--- a/public/newsletters/2026-06/dlinrt-2026-06-update.pptx
+++ b/public/newsletters/2026-06/dlinrt-2026-06-update.pptx
@@ -5493,7 +5493,7 @@
                 <a:ea typeface="Calibri" pitchFamily="34" charset="-122"/>
                 <a:cs typeface="Calibri" pitchFamily="34" charset="-120"/>
               </a:rPr>
-              <a:t>🏅 Certification round opens</a:t>
+              <a:t>Certification round opens</a:t>
             </a:r>
             <a:endParaRPr lang="en-US" sz="2000" dirty="0"/>
           </a:p>
@@ -5571,7 +5571,7 @@
                 <a:ea typeface="Calibri" pitchFamily="34" charset="-122"/>
                 <a:cs typeface="Calibri" pitchFamily="34" charset="-120"/>
               </a:rPr>
-              <a:t>📅 MAIRT @ MICCAI · Oct 1, 2026</a:t>
+              <a:t>MAIRT @ MICCAI · Oct 1, 2026</a:t>
             </a:r>
             <a:endParaRPr lang="en-US" sz="2000" dirty="0"/>
           </a:p>
@@ -5649,7 +5649,7 @@
                 <a:ea typeface="Calibri" pitchFamily="34" charset="-122"/>
                 <a:cs typeface="Calibri" pitchFamily="34" charset="-120"/>
               </a:rPr>
-              <a:t>🔍 Next review round · Nov 1 → Dec 15, 2026</a:t>
+              <a:t>Next review round · Nov 1 → Dec 15, 2026</a:t>
             </a:r>
             <a:endParaRPr lang="en-US" sz="2000" dirty="0"/>
           </a:p>
@@ -5727,7 +5727,7 @@
                 <a:ea typeface="Calibri" pitchFamily="34" charset="-122"/>
                 <a:cs typeface="Calibri" pitchFamily="34" charset="-120"/>
               </a:rPr>
-              <a:t>👋 Welcome Szabolcs David</a:t>
+              <a:t>Welcome Szabolcs David</a:t>
             </a:r>
             <a:endParaRPr lang="en-US" sz="2000" dirty="0"/>
           </a:p>

--- a/public/newsletters/2026-06/dlinrt-2026-06-update.pptx
+++ b/public/newsletters/2026-06/dlinrt-2026-06-update.pptx
@@ -10,9 +10,10 @@
     <p:sldId id="258" r:id="rId4"/>
     <p:sldId id="259" r:id="rId5"/>
     <p:sldId id="260" r:id="rId6"/>
+    <p:sldId id="261" r:id="rId7"/>
   </p:sldIdLst>
   <p:notesMasterIdLst>
-    <p:notesMasterId r:id="rId7"/>
+    <p:notesMasterId r:id="rId8"/>
   </p:notesMasterIdLst>
   <p:sldSz cx="12192000" cy="6858000"/>
   <p:notesSz cx="6858000" cy="12192000"/>
@@ -1676,6 +1677,94 @@
 </p:notes>
 </file>
 
+<file path=ppt/notesSlides/notesSlide6.xml><?xml version="1.0" encoding="utf-8"?>
+<p:notes xmlns:a="http://schemas.openxmlformats.org/drawingml/2006/main" xmlns:r="http://schemas.openxmlformats.org/officeDocument/2006/relationships" xmlns:p="http://schemas.openxmlformats.org/presentationml/2006/main">
+  <p:cSld>
+    <p:spTree>
+      <p:nvGrpSpPr>
+        <p:cNvPr id="1" name=""/>
+        <p:cNvGrpSpPr/>
+        <p:nvPr/>
+      </p:nvGrpSpPr>
+      <p:grpSpPr>
+        <a:xfrm>
+          <a:off x="0" y="0"/>
+          <a:ext cx="0" cy="0"/>
+          <a:chOff x="0" y="0"/>
+          <a:chExt cx="0" cy="0"/>
+        </a:xfrm>
+      </p:grpSpPr>
+      <p:sp>
+        <p:nvSpPr>
+          <p:cNvPr id="2" name="Slide Image Placeholder 1"/>
+          <p:cNvSpPr>
+            <a:spLocks noGrp="1" noRot="1" noChangeAspect="1"/>
+          </p:cNvSpPr>
+          <p:nvPr>
+            <p:ph type="sldImg"/>
+          </p:nvPr>
+        </p:nvSpPr>
+        <p:spPr/>
+      </p:sp>
+      <p:sp>
+        <p:nvSpPr>
+          <p:cNvPr id="3" name="Notes Placeholder 2"/>
+          <p:cNvSpPr>
+            <a:spLocks noGrp="1"/>
+          </p:cNvSpPr>
+          <p:nvPr>
+            <p:ph type="body" idx="1"/>
+          </p:nvPr>
+        </p:nvSpPr>
+        <p:spPr/>
+        <p:txBody>
+          <a:bodyPr/>
+          <a:lstStyle/>
+          <a:p>
+            <a:r>
+              <a:rPr lang="en-US" dirty="0"/>
+              <a:t/>
+            </a:r>
+            <a:endParaRPr lang="en-US" dirty="0"/>
+          </a:p>
+        </p:txBody>
+      </p:sp>
+      <p:sp>
+        <p:nvSpPr>
+          <p:cNvPr id="4" name="Slide Number Placeholder 3"/>
+          <p:cNvSpPr>
+            <a:spLocks noGrp="1"/>
+          </p:cNvSpPr>
+          <p:nvPr>
+            <p:ph type="sldNum" sz="quarter" idx="10"/>
+          </p:nvPr>
+        </p:nvSpPr>
+        <p:spPr/>
+        <p:txBody>
+          <a:bodyPr/>
+          <a:lstStyle/>
+          <a:p>
+            <a:fld id="{F7021451-1387-4CA6-816F-3879F97B5CBC}" type="slidenum">
+              <a:rPr lang="en-US"/>
+              <a:t>6</a:t>
+            </a:fld>
+            <a:endParaRPr lang="en-US"/>
+          </a:p>
+        </p:txBody>
+      </p:sp>
+    </p:spTree>
+    <p:extLst>
+      <p:ext uri="{BB962C8B-B14F-4D97-AF65-F5344CB8AC3E}">
+        <p14:creationId xmlns:p14="http://schemas.microsoft.com/office/powerpoint/2010/main" val="1024086991"/>
+      </p:ext>
+    </p:extLst>
+  </p:cSld>
+  <p:clrMapOvr>
+    <a:masterClrMapping/>
+  </p:clrMapOvr>
+</p:notes>
+</file>
+
 <file path=ppt/slideLayouts/slideLayout1.xml><?xml version="1.0" encoding="utf-8"?>
 <p:sldLayout xmlns:a="http://schemas.openxmlformats.org/drawingml/2006/main" xmlns:r="http://schemas.openxmlformats.org/officeDocument/2006/relationships" xmlns:p="http://schemas.openxmlformats.org/presentationml/2006/main" preserve="1">
   <p:cSld name="DEFAULT">
@@ -3248,73 +3337,9 @@
           </a:p>
         </p:txBody>
       </p:sp>
-      <p:sp>
-        <p:nvSpPr>
-          <p:cNvPr id="20" name="Shape 10"/>
-          <p:cNvSpPr/>
-          <p:nvPr/>
-        </p:nvSpPr>
-        <p:spPr>
-          <a:xfrm>
-            <a:off x="2112656" y="2197608"/>
-            <a:ext cx="1417712" cy="405384"/>
-          </a:xfrm>
-          <a:prstGeom prst="rect">
-            <a:avLst/>
-          </a:prstGeom>
-          <a:solidFill>
-            <a:srgbClr val="F3F4F6"/>
-          </a:solidFill>
-          <a:ln w="12700">
-            <a:solidFill>
-              <a:srgbClr val="E5E7EB"/>
-            </a:solidFill>
-            <a:prstDash val="solid"/>
-          </a:ln>
-        </p:spPr>
-      </p:sp>
-      <p:sp>
-        <p:nvSpPr>
-          <p:cNvPr id="21" name="Text 11"/>
-          <p:cNvSpPr/>
-          <p:nvPr/>
-        </p:nvSpPr>
-        <p:spPr>
-          <a:xfrm>
-            <a:off x="2112656" y="2602992"/>
-            <a:ext cx="1417712" cy="256032"/>
-          </a:xfrm>
-          <a:prstGeom prst="rect">
-            <a:avLst/>
-          </a:prstGeom>
-          <a:noFill/>
-          <a:ln/>
-        </p:spPr>
-        <p:txBody>
-          <a:bodyPr wrap="square" rtlCol="0" anchor="ctr"/>
-          <a:lstStyle/>
-          <a:p>
-            <a:pPr algn="ctr" indent="0" marL="0">
-              <a:buNone/>
-            </a:pPr>
-            <a:r>
-              <a:rPr lang="en-US" sz="900" dirty="0">
-                <a:solidFill>
-                  <a:srgbClr val="1A1A2E"/>
-                </a:solidFill>
-                <a:latin typeface="Calibri" pitchFamily="34" charset="0"/>
-                <a:ea typeface="Calibri" pitchFamily="34" charset="-122"/>
-                <a:cs typeface="Calibri" pitchFamily="34" charset="-120"/>
-              </a:rPr>
-              <a:t>MIM Software</a:t>
-            </a:r>
-            <a:endParaRPr lang="en-US" sz="900" dirty="0"/>
-          </a:p>
-        </p:txBody>
-      </p:sp>
       <p:pic>
         <p:nvPicPr>
-          <p:cNvPr id="22" name="Image 8" descr="public/logos/mirada-medical.png">    </p:cNvPr>
+          <p:cNvPr id="20" name="Image 8" descr="public/newsletters/2026-06/_logo-cache/mimsoftware.png">    </p:cNvPr>
           <p:cNvPicPr>
             <a:picLocks noChangeAspect="1"/>
           </p:cNvPicPr>
@@ -3327,7 +3352,7 @@
         </p:blipFill>
         <p:spPr>
           <a:xfrm>
-            <a:off x="3749824" y="2197608"/>
+            <a:off x="2112656" y="2197608"/>
             <a:ext cx="1417712" cy="405384"/>
           </a:xfrm>
           <a:prstGeom prst="rect">
@@ -3337,13 +3362,13 @@
       </p:pic>
       <p:sp>
         <p:nvSpPr>
-          <p:cNvPr id="23" name="Text 12"/>
-          <p:cNvSpPr/>
-          <p:nvPr/>
-        </p:nvSpPr>
-        <p:spPr>
-          <a:xfrm>
-            <a:off x="3749824" y="2602992"/>
+          <p:cNvPr id="21" name="Text 10"/>
+          <p:cNvSpPr/>
+          <p:nvPr/>
+        </p:nvSpPr>
+        <p:spPr>
+          <a:xfrm>
+            <a:off x="2112656" y="2602992"/>
             <a:ext cx="1417712" cy="256032"/>
           </a:xfrm>
           <a:prstGeom prst="rect">
@@ -3368,7 +3393,7 @@
                 <a:ea typeface="Calibri" pitchFamily="34" charset="-122"/>
                 <a:cs typeface="Calibri" pitchFamily="34" charset="-120"/>
               </a:rPr>
-              <a:t>Mirada Medical</a:t>
+              <a:t>MIM Software</a:t>
             </a:r>
             <a:endParaRPr lang="en-US" sz="900" dirty="0"/>
           </a:p>
@@ -3376,7 +3401,7 @@
       </p:sp>
       <p:pic>
         <p:nvPicPr>
-          <p:cNvPr id="24" name="Image 9" descr="public/logos/mvision-ai.png">    </p:cNvPr>
+          <p:cNvPr id="22" name="Image 9" descr="public/logos/mirada-medical.png">    </p:cNvPr>
           <p:cNvPicPr>
             <a:picLocks noChangeAspect="1"/>
           </p:cNvPicPr>
@@ -3389,7 +3414,7 @@
         </p:blipFill>
         <p:spPr>
           <a:xfrm>
-            <a:off x="5386992" y="2197608"/>
+            <a:off x="3749824" y="2197608"/>
             <a:ext cx="1417712" cy="405384"/>
           </a:xfrm>
           <a:prstGeom prst="rect">
@@ -3399,13 +3424,13 @@
       </p:pic>
       <p:sp>
         <p:nvSpPr>
-          <p:cNvPr id="25" name="Text 13"/>
-          <p:cNvSpPr/>
-          <p:nvPr/>
-        </p:nvSpPr>
-        <p:spPr>
-          <a:xfrm>
-            <a:off x="5386992" y="2602992"/>
+          <p:cNvPr id="23" name="Text 11"/>
+          <p:cNvSpPr/>
+          <p:nvPr/>
+        </p:nvSpPr>
+        <p:spPr>
+          <a:xfrm>
+            <a:off x="3749824" y="2602992"/>
             <a:ext cx="1417712" cy="256032"/>
           </a:xfrm>
           <a:prstGeom prst="rect">
@@ -3430,71 +3455,7 @@
                 <a:ea typeface="Calibri" pitchFamily="34" charset="-122"/>
                 <a:cs typeface="Calibri" pitchFamily="34" charset="-120"/>
               </a:rPr>
-              <a:t>MVision AI</a:t>
-            </a:r>
-            <a:endParaRPr lang="en-US" sz="900" dirty="0"/>
-          </a:p>
-        </p:txBody>
-      </p:sp>
-      <p:sp>
-        <p:nvSpPr>
-          <p:cNvPr id="26" name="Shape 14"/>
-          <p:cNvSpPr/>
-          <p:nvPr/>
-        </p:nvSpPr>
-        <p:spPr>
-          <a:xfrm>
-            <a:off x="7024160" y="2197608"/>
-            <a:ext cx="1417712" cy="405384"/>
-          </a:xfrm>
-          <a:prstGeom prst="rect">
-            <a:avLst/>
-          </a:prstGeom>
-          <a:solidFill>
-            <a:srgbClr val="F3F4F6"/>
-          </a:solidFill>
-          <a:ln w="12700">
-            <a:solidFill>
-              <a:srgbClr val="E5E7EB"/>
-            </a:solidFill>
-            <a:prstDash val="solid"/>
-          </a:ln>
-        </p:spPr>
-      </p:sp>
-      <p:sp>
-        <p:nvSpPr>
-          <p:cNvPr id="27" name="Text 15"/>
-          <p:cNvSpPr/>
-          <p:nvPr/>
-        </p:nvSpPr>
-        <p:spPr>
-          <a:xfrm>
-            <a:off x="7024160" y="2602992"/>
-            <a:ext cx="1417712" cy="256032"/>
-          </a:xfrm>
-          <a:prstGeom prst="rect">
-            <a:avLst/>
-          </a:prstGeom>
-          <a:noFill/>
-          <a:ln/>
-        </p:spPr>
-        <p:txBody>
-          <a:bodyPr wrap="square" rtlCol="0" anchor="ctr"/>
-          <a:lstStyle/>
-          <a:p>
-            <a:pPr algn="ctr" indent="0" marL="0">
-              <a:buNone/>
-            </a:pPr>
-            <a:r>
-              <a:rPr lang="en-US" sz="900" dirty="0">
-                <a:solidFill>
-                  <a:srgbClr val="1A1A2E"/>
-                </a:solidFill>
-                <a:latin typeface="Calibri" pitchFamily="34" charset="0"/>
-                <a:ea typeface="Calibri" pitchFamily="34" charset="-122"/>
-                <a:cs typeface="Calibri" pitchFamily="34" charset="-120"/>
-              </a:rPr>
-              <a:t>RadFormation</a:t>
+              <a:t>Mirada Medical</a:t>
             </a:r>
             <a:endParaRPr lang="en-US" sz="900" dirty="0"/>
           </a:p>
@@ -3502,7 +3463,7 @@
       </p:sp>
       <p:pic>
         <p:nvPicPr>
-          <p:cNvPr id="28" name="Image 10" descr="public/logos/synaptiq.png">    </p:cNvPr>
+          <p:cNvPr id="24" name="Image 10" descr="public/logos/mvision-ai.png">    </p:cNvPr>
           <p:cNvPicPr>
             <a:picLocks noChangeAspect="1"/>
           </p:cNvPicPr>
@@ -3515,7 +3476,7 @@
         </p:blipFill>
         <p:spPr>
           <a:xfrm>
-            <a:off x="8661327" y="2197608"/>
+            <a:off x="5386992" y="2197608"/>
             <a:ext cx="1417712" cy="405384"/>
           </a:xfrm>
           <a:prstGeom prst="rect">
@@ -3525,13 +3486,13 @@
       </p:pic>
       <p:sp>
         <p:nvSpPr>
-          <p:cNvPr id="29" name="Text 16"/>
-          <p:cNvSpPr/>
-          <p:nvPr/>
-        </p:nvSpPr>
-        <p:spPr>
-          <a:xfrm>
-            <a:off x="8661327" y="2602992"/>
+          <p:cNvPr id="25" name="Text 12"/>
+          <p:cNvSpPr/>
+          <p:nvPr/>
+        </p:nvSpPr>
+        <p:spPr>
+          <a:xfrm>
+            <a:off x="5386992" y="2602992"/>
             <a:ext cx="1417712" cy="256032"/>
           </a:xfrm>
           <a:prstGeom prst="rect">
@@ -3556,7 +3517,7 @@
                 <a:ea typeface="Calibri" pitchFamily="34" charset="-122"/>
                 <a:cs typeface="Calibri" pitchFamily="34" charset="-120"/>
               </a:rPr>
-              <a:t>Synaptiq</a:t>
+              <a:t>MVision AI</a:t>
             </a:r>
             <a:endParaRPr lang="en-US" sz="900" dirty="0"/>
           </a:p>
@@ -3564,7 +3525,7 @@
       </p:sp>
       <p:pic>
         <p:nvPicPr>
-          <p:cNvPr id="30" name="Image 11" descr="public/logos/therapanacea.png">    </p:cNvPr>
+          <p:cNvPr id="26" name="Image 11" descr="public/newsletters/2026-06/_logo-cache/radformation.png">    </p:cNvPr>
           <p:cNvPicPr>
             <a:picLocks noChangeAspect="1"/>
           </p:cNvPicPr>
@@ -3577,7 +3538,7 @@
         </p:blipFill>
         <p:spPr>
           <a:xfrm>
-            <a:off x="10298495" y="2197608"/>
+            <a:off x="7024160" y="2197608"/>
             <a:ext cx="1417712" cy="405384"/>
           </a:xfrm>
           <a:prstGeom prst="rect">
@@ -3587,13 +3548,13 @@
       </p:pic>
       <p:sp>
         <p:nvSpPr>
-          <p:cNvPr id="31" name="Text 17"/>
-          <p:cNvSpPr/>
-          <p:nvPr/>
-        </p:nvSpPr>
-        <p:spPr>
-          <a:xfrm>
-            <a:off x="10298495" y="2602992"/>
+          <p:cNvPr id="27" name="Text 13"/>
+          <p:cNvSpPr/>
+          <p:nvPr/>
+        </p:nvSpPr>
+        <p:spPr>
+          <a:xfrm>
+            <a:off x="7024160" y="2602992"/>
             <a:ext cx="1417712" cy="256032"/>
           </a:xfrm>
           <a:prstGeom prst="rect">
@@ -3618,7 +3579,7 @@
                 <a:ea typeface="Calibri" pitchFamily="34" charset="-122"/>
                 <a:cs typeface="Calibri" pitchFamily="34" charset="-120"/>
               </a:rPr>
-              <a:t>Therapanacea</a:t>
+              <a:t>RadFormation</a:t>
             </a:r>
             <a:endParaRPr lang="en-US" sz="900" dirty="0"/>
           </a:p>
@@ -3626,7 +3587,7 @@
       </p:sp>
       <p:pic>
         <p:nvPicPr>
-          <p:cNvPr id="32" name="Image 12" descr="public/logos/vysioner.png">    </p:cNvPr>
+          <p:cNvPr id="28" name="Image 12" descr="public/logos/synaptiq.png">    </p:cNvPr>
           <p:cNvPicPr>
             <a:picLocks noChangeAspect="1"/>
           </p:cNvPicPr>
@@ -3639,7 +3600,7 @@
         </p:blipFill>
         <p:spPr>
           <a:xfrm>
-            <a:off x="475488" y="3096768"/>
+            <a:off x="8661327" y="2197608"/>
             <a:ext cx="1417712" cy="405384"/>
           </a:xfrm>
           <a:prstGeom prst="rect">
@@ -3649,13 +3610,13 @@
       </p:pic>
       <p:sp>
         <p:nvSpPr>
-          <p:cNvPr id="33" name="Text 18"/>
-          <p:cNvSpPr/>
-          <p:nvPr/>
-        </p:nvSpPr>
-        <p:spPr>
-          <a:xfrm>
-            <a:off x="475488" y="3502152"/>
+          <p:cNvPr id="29" name="Text 14"/>
+          <p:cNvSpPr/>
+          <p:nvPr/>
+        </p:nvSpPr>
+        <p:spPr>
+          <a:xfrm>
+            <a:off x="8661327" y="2602992"/>
             <a:ext cx="1417712" cy="256032"/>
           </a:xfrm>
           <a:prstGeom prst="rect">
@@ -3680,7 +3641,7 @@
                 <a:ea typeface="Calibri" pitchFamily="34" charset="-122"/>
                 <a:cs typeface="Calibri" pitchFamily="34" charset="-120"/>
               </a:rPr>
-              <a:t>Vysioner</a:t>
+              <a:t>Synaptiq</a:t>
             </a:r>
             <a:endParaRPr lang="en-US" sz="900" dirty="0"/>
           </a:p>
@@ -3688,7 +3649,7 @@
       </p:sp>
       <p:pic>
         <p:nvPicPr>
-          <p:cNvPr id="34" name="Image 13" descr="public/logos/wisdom-tech.png">    </p:cNvPr>
+          <p:cNvPr id="30" name="Image 13" descr="public/logos/therapanacea.png">    </p:cNvPr>
           <p:cNvPicPr>
             <a:picLocks noChangeAspect="1"/>
           </p:cNvPicPr>
@@ -3701,7 +3662,7 @@
         </p:blipFill>
         <p:spPr>
           <a:xfrm>
-            <a:off x="2112656" y="3096768"/>
+            <a:off x="10298495" y="2197608"/>
             <a:ext cx="1417712" cy="405384"/>
           </a:xfrm>
           <a:prstGeom prst="rect">
@@ -3711,13 +3672,13 @@
       </p:pic>
       <p:sp>
         <p:nvSpPr>
-          <p:cNvPr id="35" name="Text 19"/>
-          <p:cNvSpPr/>
-          <p:nvPr/>
-        </p:nvSpPr>
-        <p:spPr>
-          <a:xfrm>
-            <a:off x="2112656" y="3502152"/>
+          <p:cNvPr id="31" name="Text 15"/>
+          <p:cNvSpPr/>
+          <p:nvPr/>
+        </p:nvSpPr>
+        <p:spPr>
+          <a:xfrm>
+            <a:off x="10298495" y="2602992"/>
             <a:ext cx="1417712" cy="256032"/>
           </a:xfrm>
           <a:prstGeom prst="rect">
@@ -3742,7 +3703,7 @@
                 <a:ea typeface="Calibri" pitchFamily="34" charset="-122"/>
                 <a:cs typeface="Calibri" pitchFamily="34" charset="-120"/>
               </a:rPr>
-              <a:t>Wisdom Tech</a:t>
+              <a:t>Therapanacea</a:t>
             </a:r>
             <a:endParaRPr lang="en-US" sz="900" dirty="0"/>
           </a:p>
@@ -3750,7 +3711,7 @@
       </p:sp>
       <p:pic>
         <p:nvPicPr>
-          <p:cNvPr id="36" name="Image 14" descr="public/logos/oncosoft.png">    </p:cNvPr>
+          <p:cNvPr id="32" name="Image 14" descr="public/logos/vysioner.png">    </p:cNvPr>
           <p:cNvPicPr>
             <a:picLocks noChangeAspect="1"/>
           </p:cNvPicPr>
@@ -3763,7 +3724,7 @@
         </p:blipFill>
         <p:spPr>
           <a:xfrm>
-            <a:off x="3749824" y="3096768"/>
+            <a:off x="475488" y="3096768"/>
             <a:ext cx="1417712" cy="405384"/>
           </a:xfrm>
           <a:prstGeom prst="rect">
@@ -3773,13 +3734,13 @@
       </p:pic>
       <p:sp>
         <p:nvSpPr>
-          <p:cNvPr id="37" name="Text 20"/>
-          <p:cNvSpPr/>
-          <p:nvPr/>
-        </p:nvSpPr>
-        <p:spPr>
-          <a:xfrm>
-            <a:off x="3749824" y="3502152"/>
+          <p:cNvPr id="33" name="Text 16"/>
+          <p:cNvSpPr/>
+          <p:nvPr/>
+        </p:nvSpPr>
+        <p:spPr>
+          <a:xfrm>
+            <a:off x="475488" y="3502152"/>
             <a:ext cx="1417712" cy="256032"/>
           </a:xfrm>
           <a:prstGeom prst="rect">
@@ -3804,7 +3765,7 @@
                 <a:ea typeface="Calibri" pitchFamily="34" charset="-122"/>
                 <a:cs typeface="Calibri" pitchFamily="34" charset="-120"/>
               </a:rPr>
-              <a:t>Oncosoft</a:t>
+              <a:t>Vysioner</a:t>
             </a:r>
             <a:endParaRPr lang="en-US" sz="900" dirty="0"/>
           </a:p>
@@ -3812,7 +3773,7 @@
       </p:sp>
       <p:pic>
         <p:nvPicPr>
-          <p:cNvPr id="38" name="Image 15" descr="public/logos/medcom.png">    </p:cNvPr>
+          <p:cNvPr id="34" name="Image 15" descr="public/logos/wisdom-tech.png">    </p:cNvPr>
           <p:cNvPicPr>
             <a:picLocks noChangeAspect="1"/>
           </p:cNvPicPr>
@@ -3825,7 +3786,7 @@
         </p:blipFill>
         <p:spPr>
           <a:xfrm>
-            <a:off x="5386992" y="3096768"/>
+            <a:off x="2112656" y="3096768"/>
             <a:ext cx="1417712" cy="405384"/>
           </a:xfrm>
           <a:prstGeom prst="rect">
@@ -3835,13 +3796,13 @@
       </p:pic>
       <p:sp>
         <p:nvSpPr>
-          <p:cNvPr id="39" name="Text 21"/>
-          <p:cNvSpPr/>
-          <p:nvPr/>
-        </p:nvSpPr>
-        <p:spPr>
-          <a:xfrm>
-            <a:off x="5386992" y="3502152"/>
+          <p:cNvPr id="35" name="Text 17"/>
+          <p:cNvSpPr/>
+          <p:nvPr/>
+        </p:nvSpPr>
+        <p:spPr>
+          <a:xfrm>
+            <a:off x="2112656" y="3502152"/>
             <a:ext cx="1417712" cy="256032"/>
           </a:xfrm>
           <a:prstGeom prst="rect">
@@ -3866,7 +3827,7 @@
                 <a:ea typeface="Calibri" pitchFamily="34" charset="-122"/>
                 <a:cs typeface="Calibri" pitchFamily="34" charset="-120"/>
               </a:rPr>
-              <a:t>MedCom</a:t>
+              <a:t>Wisdom Tech</a:t>
             </a:r>
             <a:endParaRPr lang="en-US" sz="900" dirty="0"/>
           </a:p>
@@ -3874,7 +3835,7 @@
       </p:sp>
       <p:pic>
         <p:nvPicPr>
-          <p:cNvPr id="40" name="Image 16" descr="public/logos/ge_healthcare.png">    </p:cNvPr>
+          <p:cNvPr id="36" name="Image 16" descr="public/logos/oncosoft.png">    </p:cNvPr>
           <p:cNvPicPr>
             <a:picLocks noChangeAspect="1"/>
           </p:cNvPicPr>
@@ -3887,7 +3848,7 @@
         </p:blipFill>
         <p:spPr>
           <a:xfrm>
-            <a:off x="7024160" y="3096768"/>
+            <a:off x="3749824" y="3096768"/>
             <a:ext cx="1417712" cy="405384"/>
           </a:xfrm>
           <a:prstGeom prst="rect">
@@ -3897,13 +3858,13 @@
       </p:pic>
       <p:sp>
         <p:nvSpPr>
-          <p:cNvPr id="41" name="Text 22"/>
-          <p:cNvSpPr/>
-          <p:nvPr/>
-        </p:nvSpPr>
-        <p:spPr>
-          <a:xfrm>
-            <a:off x="7024160" y="3502152"/>
+          <p:cNvPr id="37" name="Text 18"/>
+          <p:cNvSpPr/>
+          <p:nvPr/>
+        </p:nvSpPr>
+        <p:spPr>
+          <a:xfrm>
+            <a:off x="3749824" y="3502152"/>
             <a:ext cx="1417712" cy="256032"/>
           </a:xfrm>
           <a:prstGeom prst="rect">
@@ -3928,7 +3889,7 @@
                 <a:ea typeface="Calibri" pitchFamily="34" charset="-122"/>
                 <a:cs typeface="Calibri" pitchFamily="34" charset="-120"/>
               </a:rPr>
-              <a:t>GE Healthcare</a:t>
+              <a:t>Oncosoft</a:t>
             </a:r>
             <a:endParaRPr lang="en-US" sz="900" dirty="0"/>
           </a:p>
@@ -3936,7 +3897,7 @@
       </p:sp>
       <p:pic>
         <p:nvPicPr>
-          <p:cNvPr id="42" name="Image 17" descr="public/logos/philips.png">    </p:cNvPr>
+          <p:cNvPr id="38" name="Image 17" descr="public/logos/medcom.png">    </p:cNvPr>
           <p:cNvPicPr>
             <a:picLocks noChangeAspect="1"/>
           </p:cNvPicPr>
@@ -3949,7 +3910,7 @@
         </p:blipFill>
         <p:spPr>
           <a:xfrm>
-            <a:off x="8661327" y="3096768"/>
+            <a:off x="5386992" y="3096768"/>
             <a:ext cx="1417712" cy="405384"/>
           </a:xfrm>
           <a:prstGeom prst="rect">
@@ -3959,13 +3920,13 @@
       </p:pic>
       <p:sp>
         <p:nvSpPr>
-          <p:cNvPr id="43" name="Text 23"/>
-          <p:cNvSpPr/>
-          <p:nvPr/>
-        </p:nvSpPr>
-        <p:spPr>
-          <a:xfrm>
-            <a:off x="8661327" y="3502152"/>
+          <p:cNvPr id="39" name="Text 19"/>
+          <p:cNvSpPr/>
+          <p:nvPr/>
+        </p:nvSpPr>
+        <p:spPr>
+          <a:xfrm>
+            <a:off x="5386992" y="3502152"/>
             <a:ext cx="1417712" cy="256032"/>
           </a:xfrm>
           <a:prstGeom prst="rect">
@@ -3990,7 +3951,7 @@
                 <a:ea typeface="Calibri" pitchFamily="34" charset="-122"/>
                 <a:cs typeface="Calibri" pitchFamily="34" charset="-120"/>
               </a:rPr>
-              <a:t>Philips</a:t>
+              <a:t>MedCom</a:t>
             </a:r>
             <a:endParaRPr lang="en-US" sz="900" dirty="0"/>
           </a:p>
@@ -3998,7 +3959,7 @@
       </p:sp>
       <p:pic>
         <p:nvPicPr>
-          <p:cNvPr id="44" name="Image 18" descr="public/logos/siemens.png">    </p:cNvPr>
+          <p:cNvPr id="40" name="Image 18" descr="public/logos/ge_healthcare.png">    </p:cNvPr>
           <p:cNvPicPr>
             <a:picLocks noChangeAspect="1"/>
           </p:cNvPicPr>
@@ -4011,7 +3972,7 @@
         </p:blipFill>
         <p:spPr>
           <a:xfrm>
-            <a:off x="10298495" y="3096768"/>
+            <a:off x="7024160" y="3096768"/>
             <a:ext cx="1417712" cy="405384"/>
           </a:xfrm>
           <a:prstGeom prst="rect">
@@ -4021,13 +3982,13 @@
       </p:pic>
       <p:sp>
         <p:nvSpPr>
-          <p:cNvPr id="45" name="Text 24"/>
-          <p:cNvSpPr/>
-          <p:nvPr/>
-        </p:nvSpPr>
-        <p:spPr>
-          <a:xfrm>
-            <a:off x="10298495" y="3502152"/>
+          <p:cNvPr id="41" name="Text 20"/>
+          <p:cNvSpPr/>
+          <p:nvPr/>
+        </p:nvSpPr>
+        <p:spPr>
+          <a:xfrm>
+            <a:off x="7024160" y="3502152"/>
             <a:ext cx="1417712" cy="256032"/>
           </a:xfrm>
           <a:prstGeom prst="rect">
@@ -4052,7 +4013,7 @@
                 <a:ea typeface="Calibri" pitchFamily="34" charset="-122"/>
                 <a:cs typeface="Calibri" pitchFamily="34" charset="-120"/>
               </a:rPr>
-              <a:t>Siemens Healthineers</a:t>
+              <a:t>GE Healthcare</a:t>
             </a:r>
             <a:endParaRPr lang="en-US" sz="900" dirty="0"/>
           </a:p>
@@ -4060,7 +4021,7 @@
       </p:sp>
       <p:pic>
         <p:nvPicPr>
-          <p:cNvPr id="46" name="Image 19" descr="public/logos/canon.jpg">    </p:cNvPr>
+          <p:cNvPr id="42" name="Image 19" descr="public/logos/philips.png">    </p:cNvPr>
           <p:cNvPicPr>
             <a:picLocks noChangeAspect="1"/>
           </p:cNvPicPr>
@@ -4073,7 +4034,7 @@
         </p:blipFill>
         <p:spPr>
           <a:xfrm>
-            <a:off x="475488" y="3995928"/>
+            <a:off x="8661327" y="3096768"/>
             <a:ext cx="1417712" cy="405384"/>
           </a:xfrm>
           <a:prstGeom prst="rect">
@@ -4083,13 +4044,13 @@
       </p:pic>
       <p:sp>
         <p:nvSpPr>
-          <p:cNvPr id="47" name="Text 25"/>
-          <p:cNvSpPr/>
-          <p:nvPr/>
-        </p:nvSpPr>
-        <p:spPr>
-          <a:xfrm>
-            <a:off x="475488" y="4401312"/>
+          <p:cNvPr id="43" name="Text 21"/>
+          <p:cNvSpPr/>
+          <p:nvPr/>
+        </p:nvSpPr>
+        <p:spPr>
+          <a:xfrm>
+            <a:off x="8661327" y="3502152"/>
             <a:ext cx="1417712" cy="256032"/>
           </a:xfrm>
           <a:prstGeom prst="rect">
@@ -4114,7 +4075,7 @@
                 <a:ea typeface="Calibri" pitchFamily="34" charset="-122"/>
                 <a:cs typeface="Calibri" pitchFamily="34" charset="-120"/>
               </a:rPr>
-              <a:t>Canon Medical Systems</a:t>
+              <a:t>Philips</a:t>
             </a:r>
             <a:endParaRPr lang="en-US" sz="900" dirty="0"/>
           </a:p>
@@ -4122,7 +4083,7 @@
       </p:sp>
       <p:pic>
         <p:nvPicPr>
-          <p:cNvPr id="48" name="Image 20" descr="public/logos/unitedimaging.png">    </p:cNvPr>
+          <p:cNvPr id="44" name="Image 20" descr="public/logos/siemens.png">    </p:cNvPr>
           <p:cNvPicPr>
             <a:picLocks noChangeAspect="1"/>
           </p:cNvPicPr>
@@ -4135,7 +4096,7 @@
         </p:blipFill>
         <p:spPr>
           <a:xfrm>
-            <a:off x="2112656" y="3995928"/>
+            <a:off x="10298495" y="3096768"/>
             <a:ext cx="1417712" cy="405384"/>
           </a:xfrm>
           <a:prstGeom prst="rect">
@@ -4145,13 +4106,13 @@
       </p:pic>
       <p:sp>
         <p:nvSpPr>
-          <p:cNvPr id="49" name="Text 26"/>
-          <p:cNvSpPr/>
-          <p:nvPr/>
-        </p:nvSpPr>
-        <p:spPr>
-          <a:xfrm>
-            <a:off x="2112656" y="4401312"/>
+          <p:cNvPr id="45" name="Text 22"/>
+          <p:cNvSpPr/>
+          <p:nvPr/>
+        </p:nvSpPr>
+        <p:spPr>
+          <a:xfrm>
+            <a:off x="10298495" y="3502152"/>
             <a:ext cx="1417712" cy="256032"/>
           </a:xfrm>
           <a:prstGeom prst="rect">
@@ -4176,71 +4137,7 @@
                 <a:ea typeface="Calibri" pitchFamily="34" charset="-122"/>
                 <a:cs typeface="Calibri" pitchFamily="34" charset="-120"/>
               </a:rPr>
-              <a:t>United Imaging</a:t>
-            </a:r>
-            <a:endParaRPr lang="en-US" sz="900" dirty="0"/>
-          </a:p>
-        </p:txBody>
-      </p:sp>
-      <p:sp>
-        <p:nvSpPr>
-          <p:cNvPr id="50" name="Shape 27"/>
-          <p:cNvSpPr/>
-          <p:nvPr/>
-        </p:nvSpPr>
-        <p:spPr>
-          <a:xfrm>
-            <a:off x="3749824" y="3995928"/>
-            <a:ext cx="1417712" cy="405384"/>
-          </a:xfrm>
-          <a:prstGeom prst="rect">
-            <a:avLst/>
-          </a:prstGeom>
-          <a:solidFill>
-            <a:srgbClr val="F3F4F6"/>
-          </a:solidFill>
-          <a:ln w="12700">
-            <a:solidFill>
-              <a:srgbClr val="E5E7EB"/>
-            </a:solidFill>
-            <a:prstDash val="solid"/>
-          </a:ln>
-        </p:spPr>
-      </p:sp>
-      <p:sp>
-        <p:nvSpPr>
-          <p:cNvPr id="51" name="Text 28"/>
-          <p:cNvSpPr/>
-          <p:nvPr/>
-        </p:nvSpPr>
-        <p:spPr>
-          <a:xfrm>
-            <a:off x="3749824" y="4401312"/>
-            <a:ext cx="1417712" cy="256032"/>
-          </a:xfrm>
-          <a:prstGeom prst="rect">
-            <a:avLst/>
-          </a:prstGeom>
-          <a:noFill/>
-          <a:ln/>
-        </p:spPr>
-        <p:txBody>
-          <a:bodyPr wrap="square" rtlCol="0" anchor="ctr"/>
-          <a:lstStyle/>
-          <a:p>
-            <a:pPr algn="ctr" indent="0" marL="0">
-              <a:buNone/>
-            </a:pPr>
-            <a:r>
-              <a:rPr lang="en-US" sz="900" dirty="0">
-                <a:solidFill>
-                  <a:srgbClr val="1A1A2E"/>
-                </a:solidFill>
-                <a:latin typeface="Calibri" pitchFamily="34" charset="0"/>
-                <a:ea typeface="Calibri" pitchFamily="34" charset="-122"/>
-                <a:cs typeface="Calibri" pitchFamily="34" charset="-120"/>
-              </a:rPr>
-              <a:t>Taiwan Medical Imaging Co.</a:t>
+              <a:t>Siemens Healthineers</a:t>
             </a:r>
             <a:endParaRPr lang="en-US" sz="900" dirty="0"/>
           </a:p>
@@ -4248,7 +4145,7 @@
       </p:sp>
       <p:pic>
         <p:nvPicPr>
-          <p:cNvPr id="52" name="Image 21" descr="public/logos/algomedica.png">    </p:cNvPr>
+          <p:cNvPr id="46" name="Image 21" descr="public/logos/canon.jpg">    </p:cNvPr>
           <p:cNvPicPr>
             <a:picLocks noChangeAspect="1"/>
           </p:cNvPicPr>
@@ -4261,7 +4158,7 @@
         </p:blipFill>
         <p:spPr>
           <a:xfrm>
-            <a:off x="5386992" y="3995928"/>
+            <a:off x="475488" y="3995928"/>
             <a:ext cx="1417712" cy="405384"/>
           </a:xfrm>
           <a:prstGeom prst="rect">
@@ -4271,13 +4168,13 @@
       </p:pic>
       <p:sp>
         <p:nvSpPr>
-          <p:cNvPr id="53" name="Text 29"/>
-          <p:cNvSpPr/>
-          <p:nvPr/>
-        </p:nvSpPr>
-        <p:spPr>
-          <a:xfrm>
-            <a:off x="5386992" y="4401312"/>
+          <p:cNvPr id="47" name="Text 23"/>
+          <p:cNvSpPr/>
+          <p:nvPr/>
+        </p:nvSpPr>
+        <p:spPr>
+          <a:xfrm>
+            <a:off x="475488" y="4401312"/>
             <a:ext cx="1417712" cy="256032"/>
           </a:xfrm>
           <a:prstGeom prst="rect">
@@ -4302,7 +4199,7 @@
                 <a:ea typeface="Calibri" pitchFamily="34" charset="-122"/>
                 <a:cs typeface="Calibri" pitchFamily="34" charset="-120"/>
               </a:rPr>
-              <a:t>AlgoMedica</a:t>
+              <a:t>Canon Medical Systems</a:t>
             </a:r>
             <a:endParaRPr lang="en-US" sz="900" dirty="0"/>
           </a:p>
@@ -4310,7 +4207,7 @@
       </p:sp>
       <p:pic>
         <p:nvPicPr>
-          <p:cNvPr id="54" name="Image 22" descr="public/logos/spectronic-medical.jpg">    </p:cNvPr>
+          <p:cNvPr id="48" name="Image 22" descr="public/logos/unitedimaging.png">    </p:cNvPr>
           <p:cNvPicPr>
             <a:picLocks noChangeAspect="1"/>
           </p:cNvPicPr>
@@ -4323,7 +4220,7 @@
         </p:blipFill>
         <p:spPr>
           <a:xfrm>
-            <a:off x="7024160" y="3995928"/>
+            <a:off x="2112656" y="3995928"/>
             <a:ext cx="1417712" cy="405384"/>
           </a:xfrm>
           <a:prstGeom prst="rect">
@@ -4333,13 +4230,13 @@
       </p:pic>
       <p:sp>
         <p:nvSpPr>
-          <p:cNvPr id="55" name="Text 30"/>
-          <p:cNvSpPr/>
-          <p:nvPr/>
-        </p:nvSpPr>
-        <p:spPr>
-          <a:xfrm>
-            <a:off x="7024160" y="4401312"/>
+          <p:cNvPr id="49" name="Text 24"/>
+          <p:cNvSpPr/>
+          <p:nvPr/>
+        </p:nvSpPr>
+        <p:spPr>
+          <a:xfrm>
+            <a:off x="2112656" y="4401312"/>
             <a:ext cx="1417712" cy="256032"/>
           </a:xfrm>
           <a:prstGeom prst="rect">
@@ -4364,7 +4261,7 @@
                 <a:ea typeface="Calibri" pitchFamily="34" charset="-122"/>
                 <a:cs typeface="Calibri" pitchFamily="34" charset="-120"/>
               </a:rPr>
-              <a:t>Spectronic Medical</a:t>
+              <a:t>United Imaging</a:t>
             </a:r>
             <a:endParaRPr lang="en-US" sz="900" dirty="0"/>
           </a:p>
@@ -4372,7 +4269,7 @@
       </p:sp>
       <p:pic>
         <p:nvPicPr>
-          <p:cNvPr id="56" name="Image 23" descr="public/logos/syntheticMRI.png">    </p:cNvPr>
+          <p:cNvPr id="50" name="Image 23" descr="public/newsletters/2026-06/_logo-cache/Taiwan_MedImag.png">    </p:cNvPr>
           <p:cNvPicPr>
             <a:picLocks noChangeAspect="1"/>
           </p:cNvPicPr>
@@ -4385,7 +4282,7 @@
         </p:blipFill>
         <p:spPr>
           <a:xfrm>
-            <a:off x="8661327" y="3995928"/>
+            <a:off x="3749824" y="3995928"/>
             <a:ext cx="1417712" cy="405384"/>
           </a:xfrm>
           <a:prstGeom prst="rect">
@@ -4395,13 +4292,13 @@
       </p:pic>
       <p:sp>
         <p:nvSpPr>
-          <p:cNvPr id="57" name="Text 31"/>
-          <p:cNvSpPr/>
-          <p:nvPr/>
-        </p:nvSpPr>
-        <p:spPr>
-          <a:xfrm>
-            <a:off x="8661327" y="4401312"/>
+          <p:cNvPr id="51" name="Text 25"/>
+          <p:cNvSpPr/>
+          <p:nvPr/>
+        </p:nvSpPr>
+        <p:spPr>
+          <a:xfrm>
+            <a:off x="3749824" y="4401312"/>
             <a:ext cx="1417712" cy="256032"/>
           </a:xfrm>
           <a:prstGeom prst="rect">
@@ -4426,7 +4323,7 @@
                 <a:ea typeface="Calibri" pitchFamily="34" charset="-122"/>
                 <a:cs typeface="Calibri" pitchFamily="34" charset="-120"/>
               </a:rPr>
-              <a:t>SyntheticMR</a:t>
+              <a:t>Taiwan Medical Imaging Co.</a:t>
             </a:r>
             <a:endParaRPr lang="en-US" sz="900" dirty="0"/>
           </a:p>
@@ -4434,7 +4331,7 @@
       </p:sp>
       <p:pic>
         <p:nvPicPr>
-          <p:cNvPr id="58" name="Image 24" descr="public/logos/raystation.jpg">    </p:cNvPr>
+          <p:cNvPr id="52" name="Image 24" descr="public/logos/algomedica.png">    </p:cNvPr>
           <p:cNvPicPr>
             <a:picLocks noChangeAspect="1"/>
           </p:cNvPicPr>
@@ -4447,7 +4344,7 @@
         </p:blipFill>
         <p:spPr>
           <a:xfrm>
-            <a:off x="10298495" y="3995928"/>
+            <a:off x="5386992" y="3995928"/>
             <a:ext cx="1417712" cy="405384"/>
           </a:xfrm>
           <a:prstGeom prst="rect">
@@ -4457,13 +4354,13 @@
       </p:pic>
       <p:sp>
         <p:nvSpPr>
-          <p:cNvPr id="59" name="Text 32"/>
-          <p:cNvSpPr/>
-          <p:nvPr/>
-        </p:nvSpPr>
-        <p:spPr>
-          <a:xfrm>
-            <a:off x="10298495" y="4401312"/>
+          <p:cNvPr id="53" name="Text 26"/>
+          <p:cNvSpPr/>
+          <p:nvPr/>
+        </p:nvSpPr>
+        <p:spPr>
+          <a:xfrm>
+            <a:off x="5386992" y="4401312"/>
             <a:ext cx="1417712" cy="256032"/>
           </a:xfrm>
           <a:prstGeom prst="rect">
@@ -4488,7 +4385,7 @@
                 <a:ea typeface="Calibri" pitchFamily="34" charset="-122"/>
                 <a:cs typeface="Calibri" pitchFamily="34" charset="-120"/>
               </a:rPr>
-              <a:t>RaySearch Laboratories</a:t>
+              <a:t>AlgoMedica</a:t>
             </a:r>
             <a:endParaRPr lang="en-US" sz="900" dirty="0"/>
           </a:p>
@@ -4496,7 +4393,7 @@
       </p:sp>
       <p:pic>
         <p:nvPicPr>
-          <p:cNvPr id="60" name="Image 25" descr="public/logos/airs.jpg">    </p:cNvPr>
+          <p:cNvPr id="54" name="Image 25" descr="public/logos/spectronic-medical.jpg">    </p:cNvPr>
           <p:cNvPicPr>
             <a:picLocks noChangeAspect="1"/>
           </p:cNvPicPr>
@@ -4509,7 +4406,7 @@
         </p:blipFill>
         <p:spPr>
           <a:xfrm>
-            <a:off x="475488" y="4895088"/>
+            <a:off x="7024160" y="3995928"/>
             <a:ext cx="1417712" cy="405384"/>
           </a:xfrm>
           <a:prstGeom prst="rect">
@@ -4519,13 +4416,13 @@
       </p:pic>
       <p:sp>
         <p:nvSpPr>
-          <p:cNvPr id="61" name="Text 33"/>
-          <p:cNvSpPr/>
-          <p:nvPr/>
-        </p:nvSpPr>
-        <p:spPr>
-          <a:xfrm>
-            <a:off x="475488" y="5300472"/>
+          <p:cNvPr id="55" name="Text 27"/>
+          <p:cNvSpPr/>
+          <p:nvPr/>
+        </p:nvSpPr>
+        <p:spPr>
+          <a:xfrm>
+            <a:off x="7024160" y="4401312"/>
             <a:ext cx="1417712" cy="256032"/>
           </a:xfrm>
           <a:prstGeom prst="rect">
@@ -4550,7 +4447,7 @@
                 <a:ea typeface="Calibri" pitchFamily="34" charset="-122"/>
                 <a:cs typeface="Calibri" pitchFamily="34" charset="-120"/>
               </a:rPr>
-              <a:t>AIRS Medical</a:t>
+              <a:t>Spectronic Medical</a:t>
             </a:r>
             <a:endParaRPr lang="en-US" sz="900" dirty="0"/>
           </a:p>
@@ -4558,7 +4455,7 @@
       </p:sp>
       <p:pic>
         <p:nvPicPr>
-          <p:cNvPr id="62" name="Image 26" descr="public/logos/claripi.jpg">    </p:cNvPr>
+          <p:cNvPr id="56" name="Image 26" descr="public/logos/syntheticMRI.png">    </p:cNvPr>
           <p:cNvPicPr>
             <a:picLocks noChangeAspect="1"/>
           </p:cNvPicPr>
@@ -4571,7 +4468,7 @@
         </p:blipFill>
         <p:spPr>
           <a:xfrm>
-            <a:off x="2112656" y="4895088"/>
+            <a:off x="8661327" y="3995928"/>
             <a:ext cx="1417712" cy="405384"/>
           </a:xfrm>
           <a:prstGeom prst="rect">
@@ -4581,13 +4478,13 @@
       </p:pic>
       <p:sp>
         <p:nvSpPr>
-          <p:cNvPr id="63" name="Text 34"/>
-          <p:cNvSpPr/>
-          <p:nvPr/>
-        </p:nvSpPr>
-        <p:spPr>
-          <a:xfrm>
-            <a:off x="2112656" y="5300472"/>
+          <p:cNvPr id="57" name="Text 28"/>
+          <p:cNvSpPr/>
+          <p:nvPr/>
+        </p:nvSpPr>
+        <p:spPr>
+          <a:xfrm>
+            <a:off x="8661327" y="4401312"/>
             <a:ext cx="1417712" cy="256032"/>
           </a:xfrm>
           <a:prstGeom prst="rect">
@@ -4612,7 +4509,7 @@
                 <a:ea typeface="Calibri" pitchFamily="34" charset="-122"/>
                 <a:cs typeface="Calibri" pitchFamily="34" charset="-120"/>
               </a:rPr>
-              <a:t>ClariPi</a:t>
+              <a:t>SyntheticMR</a:t>
             </a:r>
             <a:endParaRPr lang="en-US" sz="900" dirty="0"/>
           </a:p>
@@ -4620,7 +4517,7 @@
       </p:sp>
       <p:pic>
         <p:nvPicPr>
-          <p:cNvPr id="64" name="Image 27" descr="public/logos/SubtleMedical.jpg">    </p:cNvPr>
+          <p:cNvPr id="58" name="Image 27" descr="public/logos/raystation.jpg">    </p:cNvPr>
           <p:cNvPicPr>
             <a:picLocks noChangeAspect="1"/>
           </p:cNvPicPr>
@@ -4633,7 +4530,7 @@
         </p:blipFill>
         <p:spPr>
           <a:xfrm>
-            <a:off x="3749824" y="4895088"/>
+            <a:off x="10298495" y="3995928"/>
             <a:ext cx="1417712" cy="405384"/>
           </a:xfrm>
           <a:prstGeom prst="rect">
@@ -4643,13 +4540,13 @@
       </p:pic>
       <p:sp>
         <p:nvSpPr>
-          <p:cNvPr id="65" name="Text 35"/>
-          <p:cNvSpPr/>
-          <p:nvPr/>
-        </p:nvSpPr>
-        <p:spPr>
-          <a:xfrm>
-            <a:off x="3749824" y="5300472"/>
+          <p:cNvPr id="59" name="Text 29"/>
+          <p:cNvSpPr/>
+          <p:nvPr/>
+        </p:nvSpPr>
+        <p:spPr>
+          <a:xfrm>
+            <a:off x="10298495" y="4401312"/>
             <a:ext cx="1417712" cy="256032"/>
           </a:xfrm>
           <a:prstGeom prst="rect">
@@ -4674,7 +4571,7 @@
                 <a:ea typeface="Calibri" pitchFamily="34" charset="-122"/>
                 <a:cs typeface="Calibri" pitchFamily="34" charset="-120"/>
               </a:rPr>
-              <a:t>Subtle Medical</a:t>
+              <a:t>RaySearch Laboratories</a:t>
             </a:r>
             <a:endParaRPr lang="en-US" sz="900" dirty="0"/>
           </a:p>
@@ -4682,7 +4579,7 @@
       </p:sp>
       <p:pic>
         <p:nvPicPr>
-          <p:cNvPr id="66" name="Image 28" descr="public/logos/ptw.jpg">    </p:cNvPr>
+          <p:cNvPr id="60" name="Image 28" descr="public/logos/airs.jpg">    </p:cNvPr>
           <p:cNvPicPr>
             <a:picLocks noChangeAspect="1"/>
           </p:cNvPicPr>
@@ -4695,7 +4592,7 @@
         </p:blipFill>
         <p:spPr>
           <a:xfrm>
-            <a:off x="5386992" y="4895088"/>
+            <a:off x="475488" y="4895088"/>
             <a:ext cx="1417712" cy="405384"/>
           </a:xfrm>
           <a:prstGeom prst="rect">
@@ -4705,13 +4602,13 @@
       </p:pic>
       <p:sp>
         <p:nvSpPr>
-          <p:cNvPr id="67" name="Text 36"/>
-          <p:cNvSpPr/>
-          <p:nvPr/>
-        </p:nvSpPr>
-        <p:spPr>
-          <a:xfrm>
-            <a:off x="5386992" y="5300472"/>
+          <p:cNvPr id="61" name="Text 30"/>
+          <p:cNvSpPr/>
+          <p:nvPr/>
+        </p:nvSpPr>
+        <p:spPr>
+          <a:xfrm>
+            <a:off x="475488" y="5300472"/>
             <a:ext cx="1417712" cy="256032"/>
           </a:xfrm>
           <a:prstGeom prst="rect">
@@ -4736,7 +4633,7 @@
                 <a:ea typeface="Calibri" pitchFamily="34" charset="-122"/>
                 <a:cs typeface="Calibri" pitchFamily="34" charset="-120"/>
               </a:rPr>
-              <a:t>PTW</a:t>
+              <a:t>AIRS Medical</a:t>
             </a:r>
             <a:endParaRPr lang="en-US" sz="900" dirty="0"/>
           </a:p>
@@ -4744,7 +4641,7 @@
       </p:sp>
       <p:pic>
         <p:nvPicPr>
-          <p:cNvPr id="68" name="Image 29" descr="public/logos/pymedix.png">    </p:cNvPr>
+          <p:cNvPr id="62" name="Image 29" descr="public/logos/claripi.jpg">    </p:cNvPr>
           <p:cNvPicPr>
             <a:picLocks noChangeAspect="1"/>
           </p:cNvPicPr>
@@ -4757,7 +4654,7 @@
         </p:blipFill>
         <p:spPr>
           <a:xfrm>
-            <a:off x="7024160" y="4895088"/>
+            <a:off x="2112656" y="4895088"/>
             <a:ext cx="1417712" cy="405384"/>
           </a:xfrm>
           <a:prstGeom prst="rect">
@@ -4767,13 +4664,13 @@
       </p:pic>
       <p:sp>
         <p:nvSpPr>
-          <p:cNvPr id="69" name="Text 37"/>
-          <p:cNvSpPr/>
-          <p:nvPr/>
-        </p:nvSpPr>
-        <p:spPr>
-          <a:xfrm>
-            <a:off x="7024160" y="5300472"/>
+          <p:cNvPr id="63" name="Text 31"/>
+          <p:cNvSpPr/>
+          <p:nvPr/>
+        </p:nvSpPr>
+        <p:spPr>
+          <a:xfrm>
+            <a:off x="2112656" y="5300472"/>
             <a:ext cx="1417712" cy="256032"/>
           </a:xfrm>
           <a:prstGeom prst="rect">
@@ -4798,7 +4695,7 @@
                 <a:ea typeface="Calibri" pitchFamily="34" charset="-122"/>
                 <a:cs typeface="Calibri" pitchFamily="34" charset="-120"/>
               </a:rPr>
-              <a:t>PyMedix</a:t>
+              <a:t>ClariPi</a:t>
             </a:r>
             <a:endParaRPr lang="en-US" sz="900" dirty="0"/>
           </a:p>
@@ -4806,7 +4703,7 @@
       </p:sp>
       <p:pic>
         <p:nvPicPr>
-          <p:cNvPr id="70" name="Image 30" descr="public/logos/medlever.jpg">    </p:cNvPr>
+          <p:cNvPr id="64" name="Image 30" descr="public/logos/SubtleMedical.jpg">    </p:cNvPr>
           <p:cNvPicPr>
             <a:picLocks noChangeAspect="1"/>
           </p:cNvPicPr>
@@ -4819,7 +4716,7 @@
         </p:blipFill>
         <p:spPr>
           <a:xfrm>
-            <a:off x="8661327" y="4895088"/>
+            <a:off x="3749824" y="4895088"/>
             <a:ext cx="1417712" cy="405384"/>
           </a:xfrm>
           <a:prstGeom prst="rect">
@@ -4829,13 +4726,13 @@
       </p:pic>
       <p:sp>
         <p:nvSpPr>
-          <p:cNvPr id="71" name="Text 38"/>
-          <p:cNvSpPr/>
-          <p:nvPr/>
-        </p:nvSpPr>
-        <p:spPr>
-          <a:xfrm>
-            <a:off x="8661327" y="5300472"/>
+          <p:cNvPr id="65" name="Text 32"/>
+          <p:cNvSpPr/>
+          <p:nvPr/>
+        </p:nvSpPr>
+        <p:spPr>
+          <a:xfrm>
+            <a:off x="3749824" y="5300472"/>
             <a:ext cx="1417712" cy="256032"/>
           </a:xfrm>
           <a:prstGeom prst="rect">
@@ -4860,7 +4757,7 @@
                 <a:ea typeface="Calibri" pitchFamily="34" charset="-122"/>
                 <a:cs typeface="Calibri" pitchFamily="34" charset="-120"/>
               </a:rPr>
-              <a:t>MedLever, Inc.</a:t>
+              <a:t>Subtle Medical</a:t>
             </a:r>
             <a:endParaRPr lang="en-US" sz="900" dirty="0"/>
           </a:p>
@@ -4868,7 +4765,7 @@
       </p:sp>
       <p:pic>
         <p:nvPicPr>
-          <p:cNvPr id="72" name="Image 31" descr="public/logos/medmind.png">    </p:cNvPr>
+          <p:cNvPr id="66" name="Image 31" descr="public/logos/ptw.jpg">    </p:cNvPr>
           <p:cNvPicPr>
             <a:picLocks noChangeAspect="1"/>
           </p:cNvPicPr>
@@ -4881,7 +4778,7 @@
         </p:blipFill>
         <p:spPr>
           <a:xfrm>
-            <a:off x="10298495" y="4895088"/>
+            <a:off x="5386992" y="4895088"/>
             <a:ext cx="1417712" cy="405384"/>
           </a:xfrm>
           <a:prstGeom prst="rect">
@@ -4891,13 +4788,13 @@
       </p:pic>
       <p:sp>
         <p:nvSpPr>
-          <p:cNvPr id="73" name="Text 39"/>
-          <p:cNvSpPr/>
-          <p:nvPr/>
-        </p:nvSpPr>
-        <p:spPr>
-          <a:xfrm>
-            <a:off x="10298495" y="5300472"/>
+          <p:cNvPr id="67" name="Text 33"/>
+          <p:cNvSpPr/>
+          <p:nvPr/>
+        </p:nvSpPr>
+        <p:spPr>
+          <a:xfrm>
+            <a:off x="5386992" y="5300472"/>
             <a:ext cx="1417712" cy="256032"/>
           </a:xfrm>
           <a:prstGeom prst="rect">
@@ -4922,7 +4819,7 @@
                 <a:ea typeface="Calibri" pitchFamily="34" charset="-122"/>
                 <a:cs typeface="Calibri" pitchFamily="34" charset="-120"/>
               </a:rPr>
-              <a:t>MedMind Technology Co., Ltd.</a:t>
+              <a:t>PTW</a:t>
             </a:r>
             <a:endParaRPr lang="en-US" sz="900" dirty="0"/>
           </a:p>
@@ -4930,7 +4827,7 @@
       </p:sp>
       <p:pic>
         <p:nvPicPr>
-          <p:cNvPr id="74" name="Image 32" descr="public/logos/quanta-computer.png">    </p:cNvPr>
+          <p:cNvPr id="68" name="Image 32" descr="public/logos/pymedix.png">    </p:cNvPr>
           <p:cNvPicPr>
             <a:picLocks noChangeAspect="1"/>
           </p:cNvPicPr>
@@ -4943,7 +4840,7 @@
         </p:blipFill>
         <p:spPr>
           <a:xfrm>
-            <a:off x="475488" y="5794248"/>
+            <a:off x="7024160" y="4895088"/>
             <a:ext cx="1417712" cy="405384"/>
           </a:xfrm>
           <a:prstGeom prst="rect">
@@ -4953,13 +4850,13 @@
       </p:pic>
       <p:sp>
         <p:nvSpPr>
-          <p:cNvPr id="75" name="Text 40"/>
-          <p:cNvSpPr/>
-          <p:nvPr/>
-        </p:nvSpPr>
-        <p:spPr>
-          <a:xfrm>
-            <a:off x="475488" y="6199632"/>
+          <p:cNvPr id="69" name="Text 34"/>
+          <p:cNvSpPr/>
+          <p:nvPr/>
+        </p:nvSpPr>
+        <p:spPr>
+          <a:xfrm>
+            <a:off x="7024160" y="5300472"/>
             <a:ext cx="1417712" cy="256032"/>
           </a:xfrm>
           <a:prstGeom prst="rect">
@@ -4984,7 +4881,7 @@
                 <a:ea typeface="Calibri" pitchFamily="34" charset="-122"/>
                 <a:cs typeface="Calibri" pitchFamily="34" charset="-120"/>
               </a:rPr>
-              <a:t>Quanta Computer Inc.</a:t>
+              <a:t>PyMedix</a:t>
             </a:r>
             <a:endParaRPr lang="en-US" sz="900" dirty="0"/>
           </a:p>
@@ -4992,7 +4889,7 @@
       </p:sp>
       <p:pic>
         <p:nvPicPr>
-          <p:cNvPr id="76" name="Image 33" descr="public/logos/Elekta.png">    </p:cNvPr>
+          <p:cNvPr id="70" name="Image 33" descr="public/logos/medlever.jpg">    </p:cNvPr>
           <p:cNvPicPr>
             <a:picLocks noChangeAspect="1"/>
           </p:cNvPicPr>
@@ -5005,7 +4902,7 @@
         </p:blipFill>
         <p:spPr>
           <a:xfrm>
-            <a:off x="2112656" y="5794248"/>
+            <a:off x="8661327" y="4895088"/>
             <a:ext cx="1417712" cy="405384"/>
           </a:xfrm>
           <a:prstGeom prst="rect">
@@ -5015,13 +4912,13 @@
       </p:pic>
       <p:sp>
         <p:nvSpPr>
-          <p:cNvPr id="77" name="Text 41"/>
-          <p:cNvSpPr/>
-          <p:nvPr/>
-        </p:nvSpPr>
-        <p:spPr>
-          <a:xfrm>
-            <a:off x="2112656" y="6199632"/>
+          <p:cNvPr id="71" name="Text 35"/>
+          <p:cNvSpPr/>
+          <p:nvPr/>
+        </p:nvSpPr>
+        <p:spPr>
+          <a:xfrm>
+            <a:off x="8661327" y="5300472"/>
             <a:ext cx="1417712" cy="256032"/>
           </a:xfrm>
           <a:prstGeom prst="rect">
@@ -5046,7 +4943,7 @@
                 <a:ea typeface="Calibri" pitchFamily="34" charset="-122"/>
                 <a:cs typeface="Calibri" pitchFamily="34" charset="-120"/>
               </a:rPr>
-              <a:t>Elekta</a:t>
+              <a:t>MedLever, Inc.</a:t>
             </a:r>
             <a:endParaRPr lang="en-US" sz="900" dirty="0"/>
           </a:p>
@@ -5054,7 +4951,7 @@
       </p:sp>
       <p:pic>
         <p:nvPicPr>
-          <p:cNvPr id="78" name="Image 34" descr="public/logos/accuray.png">    </p:cNvPr>
+          <p:cNvPr id="72" name="Image 34" descr="public/logos/medmind.png">    </p:cNvPr>
           <p:cNvPicPr>
             <a:picLocks noChangeAspect="1"/>
           </p:cNvPicPr>
@@ -5067,7 +4964,7 @@
         </p:blipFill>
         <p:spPr>
           <a:xfrm>
-            <a:off x="3749824" y="5794248"/>
+            <a:off x="10298495" y="4895088"/>
             <a:ext cx="1417712" cy="405384"/>
           </a:xfrm>
           <a:prstGeom prst="rect">
@@ -5077,13 +4974,13 @@
       </p:pic>
       <p:sp>
         <p:nvSpPr>
-          <p:cNvPr id="79" name="Text 42"/>
-          <p:cNvSpPr/>
-          <p:nvPr/>
-        </p:nvSpPr>
-        <p:spPr>
-          <a:xfrm>
-            <a:off x="3749824" y="6199632"/>
+          <p:cNvPr id="73" name="Text 36"/>
+          <p:cNvSpPr/>
+          <p:nvPr/>
+        </p:nvSpPr>
+        <p:spPr>
+          <a:xfrm>
+            <a:off x="10298495" y="5300472"/>
             <a:ext cx="1417712" cy="256032"/>
           </a:xfrm>
           <a:prstGeom prst="rect">
@@ -5108,7 +5005,7 @@
                 <a:ea typeface="Calibri" pitchFamily="34" charset="-122"/>
                 <a:cs typeface="Calibri" pitchFamily="34" charset="-120"/>
               </a:rPr>
-              <a:t>Accuray®</a:t>
+              <a:t>MedMind Technology Co., Ltd.</a:t>
             </a:r>
             <a:endParaRPr lang="en-US" sz="900" dirty="0"/>
           </a:p>
@@ -5116,7 +5013,7 @@
       </p:sp>
       <p:pic>
         <p:nvPicPr>
-          <p:cNvPr id="80" name="Image 35" descr="public/logos/SunNuclear.png">    </p:cNvPr>
+          <p:cNvPr id="74" name="Image 35" descr="public/logos/quanta-computer.png">    </p:cNvPr>
           <p:cNvPicPr>
             <a:picLocks noChangeAspect="1"/>
           </p:cNvPicPr>
@@ -5129,7 +5026,7 @@
         </p:blipFill>
         <p:spPr>
           <a:xfrm>
-            <a:off x="5386992" y="5794248"/>
+            <a:off x="475488" y="5794248"/>
             <a:ext cx="1417712" cy="405384"/>
           </a:xfrm>
           <a:prstGeom prst="rect">
@@ -5139,13 +5036,13 @@
       </p:pic>
       <p:sp>
         <p:nvSpPr>
-          <p:cNvPr id="81" name="Text 43"/>
-          <p:cNvSpPr/>
-          <p:nvPr/>
-        </p:nvSpPr>
-        <p:spPr>
-          <a:xfrm>
-            <a:off x="5386992" y="6199632"/>
+          <p:cNvPr id="75" name="Text 37"/>
+          <p:cNvSpPr/>
+          <p:nvPr/>
+        </p:nvSpPr>
+        <p:spPr>
+          <a:xfrm>
+            <a:off x="475488" y="6199632"/>
             <a:ext cx="1417712" cy="256032"/>
           </a:xfrm>
           <a:prstGeom prst="rect">
@@ -5170,71 +5067,7 @@
                 <a:ea typeface="Calibri" pitchFamily="34" charset="-122"/>
                 <a:cs typeface="Calibri" pitchFamily="34" charset="-120"/>
               </a:rPr>
-              <a:t>Sun Nuclear (Mirion Medical)</a:t>
-            </a:r>
-            <a:endParaRPr lang="en-US" sz="900" dirty="0"/>
-          </a:p>
-        </p:txBody>
-      </p:sp>
-      <p:sp>
-        <p:nvSpPr>
-          <p:cNvPr id="82" name="Shape 44"/>
-          <p:cNvSpPr/>
-          <p:nvPr/>
-        </p:nvSpPr>
-        <p:spPr>
-          <a:xfrm>
-            <a:off x="7024160" y="5794248"/>
-            <a:ext cx="1417712" cy="405384"/>
-          </a:xfrm>
-          <a:prstGeom prst="rect">
-            <a:avLst/>
-          </a:prstGeom>
-          <a:solidFill>
-            <a:srgbClr val="F3F4F6"/>
-          </a:solidFill>
-          <a:ln w="12700">
-            <a:solidFill>
-              <a:srgbClr val="E5E7EB"/>
-            </a:solidFill>
-            <a:prstDash val="solid"/>
-          </a:ln>
-        </p:spPr>
-      </p:sp>
-      <p:sp>
-        <p:nvSpPr>
-          <p:cNvPr id="83" name="Text 45"/>
-          <p:cNvSpPr/>
-          <p:nvPr/>
-        </p:nvSpPr>
-        <p:spPr>
-          <a:xfrm>
-            <a:off x="7024160" y="6199632"/>
-            <a:ext cx="1417712" cy="256032"/>
-          </a:xfrm>
-          <a:prstGeom prst="rect">
-            <a:avLst/>
-          </a:prstGeom>
-          <a:noFill/>
-          <a:ln/>
-        </p:spPr>
-        <p:txBody>
-          <a:bodyPr wrap="square" rtlCol="0" anchor="ctr"/>
-          <a:lstStyle/>
-          <a:p>
-            <a:pPr algn="ctr" indent="0" marL="0">
-              <a:buNone/>
-            </a:pPr>
-            <a:r>
-              <a:rPr lang="en-US" sz="900" dirty="0">
-                <a:solidFill>
-                  <a:srgbClr val="1A1A2E"/>
-                </a:solidFill>
-                <a:latin typeface="Calibri" pitchFamily="34" charset="0"/>
-                <a:ea typeface="Calibri" pitchFamily="34" charset="-122"/>
-                <a:cs typeface="Calibri" pitchFamily="34" charset="-120"/>
-              </a:rPr>
-              <a:t>MD Anderson Cancer Center</a:t>
+              <a:t>Quanta Computer Inc.</a:t>
             </a:r>
             <a:endParaRPr lang="en-US" sz="900" dirty="0"/>
           </a:p>
@@ -5242,7 +5075,7 @@
       </p:sp>
       <p:pic>
         <p:nvPicPr>
-          <p:cNvPr id="84" name="Image 36" descr="public/logos/Brainlab.jpg">    </p:cNvPr>
+          <p:cNvPr id="76" name="Image 36" descr="public/logos/Elekta.png">    </p:cNvPr>
           <p:cNvPicPr>
             <a:picLocks noChangeAspect="1"/>
           </p:cNvPicPr>
@@ -5255,7 +5088,7 @@
         </p:blipFill>
         <p:spPr>
           <a:xfrm>
-            <a:off x="8661327" y="5794248"/>
+            <a:off x="2112656" y="5794248"/>
             <a:ext cx="1417712" cy="405384"/>
           </a:xfrm>
           <a:prstGeom prst="rect">
@@ -5265,13 +5098,13 @@
       </p:pic>
       <p:sp>
         <p:nvSpPr>
-          <p:cNvPr id="85" name="Text 46"/>
-          <p:cNvSpPr/>
-          <p:nvPr/>
-        </p:nvSpPr>
-        <p:spPr>
-          <a:xfrm>
-            <a:off x="8661327" y="6199632"/>
+          <p:cNvPr id="77" name="Text 38"/>
+          <p:cNvSpPr/>
+          <p:nvPr/>
+        </p:nvSpPr>
+        <p:spPr>
+          <a:xfrm>
+            <a:off x="2112656" y="6199632"/>
             <a:ext cx="1417712" cy="256032"/>
           </a:xfrm>
           <a:prstGeom prst="rect">
@@ -5296,7 +5129,7 @@
                 <a:ea typeface="Calibri" pitchFamily="34" charset="-122"/>
                 <a:cs typeface="Calibri" pitchFamily="34" charset="-120"/>
               </a:rPr>
-              <a:t>Brainlab</a:t>
+              <a:t>Elekta</a:t>
             </a:r>
             <a:endParaRPr lang="en-US" sz="900" dirty="0"/>
           </a:p>
@@ -5304,7 +5137,7 @@
       </p:sp>
       <p:pic>
         <p:nvPicPr>
-          <p:cNvPr id="86" name="Image 37" descr="public/logos/varian.jpg">    </p:cNvPr>
+          <p:cNvPr id="78" name="Image 37" descr="public/logos/accuray.png">    </p:cNvPr>
           <p:cNvPicPr>
             <a:picLocks noChangeAspect="1"/>
           </p:cNvPicPr>
@@ -5317,6 +5150,254 @@
         </p:blipFill>
         <p:spPr>
           <a:xfrm>
+            <a:off x="3749824" y="5794248"/>
+            <a:ext cx="1417712" cy="405384"/>
+          </a:xfrm>
+          <a:prstGeom prst="rect">
+            <a:avLst/>
+          </a:prstGeom>
+        </p:spPr>
+      </p:pic>
+      <p:sp>
+        <p:nvSpPr>
+          <p:cNvPr id="79" name="Text 39"/>
+          <p:cNvSpPr/>
+          <p:nvPr/>
+        </p:nvSpPr>
+        <p:spPr>
+          <a:xfrm>
+            <a:off x="3749824" y="6199632"/>
+            <a:ext cx="1417712" cy="256032"/>
+          </a:xfrm>
+          <a:prstGeom prst="rect">
+            <a:avLst/>
+          </a:prstGeom>
+          <a:noFill/>
+          <a:ln/>
+        </p:spPr>
+        <p:txBody>
+          <a:bodyPr wrap="square" rtlCol="0" anchor="ctr"/>
+          <a:lstStyle/>
+          <a:p>
+            <a:pPr algn="ctr" indent="0" marL="0">
+              <a:buNone/>
+            </a:pPr>
+            <a:r>
+              <a:rPr lang="en-US" sz="900" dirty="0">
+                <a:solidFill>
+                  <a:srgbClr val="1A1A2E"/>
+                </a:solidFill>
+                <a:latin typeface="Calibri" pitchFamily="34" charset="0"/>
+                <a:ea typeface="Calibri" pitchFamily="34" charset="-122"/>
+                <a:cs typeface="Calibri" pitchFamily="34" charset="-120"/>
+              </a:rPr>
+              <a:t>Accuray®</a:t>
+            </a:r>
+            <a:endParaRPr lang="en-US" sz="900" dirty="0"/>
+          </a:p>
+        </p:txBody>
+      </p:sp>
+      <p:pic>
+        <p:nvPicPr>
+          <p:cNvPr id="80" name="Image 38" descr="public/logos/SunNuclear.png">    </p:cNvPr>
+          <p:cNvPicPr>
+            <a:picLocks noChangeAspect="1"/>
+          </p:cNvPicPr>
+          <p:nvPr/>
+        </p:nvPicPr>
+        <p:blipFill>
+          <a:blip r:embed="rId39"/>
+          <a:srcRect l="0" r="0" t="0" b="0"/>
+          <a:stretch/>
+        </p:blipFill>
+        <p:spPr>
+          <a:xfrm>
+            <a:off x="5386992" y="5794248"/>
+            <a:ext cx="1417712" cy="405384"/>
+          </a:xfrm>
+          <a:prstGeom prst="rect">
+            <a:avLst/>
+          </a:prstGeom>
+        </p:spPr>
+      </p:pic>
+      <p:sp>
+        <p:nvSpPr>
+          <p:cNvPr id="81" name="Text 40"/>
+          <p:cNvSpPr/>
+          <p:nvPr/>
+        </p:nvSpPr>
+        <p:spPr>
+          <a:xfrm>
+            <a:off x="5386992" y="6199632"/>
+            <a:ext cx="1417712" cy="256032"/>
+          </a:xfrm>
+          <a:prstGeom prst="rect">
+            <a:avLst/>
+          </a:prstGeom>
+          <a:noFill/>
+          <a:ln/>
+        </p:spPr>
+        <p:txBody>
+          <a:bodyPr wrap="square" rtlCol="0" anchor="ctr"/>
+          <a:lstStyle/>
+          <a:p>
+            <a:pPr algn="ctr" indent="0" marL="0">
+              <a:buNone/>
+            </a:pPr>
+            <a:r>
+              <a:rPr lang="en-US" sz="900" dirty="0">
+                <a:solidFill>
+                  <a:srgbClr val="1A1A2E"/>
+                </a:solidFill>
+                <a:latin typeface="Calibri" pitchFamily="34" charset="0"/>
+                <a:ea typeface="Calibri" pitchFamily="34" charset="-122"/>
+                <a:cs typeface="Calibri" pitchFamily="34" charset="-120"/>
+              </a:rPr>
+              <a:t>Sun Nuclear (Mirion Medical)</a:t>
+            </a:r>
+            <a:endParaRPr lang="en-US" sz="900" dirty="0"/>
+          </a:p>
+        </p:txBody>
+      </p:sp>
+      <p:pic>
+        <p:nvPicPr>
+          <p:cNvPr id="82" name="Image 39" descr="public/newsletters/2026-06/_logo-cache/md_anderson.png">    </p:cNvPr>
+          <p:cNvPicPr>
+            <a:picLocks noChangeAspect="1"/>
+          </p:cNvPicPr>
+          <p:nvPr/>
+        </p:nvPicPr>
+        <p:blipFill>
+          <a:blip r:embed="rId40"/>
+          <a:srcRect l="0" r="0" t="0" b="0"/>
+          <a:stretch/>
+        </p:blipFill>
+        <p:spPr>
+          <a:xfrm>
+            <a:off x="7024160" y="5794248"/>
+            <a:ext cx="1417712" cy="405384"/>
+          </a:xfrm>
+          <a:prstGeom prst="rect">
+            <a:avLst/>
+          </a:prstGeom>
+        </p:spPr>
+      </p:pic>
+      <p:sp>
+        <p:nvSpPr>
+          <p:cNvPr id="83" name="Text 41"/>
+          <p:cNvSpPr/>
+          <p:nvPr/>
+        </p:nvSpPr>
+        <p:spPr>
+          <a:xfrm>
+            <a:off x="7024160" y="6199632"/>
+            <a:ext cx="1417712" cy="256032"/>
+          </a:xfrm>
+          <a:prstGeom prst="rect">
+            <a:avLst/>
+          </a:prstGeom>
+          <a:noFill/>
+          <a:ln/>
+        </p:spPr>
+        <p:txBody>
+          <a:bodyPr wrap="square" rtlCol="0" anchor="ctr"/>
+          <a:lstStyle/>
+          <a:p>
+            <a:pPr algn="ctr" indent="0" marL="0">
+              <a:buNone/>
+            </a:pPr>
+            <a:r>
+              <a:rPr lang="en-US" sz="900" dirty="0">
+                <a:solidFill>
+                  <a:srgbClr val="1A1A2E"/>
+                </a:solidFill>
+                <a:latin typeface="Calibri" pitchFamily="34" charset="0"/>
+                <a:ea typeface="Calibri" pitchFamily="34" charset="-122"/>
+                <a:cs typeface="Calibri" pitchFamily="34" charset="-120"/>
+              </a:rPr>
+              <a:t>MD Anderson Cancer Center</a:t>
+            </a:r>
+            <a:endParaRPr lang="en-US" sz="900" dirty="0"/>
+          </a:p>
+        </p:txBody>
+      </p:sp>
+      <p:pic>
+        <p:nvPicPr>
+          <p:cNvPr id="84" name="Image 40" descr="public/logos/Brainlab.jpg">    </p:cNvPr>
+          <p:cNvPicPr>
+            <a:picLocks noChangeAspect="1"/>
+          </p:cNvPicPr>
+          <p:nvPr/>
+        </p:nvPicPr>
+        <p:blipFill>
+          <a:blip r:embed="rId41"/>
+          <a:srcRect l="0" r="0" t="0" b="0"/>
+          <a:stretch/>
+        </p:blipFill>
+        <p:spPr>
+          <a:xfrm>
+            <a:off x="8661327" y="5794248"/>
+            <a:ext cx="1417712" cy="405384"/>
+          </a:xfrm>
+          <a:prstGeom prst="rect">
+            <a:avLst/>
+          </a:prstGeom>
+        </p:spPr>
+      </p:pic>
+      <p:sp>
+        <p:nvSpPr>
+          <p:cNvPr id="85" name="Text 42"/>
+          <p:cNvSpPr/>
+          <p:nvPr/>
+        </p:nvSpPr>
+        <p:spPr>
+          <a:xfrm>
+            <a:off x="8661327" y="6199632"/>
+            <a:ext cx="1417712" cy="256032"/>
+          </a:xfrm>
+          <a:prstGeom prst="rect">
+            <a:avLst/>
+          </a:prstGeom>
+          <a:noFill/>
+          <a:ln/>
+        </p:spPr>
+        <p:txBody>
+          <a:bodyPr wrap="square" rtlCol="0" anchor="ctr"/>
+          <a:lstStyle/>
+          <a:p>
+            <a:pPr algn="ctr" indent="0" marL="0">
+              <a:buNone/>
+            </a:pPr>
+            <a:r>
+              <a:rPr lang="en-US" sz="900" dirty="0">
+                <a:solidFill>
+                  <a:srgbClr val="1A1A2E"/>
+                </a:solidFill>
+                <a:latin typeface="Calibri" pitchFamily="34" charset="0"/>
+                <a:ea typeface="Calibri" pitchFamily="34" charset="-122"/>
+                <a:cs typeface="Calibri" pitchFamily="34" charset="-120"/>
+              </a:rPr>
+              <a:t>Brainlab</a:t>
+            </a:r>
+            <a:endParaRPr lang="en-US" sz="900" dirty="0"/>
+          </a:p>
+        </p:txBody>
+      </p:sp>
+      <p:pic>
+        <p:nvPicPr>
+          <p:cNvPr id="86" name="Image 41" descr="public/logos/varian.jpg">    </p:cNvPr>
+          <p:cNvPicPr>
+            <a:picLocks noChangeAspect="1"/>
+          </p:cNvPicPr>
+          <p:nvPr/>
+        </p:nvPicPr>
+        <p:blipFill>
+          <a:blip r:embed="rId42"/>
+          <a:srcRect l="0" r="0" t="0" b="0"/>
+          <a:stretch/>
+        </p:blipFill>
+        <p:spPr>
+          <a:xfrm>
             <a:off x="10298495" y="5794248"/>
             <a:ext cx="1417712" cy="405384"/>
           </a:xfrm>
@@ -5327,7 +5408,7 @@
       </p:pic>
       <p:sp>
         <p:nvSpPr>
-          <p:cNvPr id="87" name="Text 47"/>
+          <p:cNvPr id="87" name="Text 43"/>
           <p:cNvSpPr/>
           <p:nvPr/>
         </p:nvSpPr>
@@ -5375,6 +5456,339 @@
 <file path=ppt/slides/slide5.xml><?xml version="1.0" encoding="utf-8"?>
 <p:sld xmlns:a="http://schemas.openxmlformats.org/drawingml/2006/main" xmlns:r="http://schemas.openxmlformats.org/officeDocument/2006/relationships" xmlns:p="http://schemas.openxmlformats.org/presentationml/2006/main">
   <p:cSld name="Slide 5">
+    <p:bg>
+      <p:bgPr>
+        <a:solidFill>
+          <a:srgbClr val="FFFFFF"/>
+        </a:solidFill>
+      </p:bgPr>
+    </p:bg>
+    <p:spTree>
+      <p:nvGrpSpPr>
+        <p:cNvPr id="1" name=""/>
+        <p:cNvGrpSpPr/>
+        <p:nvPr/>
+      </p:nvGrpSpPr>
+      <p:grpSpPr>
+        <a:xfrm>
+          <a:off x="0" y="0"/>
+          <a:ext cx="0" cy="0"/>
+          <a:chOff x="0" y="0"/>
+          <a:chExt cx="0" cy="0"/>
+        </a:xfrm>
+      </p:grpSpPr>
+      <p:sp>
+        <p:nvSpPr>
+          <p:cNvPr id="2" name="Shape 0"/>
+          <p:cNvSpPr/>
+          <p:nvPr/>
+        </p:nvSpPr>
+        <p:spPr>
+          <a:xfrm>
+            <a:off x="0" y="0"/>
+            <a:ext cx="228600" cy="6858000"/>
+          </a:xfrm>
+          <a:prstGeom prst="rect">
+            <a:avLst/>
+          </a:prstGeom>
+          <a:solidFill>
+            <a:srgbClr val="5090D0"/>
+          </a:solidFill>
+          <a:ln w="12700">
+            <a:solidFill>
+              <a:srgbClr val="5090D0"/>
+            </a:solidFill>
+            <a:prstDash val="solid"/>
+          </a:ln>
+        </p:spPr>
+      </p:sp>
+      <p:sp>
+        <p:nvSpPr>
+          <p:cNvPr id="3" name="Text 1"/>
+          <p:cNvSpPr/>
+          <p:nvPr/>
+        </p:nvSpPr>
+        <p:spPr>
+          <a:xfrm>
+            <a:off x="640080" y="365760"/>
+            <a:ext cx="10911535" cy="731520"/>
+          </a:xfrm>
+          <a:prstGeom prst="rect">
+            <a:avLst/>
+          </a:prstGeom>
+          <a:noFill/>
+          <a:ln/>
+        </p:spPr>
+        <p:txBody>
+          <a:bodyPr wrap="square" rtlCol="0" anchor="ctr"/>
+          <a:lstStyle/>
+          <a:p>
+            <a:pPr indent="0" marL="0">
+              <a:buNone/>
+            </a:pPr>
+            <a:r>
+              <a:rPr lang="en-US" sz="3200" b="1" dirty="0">
+                <a:solidFill>
+                  <a:srgbClr val="1A1A2E"/>
+                </a:solidFill>
+                <a:latin typeface="Calibri" pitchFamily="34" charset="0"/>
+                <a:ea typeface="Calibri" pitchFamily="34" charset="-122"/>
+                <a:cs typeface="Calibri" pitchFamily="34" charset="-120"/>
+              </a:rPr>
+              <a:t>Support &amp; Transparency</a:t>
+            </a:r>
+            <a:endParaRPr lang="en-US" sz="3200" dirty="0"/>
+          </a:p>
+        </p:txBody>
+      </p:sp>
+      <p:sp>
+        <p:nvSpPr>
+          <p:cNvPr id="4" name="Text 2"/>
+          <p:cNvSpPr/>
+          <p:nvPr/>
+        </p:nvSpPr>
+        <p:spPr>
+          <a:xfrm>
+            <a:off x="640080" y="1280160"/>
+            <a:ext cx="10911535" cy="457200"/>
+          </a:xfrm>
+          <a:prstGeom prst="rect">
+            <a:avLst/>
+          </a:prstGeom>
+          <a:noFill/>
+          <a:ln/>
+        </p:spPr>
+        <p:txBody>
+          <a:bodyPr wrap="square" rtlCol="0" anchor="ctr"/>
+          <a:lstStyle/>
+          <a:p>
+            <a:pPr indent="0" marL="0">
+              <a:buNone/>
+            </a:pPr>
+            <a:r>
+              <a:rPr lang="en-US" sz="2200" b="1" dirty="0">
+                <a:solidFill>
+                  <a:srgbClr val="5090D0"/>
+                </a:solidFill>
+                <a:latin typeface="Calibri" pitchFamily="34" charset="0"/>
+                <a:ea typeface="Calibri" pitchFamily="34" charset="-122"/>
+                <a:cs typeface="Calibri" pitchFamily="34" charset="-120"/>
+              </a:rPr>
+              <a:t>UMC Utrecht backs the platform</a:t>
+            </a:r>
+            <a:endParaRPr lang="en-US" sz="2200" dirty="0"/>
+          </a:p>
+        </p:txBody>
+      </p:sp>
+      <p:sp>
+        <p:nvSpPr>
+          <p:cNvPr id="5" name="Text 3"/>
+          <p:cNvSpPr/>
+          <p:nvPr/>
+        </p:nvSpPr>
+        <p:spPr>
+          <a:xfrm>
+            <a:off x="640080" y="1737360"/>
+            <a:ext cx="10911535" cy="1463040"/>
+          </a:xfrm>
+          <a:prstGeom prst="rect">
+            <a:avLst/>
+          </a:prstGeom>
+          <a:noFill/>
+          <a:ln/>
+        </p:spPr>
+        <p:txBody>
+          <a:bodyPr wrap="square" rtlCol="0" anchor="ctr"/>
+          <a:lstStyle/>
+          <a:p>
+            <a:pPr indent="0" marL="0">
+              <a:spcAft>
+                <a:spcPts val="600"/>
+              </a:spcAft>
+              <a:buNone/>
+            </a:pPr>
+            <a:r>
+              <a:rPr lang="en-US" sz="1800" dirty="0">
+                <a:solidFill>
+                  <a:srgbClr val="1A1A2E"/>
+                </a:solidFill>
+                <a:latin typeface="Calibri" pitchFamily="34" charset="0"/>
+                <a:ea typeface="Calibri" pitchFamily="34" charset="-122"/>
+                <a:cs typeface="Calibri" pitchFamily="34" charset="-120"/>
+              </a:rPr>
+              <a:t>Through the Radiotherapy Medical Physics Traineeship, UMC Utrecht has agreed to cover the running costs of DLinRT.eu — safeguarding the independence and continuity of the initiative. A huge thank you to the Radiotherapy Department for this support.</a:t>
+            </a:r>
+            <a:endParaRPr lang="en-US" sz="1800" dirty="0"/>
+          </a:p>
+        </p:txBody>
+      </p:sp>
+      <p:sp>
+        <p:nvSpPr>
+          <p:cNvPr id="6" name="Text 4"/>
+          <p:cNvSpPr/>
+          <p:nvPr/>
+        </p:nvSpPr>
+        <p:spPr>
+          <a:xfrm>
+            <a:off x="640080" y="3383280"/>
+            <a:ext cx="10911535" cy="457200"/>
+          </a:xfrm>
+          <a:prstGeom prst="rect">
+            <a:avLst/>
+          </a:prstGeom>
+          <a:noFill/>
+          <a:ln/>
+        </p:spPr>
+        <p:txBody>
+          <a:bodyPr wrap="square" rtlCol="0" anchor="ctr"/>
+          <a:lstStyle/>
+          <a:p>
+            <a:pPr indent="0" marL="0">
+              <a:buNone/>
+            </a:pPr>
+            <a:r>
+              <a:rPr lang="en-US" sz="2200" b="1" dirty="0">
+                <a:solidFill>
+                  <a:srgbClr val="5090D0"/>
+                </a:solidFill>
+                <a:latin typeface="Calibri" pitchFamily="34" charset="0"/>
+                <a:ea typeface="Calibri" pitchFamily="34" charset="-122"/>
+                <a:cs typeface="Calibri" pitchFamily="34" charset="-120"/>
+              </a:rPr>
+              <a:t>Running costs, in the open</a:t>
+            </a:r>
+            <a:endParaRPr lang="en-US" sz="2200" dirty="0"/>
+          </a:p>
+        </p:txBody>
+      </p:sp>
+      <p:sp>
+        <p:nvSpPr>
+          <p:cNvPr id="7" name="Text 5"/>
+          <p:cNvSpPr/>
+          <p:nvPr/>
+        </p:nvSpPr>
+        <p:spPr>
+          <a:xfrm>
+            <a:off x="640080" y="3840480"/>
+            <a:ext cx="10911535" cy="731520"/>
+          </a:xfrm>
+          <a:prstGeom prst="rect">
+            <a:avLst/>
+          </a:prstGeom>
+          <a:noFill/>
+          <a:ln/>
+        </p:spPr>
+        <p:txBody>
+          <a:bodyPr wrap="square" rtlCol="0" anchor="ctr"/>
+          <a:lstStyle/>
+          <a:p>
+            <a:pPr indent="0" marL="0">
+              <a:buNone/>
+            </a:pPr>
+            <a:r>
+              <a:rPr lang="en-US" sz="1800" dirty="0">
+                <a:solidFill>
+                  <a:srgbClr val="1A1A2E"/>
+                </a:solidFill>
+                <a:latin typeface="Calibri" pitchFamily="34" charset="0"/>
+                <a:ea typeface="Calibri" pitchFamily="34" charset="-122"/>
+                <a:cs typeface="Calibri" pitchFamily="34" charset="-120"/>
+              </a:rPr>
+              <a:t>We publish our running costs and will keep them up to date at dlinrt.eu/transparency.</a:t>
+            </a:r>
+            <a:endParaRPr lang="en-US" sz="1800" dirty="0"/>
+          </a:p>
+        </p:txBody>
+      </p:sp>
+      <p:sp>
+        <p:nvSpPr>
+          <p:cNvPr id="8" name="Text 6"/>
+          <p:cNvSpPr/>
+          <p:nvPr/>
+        </p:nvSpPr>
+        <p:spPr>
+          <a:xfrm>
+            <a:off x="640080" y="4846320"/>
+            <a:ext cx="10911535" cy="457200"/>
+          </a:xfrm>
+          <a:prstGeom prst="rect">
+            <a:avLst/>
+          </a:prstGeom>
+          <a:noFill/>
+          <a:ln/>
+        </p:spPr>
+        <p:txBody>
+          <a:bodyPr wrap="square" rtlCol="0" anchor="ctr"/>
+          <a:lstStyle/>
+          <a:p>
+            <a:pPr indent="0" marL="0">
+              <a:buNone/>
+            </a:pPr>
+            <a:r>
+              <a:rPr lang="en-US" sz="2200" b="1" i="1" dirty="0">
+                <a:solidFill>
+                  <a:srgbClr val="5090D0"/>
+                </a:solidFill>
+                <a:latin typeface="Calibri" pitchFamily="34" charset="0"/>
+                <a:ea typeface="Calibri" pitchFamily="34" charset="-122"/>
+                <a:cs typeface="Calibri" pitchFamily="34" charset="-120"/>
+              </a:rPr>
+              <a:t>Errare humanum est</a:t>
+            </a:r>
+            <a:endParaRPr lang="en-US" sz="2200" dirty="0"/>
+          </a:p>
+        </p:txBody>
+      </p:sp>
+      <p:sp>
+        <p:nvSpPr>
+          <p:cNvPr id="9" name="Text 7"/>
+          <p:cNvSpPr/>
+          <p:nvPr/>
+        </p:nvSpPr>
+        <p:spPr>
+          <a:xfrm>
+            <a:off x="640080" y="5303520"/>
+            <a:ext cx="10911535" cy="1097280"/>
+          </a:xfrm>
+          <a:prstGeom prst="rect">
+            <a:avLst/>
+          </a:prstGeom>
+          <a:noFill/>
+          <a:ln/>
+        </p:spPr>
+        <p:txBody>
+          <a:bodyPr wrap="square" rtlCol="0" anchor="ctr"/>
+          <a:lstStyle/>
+          <a:p>
+            <a:pPr indent="0" marL="0">
+              <a:buNone/>
+            </a:pPr>
+            <a:r>
+              <a:rPr lang="en-US" sz="1800" dirty="0">
+                <a:solidFill>
+                  <a:srgbClr val="1A1A2E"/>
+                </a:solidFill>
+                <a:latin typeface="Calibri" pitchFamily="34" charset="0"/>
+                <a:ea typeface="Calibri" pitchFamily="34" charset="-122"/>
+                <a:cs typeface="Calibri" pitchFamily="34" charset="-120"/>
+              </a:rPr>
+              <a:t>We strive for accuracy and, alongside the AI tooling, we still value human revision. If you spot an imprecision or error, please reach out — we will take action.</a:t>
+            </a:r>
+            <a:endParaRPr lang="en-US" sz="1800" dirty="0"/>
+          </a:p>
+        </p:txBody>
+      </p:sp>
+    </p:spTree>
+  </p:cSld>
+  <p:clrMapOvr>
+    <a:masterClrMapping/>
+  </p:clrMapOvr>
+</p:sld>
+</file>
+
+<file path=ppt/slides/slide6.xml><?xml version="1.0" encoding="utf-8"?>
+<p:sld xmlns:a="http://schemas.openxmlformats.org/drawingml/2006/main" xmlns:r="http://schemas.openxmlformats.org/officeDocument/2006/relationships" xmlns:p="http://schemas.openxmlformats.org/presentationml/2006/main">
+  <p:cSld name="Slide 6">
     <p:bg>
       <p:bgPr>
         <a:solidFill>

--- a/public/newsletters/2026-06/dlinrt-2026-06-update.pptx
+++ b/public/newsletters/2026-06/dlinrt-2026-06-update.pptx
@@ -2146,13 +2146,20 @@
               <a:buNone/>
             </a:pPr>
             <a:r>
-              <a:rPr lang="en-US" sz="6000" b="1" dirty="0">
+              <a:rPr lang="en-US" sz="6000" b="1" u="sng" dirty="0">
                 <a:solidFill>
                   <a:srgbClr val="FFFFFF"/>
                 </a:solidFill>
                 <a:latin typeface="Calibri" pitchFamily="34" charset="0"/>
                 <a:ea typeface="Calibri" pitchFamily="34" charset="-122"/>
                 <a:cs typeface="Calibri" pitchFamily="34" charset="-120"/>
+                <a:hlinkClick r:id="rId1" invalidUrl="" action="" tgtFrame="" tooltip="" history="1" highlightClick="0" endSnd="0">
+                  <a:extLst>
+                    <a:ext uri="{A12FA001-AC4F-418D-AE19-62706E023703}">
+                      <ahyp:hlinkClr xmlns:ahyp="http://schemas.microsoft.com/office/drawing/2018/hyperlinkcolor" val="tx"/>
+                    </a:ext>
+                  </a:extLst>
+                </a:hlinkClick>
               </a:rPr>
               <a:t>DLinRT.eu</a:t>
             </a:r>
@@ -2238,16 +2245,41 @@
           </a:p>
         </p:txBody>
       </p:sp>
-      <p:sp>
-        <p:nvSpPr>
-          <p:cNvPr id="6" name="Text 4"/>
-          <p:cNvSpPr/>
-          <p:nvPr/>
-        </p:nvSpPr>
-        <p:spPr>
-          <a:xfrm>
-            <a:off x="548640" y="6035040"/>
-            <a:ext cx="11094415" cy="365760"/>
+      <p:pic>
+        <p:nvPicPr>
+          <p:cNvPr id="6" name="Image 0" descr="public/newsletters/2026-06/_assets/dlinrt-logo.png">
+            <a:hlinkClick r:id="rId3" tooltip="dlinrt.eu"/>
+          </p:cNvPr>
+          <p:cNvPicPr>
+            <a:picLocks noChangeAspect="1"/>
+          </p:cNvPicPr>
+          <p:nvPr/>
+        </p:nvPicPr>
+        <p:blipFill>
+          <a:blip r:embed="rId2"/>
+          <a:srcRect l="0" r="0" t="0" b="0"/>
+          <a:stretch/>
+        </p:blipFill>
+        <p:spPr>
+          <a:xfrm>
+            <a:off x="274320" y="6492240"/>
+            <a:ext cx="292608" cy="292608"/>
+          </a:xfrm>
+          <a:prstGeom prst="rect">
+            <a:avLst/>
+          </a:prstGeom>
+        </p:spPr>
+      </p:pic>
+      <p:sp>
+        <p:nvSpPr>
+          <p:cNvPr id="7" name="Text 4"/>
+          <p:cNvSpPr/>
+          <p:nvPr/>
+        </p:nvSpPr>
+        <p:spPr>
+          <a:xfrm>
+            <a:off x="621792" y="6510528"/>
+            <a:ext cx="1828800" cy="274320"/>
           </a:xfrm>
           <a:prstGeom prst="rect">
             <a:avLst/>
@@ -2263,7 +2295,53 @@
               <a:buNone/>
             </a:pPr>
             <a:r>
-              <a:rPr lang="en-US" sz="1400" dirty="0">
+              <a:rPr lang="en-US" sz="1100" b="1" u="sng" dirty="0">
+                <a:solidFill>
+                  <a:srgbClr val="FFFFFF"/>
+                </a:solidFill>
+                <a:latin typeface="Calibri" pitchFamily="34" charset="0"/>
+                <a:ea typeface="Calibri" pitchFamily="34" charset="-122"/>
+                <a:cs typeface="Calibri" pitchFamily="34" charset="-120"/>
+                <a:hlinkClick r:id="rId4" invalidUrl="" action="" tgtFrame="" tooltip="" history="1" highlightClick="0" endSnd="0">
+                  <a:extLst>
+                    <a:ext uri="{A12FA001-AC4F-418D-AE19-62706E023703}">
+                      <ahyp:hlinkClr xmlns:ahyp="http://schemas.microsoft.com/office/drawing/2018/hyperlinkcolor" val="tx"/>
+                    </a:ext>
+                  </a:extLst>
+                </a:hlinkClick>
+              </a:rPr>
+              <a:t>dlinrt.eu</a:t>
+            </a:r>
+            <a:endParaRPr lang="en-US" sz="1100" dirty="0"/>
+          </a:p>
+        </p:txBody>
+      </p:sp>
+      <p:sp>
+        <p:nvSpPr>
+          <p:cNvPr id="8" name="Text 5"/>
+          <p:cNvSpPr/>
+          <p:nvPr/>
+        </p:nvSpPr>
+        <p:spPr>
+          <a:xfrm>
+            <a:off x="2743200" y="6510528"/>
+            <a:ext cx="6705295" cy="274320"/>
+          </a:xfrm>
+          <a:prstGeom prst="rect">
+            <a:avLst/>
+          </a:prstGeom>
+          <a:noFill/>
+          <a:ln/>
+        </p:spPr>
+        <p:txBody>
+          <a:bodyPr wrap="square" rtlCol="0" anchor="ctr"/>
+          <a:lstStyle/>
+          <a:p>
+            <a:pPr algn="ctr" indent="0" marL="0">
+              <a:buNone/>
+            </a:pPr>
+            <a:r>
+              <a:rPr lang="en-US" sz="1100" dirty="0">
                 <a:solidFill>
                   <a:srgbClr val="CADCFC"/>
                 </a:solidFill>
@@ -2271,12 +2349,58 @@
                 <a:ea typeface="Calibri" pitchFamily="34" charset="-122"/>
                 <a:cs typeface="Calibri" pitchFamily="34" charset="-120"/>
               </a:rPr>
-              <a:t>dlinrt.eu  ·  2026-06-16</a:t>
-            </a:r>
-            <a:endParaRPr lang="en-US" sz="1400" dirty="0"/>
-          </a:p>
-        </p:txBody>
-      </p:sp>
+              <a:t>2026-06-16  ·  </a:t>
+            </a:r>
+            <a:pPr algn="ctr" indent="0" marL="0">
+              <a:buNone/>
+            </a:pPr>
+            <a:r>
+              <a:rPr lang="en-US" sz="1100" u="sng" dirty="0">
+                <a:solidFill>
+                  <a:srgbClr val="FFFFFF"/>
+                </a:solidFill>
+                <a:latin typeface="Calibri" pitchFamily="34" charset="0"/>
+                <a:ea typeface="Calibri" pitchFamily="34" charset="-122"/>
+                <a:cs typeface="Calibri" pitchFamily="34" charset="-120"/>
+                <a:hlinkClick r:id="rId5" invalidUrl="" action="" tgtFrame="" tooltip="" history="1" highlightClick="0" endSnd="0">
+                  <a:extLst>
+                    <a:ext uri="{A12FA001-AC4F-418D-AE19-62706E023703}">
+                      <ahyp:hlinkClr xmlns:ahyp="http://schemas.microsoft.com/office/drawing/2018/hyperlinkcolor" val="tx"/>
+                    </a:ext>
+                  </a:extLst>
+                </a:hlinkClick>
+              </a:rPr>
+              <a:t>CC BY 4.0</a:t>
+            </a:r>
+            <a:endParaRPr lang="en-US" sz="1100" dirty="0"/>
+          </a:p>
+        </p:txBody>
+      </p:sp>
+      <p:pic>
+        <p:nvPicPr>
+          <p:cNvPr id="9" name="Image 1" descr="public/newsletters/2026-06/_assets/linkedin.png">
+            <a:hlinkClick r:id="rId7" tooltip="DLinRT on LinkedIn"/>
+          </p:cNvPr>
+          <p:cNvPicPr>
+            <a:picLocks noChangeAspect="1"/>
+          </p:cNvPicPr>
+          <p:nvPr/>
+        </p:nvPicPr>
+        <p:blipFill>
+          <a:blip r:embed="rId6"/>
+          <a:srcRect l="0" r="0" t="0" b="0"/>
+          <a:stretch/>
+        </p:blipFill>
+        <p:spPr>
+          <a:xfrm>
+            <a:off x="11688775" y="6492240"/>
+            <a:ext cx="292608" cy="292608"/>
+          </a:xfrm>
+          <a:prstGeom prst="rect">
+            <a:avLst/>
+          </a:prstGeom>
+        </p:spPr>
+      </p:pic>
     </p:spTree>
   </p:cSld>
   <p:clrMapOvr>
@@ -2334,13 +2458,20 @@
               <a:buNone/>
             </a:pPr>
             <a:r>
-              <a:rPr lang="en-US" sz="3000" b="1" dirty="0">
+              <a:rPr lang="en-US" sz="3000" b="1" u="sng" dirty="0">
                 <a:solidFill>
                   <a:srgbClr val="1A1A2E"/>
                 </a:solidFill>
                 <a:latin typeface="Calibri" pitchFamily="34" charset="0"/>
                 <a:ea typeface="Calibri" pitchFamily="34" charset="-122"/>
                 <a:cs typeface="Calibri" pitchFamily="34" charset="-120"/>
+                <a:hlinkClick r:id="rId1" invalidUrl="" action="" tgtFrame="" tooltip="" history="1" highlightClick="0" endSnd="0">
+                  <a:extLst>
+                    <a:ext uri="{A12FA001-AC4F-418D-AE19-62706E023703}">
+                      <ahyp:hlinkClr xmlns:ahyp="http://schemas.microsoft.com/office/drawing/2018/hyperlinkcolor" val="tx"/>
+                    </a:ext>
+                  </a:extLst>
+                </a:hlinkClick>
               </a:rPr>
               <a:t>Cumulative products in the catalogue</a:t>
             </a:r>
@@ -2395,14 +2526,170 @@
         </p:nvGraphicFramePr>
         <p:xfrm>
           <a:off x="548640" y="1463040"/>
-          <a:ext cx="11094415" cy="4937760"/>
+          <a:ext cx="11094415" cy="4572000"/>
         </p:xfrm>
         <a:graphic xmlns:a="http://schemas.openxmlformats.org/drawingml/2006/main">
           <a:graphicData uri="http://schemas.openxmlformats.org/drawingml/2006/chart">
-            <c:chart xmlns:c="http://schemas.openxmlformats.org/drawingml/2006/chart" r:id="rId1"/>
+            <c:chart xmlns:c="http://schemas.openxmlformats.org/drawingml/2006/chart" r:id="rId2"/>
           </a:graphicData>
         </a:graphic>
       </p:graphicFrame>
+      <p:pic>
+        <p:nvPicPr>
+          <p:cNvPr id="5" name="Image 0" descr="public/newsletters/2026-06/_assets/dlinrt-logo.png">
+            <a:hlinkClick r:id="rId4" tooltip="dlinrt.eu"/>
+          </p:cNvPr>
+          <p:cNvPicPr>
+            <a:picLocks noChangeAspect="1"/>
+          </p:cNvPicPr>
+          <p:nvPr/>
+        </p:nvPicPr>
+        <p:blipFill>
+          <a:blip r:embed="rId3"/>
+          <a:srcRect l="0" r="0" t="0" b="0"/>
+          <a:stretch/>
+        </p:blipFill>
+        <p:spPr>
+          <a:xfrm>
+            <a:off x="274320" y="6492240"/>
+            <a:ext cx="292608" cy="292608"/>
+          </a:xfrm>
+          <a:prstGeom prst="rect">
+            <a:avLst/>
+          </a:prstGeom>
+        </p:spPr>
+      </p:pic>
+      <p:sp>
+        <p:nvSpPr>
+          <p:cNvPr id="6" name="Text 2"/>
+          <p:cNvSpPr/>
+          <p:nvPr/>
+        </p:nvSpPr>
+        <p:spPr>
+          <a:xfrm>
+            <a:off x="621792" y="6510528"/>
+            <a:ext cx="1828800" cy="274320"/>
+          </a:xfrm>
+          <a:prstGeom prst="rect">
+            <a:avLst/>
+          </a:prstGeom>
+          <a:noFill/>
+          <a:ln/>
+        </p:spPr>
+        <p:txBody>
+          <a:bodyPr wrap="square" rtlCol="0" anchor="ctr"/>
+          <a:lstStyle/>
+          <a:p>
+            <a:pPr indent="0" marL="0">
+              <a:buNone/>
+            </a:pPr>
+            <a:r>
+              <a:rPr lang="en-US" sz="1100" b="1" u="sng" dirty="0">
+                <a:solidFill>
+                  <a:srgbClr val="5090D0"/>
+                </a:solidFill>
+                <a:latin typeface="Calibri" pitchFamily="34" charset="0"/>
+                <a:ea typeface="Calibri" pitchFamily="34" charset="-122"/>
+                <a:cs typeface="Calibri" pitchFamily="34" charset="-120"/>
+                <a:hlinkClick r:id="rId5" invalidUrl="" action="" tgtFrame="" tooltip="" history="1" highlightClick="0" endSnd="0">
+                  <a:extLst>
+                    <a:ext uri="{A12FA001-AC4F-418D-AE19-62706E023703}">
+                      <ahyp:hlinkClr xmlns:ahyp="http://schemas.microsoft.com/office/drawing/2018/hyperlinkcolor" val="tx"/>
+                    </a:ext>
+                  </a:extLst>
+                </a:hlinkClick>
+              </a:rPr>
+              <a:t>dlinrt.eu</a:t>
+            </a:r>
+            <a:endParaRPr lang="en-US" sz="1100" dirty="0"/>
+          </a:p>
+        </p:txBody>
+      </p:sp>
+      <p:sp>
+        <p:nvSpPr>
+          <p:cNvPr id="7" name="Text 3"/>
+          <p:cNvSpPr/>
+          <p:nvPr/>
+        </p:nvSpPr>
+        <p:spPr>
+          <a:xfrm>
+            <a:off x="2743200" y="6510528"/>
+            <a:ext cx="6705295" cy="274320"/>
+          </a:xfrm>
+          <a:prstGeom prst="rect">
+            <a:avLst/>
+          </a:prstGeom>
+          <a:noFill/>
+          <a:ln/>
+        </p:spPr>
+        <p:txBody>
+          <a:bodyPr wrap="square" rtlCol="0" anchor="ctr"/>
+          <a:lstStyle/>
+          <a:p>
+            <a:pPr algn="ctr" indent="0" marL="0">
+              <a:buNone/>
+            </a:pPr>
+            <a:r>
+              <a:rPr lang="en-US" sz="1100" dirty="0">
+                <a:solidFill>
+                  <a:srgbClr val="6B7280"/>
+                </a:solidFill>
+                <a:latin typeface="Calibri" pitchFamily="34" charset="0"/>
+                <a:ea typeface="Calibri" pitchFamily="34" charset="-122"/>
+                <a:cs typeface="Calibri" pitchFamily="34" charset="-120"/>
+              </a:rPr>
+              <a:t>2026-06-16  ·  </a:t>
+            </a:r>
+            <a:pPr algn="ctr" indent="0" marL="0">
+              <a:buNone/>
+            </a:pPr>
+            <a:r>
+              <a:rPr lang="en-US" sz="1100" u="sng" dirty="0">
+                <a:solidFill>
+                  <a:srgbClr val="5090D0"/>
+                </a:solidFill>
+                <a:latin typeface="Calibri" pitchFamily="34" charset="0"/>
+                <a:ea typeface="Calibri" pitchFamily="34" charset="-122"/>
+                <a:cs typeface="Calibri" pitchFamily="34" charset="-120"/>
+                <a:hlinkClick r:id="rId6" invalidUrl="" action="" tgtFrame="" tooltip="" history="1" highlightClick="0" endSnd="0">
+                  <a:extLst>
+                    <a:ext uri="{A12FA001-AC4F-418D-AE19-62706E023703}">
+                      <ahyp:hlinkClr xmlns:ahyp="http://schemas.microsoft.com/office/drawing/2018/hyperlinkcolor" val="tx"/>
+                    </a:ext>
+                  </a:extLst>
+                </a:hlinkClick>
+              </a:rPr>
+              <a:t>CC BY 4.0</a:t>
+            </a:r>
+            <a:endParaRPr lang="en-US" sz="1100" dirty="0"/>
+          </a:p>
+        </p:txBody>
+      </p:sp>
+      <p:pic>
+        <p:nvPicPr>
+          <p:cNvPr id="8" name="Image 1" descr="public/newsletters/2026-06/_assets/linkedin.png">
+            <a:hlinkClick r:id="rId8" tooltip="DLinRT on LinkedIn"/>
+          </p:cNvPr>
+          <p:cNvPicPr>
+            <a:picLocks noChangeAspect="1"/>
+          </p:cNvPicPr>
+          <p:nvPr/>
+        </p:nvPicPr>
+        <p:blipFill>
+          <a:blip r:embed="rId7"/>
+          <a:srcRect l="0" r="0" t="0" b="0"/>
+          <a:stretch/>
+        </p:blipFill>
+        <p:spPr>
+          <a:xfrm>
+            <a:off x="11688775" y="6492240"/>
+            <a:ext cx="292608" cy="292608"/>
+          </a:xfrm>
+          <a:prstGeom prst="rect">
+            <a:avLst/>
+          </a:prstGeom>
+        </p:spPr>
+      </p:pic>
     </p:spTree>
   </p:cSld>
   <p:clrMapOvr>
@@ -2460,13 +2747,20 @@
               <a:buNone/>
             </a:pPr>
             <a:r>
-              <a:rPr lang="en-US" sz="3000" b="1" dirty="0">
+              <a:rPr lang="en-US" sz="3000" b="1" u="sng" dirty="0">
                 <a:solidFill>
                   <a:srgbClr val="1A1A2E"/>
                 </a:solidFill>
                 <a:latin typeface="Calibri" pitchFamily="34" charset="0"/>
                 <a:ea typeface="Calibri" pitchFamily="34" charset="-122"/>
                 <a:cs typeface="Calibri" pitchFamily="34" charset="-120"/>
+                <a:hlinkClick r:id="rId1" invalidUrl="" action="" tgtFrame="" tooltip="" history="1" highlightClick="0" endSnd="0">
+                  <a:extLst>
+                    <a:ext uri="{A12FA001-AC4F-418D-AE19-62706E023703}">
+                      <ahyp:hlinkClr xmlns:ahyp="http://schemas.microsoft.com/office/drawing/2018/hyperlinkcolor" val="tx"/>
+                    </a:ext>
+                  </a:extLst>
+                </a:hlinkClick>
               </a:rPr>
               <a:t>Products by primary category</a:t>
             </a:r>
@@ -2507,7 +2801,7 @@
                 <a:ea typeface="Calibri" pitchFamily="34" charset="-122"/>
                 <a:cs typeface="Calibri" pitchFamily="34" charset="-120"/>
               </a:rPr>
-              <a:t>n = 88 products · primary category only</a:t>
+              <a:t>n = 88 products · primary category only · click a category to browse</a:t>
             </a:r>
             <a:endParaRPr lang="en-US" sz="1400" dirty="0"/>
           </a:p>
@@ -2521,11 +2815,11 @@
         </p:nvGraphicFramePr>
         <p:xfrm>
           <a:off x="548640" y="1371600"/>
-          <a:ext cx="6858000" cy="5120640"/>
+          <a:ext cx="6858000" cy="4754880"/>
         </p:xfrm>
         <a:graphic xmlns:a="http://schemas.openxmlformats.org/drawingml/2006/main">
           <a:graphicData uri="http://schemas.openxmlformats.org/drawingml/2006/chart">
-            <c:chart xmlns:c="http://schemas.openxmlformats.org/drawingml/2006/chart" r:id="rId1"/>
+            <c:chart xmlns:c="http://schemas.openxmlformats.org/drawingml/2006/chart" r:id="rId2"/>
           </a:graphicData>
         </a:graphic>
       </p:graphicFrame>
@@ -2538,7 +2832,7 @@
         <p:spPr>
           <a:xfrm>
             <a:off x="7863840" y="1463040"/>
-            <a:ext cx="3840480" cy="4937760"/>
+            <a:ext cx="3840480" cy="320040"/>
           </a:xfrm>
           <a:prstGeom prst="rect">
             <a:avLst/>
@@ -2551,13 +2845,31 @@
           <a:lstStyle/>
           <a:p>
             <a:pPr indent="0" marL="0">
-              <a:lnSpc>
-                <a:spcPct val="140000"/>
-              </a:lnSpc>
-              <a:buNone/>
-            </a:pPr>
-            <a:r>
-              <a:rPr lang="en-US" sz="1600" dirty="0">
+              <a:buNone/>
+            </a:pPr>
+            <a:r>
+              <a:rPr lang="en-US" sz="1500" b="1" u="sng" dirty="0">
+                <a:solidFill>
+                  <a:srgbClr val="5090D0"/>
+                </a:solidFill>
+                <a:latin typeface="Calibri" pitchFamily="34" charset="0"/>
+                <a:ea typeface="Calibri" pitchFamily="34" charset="-122"/>
+                <a:cs typeface="Calibri" pitchFamily="34" charset="-120"/>
+                <a:hlinkClick r:id="rId3" invalidUrl="" action="" tgtFrame="" tooltip="" history="1" highlightClick="0" endSnd="0">
+                  <a:extLst>
+                    <a:ext uri="{A12FA001-AC4F-418D-AE19-62706E023703}">
+                      <ahyp:hlinkClr xmlns:ahyp="http://schemas.microsoft.com/office/drawing/2018/hyperlinkcolor" val="tx"/>
+                    </a:ext>
+                  </a:extLst>
+                </a:hlinkClick>
+              </a:rPr>
+              <a:t>Auto-Contouring</a:t>
+            </a:r>
+            <a:pPr indent="0" marL="0">
+              <a:buNone/>
+            </a:pPr>
+            <a:r>
+              <a:rPr lang="en-US" sz="1500" dirty="0">
                 <a:solidFill>
                   <a:srgbClr val="1A1A2E"/>
                 </a:solidFill>
@@ -2565,19 +2877,59 @@
                 <a:ea typeface="Calibri" pitchFamily="34" charset="-122"/>
                 <a:cs typeface="Calibri" pitchFamily="34" charset="-120"/>
               </a:rPr>
-              <a:t>Auto-Contouring: 33</a:t>
-            </a:r>
-            <a:endParaRPr lang="en-US" sz="1600" dirty="0"/>
-          </a:p>
+              <a:t>: 33</a:t>
+            </a:r>
+            <a:endParaRPr lang="en-US" sz="1500" dirty="0"/>
+          </a:p>
+        </p:txBody>
+      </p:sp>
+      <p:sp>
+        <p:nvSpPr>
+          <p:cNvPr id="6" name="Text 3"/>
+          <p:cNvSpPr/>
+          <p:nvPr/>
+        </p:nvSpPr>
+        <p:spPr>
+          <a:xfrm>
+            <a:off x="7863840" y="1847088"/>
+            <a:ext cx="3840480" cy="320040"/>
+          </a:xfrm>
+          <a:prstGeom prst="rect">
+            <a:avLst/>
+          </a:prstGeom>
+          <a:noFill/>
+          <a:ln/>
+        </p:spPr>
+        <p:txBody>
+          <a:bodyPr wrap="square" rtlCol="0" anchor="ctr"/>
+          <a:lstStyle/>
           <a:p>
             <a:pPr indent="0" marL="0">
-              <a:lnSpc>
-                <a:spcPct val="140000"/>
-              </a:lnSpc>
-              <a:buNone/>
-            </a:pPr>
-            <a:r>
-              <a:rPr lang="en-US" sz="1600" dirty="0">
+              <a:buNone/>
+            </a:pPr>
+            <a:r>
+              <a:rPr lang="en-US" sz="1500" b="1" u="sng" dirty="0">
+                <a:solidFill>
+                  <a:srgbClr val="5090D0"/>
+                </a:solidFill>
+                <a:latin typeface="Calibri" pitchFamily="34" charset="0"/>
+                <a:ea typeface="Calibri" pitchFamily="34" charset="-122"/>
+                <a:cs typeface="Calibri" pitchFamily="34" charset="-120"/>
+                <a:hlinkClick r:id="rId4" invalidUrl="" action="" tgtFrame="" tooltip="" history="1" highlightClick="0" endSnd="0">
+                  <a:extLst>
+                    <a:ext uri="{A12FA001-AC4F-418D-AE19-62706E023703}">
+                      <ahyp:hlinkClr xmlns:ahyp="http://schemas.microsoft.com/office/drawing/2018/hyperlinkcolor" val="tx"/>
+                    </a:ext>
+                  </a:extLst>
+                </a:hlinkClick>
+              </a:rPr>
+              <a:t>Image Enhancement</a:t>
+            </a:r>
+            <a:pPr indent="0" marL="0">
+              <a:buNone/>
+            </a:pPr>
+            <a:r>
+              <a:rPr lang="en-US" sz="1500" dirty="0">
                 <a:solidFill>
                   <a:srgbClr val="1A1A2E"/>
                 </a:solidFill>
@@ -2585,19 +2937,59 @@
                 <a:ea typeface="Calibri" pitchFamily="34" charset="-122"/>
                 <a:cs typeface="Calibri" pitchFamily="34" charset="-120"/>
               </a:rPr>
-              <a:t>Image Enhancement: 14</a:t>
-            </a:r>
-            <a:endParaRPr lang="en-US" sz="1600" dirty="0"/>
-          </a:p>
+              <a:t>: 14</a:t>
+            </a:r>
+            <a:endParaRPr lang="en-US" sz="1500" dirty="0"/>
+          </a:p>
+        </p:txBody>
+      </p:sp>
+      <p:sp>
+        <p:nvSpPr>
+          <p:cNvPr id="7" name="Text 4"/>
+          <p:cNvSpPr/>
+          <p:nvPr/>
+        </p:nvSpPr>
+        <p:spPr>
+          <a:xfrm>
+            <a:off x="7863840" y="2231136"/>
+            <a:ext cx="3840480" cy="320040"/>
+          </a:xfrm>
+          <a:prstGeom prst="rect">
+            <a:avLst/>
+          </a:prstGeom>
+          <a:noFill/>
+          <a:ln/>
+        </p:spPr>
+        <p:txBody>
+          <a:bodyPr wrap="square" rtlCol="0" anchor="ctr"/>
+          <a:lstStyle/>
           <a:p>
             <a:pPr indent="0" marL="0">
-              <a:lnSpc>
-                <a:spcPct val="140000"/>
-              </a:lnSpc>
-              <a:buNone/>
-            </a:pPr>
-            <a:r>
-              <a:rPr lang="en-US" sz="1600" dirty="0">
+              <a:buNone/>
+            </a:pPr>
+            <a:r>
+              <a:rPr lang="en-US" sz="1500" b="1" u="sng" dirty="0">
+                <a:solidFill>
+                  <a:srgbClr val="5090D0"/>
+                </a:solidFill>
+                <a:latin typeface="Calibri" pitchFamily="34" charset="0"/>
+                <a:ea typeface="Calibri" pitchFamily="34" charset="-122"/>
+                <a:cs typeface="Calibri" pitchFamily="34" charset="-120"/>
+                <a:hlinkClick r:id="rId5" invalidUrl="" action="" tgtFrame="" tooltip="" history="1" highlightClick="0" endSnd="0">
+                  <a:extLst>
+                    <a:ext uri="{A12FA001-AC4F-418D-AE19-62706E023703}">
+                      <ahyp:hlinkClr xmlns:ahyp="http://schemas.microsoft.com/office/drawing/2018/hyperlinkcolor" val="tx"/>
+                    </a:ext>
+                  </a:extLst>
+                </a:hlinkClick>
+              </a:rPr>
+              <a:t>Reconstruction</a:t>
+            </a:r>
+            <a:pPr indent="0" marL="0">
+              <a:buNone/>
+            </a:pPr>
+            <a:r>
+              <a:rPr lang="en-US" sz="1500" dirty="0">
                 <a:solidFill>
                   <a:srgbClr val="1A1A2E"/>
                 </a:solidFill>
@@ -2605,19 +2997,59 @@
                 <a:ea typeface="Calibri" pitchFamily="34" charset="-122"/>
                 <a:cs typeface="Calibri" pitchFamily="34" charset="-120"/>
               </a:rPr>
-              <a:t>Reconstruction: 13</a:t>
-            </a:r>
-            <a:endParaRPr lang="en-US" sz="1600" dirty="0"/>
-          </a:p>
+              <a:t>: 13</a:t>
+            </a:r>
+            <a:endParaRPr lang="en-US" sz="1500" dirty="0"/>
+          </a:p>
+        </p:txBody>
+      </p:sp>
+      <p:sp>
+        <p:nvSpPr>
+          <p:cNvPr id="8" name="Text 5"/>
+          <p:cNvSpPr/>
+          <p:nvPr/>
+        </p:nvSpPr>
+        <p:spPr>
+          <a:xfrm>
+            <a:off x="7863840" y="2615184"/>
+            <a:ext cx="3840480" cy="320040"/>
+          </a:xfrm>
+          <a:prstGeom prst="rect">
+            <a:avLst/>
+          </a:prstGeom>
+          <a:noFill/>
+          <a:ln/>
+        </p:spPr>
+        <p:txBody>
+          <a:bodyPr wrap="square" rtlCol="0" anchor="ctr"/>
+          <a:lstStyle/>
           <a:p>
             <a:pPr indent="0" marL="0">
-              <a:lnSpc>
-                <a:spcPct val="140000"/>
-              </a:lnSpc>
-              <a:buNone/>
-            </a:pPr>
-            <a:r>
-              <a:rPr lang="en-US" sz="1600" dirty="0">
+              <a:buNone/>
+            </a:pPr>
+            <a:r>
+              <a:rPr lang="en-US" sz="1500" b="1" u="sng" dirty="0">
+                <a:solidFill>
+                  <a:srgbClr val="5090D0"/>
+                </a:solidFill>
+                <a:latin typeface="Calibri" pitchFamily="34" charset="0"/>
+                <a:ea typeface="Calibri" pitchFamily="34" charset="-122"/>
+                <a:cs typeface="Calibri" pitchFamily="34" charset="-120"/>
+                <a:hlinkClick r:id="rId6" invalidUrl="" action="" tgtFrame="" tooltip="" history="1" highlightClick="0" endSnd="0">
+                  <a:extLst>
+                    <a:ext uri="{A12FA001-AC4F-418D-AE19-62706E023703}">
+                      <ahyp:hlinkClr xmlns:ahyp="http://schemas.microsoft.com/office/drawing/2018/hyperlinkcolor" val="tx"/>
+                    </a:ext>
+                  </a:extLst>
+                </a:hlinkClick>
+              </a:rPr>
+              <a:t>Image Synthesis</a:t>
+            </a:r>
+            <a:pPr indent="0" marL="0">
+              <a:buNone/>
+            </a:pPr>
+            <a:r>
+              <a:rPr lang="en-US" sz="1500" dirty="0">
                 <a:solidFill>
                   <a:srgbClr val="1A1A2E"/>
                 </a:solidFill>
@@ -2625,19 +3057,59 @@
                 <a:ea typeface="Calibri" pitchFamily="34" charset="-122"/>
                 <a:cs typeface="Calibri" pitchFamily="34" charset="-120"/>
               </a:rPr>
-              <a:t>Image Synthesis: 9</a:t>
-            </a:r>
-            <a:endParaRPr lang="en-US" sz="1600" dirty="0"/>
-          </a:p>
+              <a:t>: 9</a:t>
+            </a:r>
+            <a:endParaRPr lang="en-US" sz="1500" dirty="0"/>
+          </a:p>
+        </p:txBody>
+      </p:sp>
+      <p:sp>
+        <p:nvSpPr>
+          <p:cNvPr id="9" name="Text 6"/>
+          <p:cNvSpPr/>
+          <p:nvPr/>
+        </p:nvSpPr>
+        <p:spPr>
+          <a:xfrm>
+            <a:off x="7863840" y="2999232"/>
+            <a:ext cx="3840480" cy="320040"/>
+          </a:xfrm>
+          <a:prstGeom prst="rect">
+            <a:avLst/>
+          </a:prstGeom>
+          <a:noFill/>
+          <a:ln/>
+        </p:spPr>
+        <p:txBody>
+          <a:bodyPr wrap="square" rtlCol="0" anchor="ctr"/>
+          <a:lstStyle/>
           <a:p>
             <a:pPr indent="0" marL="0">
-              <a:lnSpc>
-                <a:spcPct val="140000"/>
-              </a:lnSpc>
-              <a:buNone/>
-            </a:pPr>
-            <a:r>
-              <a:rPr lang="en-US" sz="1600" dirty="0">
+              <a:buNone/>
+            </a:pPr>
+            <a:r>
+              <a:rPr lang="en-US" sz="1500" b="1" u="sng" dirty="0">
+                <a:solidFill>
+                  <a:srgbClr val="5090D0"/>
+                </a:solidFill>
+                <a:latin typeface="Calibri" pitchFamily="34" charset="0"/>
+                <a:ea typeface="Calibri" pitchFamily="34" charset="-122"/>
+                <a:cs typeface="Calibri" pitchFamily="34" charset="-120"/>
+                <a:hlinkClick r:id="rId7" invalidUrl="" action="" tgtFrame="" tooltip="" history="1" highlightClick="0" endSnd="0">
+                  <a:extLst>
+                    <a:ext uri="{A12FA001-AC4F-418D-AE19-62706E023703}">
+                      <ahyp:hlinkClr xmlns:ahyp="http://schemas.microsoft.com/office/drawing/2018/hyperlinkcolor" val="tx"/>
+                    </a:ext>
+                  </a:extLst>
+                </a:hlinkClick>
+              </a:rPr>
+              <a:t>Treatment Planning</a:t>
+            </a:r>
+            <a:pPr indent="0" marL="0">
+              <a:buNone/>
+            </a:pPr>
+            <a:r>
+              <a:rPr lang="en-US" sz="1500" dirty="0">
                 <a:solidFill>
                   <a:srgbClr val="1A1A2E"/>
                 </a:solidFill>
@@ -2645,19 +3117,59 @@
                 <a:ea typeface="Calibri" pitchFamily="34" charset="-122"/>
                 <a:cs typeface="Calibri" pitchFamily="34" charset="-120"/>
               </a:rPr>
-              <a:t>Treatment Planning: 8</a:t>
-            </a:r>
-            <a:endParaRPr lang="en-US" sz="1600" dirty="0"/>
-          </a:p>
+              <a:t>: 8</a:t>
+            </a:r>
+            <a:endParaRPr lang="en-US" sz="1500" dirty="0"/>
+          </a:p>
+        </p:txBody>
+      </p:sp>
+      <p:sp>
+        <p:nvSpPr>
+          <p:cNvPr id="10" name="Text 7"/>
+          <p:cNvSpPr/>
+          <p:nvPr/>
+        </p:nvSpPr>
+        <p:spPr>
+          <a:xfrm>
+            <a:off x="7863840" y="3383280"/>
+            <a:ext cx="3840480" cy="320040"/>
+          </a:xfrm>
+          <a:prstGeom prst="rect">
+            <a:avLst/>
+          </a:prstGeom>
+          <a:noFill/>
+          <a:ln/>
+        </p:spPr>
+        <p:txBody>
+          <a:bodyPr wrap="square" rtlCol="0" anchor="ctr"/>
+          <a:lstStyle/>
           <a:p>
             <a:pPr indent="0" marL="0">
-              <a:lnSpc>
-                <a:spcPct val="140000"/>
-              </a:lnSpc>
-              <a:buNone/>
-            </a:pPr>
-            <a:r>
-              <a:rPr lang="en-US" sz="1600" dirty="0">
+              <a:buNone/>
+            </a:pPr>
+            <a:r>
+              <a:rPr lang="en-US" sz="1500" b="1" u="sng" dirty="0">
+                <a:solidFill>
+                  <a:srgbClr val="5090D0"/>
+                </a:solidFill>
+                <a:latin typeface="Calibri" pitchFamily="34" charset="0"/>
+                <a:ea typeface="Calibri" pitchFamily="34" charset="-122"/>
+                <a:cs typeface="Calibri" pitchFamily="34" charset="-120"/>
+                <a:hlinkClick r:id="rId8" invalidUrl="" action="" tgtFrame="" tooltip="" history="1" highlightClick="0" endSnd="0">
+                  <a:extLst>
+                    <a:ext uri="{A12FA001-AC4F-418D-AE19-62706E023703}">
+                      <ahyp:hlinkClr xmlns:ahyp="http://schemas.microsoft.com/office/drawing/2018/hyperlinkcolor" val="tx"/>
+                    </a:ext>
+                  </a:extLst>
+                </a:hlinkClick>
+              </a:rPr>
+              <a:t>Platform</a:t>
+            </a:r>
+            <a:pPr indent="0" marL="0">
+              <a:buNone/>
+            </a:pPr>
+            <a:r>
+              <a:rPr lang="en-US" sz="1500" dirty="0">
                 <a:solidFill>
                   <a:srgbClr val="1A1A2E"/>
                 </a:solidFill>
@@ -2665,19 +3177,59 @@
                 <a:ea typeface="Calibri" pitchFamily="34" charset="-122"/>
                 <a:cs typeface="Calibri" pitchFamily="34" charset="-120"/>
               </a:rPr>
-              <a:t>Platform: 6</a:t>
-            </a:r>
-            <a:endParaRPr lang="en-US" sz="1600" dirty="0"/>
-          </a:p>
+              <a:t>: 6</a:t>
+            </a:r>
+            <a:endParaRPr lang="en-US" sz="1500" dirty="0"/>
+          </a:p>
+        </p:txBody>
+      </p:sp>
+      <p:sp>
+        <p:nvSpPr>
+          <p:cNvPr id="11" name="Text 8"/>
+          <p:cNvSpPr/>
+          <p:nvPr/>
+        </p:nvSpPr>
+        <p:spPr>
+          <a:xfrm>
+            <a:off x="7863840" y="3767328"/>
+            <a:ext cx="3840480" cy="320040"/>
+          </a:xfrm>
+          <a:prstGeom prst="rect">
+            <a:avLst/>
+          </a:prstGeom>
+          <a:noFill/>
+          <a:ln/>
+        </p:spPr>
+        <p:txBody>
+          <a:bodyPr wrap="square" rtlCol="0" anchor="ctr"/>
+          <a:lstStyle/>
           <a:p>
             <a:pPr indent="0" marL="0">
-              <a:lnSpc>
-                <a:spcPct val="140000"/>
-              </a:lnSpc>
-              <a:buNone/>
-            </a:pPr>
-            <a:r>
-              <a:rPr lang="en-US" sz="1600" dirty="0">
+              <a:buNone/>
+            </a:pPr>
+            <a:r>
+              <a:rPr lang="en-US" sz="1500" b="1" u="sng" dirty="0">
+                <a:solidFill>
+                  <a:srgbClr val="5090D0"/>
+                </a:solidFill>
+                <a:latin typeface="Calibri" pitchFamily="34" charset="0"/>
+                <a:ea typeface="Calibri" pitchFamily="34" charset="-122"/>
+                <a:cs typeface="Calibri" pitchFamily="34" charset="-120"/>
+                <a:hlinkClick r:id="rId9" invalidUrl="" action="" tgtFrame="" tooltip="" history="1" highlightClick="0" endSnd="0">
+                  <a:extLst>
+                    <a:ext uri="{A12FA001-AC4F-418D-AE19-62706E023703}">
+                      <ahyp:hlinkClr xmlns:ahyp="http://schemas.microsoft.com/office/drawing/2018/hyperlinkcolor" val="tx"/>
+                    </a:ext>
+                  </a:extLst>
+                </a:hlinkClick>
+              </a:rPr>
+              <a:t>Registration</a:t>
+            </a:r>
+            <a:pPr indent="0" marL="0">
+              <a:buNone/>
+            </a:pPr>
+            <a:r>
+              <a:rPr lang="en-US" sz="1500" dirty="0">
                 <a:solidFill>
                   <a:srgbClr val="1A1A2E"/>
                 </a:solidFill>
@@ -2685,19 +3237,59 @@
                 <a:ea typeface="Calibri" pitchFamily="34" charset="-122"/>
                 <a:cs typeface="Calibri" pitchFamily="34" charset="-120"/>
               </a:rPr>
-              <a:t>Registration: 2</a:t>
-            </a:r>
-            <a:endParaRPr lang="en-US" sz="1600" dirty="0"/>
-          </a:p>
+              <a:t>: 2</a:t>
+            </a:r>
+            <a:endParaRPr lang="en-US" sz="1500" dirty="0"/>
+          </a:p>
+        </p:txBody>
+      </p:sp>
+      <p:sp>
+        <p:nvSpPr>
+          <p:cNvPr id="12" name="Text 9"/>
+          <p:cNvSpPr/>
+          <p:nvPr/>
+        </p:nvSpPr>
+        <p:spPr>
+          <a:xfrm>
+            <a:off x="7863840" y="4151376"/>
+            <a:ext cx="3840480" cy="320040"/>
+          </a:xfrm>
+          <a:prstGeom prst="rect">
+            <a:avLst/>
+          </a:prstGeom>
+          <a:noFill/>
+          <a:ln/>
+        </p:spPr>
+        <p:txBody>
+          <a:bodyPr wrap="square" rtlCol="0" anchor="ctr"/>
+          <a:lstStyle/>
           <a:p>
             <a:pPr indent="0" marL="0">
-              <a:lnSpc>
-                <a:spcPct val="140000"/>
-              </a:lnSpc>
-              <a:buNone/>
-            </a:pPr>
-            <a:r>
-              <a:rPr lang="en-US" sz="1600" dirty="0">
+              <a:buNone/>
+            </a:pPr>
+            <a:r>
+              <a:rPr lang="en-US" sz="1500" b="1" u="sng" dirty="0">
+                <a:solidFill>
+                  <a:srgbClr val="5090D0"/>
+                </a:solidFill>
+                <a:latin typeface="Calibri" pitchFamily="34" charset="0"/>
+                <a:ea typeface="Calibri" pitchFamily="34" charset="-122"/>
+                <a:cs typeface="Calibri" pitchFamily="34" charset="-120"/>
+                <a:hlinkClick r:id="rId10" invalidUrl="" action="" tgtFrame="" tooltip="" history="1" highlightClick="0" endSnd="0">
+                  <a:extLst>
+                    <a:ext uri="{A12FA001-AC4F-418D-AE19-62706E023703}">
+                      <ahyp:hlinkClr xmlns:ahyp="http://schemas.microsoft.com/office/drawing/2018/hyperlinkcolor" val="tx"/>
+                    </a:ext>
+                  </a:extLst>
+                </a:hlinkClick>
+              </a:rPr>
+              <a:t>Performance Monitor</a:t>
+            </a:r>
+            <a:pPr indent="0" marL="0">
+              <a:buNone/>
+            </a:pPr>
+            <a:r>
+              <a:rPr lang="en-US" sz="1500" dirty="0">
                 <a:solidFill>
                   <a:srgbClr val="1A1A2E"/>
                 </a:solidFill>
@@ -2705,19 +3297,59 @@
                 <a:ea typeface="Calibri" pitchFamily="34" charset="-122"/>
                 <a:cs typeface="Calibri" pitchFamily="34" charset="-120"/>
               </a:rPr>
-              <a:t>Performance Monitor: 2</a:t>
-            </a:r>
-            <a:endParaRPr lang="en-US" sz="1600" dirty="0"/>
-          </a:p>
+              <a:t>: 2</a:t>
+            </a:r>
+            <a:endParaRPr lang="en-US" sz="1500" dirty="0"/>
+          </a:p>
+        </p:txBody>
+      </p:sp>
+      <p:sp>
+        <p:nvSpPr>
+          <p:cNvPr id="13" name="Text 10"/>
+          <p:cNvSpPr/>
+          <p:nvPr/>
+        </p:nvSpPr>
+        <p:spPr>
+          <a:xfrm>
+            <a:off x="7863840" y="4535424"/>
+            <a:ext cx="3840480" cy="320040"/>
+          </a:xfrm>
+          <a:prstGeom prst="rect">
+            <a:avLst/>
+          </a:prstGeom>
+          <a:noFill/>
+          <a:ln/>
+        </p:spPr>
+        <p:txBody>
+          <a:bodyPr wrap="square" rtlCol="0" anchor="ctr"/>
+          <a:lstStyle/>
           <a:p>
             <a:pPr indent="0" marL="0">
-              <a:lnSpc>
-                <a:spcPct val="140000"/>
-              </a:lnSpc>
-              <a:buNone/>
-            </a:pPr>
-            <a:r>
-              <a:rPr lang="en-US" sz="1600" dirty="0">
+              <a:buNone/>
+            </a:pPr>
+            <a:r>
+              <a:rPr lang="en-US" sz="1500" b="1" u="sng" dirty="0">
+                <a:solidFill>
+                  <a:srgbClr val="5090D0"/>
+                </a:solidFill>
+                <a:latin typeface="Calibri" pitchFamily="34" charset="0"/>
+                <a:ea typeface="Calibri" pitchFamily="34" charset="-122"/>
+                <a:cs typeface="Calibri" pitchFamily="34" charset="-120"/>
+                <a:hlinkClick r:id="rId11" invalidUrl="" action="" tgtFrame="" tooltip="" history="1" highlightClick="0" endSnd="0">
+                  <a:extLst>
+                    <a:ext uri="{A12FA001-AC4F-418D-AE19-62706E023703}">
+                      <ahyp:hlinkClr xmlns:ahyp="http://schemas.microsoft.com/office/drawing/2018/hyperlinkcolor" val="tx"/>
+                    </a:ext>
+                  </a:extLst>
+                </a:hlinkClick>
+              </a:rPr>
+              <a:t>Tracking</a:t>
+            </a:r>
+            <a:pPr indent="0" marL="0">
+              <a:buNone/>
+            </a:pPr>
+            <a:r>
+              <a:rPr lang="en-US" sz="1500" dirty="0">
                 <a:solidFill>
                   <a:srgbClr val="1A1A2E"/>
                 </a:solidFill>
@@ -2725,12 +3357,168 @@
                 <a:ea typeface="Calibri" pitchFamily="34" charset="-122"/>
                 <a:cs typeface="Calibri" pitchFamily="34" charset="-120"/>
               </a:rPr>
-              <a:t>Tracking: 1</a:t>
-            </a:r>
-            <a:endParaRPr lang="en-US" sz="1600" dirty="0"/>
-          </a:p>
-        </p:txBody>
-      </p:sp>
+              <a:t>: 1</a:t>
+            </a:r>
+            <a:endParaRPr lang="en-US" sz="1500" dirty="0"/>
+          </a:p>
+        </p:txBody>
+      </p:sp>
+      <p:pic>
+        <p:nvPicPr>
+          <p:cNvPr id="14" name="Image 0" descr="public/newsletters/2026-06/_assets/dlinrt-logo.png">
+            <a:hlinkClick r:id="rId13" tooltip="dlinrt.eu"/>
+          </p:cNvPr>
+          <p:cNvPicPr>
+            <a:picLocks noChangeAspect="1"/>
+          </p:cNvPicPr>
+          <p:nvPr/>
+        </p:nvPicPr>
+        <p:blipFill>
+          <a:blip r:embed="rId12"/>
+          <a:srcRect l="0" r="0" t="0" b="0"/>
+          <a:stretch/>
+        </p:blipFill>
+        <p:spPr>
+          <a:xfrm>
+            <a:off x="274320" y="6492240"/>
+            <a:ext cx="292608" cy="292608"/>
+          </a:xfrm>
+          <a:prstGeom prst="rect">
+            <a:avLst/>
+          </a:prstGeom>
+        </p:spPr>
+      </p:pic>
+      <p:sp>
+        <p:nvSpPr>
+          <p:cNvPr id="15" name="Text 11"/>
+          <p:cNvSpPr/>
+          <p:nvPr/>
+        </p:nvSpPr>
+        <p:spPr>
+          <a:xfrm>
+            <a:off x="621792" y="6510528"/>
+            <a:ext cx="1828800" cy="274320"/>
+          </a:xfrm>
+          <a:prstGeom prst="rect">
+            <a:avLst/>
+          </a:prstGeom>
+          <a:noFill/>
+          <a:ln/>
+        </p:spPr>
+        <p:txBody>
+          <a:bodyPr wrap="square" rtlCol="0" anchor="ctr"/>
+          <a:lstStyle/>
+          <a:p>
+            <a:pPr indent="0" marL="0">
+              <a:buNone/>
+            </a:pPr>
+            <a:r>
+              <a:rPr lang="en-US" sz="1100" b="1" u="sng" dirty="0">
+                <a:solidFill>
+                  <a:srgbClr val="5090D0"/>
+                </a:solidFill>
+                <a:latin typeface="Calibri" pitchFamily="34" charset="0"/>
+                <a:ea typeface="Calibri" pitchFamily="34" charset="-122"/>
+                <a:cs typeface="Calibri" pitchFamily="34" charset="-120"/>
+                <a:hlinkClick r:id="rId14" invalidUrl="" action="" tgtFrame="" tooltip="" history="1" highlightClick="0" endSnd="0">
+                  <a:extLst>
+                    <a:ext uri="{A12FA001-AC4F-418D-AE19-62706E023703}">
+                      <ahyp:hlinkClr xmlns:ahyp="http://schemas.microsoft.com/office/drawing/2018/hyperlinkcolor" val="tx"/>
+                    </a:ext>
+                  </a:extLst>
+                </a:hlinkClick>
+              </a:rPr>
+              <a:t>dlinrt.eu</a:t>
+            </a:r>
+            <a:endParaRPr lang="en-US" sz="1100" dirty="0"/>
+          </a:p>
+        </p:txBody>
+      </p:sp>
+      <p:sp>
+        <p:nvSpPr>
+          <p:cNvPr id="16" name="Text 12"/>
+          <p:cNvSpPr/>
+          <p:nvPr/>
+        </p:nvSpPr>
+        <p:spPr>
+          <a:xfrm>
+            <a:off x="2743200" y="6510528"/>
+            <a:ext cx="6705295" cy="274320"/>
+          </a:xfrm>
+          <a:prstGeom prst="rect">
+            <a:avLst/>
+          </a:prstGeom>
+          <a:noFill/>
+          <a:ln/>
+        </p:spPr>
+        <p:txBody>
+          <a:bodyPr wrap="square" rtlCol="0" anchor="ctr"/>
+          <a:lstStyle/>
+          <a:p>
+            <a:pPr algn="ctr" indent="0" marL="0">
+              <a:buNone/>
+            </a:pPr>
+            <a:r>
+              <a:rPr lang="en-US" sz="1100" dirty="0">
+                <a:solidFill>
+                  <a:srgbClr val="6B7280"/>
+                </a:solidFill>
+                <a:latin typeface="Calibri" pitchFamily="34" charset="0"/>
+                <a:ea typeface="Calibri" pitchFamily="34" charset="-122"/>
+                <a:cs typeface="Calibri" pitchFamily="34" charset="-120"/>
+              </a:rPr>
+              <a:t>2026-06-16  ·  </a:t>
+            </a:r>
+            <a:pPr algn="ctr" indent="0" marL="0">
+              <a:buNone/>
+            </a:pPr>
+            <a:r>
+              <a:rPr lang="en-US" sz="1100" u="sng" dirty="0">
+                <a:solidFill>
+                  <a:srgbClr val="5090D0"/>
+                </a:solidFill>
+                <a:latin typeface="Calibri" pitchFamily="34" charset="0"/>
+                <a:ea typeface="Calibri" pitchFamily="34" charset="-122"/>
+                <a:cs typeface="Calibri" pitchFamily="34" charset="-120"/>
+                <a:hlinkClick r:id="rId15" invalidUrl="" action="" tgtFrame="" tooltip="" history="1" highlightClick="0" endSnd="0">
+                  <a:extLst>
+                    <a:ext uri="{A12FA001-AC4F-418D-AE19-62706E023703}">
+                      <ahyp:hlinkClr xmlns:ahyp="http://schemas.microsoft.com/office/drawing/2018/hyperlinkcolor" val="tx"/>
+                    </a:ext>
+                  </a:extLst>
+                </a:hlinkClick>
+              </a:rPr>
+              <a:t>CC BY 4.0</a:t>
+            </a:r>
+            <a:endParaRPr lang="en-US" sz="1100" dirty="0"/>
+          </a:p>
+        </p:txBody>
+      </p:sp>
+      <p:pic>
+        <p:nvPicPr>
+          <p:cNvPr id="17" name="Image 1" descr="public/newsletters/2026-06/_assets/linkedin.png">
+            <a:hlinkClick r:id="rId17" tooltip="DLinRT on LinkedIn"/>
+          </p:cNvPr>
+          <p:cNvPicPr>
+            <a:picLocks noChangeAspect="1"/>
+          </p:cNvPicPr>
+          <p:nvPr/>
+        </p:nvPicPr>
+        <p:blipFill>
+          <a:blip r:embed="rId16"/>
+          <a:srcRect l="0" r="0" t="0" b="0"/>
+          <a:stretch/>
+        </p:blipFill>
+        <p:spPr>
+          <a:xfrm>
+            <a:off x="11688775" y="6492240"/>
+            <a:ext cx="292608" cy="292608"/>
+          </a:xfrm>
+          <a:prstGeom prst="rect">
+            <a:avLst/>
+          </a:prstGeom>
+        </p:spPr>
+      </p:pic>
     </p:spTree>
   </p:cSld>
   <p:clrMapOvr>
@@ -2788,13 +3576,20 @@
               <a:buNone/>
             </a:pPr>
             <a:r>
-              <a:rPr lang="en-US" sz="2600" b="1" dirty="0">
+              <a:rPr lang="en-US" sz="2600" b="1" u="sng" dirty="0">
                 <a:solidFill>
                   <a:srgbClr val="1A1A2E"/>
                 </a:solidFill>
                 <a:latin typeface="Calibri" pitchFamily="34" charset="0"/>
                 <a:ea typeface="Calibri" pitchFamily="34" charset="-122"/>
                 <a:cs typeface="Calibri" pitchFamily="34" charset="-120"/>
+                <a:hlinkClick r:id="rId1" invalidUrl="" action="" tgtFrame="" tooltip="" history="1" highlightClick="0" endSnd="0">
+                  <a:extLst>
+                    <a:ext uri="{A12FA001-AC4F-418D-AE19-62706E023703}">
+                      <ahyp:hlinkClr xmlns:ahyp="http://schemas.microsoft.com/office/drawing/2018/hyperlinkcolor" val="tx"/>
+                    </a:ext>
+                  </a:extLst>
+                </a:hlinkClick>
               </a:rPr>
               <a:t>Companies in the DLinRT.eu catalogue</a:t>
             </a:r>
@@ -2835,7 +3630,7 @@
                 <a:ea typeface="Calibri" pitchFamily="34" charset="-122"/>
                 <a:cs typeface="Calibri" pitchFamily="34" charset="-120"/>
               </a:rPr>
-              <a:t>42 active companies</a:t>
+              <a:t>42 active companies · click any logo to open its page</a:t>
             </a:r>
             <a:endParaRPr lang="en-US" sz="1300" dirty="0"/>
           </a:p>
@@ -2843,69 +3638,9 @@
       </p:sp>
       <p:pic>
         <p:nvPicPr>
-          <p:cNvPr id="4" name="Image 0" descr="public/logos/NeuralRadLogo.png">    </p:cNvPr>
-          <p:cNvPicPr>
-            <a:picLocks noChangeAspect="1"/>
-          </p:cNvPicPr>
-          <p:nvPr/>
-        </p:nvPicPr>
-        <p:blipFill>
-          <a:blip r:embed="rId1"/>
-          <a:srcRect l="0" r="0" t="0" b="0"/>
-          <a:stretch/>
-        </p:blipFill>
-        <p:spPr>
-          <a:xfrm>
-            <a:off x="475488" y="1298448"/>
-            <a:ext cx="1417712" cy="405384"/>
-          </a:xfrm>
-          <a:prstGeom prst="rect">
-            <a:avLst/>
-          </a:prstGeom>
-        </p:spPr>
-      </p:pic>
-      <p:sp>
-        <p:nvSpPr>
-          <p:cNvPr id="5" name="Text 2"/>
-          <p:cNvSpPr/>
-          <p:nvPr/>
-        </p:nvSpPr>
-        <p:spPr>
-          <a:xfrm>
-            <a:off x="475488" y="1703832"/>
-            <a:ext cx="1417712" cy="256032"/>
-          </a:xfrm>
-          <a:prstGeom prst="rect">
-            <a:avLst/>
-          </a:prstGeom>
-          <a:noFill/>
-          <a:ln/>
-        </p:spPr>
-        <p:txBody>
-          <a:bodyPr wrap="square" rtlCol="0" anchor="ctr"/>
-          <a:lstStyle/>
-          <a:p>
-            <a:pPr algn="ctr" indent="0" marL="0">
-              <a:buNone/>
-            </a:pPr>
-            <a:r>
-              <a:rPr lang="en-US" sz="900" dirty="0">
-                <a:solidFill>
-                  <a:srgbClr val="1A1A2E"/>
-                </a:solidFill>
-                <a:latin typeface="Calibri" pitchFamily="34" charset="0"/>
-                <a:ea typeface="Calibri" pitchFamily="34" charset="-122"/>
-                <a:cs typeface="Calibri" pitchFamily="34" charset="-120"/>
-              </a:rPr>
-              <a:t>NeuralRad</a:t>
-            </a:r>
-            <a:endParaRPr lang="en-US" sz="900" dirty="0"/>
-          </a:p>
-        </p:txBody>
-      </p:sp>
-      <p:pic>
-        <p:nvPicPr>
-          <p:cNvPr id="6" name="Image 1" descr="public/logos/ai-medical.png">    </p:cNvPr>
+          <p:cNvPr id="4" name="Image 0" descr="public/logos/NeuralRadLogo.png">
+            <a:hlinkClick r:id="rId3" tooltip="NeuralRad"/>
+          </p:cNvPr>
           <p:cNvPicPr>
             <a:picLocks noChangeAspect="1"/>
           </p:cNvPicPr>
@@ -2918,8 +3653,8 @@
         </p:blipFill>
         <p:spPr>
           <a:xfrm>
-            <a:off x="2112656" y="1298448"/>
-            <a:ext cx="1417712" cy="405384"/>
+            <a:off x="475488" y="1298448"/>
+            <a:ext cx="1417712" cy="344424"/>
           </a:xfrm>
           <a:prstGeom prst="rect">
             <a:avLst/>
@@ -2928,13 +3663,13 @@
       </p:pic>
       <p:sp>
         <p:nvSpPr>
-          <p:cNvPr id="7" name="Text 3"/>
-          <p:cNvSpPr/>
-          <p:nvPr/>
-        </p:nvSpPr>
-        <p:spPr>
-          <a:xfrm>
-            <a:off x="2112656" y="1703832"/>
+          <p:cNvPr id="5" name="Text 2"/>
+          <p:cNvSpPr/>
+          <p:nvPr/>
+        </p:nvSpPr>
+        <p:spPr>
+          <a:xfrm>
+            <a:off x="475488" y="1642872"/>
             <a:ext cx="1417712" cy="256032"/>
           </a:xfrm>
           <a:prstGeom prst="rect">
@@ -2951,15 +3686,22 @@
               <a:buNone/>
             </a:pPr>
             <a:r>
-              <a:rPr lang="en-US" sz="900" dirty="0">
+              <a:rPr lang="en-US" sz="900" u="sng" dirty="0">
                 <a:solidFill>
                   <a:srgbClr val="1A1A2E"/>
                 </a:solidFill>
                 <a:latin typeface="Calibri" pitchFamily="34" charset="0"/>
                 <a:ea typeface="Calibri" pitchFamily="34" charset="-122"/>
                 <a:cs typeface="Calibri" pitchFamily="34" charset="-120"/>
-              </a:rPr>
-              <a:t>AI Medical</a:t>
+                <a:hlinkClick r:id="rId4" invalidUrl="" action="" tgtFrame="" tooltip="" history="1" highlightClick="0" endSnd="0">
+                  <a:extLst>
+                    <a:ext uri="{A12FA001-AC4F-418D-AE19-62706E023703}">
+                      <ahyp:hlinkClr xmlns:ahyp="http://schemas.microsoft.com/office/drawing/2018/hyperlinkcolor" val="tx"/>
+                    </a:ext>
+                  </a:extLst>
+                </a:hlinkClick>
+              </a:rPr>
+              <a:t>NeuralRad</a:t>
             </a:r>
             <a:endParaRPr lang="en-US" sz="900" dirty="0"/>
           </a:p>
@@ -2967,131 +3709,9 @@
       </p:sp>
       <p:pic>
         <p:nvPicPr>
-          <p:cNvPr id="8" name="Image 2" descr="public/logos/carina.jpg">    </p:cNvPr>
-          <p:cNvPicPr>
-            <a:picLocks noChangeAspect="1"/>
-          </p:cNvPicPr>
-          <p:nvPr/>
-        </p:nvPicPr>
-        <p:blipFill>
-          <a:blip r:embed="rId3"/>
-          <a:srcRect l="0" r="0" t="0" b="0"/>
-          <a:stretch/>
-        </p:blipFill>
-        <p:spPr>
-          <a:xfrm>
-            <a:off x="3749824" y="1298448"/>
-            <a:ext cx="1417712" cy="405384"/>
-          </a:xfrm>
-          <a:prstGeom prst="rect">
-            <a:avLst/>
-          </a:prstGeom>
-        </p:spPr>
-      </p:pic>
-      <p:sp>
-        <p:nvSpPr>
-          <p:cNvPr id="9" name="Text 4"/>
-          <p:cNvSpPr/>
-          <p:nvPr/>
-        </p:nvSpPr>
-        <p:spPr>
-          <a:xfrm>
-            <a:off x="3749824" y="1703832"/>
-            <a:ext cx="1417712" cy="256032"/>
-          </a:xfrm>
-          <a:prstGeom prst="rect">
-            <a:avLst/>
-          </a:prstGeom>
-          <a:noFill/>
-          <a:ln/>
-        </p:spPr>
-        <p:txBody>
-          <a:bodyPr wrap="square" rtlCol="0" anchor="ctr"/>
-          <a:lstStyle/>
-          <a:p>
-            <a:pPr algn="ctr" indent="0" marL="0">
-              <a:buNone/>
-            </a:pPr>
-            <a:r>
-              <a:rPr lang="en-US" sz="900" dirty="0">
-                <a:solidFill>
-                  <a:srgbClr val="1A1A2E"/>
-                </a:solidFill>
-                <a:latin typeface="Calibri" pitchFamily="34" charset="0"/>
-                <a:ea typeface="Calibri" pitchFamily="34" charset="-122"/>
-                <a:cs typeface="Calibri" pitchFamily="34" charset="-120"/>
-              </a:rPr>
-              <a:t>Carina AI</a:t>
-            </a:r>
-            <a:endParaRPr lang="en-US" sz="900" dirty="0"/>
-          </a:p>
-        </p:txBody>
-      </p:sp>
-      <p:pic>
-        <p:nvPicPr>
-          <p:cNvPr id="10" name="Image 3" descr="public/logos/coreline.jpg">    </p:cNvPr>
-          <p:cNvPicPr>
-            <a:picLocks noChangeAspect="1"/>
-          </p:cNvPicPr>
-          <p:nvPr/>
-        </p:nvPicPr>
-        <p:blipFill>
-          <a:blip r:embed="rId4"/>
-          <a:srcRect l="0" r="0" t="0" b="0"/>
-          <a:stretch/>
-        </p:blipFill>
-        <p:spPr>
-          <a:xfrm>
-            <a:off x="5386992" y="1298448"/>
-            <a:ext cx="1417712" cy="405384"/>
-          </a:xfrm>
-          <a:prstGeom prst="rect">
-            <a:avLst/>
-          </a:prstGeom>
-        </p:spPr>
-      </p:pic>
-      <p:sp>
-        <p:nvSpPr>
-          <p:cNvPr id="11" name="Text 5"/>
-          <p:cNvSpPr/>
-          <p:nvPr/>
-        </p:nvSpPr>
-        <p:spPr>
-          <a:xfrm>
-            <a:off x="5386992" y="1703832"/>
-            <a:ext cx="1417712" cy="256032"/>
-          </a:xfrm>
-          <a:prstGeom prst="rect">
-            <a:avLst/>
-          </a:prstGeom>
-          <a:noFill/>
-          <a:ln/>
-        </p:spPr>
-        <p:txBody>
-          <a:bodyPr wrap="square" rtlCol="0" anchor="ctr"/>
-          <a:lstStyle/>
-          <a:p>
-            <a:pPr algn="ctr" indent="0" marL="0">
-              <a:buNone/>
-            </a:pPr>
-            <a:r>
-              <a:rPr lang="en-US" sz="900" dirty="0">
-                <a:solidFill>
-                  <a:srgbClr val="1A1A2E"/>
-                </a:solidFill>
-                <a:latin typeface="Calibri" pitchFamily="34" charset="0"/>
-                <a:ea typeface="Calibri" pitchFamily="34" charset="-122"/>
-                <a:cs typeface="Calibri" pitchFamily="34" charset="-120"/>
-              </a:rPr>
-              <a:t>Coreline Soft Co</a:t>
-            </a:r>
-            <a:endParaRPr lang="en-US" sz="900" dirty="0"/>
-          </a:p>
-        </p:txBody>
-      </p:sp>
-      <p:pic>
-        <p:nvPicPr>
-          <p:cNvPr id="12" name="Image 4" descr="public/logos/ever-fortune.png">    </p:cNvPr>
+          <p:cNvPr id="6" name="Image 1" descr="public/logos/ai-medical.png">
+            <a:hlinkClick r:id="rId6" tooltip="AI Medical"/>
+          </p:cNvPr>
           <p:cNvPicPr>
             <a:picLocks noChangeAspect="1"/>
           </p:cNvPicPr>
@@ -3104,8 +3724,8 @@
         </p:blipFill>
         <p:spPr>
           <a:xfrm>
-            <a:off x="7024160" y="1298448"/>
-            <a:ext cx="1417712" cy="405384"/>
+            <a:off x="2112656" y="1298448"/>
+            <a:ext cx="1417712" cy="344424"/>
           </a:xfrm>
           <a:prstGeom prst="rect">
             <a:avLst/>
@@ -3114,13 +3734,13 @@
       </p:pic>
       <p:sp>
         <p:nvSpPr>
-          <p:cNvPr id="13" name="Text 6"/>
-          <p:cNvSpPr/>
-          <p:nvPr/>
-        </p:nvSpPr>
-        <p:spPr>
-          <a:xfrm>
-            <a:off x="7024160" y="1703832"/>
+          <p:cNvPr id="7" name="Text 3"/>
+          <p:cNvSpPr/>
+          <p:nvPr/>
+        </p:nvSpPr>
+        <p:spPr>
+          <a:xfrm>
+            <a:off x="2112656" y="1642872"/>
             <a:ext cx="1417712" cy="256032"/>
           </a:xfrm>
           <a:prstGeom prst="rect">
@@ -3137,15 +3757,22 @@
               <a:buNone/>
             </a:pPr>
             <a:r>
-              <a:rPr lang="en-US" sz="900" dirty="0">
+              <a:rPr lang="en-US" sz="900" u="sng" dirty="0">
                 <a:solidFill>
                   <a:srgbClr val="1A1A2E"/>
                 </a:solidFill>
                 <a:latin typeface="Calibri" pitchFamily="34" charset="0"/>
                 <a:ea typeface="Calibri" pitchFamily="34" charset="-122"/>
                 <a:cs typeface="Calibri" pitchFamily="34" charset="-120"/>
-              </a:rPr>
-              <a:t>Ever Fortune AI</a:t>
+                <a:hlinkClick r:id="rId7" invalidUrl="" action="" tgtFrame="" tooltip="" history="1" highlightClick="0" endSnd="0">
+                  <a:extLst>
+                    <a:ext uri="{A12FA001-AC4F-418D-AE19-62706E023703}">
+                      <ahyp:hlinkClr xmlns:ahyp="http://schemas.microsoft.com/office/drawing/2018/hyperlinkcolor" val="tx"/>
+                    </a:ext>
+                  </a:extLst>
+                </a:hlinkClick>
+              </a:rPr>
+              <a:t>AI Medical</a:t>
             </a:r>
             <a:endParaRPr lang="en-US" sz="900" dirty="0"/>
           </a:p>
@@ -3153,131 +3780,9 @@
       </p:sp>
       <p:pic>
         <p:nvPicPr>
-          <p:cNvPr id="14" name="Image 5" descr="public/logos/huraimaging.png">    </p:cNvPr>
-          <p:cNvPicPr>
-            <a:picLocks noChangeAspect="1"/>
-          </p:cNvPicPr>
-          <p:nvPr/>
-        </p:nvPicPr>
-        <p:blipFill>
-          <a:blip r:embed="rId6"/>
-          <a:srcRect l="0" r="0" t="0" b="0"/>
-          <a:stretch/>
-        </p:blipFill>
-        <p:spPr>
-          <a:xfrm>
-            <a:off x="8661327" y="1298448"/>
-            <a:ext cx="1417712" cy="405384"/>
-          </a:xfrm>
-          <a:prstGeom prst="rect">
-            <a:avLst/>
-          </a:prstGeom>
-        </p:spPr>
-      </p:pic>
-      <p:sp>
-        <p:nvSpPr>
-          <p:cNvPr id="15" name="Text 7"/>
-          <p:cNvSpPr/>
-          <p:nvPr/>
-        </p:nvSpPr>
-        <p:spPr>
-          <a:xfrm>
-            <a:off x="8661327" y="1703832"/>
-            <a:ext cx="1417712" cy="256032"/>
-          </a:xfrm>
-          <a:prstGeom prst="rect">
-            <a:avLst/>
-          </a:prstGeom>
-          <a:noFill/>
-          <a:ln/>
-        </p:spPr>
-        <p:txBody>
-          <a:bodyPr wrap="square" rtlCol="0" anchor="ctr"/>
-          <a:lstStyle/>
-          <a:p>
-            <a:pPr algn="ctr" indent="0" marL="0">
-              <a:buNone/>
-            </a:pPr>
-            <a:r>
-              <a:rPr lang="en-US" sz="900" dirty="0">
-                <a:solidFill>
-                  <a:srgbClr val="1A1A2E"/>
-                </a:solidFill>
-                <a:latin typeface="Calibri" pitchFamily="34" charset="0"/>
-                <a:ea typeface="Calibri" pitchFamily="34" charset="-122"/>
-                <a:cs typeface="Calibri" pitchFamily="34" charset="-120"/>
-              </a:rPr>
-              <a:t>Hura Imaging</a:t>
-            </a:r>
-            <a:endParaRPr lang="en-US" sz="900" dirty="0"/>
-          </a:p>
-        </p:txBody>
-      </p:sp>
-      <p:pic>
-        <p:nvPicPr>
-          <p:cNvPr id="16" name="Image 6" descr="public/logos/Limbus-ai.png">    </p:cNvPr>
-          <p:cNvPicPr>
-            <a:picLocks noChangeAspect="1"/>
-          </p:cNvPicPr>
-          <p:nvPr/>
-        </p:nvPicPr>
-        <p:blipFill>
-          <a:blip r:embed="rId7"/>
-          <a:srcRect l="0" r="0" t="0" b="0"/>
-          <a:stretch/>
-        </p:blipFill>
-        <p:spPr>
-          <a:xfrm>
-            <a:off x="10298495" y="1298448"/>
-            <a:ext cx="1417712" cy="405384"/>
-          </a:xfrm>
-          <a:prstGeom prst="rect">
-            <a:avLst/>
-          </a:prstGeom>
-        </p:spPr>
-      </p:pic>
-      <p:sp>
-        <p:nvSpPr>
-          <p:cNvPr id="17" name="Text 8"/>
-          <p:cNvSpPr/>
-          <p:nvPr/>
-        </p:nvSpPr>
-        <p:spPr>
-          <a:xfrm>
-            <a:off x="10298495" y="1703832"/>
-            <a:ext cx="1417712" cy="256032"/>
-          </a:xfrm>
-          <a:prstGeom prst="rect">
-            <a:avLst/>
-          </a:prstGeom>
-          <a:noFill/>
-          <a:ln/>
-        </p:spPr>
-        <p:txBody>
-          <a:bodyPr wrap="square" rtlCol="0" anchor="ctr"/>
-          <a:lstStyle/>
-          <a:p>
-            <a:pPr algn="ctr" indent="0" marL="0">
-              <a:buNone/>
-            </a:pPr>
-            <a:r>
-              <a:rPr lang="en-US" sz="900" dirty="0">
-                <a:solidFill>
-                  <a:srgbClr val="1A1A2E"/>
-                </a:solidFill>
-                <a:latin typeface="Calibri" pitchFamily="34" charset="0"/>
-                <a:ea typeface="Calibri" pitchFamily="34" charset="-122"/>
-                <a:cs typeface="Calibri" pitchFamily="34" charset="-120"/>
-              </a:rPr>
-              <a:t>Limbus AI</a:t>
-            </a:r>
-            <a:endParaRPr lang="en-US" sz="900" dirty="0"/>
-          </a:p>
-        </p:txBody>
-      </p:sp>
-      <p:pic>
-        <p:nvPicPr>
-          <p:cNvPr id="18" name="Image 7" descr="public/logos/manteia.png">    </p:cNvPr>
+          <p:cNvPr id="8" name="Image 2" descr="public/logos/carina.jpg">
+            <a:hlinkClick r:id="rId9" tooltip="Carina AI"/>
+          </p:cNvPr>
           <p:cNvPicPr>
             <a:picLocks noChangeAspect="1"/>
           </p:cNvPicPr>
@@ -3290,8 +3795,8 @@
         </p:blipFill>
         <p:spPr>
           <a:xfrm>
-            <a:off x="475488" y="2197608"/>
-            <a:ext cx="1417712" cy="405384"/>
+            <a:off x="3749824" y="1298448"/>
+            <a:ext cx="1417712" cy="344424"/>
           </a:xfrm>
           <a:prstGeom prst="rect">
             <a:avLst/>
@@ -3300,13 +3805,13 @@
       </p:pic>
       <p:sp>
         <p:nvSpPr>
-          <p:cNvPr id="19" name="Text 9"/>
-          <p:cNvSpPr/>
-          <p:nvPr/>
-        </p:nvSpPr>
-        <p:spPr>
-          <a:xfrm>
-            <a:off x="475488" y="2602992"/>
+          <p:cNvPr id="9" name="Text 4"/>
+          <p:cNvSpPr/>
+          <p:nvPr/>
+        </p:nvSpPr>
+        <p:spPr>
+          <a:xfrm>
+            <a:off x="3749824" y="1642872"/>
             <a:ext cx="1417712" cy="256032"/>
           </a:xfrm>
           <a:prstGeom prst="rect">
@@ -3323,15 +3828,22 @@
               <a:buNone/>
             </a:pPr>
             <a:r>
-              <a:rPr lang="en-US" sz="900" dirty="0">
+              <a:rPr lang="en-US" sz="900" u="sng" dirty="0">
                 <a:solidFill>
                   <a:srgbClr val="1A1A2E"/>
                 </a:solidFill>
                 <a:latin typeface="Calibri" pitchFamily="34" charset="0"/>
                 <a:ea typeface="Calibri" pitchFamily="34" charset="-122"/>
                 <a:cs typeface="Calibri" pitchFamily="34" charset="-120"/>
-              </a:rPr>
-              <a:t>Manteia</a:t>
+                <a:hlinkClick r:id="rId10" invalidUrl="" action="" tgtFrame="" tooltip="" history="1" highlightClick="0" endSnd="0">
+                  <a:extLst>
+                    <a:ext uri="{A12FA001-AC4F-418D-AE19-62706E023703}">
+                      <ahyp:hlinkClr xmlns:ahyp="http://schemas.microsoft.com/office/drawing/2018/hyperlinkcolor" val="tx"/>
+                    </a:ext>
+                  </a:extLst>
+                </a:hlinkClick>
+              </a:rPr>
+              <a:t>Carina AI</a:t>
             </a:r>
             <a:endParaRPr lang="en-US" sz="900" dirty="0"/>
           </a:p>
@@ -3339,131 +3851,9 @@
       </p:sp>
       <p:pic>
         <p:nvPicPr>
-          <p:cNvPr id="20" name="Image 8" descr="public/newsletters/2026-06/_logo-cache/mimsoftware.png">    </p:cNvPr>
-          <p:cNvPicPr>
-            <a:picLocks noChangeAspect="1"/>
-          </p:cNvPicPr>
-          <p:nvPr/>
-        </p:nvPicPr>
-        <p:blipFill>
-          <a:blip r:embed="rId9"/>
-          <a:srcRect l="0" r="0" t="0" b="0"/>
-          <a:stretch/>
-        </p:blipFill>
-        <p:spPr>
-          <a:xfrm>
-            <a:off x="2112656" y="2197608"/>
-            <a:ext cx="1417712" cy="405384"/>
-          </a:xfrm>
-          <a:prstGeom prst="rect">
-            <a:avLst/>
-          </a:prstGeom>
-        </p:spPr>
-      </p:pic>
-      <p:sp>
-        <p:nvSpPr>
-          <p:cNvPr id="21" name="Text 10"/>
-          <p:cNvSpPr/>
-          <p:nvPr/>
-        </p:nvSpPr>
-        <p:spPr>
-          <a:xfrm>
-            <a:off x="2112656" y="2602992"/>
-            <a:ext cx="1417712" cy="256032"/>
-          </a:xfrm>
-          <a:prstGeom prst="rect">
-            <a:avLst/>
-          </a:prstGeom>
-          <a:noFill/>
-          <a:ln/>
-        </p:spPr>
-        <p:txBody>
-          <a:bodyPr wrap="square" rtlCol="0" anchor="ctr"/>
-          <a:lstStyle/>
-          <a:p>
-            <a:pPr algn="ctr" indent="0" marL="0">
-              <a:buNone/>
-            </a:pPr>
-            <a:r>
-              <a:rPr lang="en-US" sz="900" dirty="0">
-                <a:solidFill>
-                  <a:srgbClr val="1A1A2E"/>
-                </a:solidFill>
-                <a:latin typeface="Calibri" pitchFamily="34" charset="0"/>
-                <a:ea typeface="Calibri" pitchFamily="34" charset="-122"/>
-                <a:cs typeface="Calibri" pitchFamily="34" charset="-120"/>
-              </a:rPr>
-              <a:t>MIM Software</a:t>
-            </a:r>
-            <a:endParaRPr lang="en-US" sz="900" dirty="0"/>
-          </a:p>
-        </p:txBody>
-      </p:sp>
-      <p:pic>
-        <p:nvPicPr>
-          <p:cNvPr id="22" name="Image 9" descr="public/logos/mirada-medical.png">    </p:cNvPr>
-          <p:cNvPicPr>
-            <a:picLocks noChangeAspect="1"/>
-          </p:cNvPicPr>
-          <p:nvPr/>
-        </p:nvPicPr>
-        <p:blipFill>
-          <a:blip r:embed="rId10"/>
-          <a:srcRect l="0" r="0" t="0" b="0"/>
-          <a:stretch/>
-        </p:blipFill>
-        <p:spPr>
-          <a:xfrm>
-            <a:off x="3749824" y="2197608"/>
-            <a:ext cx="1417712" cy="405384"/>
-          </a:xfrm>
-          <a:prstGeom prst="rect">
-            <a:avLst/>
-          </a:prstGeom>
-        </p:spPr>
-      </p:pic>
-      <p:sp>
-        <p:nvSpPr>
-          <p:cNvPr id="23" name="Text 11"/>
-          <p:cNvSpPr/>
-          <p:nvPr/>
-        </p:nvSpPr>
-        <p:spPr>
-          <a:xfrm>
-            <a:off x="3749824" y="2602992"/>
-            <a:ext cx="1417712" cy="256032"/>
-          </a:xfrm>
-          <a:prstGeom prst="rect">
-            <a:avLst/>
-          </a:prstGeom>
-          <a:noFill/>
-          <a:ln/>
-        </p:spPr>
-        <p:txBody>
-          <a:bodyPr wrap="square" rtlCol="0" anchor="ctr"/>
-          <a:lstStyle/>
-          <a:p>
-            <a:pPr algn="ctr" indent="0" marL="0">
-              <a:buNone/>
-            </a:pPr>
-            <a:r>
-              <a:rPr lang="en-US" sz="900" dirty="0">
-                <a:solidFill>
-                  <a:srgbClr val="1A1A2E"/>
-                </a:solidFill>
-                <a:latin typeface="Calibri" pitchFamily="34" charset="0"/>
-                <a:ea typeface="Calibri" pitchFamily="34" charset="-122"/>
-                <a:cs typeface="Calibri" pitchFamily="34" charset="-120"/>
-              </a:rPr>
-              <a:t>Mirada Medical</a:t>
-            </a:r>
-            <a:endParaRPr lang="en-US" sz="900" dirty="0"/>
-          </a:p>
-        </p:txBody>
-      </p:sp>
-      <p:pic>
-        <p:nvPicPr>
-          <p:cNvPr id="24" name="Image 10" descr="public/logos/mvision-ai.png">    </p:cNvPr>
+          <p:cNvPr id="10" name="Image 3" descr="public/logos/coreline.jpg">
+            <a:hlinkClick r:id="rId12" tooltip="Coreline Soft Co"/>
+          </p:cNvPr>
           <p:cNvPicPr>
             <a:picLocks noChangeAspect="1"/>
           </p:cNvPicPr>
@@ -3476,8 +3866,8 @@
         </p:blipFill>
         <p:spPr>
           <a:xfrm>
-            <a:off x="5386992" y="2197608"/>
-            <a:ext cx="1417712" cy="405384"/>
+            <a:off x="5386992" y="1298448"/>
+            <a:ext cx="1417712" cy="344424"/>
           </a:xfrm>
           <a:prstGeom prst="rect">
             <a:avLst/>
@@ -3486,13 +3876,13 @@
       </p:pic>
       <p:sp>
         <p:nvSpPr>
-          <p:cNvPr id="25" name="Text 12"/>
-          <p:cNvSpPr/>
-          <p:nvPr/>
-        </p:nvSpPr>
-        <p:spPr>
-          <a:xfrm>
-            <a:off x="5386992" y="2602992"/>
+          <p:cNvPr id="11" name="Text 5"/>
+          <p:cNvSpPr/>
+          <p:nvPr/>
+        </p:nvSpPr>
+        <p:spPr>
+          <a:xfrm>
+            <a:off x="5386992" y="1642872"/>
             <a:ext cx="1417712" cy="256032"/>
           </a:xfrm>
           <a:prstGeom prst="rect">
@@ -3509,15 +3899,22 @@
               <a:buNone/>
             </a:pPr>
             <a:r>
-              <a:rPr lang="en-US" sz="900" dirty="0">
+              <a:rPr lang="en-US" sz="900" u="sng" dirty="0">
                 <a:solidFill>
                   <a:srgbClr val="1A1A2E"/>
                 </a:solidFill>
                 <a:latin typeface="Calibri" pitchFamily="34" charset="0"/>
                 <a:ea typeface="Calibri" pitchFamily="34" charset="-122"/>
                 <a:cs typeface="Calibri" pitchFamily="34" charset="-120"/>
-              </a:rPr>
-              <a:t>MVision AI</a:t>
+                <a:hlinkClick r:id="rId13" invalidUrl="" action="" tgtFrame="" tooltip="" history="1" highlightClick="0" endSnd="0">
+                  <a:extLst>
+                    <a:ext uri="{A12FA001-AC4F-418D-AE19-62706E023703}">
+                      <ahyp:hlinkClr xmlns:ahyp="http://schemas.microsoft.com/office/drawing/2018/hyperlinkcolor" val="tx"/>
+                    </a:ext>
+                  </a:extLst>
+                </a:hlinkClick>
+              </a:rPr>
+              <a:t>Coreline Soft Co</a:t>
             </a:r>
             <a:endParaRPr lang="en-US" sz="900" dirty="0"/>
           </a:p>
@@ -3525,131 +3922,9 @@
       </p:sp>
       <p:pic>
         <p:nvPicPr>
-          <p:cNvPr id="26" name="Image 11" descr="public/newsletters/2026-06/_logo-cache/radformation.png">    </p:cNvPr>
-          <p:cNvPicPr>
-            <a:picLocks noChangeAspect="1"/>
-          </p:cNvPicPr>
-          <p:nvPr/>
-        </p:nvPicPr>
-        <p:blipFill>
-          <a:blip r:embed="rId12"/>
-          <a:srcRect l="0" r="0" t="0" b="0"/>
-          <a:stretch/>
-        </p:blipFill>
-        <p:spPr>
-          <a:xfrm>
-            <a:off x="7024160" y="2197608"/>
-            <a:ext cx="1417712" cy="405384"/>
-          </a:xfrm>
-          <a:prstGeom prst="rect">
-            <a:avLst/>
-          </a:prstGeom>
-        </p:spPr>
-      </p:pic>
-      <p:sp>
-        <p:nvSpPr>
-          <p:cNvPr id="27" name="Text 13"/>
-          <p:cNvSpPr/>
-          <p:nvPr/>
-        </p:nvSpPr>
-        <p:spPr>
-          <a:xfrm>
-            <a:off x="7024160" y="2602992"/>
-            <a:ext cx="1417712" cy="256032"/>
-          </a:xfrm>
-          <a:prstGeom prst="rect">
-            <a:avLst/>
-          </a:prstGeom>
-          <a:noFill/>
-          <a:ln/>
-        </p:spPr>
-        <p:txBody>
-          <a:bodyPr wrap="square" rtlCol="0" anchor="ctr"/>
-          <a:lstStyle/>
-          <a:p>
-            <a:pPr algn="ctr" indent="0" marL="0">
-              <a:buNone/>
-            </a:pPr>
-            <a:r>
-              <a:rPr lang="en-US" sz="900" dirty="0">
-                <a:solidFill>
-                  <a:srgbClr val="1A1A2E"/>
-                </a:solidFill>
-                <a:latin typeface="Calibri" pitchFamily="34" charset="0"/>
-                <a:ea typeface="Calibri" pitchFamily="34" charset="-122"/>
-                <a:cs typeface="Calibri" pitchFamily="34" charset="-120"/>
-              </a:rPr>
-              <a:t>RadFormation</a:t>
-            </a:r>
-            <a:endParaRPr lang="en-US" sz="900" dirty="0"/>
-          </a:p>
-        </p:txBody>
-      </p:sp>
-      <p:pic>
-        <p:nvPicPr>
-          <p:cNvPr id="28" name="Image 12" descr="public/logos/synaptiq.png">    </p:cNvPr>
-          <p:cNvPicPr>
-            <a:picLocks noChangeAspect="1"/>
-          </p:cNvPicPr>
-          <p:nvPr/>
-        </p:nvPicPr>
-        <p:blipFill>
-          <a:blip r:embed="rId13"/>
-          <a:srcRect l="0" r="0" t="0" b="0"/>
-          <a:stretch/>
-        </p:blipFill>
-        <p:spPr>
-          <a:xfrm>
-            <a:off x="8661327" y="2197608"/>
-            <a:ext cx="1417712" cy="405384"/>
-          </a:xfrm>
-          <a:prstGeom prst="rect">
-            <a:avLst/>
-          </a:prstGeom>
-        </p:spPr>
-      </p:pic>
-      <p:sp>
-        <p:nvSpPr>
-          <p:cNvPr id="29" name="Text 14"/>
-          <p:cNvSpPr/>
-          <p:nvPr/>
-        </p:nvSpPr>
-        <p:spPr>
-          <a:xfrm>
-            <a:off x="8661327" y="2602992"/>
-            <a:ext cx="1417712" cy="256032"/>
-          </a:xfrm>
-          <a:prstGeom prst="rect">
-            <a:avLst/>
-          </a:prstGeom>
-          <a:noFill/>
-          <a:ln/>
-        </p:spPr>
-        <p:txBody>
-          <a:bodyPr wrap="square" rtlCol="0" anchor="ctr"/>
-          <a:lstStyle/>
-          <a:p>
-            <a:pPr algn="ctr" indent="0" marL="0">
-              <a:buNone/>
-            </a:pPr>
-            <a:r>
-              <a:rPr lang="en-US" sz="900" dirty="0">
-                <a:solidFill>
-                  <a:srgbClr val="1A1A2E"/>
-                </a:solidFill>
-                <a:latin typeface="Calibri" pitchFamily="34" charset="0"/>
-                <a:ea typeface="Calibri" pitchFamily="34" charset="-122"/>
-                <a:cs typeface="Calibri" pitchFamily="34" charset="-120"/>
-              </a:rPr>
-              <a:t>Synaptiq</a:t>
-            </a:r>
-            <a:endParaRPr lang="en-US" sz="900" dirty="0"/>
-          </a:p>
-        </p:txBody>
-      </p:sp>
-      <p:pic>
-        <p:nvPicPr>
-          <p:cNvPr id="30" name="Image 13" descr="public/logos/therapanacea.png">    </p:cNvPr>
+          <p:cNvPr id="12" name="Image 4" descr="public/logos/ever-fortune.png">
+            <a:hlinkClick r:id="rId15" tooltip="Ever Fortune AI"/>
+          </p:cNvPr>
           <p:cNvPicPr>
             <a:picLocks noChangeAspect="1"/>
           </p:cNvPicPr>
@@ -3662,8 +3937,8 @@
         </p:blipFill>
         <p:spPr>
           <a:xfrm>
-            <a:off x="10298495" y="2197608"/>
-            <a:ext cx="1417712" cy="405384"/>
+            <a:off x="7024160" y="1298448"/>
+            <a:ext cx="1417712" cy="344424"/>
           </a:xfrm>
           <a:prstGeom prst="rect">
             <a:avLst/>
@@ -3672,13 +3947,13 @@
       </p:pic>
       <p:sp>
         <p:nvSpPr>
-          <p:cNvPr id="31" name="Text 15"/>
-          <p:cNvSpPr/>
-          <p:nvPr/>
-        </p:nvSpPr>
-        <p:spPr>
-          <a:xfrm>
-            <a:off x="10298495" y="2602992"/>
+          <p:cNvPr id="13" name="Text 6"/>
+          <p:cNvSpPr/>
+          <p:nvPr/>
+        </p:nvSpPr>
+        <p:spPr>
+          <a:xfrm>
+            <a:off x="7024160" y="1642872"/>
             <a:ext cx="1417712" cy="256032"/>
           </a:xfrm>
           <a:prstGeom prst="rect">
@@ -3695,15 +3970,22 @@
               <a:buNone/>
             </a:pPr>
             <a:r>
-              <a:rPr lang="en-US" sz="900" dirty="0">
+              <a:rPr lang="en-US" sz="900" u="sng" dirty="0">
                 <a:solidFill>
                   <a:srgbClr val="1A1A2E"/>
                 </a:solidFill>
                 <a:latin typeface="Calibri" pitchFamily="34" charset="0"/>
                 <a:ea typeface="Calibri" pitchFamily="34" charset="-122"/>
                 <a:cs typeface="Calibri" pitchFamily="34" charset="-120"/>
-              </a:rPr>
-              <a:t>Therapanacea</a:t>
+                <a:hlinkClick r:id="rId16" invalidUrl="" action="" tgtFrame="" tooltip="" history="1" highlightClick="0" endSnd="0">
+                  <a:extLst>
+                    <a:ext uri="{A12FA001-AC4F-418D-AE19-62706E023703}">
+                      <ahyp:hlinkClr xmlns:ahyp="http://schemas.microsoft.com/office/drawing/2018/hyperlinkcolor" val="tx"/>
+                    </a:ext>
+                  </a:extLst>
+                </a:hlinkClick>
+              </a:rPr>
+              <a:t>Ever Fortune AI</a:t>
             </a:r>
             <a:endParaRPr lang="en-US" sz="900" dirty="0"/>
           </a:p>
@@ -3711,131 +3993,9 @@
       </p:sp>
       <p:pic>
         <p:nvPicPr>
-          <p:cNvPr id="32" name="Image 14" descr="public/logos/vysioner.png">    </p:cNvPr>
-          <p:cNvPicPr>
-            <a:picLocks noChangeAspect="1"/>
-          </p:cNvPicPr>
-          <p:nvPr/>
-        </p:nvPicPr>
-        <p:blipFill>
-          <a:blip r:embed="rId15"/>
-          <a:srcRect l="0" r="0" t="0" b="0"/>
-          <a:stretch/>
-        </p:blipFill>
-        <p:spPr>
-          <a:xfrm>
-            <a:off x="475488" y="3096768"/>
-            <a:ext cx="1417712" cy="405384"/>
-          </a:xfrm>
-          <a:prstGeom prst="rect">
-            <a:avLst/>
-          </a:prstGeom>
-        </p:spPr>
-      </p:pic>
-      <p:sp>
-        <p:nvSpPr>
-          <p:cNvPr id="33" name="Text 16"/>
-          <p:cNvSpPr/>
-          <p:nvPr/>
-        </p:nvSpPr>
-        <p:spPr>
-          <a:xfrm>
-            <a:off x="475488" y="3502152"/>
-            <a:ext cx="1417712" cy="256032"/>
-          </a:xfrm>
-          <a:prstGeom prst="rect">
-            <a:avLst/>
-          </a:prstGeom>
-          <a:noFill/>
-          <a:ln/>
-        </p:spPr>
-        <p:txBody>
-          <a:bodyPr wrap="square" rtlCol="0" anchor="ctr"/>
-          <a:lstStyle/>
-          <a:p>
-            <a:pPr algn="ctr" indent="0" marL="0">
-              <a:buNone/>
-            </a:pPr>
-            <a:r>
-              <a:rPr lang="en-US" sz="900" dirty="0">
-                <a:solidFill>
-                  <a:srgbClr val="1A1A2E"/>
-                </a:solidFill>
-                <a:latin typeface="Calibri" pitchFamily="34" charset="0"/>
-                <a:ea typeface="Calibri" pitchFamily="34" charset="-122"/>
-                <a:cs typeface="Calibri" pitchFamily="34" charset="-120"/>
-              </a:rPr>
-              <a:t>Vysioner</a:t>
-            </a:r>
-            <a:endParaRPr lang="en-US" sz="900" dirty="0"/>
-          </a:p>
-        </p:txBody>
-      </p:sp>
-      <p:pic>
-        <p:nvPicPr>
-          <p:cNvPr id="34" name="Image 15" descr="public/logos/wisdom-tech.png">    </p:cNvPr>
-          <p:cNvPicPr>
-            <a:picLocks noChangeAspect="1"/>
-          </p:cNvPicPr>
-          <p:nvPr/>
-        </p:nvPicPr>
-        <p:blipFill>
-          <a:blip r:embed="rId16"/>
-          <a:srcRect l="0" r="0" t="0" b="0"/>
-          <a:stretch/>
-        </p:blipFill>
-        <p:spPr>
-          <a:xfrm>
-            <a:off x="2112656" y="3096768"/>
-            <a:ext cx="1417712" cy="405384"/>
-          </a:xfrm>
-          <a:prstGeom prst="rect">
-            <a:avLst/>
-          </a:prstGeom>
-        </p:spPr>
-      </p:pic>
-      <p:sp>
-        <p:nvSpPr>
-          <p:cNvPr id="35" name="Text 17"/>
-          <p:cNvSpPr/>
-          <p:nvPr/>
-        </p:nvSpPr>
-        <p:spPr>
-          <a:xfrm>
-            <a:off x="2112656" y="3502152"/>
-            <a:ext cx="1417712" cy="256032"/>
-          </a:xfrm>
-          <a:prstGeom prst="rect">
-            <a:avLst/>
-          </a:prstGeom>
-          <a:noFill/>
-          <a:ln/>
-        </p:spPr>
-        <p:txBody>
-          <a:bodyPr wrap="square" rtlCol="0" anchor="ctr"/>
-          <a:lstStyle/>
-          <a:p>
-            <a:pPr algn="ctr" indent="0" marL="0">
-              <a:buNone/>
-            </a:pPr>
-            <a:r>
-              <a:rPr lang="en-US" sz="900" dirty="0">
-                <a:solidFill>
-                  <a:srgbClr val="1A1A2E"/>
-                </a:solidFill>
-                <a:latin typeface="Calibri" pitchFamily="34" charset="0"/>
-                <a:ea typeface="Calibri" pitchFamily="34" charset="-122"/>
-                <a:cs typeface="Calibri" pitchFamily="34" charset="-120"/>
-              </a:rPr>
-              <a:t>Wisdom Tech</a:t>
-            </a:r>
-            <a:endParaRPr lang="en-US" sz="900" dirty="0"/>
-          </a:p>
-        </p:txBody>
-      </p:sp>
-      <p:pic>
-        <p:nvPicPr>
-          <p:cNvPr id="36" name="Image 16" descr="public/logos/oncosoft.png">    </p:cNvPr>
+          <p:cNvPr id="14" name="Image 5" descr="public/logos/huraimaging.png">
+            <a:hlinkClick r:id="rId18" tooltip="Hura Imaging"/>
+          </p:cNvPr>
           <p:cNvPicPr>
             <a:picLocks noChangeAspect="1"/>
           </p:cNvPicPr>
@@ -3848,8 +4008,8 @@
         </p:blipFill>
         <p:spPr>
           <a:xfrm>
-            <a:off x="3749824" y="3096768"/>
-            <a:ext cx="1417712" cy="405384"/>
+            <a:off x="8661327" y="1298448"/>
+            <a:ext cx="1417712" cy="344424"/>
           </a:xfrm>
           <a:prstGeom prst="rect">
             <a:avLst/>
@@ -3858,13 +4018,13 @@
       </p:pic>
       <p:sp>
         <p:nvSpPr>
-          <p:cNvPr id="37" name="Text 18"/>
-          <p:cNvSpPr/>
-          <p:nvPr/>
-        </p:nvSpPr>
-        <p:spPr>
-          <a:xfrm>
-            <a:off x="3749824" y="3502152"/>
+          <p:cNvPr id="15" name="Text 7"/>
+          <p:cNvSpPr/>
+          <p:nvPr/>
+        </p:nvSpPr>
+        <p:spPr>
+          <a:xfrm>
+            <a:off x="8661327" y="1642872"/>
             <a:ext cx="1417712" cy="256032"/>
           </a:xfrm>
           <a:prstGeom prst="rect">
@@ -3881,15 +4041,22 @@
               <a:buNone/>
             </a:pPr>
             <a:r>
-              <a:rPr lang="en-US" sz="900" dirty="0">
+              <a:rPr lang="en-US" sz="900" u="sng" dirty="0">
                 <a:solidFill>
                   <a:srgbClr val="1A1A2E"/>
                 </a:solidFill>
                 <a:latin typeface="Calibri" pitchFamily="34" charset="0"/>
                 <a:ea typeface="Calibri" pitchFamily="34" charset="-122"/>
                 <a:cs typeface="Calibri" pitchFamily="34" charset="-120"/>
-              </a:rPr>
-              <a:t>Oncosoft</a:t>
+                <a:hlinkClick r:id="rId19" invalidUrl="" action="" tgtFrame="" tooltip="" history="1" highlightClick="0" endSnd="0">
+                  <a:extLst>
+                    <a:ext uri="{A12FA001-AC4F-418D-AE19-62706E023703}">
+                      <ahyp:hlinkClr xmlns:ahyp="http://schemas.microsoft.com/office/drawing/2018/hyperlinkcolor" val="tx"/>
+                    </a:ext>
+                  </a:extLst>
+                </a:hlinkClick>
+              </a:rPr>
+              <a:t>Hura Imaging</a:t>
             </a:r>
             <a:endParaRPr lang="en-US" sz="900" dirty="0"/>
           </a:p>
@@ -3897,131 +4064,9 @@
       </p:sp>
       <p:pic>
         <p:nvPicPr>
-          <p:cNvPr id="38" name="Image 17" descr="public/logos/medcom.png">    </p:cNvPr>
-          <p:cNvPicPr>
-            <a:picLocks noChangeAspect="1"/>
-          </p:cNvPicPr>
-          <p:nvPr/>
-        </p:nvPicPr>
-        <p:blipFill>
-          <a:blip r:embed="rId18"/>
-          <a:srcRect l="0" r="0" t="0" b="0"/>
-          <a:stretch/>
-        </p:blipFill>
-        <p:spPr>
-          <a:xfrm>
-            <a:off x="5386992" y="3096768"/>
-            <a:ext cx="1417712" cy="405384"/>
-          </a:xfrm>
-          <a:prstGeom prst="rect">
-            <a:avLst/>
-          </a:prstGeom>
-        </p:spPr>
-      </p:pic>
-      <p:sp>
-        <p:nvSpPr>
-          <p:cNvPr id="39" name="Text 19"/>
-          <p:cNvSpPr/>
-          <p:nvPr/>
-        </p:nvSpPr>
-        <p:spPr>
-          <a:xfrm>
-            <a:off x="5386992" y="3502152"/>
-            <a:ext cx="1417712" cy="256032"/>
-          </a:xfrm>
-          <a:prstGeom prst="rect">
-            <a:avLst/>
-          </a:prstGeom>
-          <a:noFill/>
-          <a:ln/>
-        </p:spPr>
-        <p:txBody>
-          <a:bodyPr wrap="square" rtlCol="0" anchor="ctr"/>
-          <a:lstStyle/>
-          <a:p>
-            <a:pPr algn="ctr" indent="0" marL="0">
-              <a:buNone/>
-            </a:pPr>
-            <a:r>
-              <a:rPr lang="en-US" sz="900" dirty="0">
-                <a:solidFill>
-                  <a:srgbClr val="1A1A2E"/>
-                </a:solidFill>
-                <a:latin typeface="Calibri" pitchFamily="34" charset="0"/>
-                <a:ea typeface="Calibri" pitchFamily="34" charset="-122"/>
-                <a:cs typeface="Calibri" pitchFamily="34" charset="-120"/>
-              </a:rPr>
-              <a:t>MedCom</a:t>
-            </a:r>
-            <a:endParaRPr lang="en-US" sz="900" dirty="0"/>
-          </a:p>
-        </p:txBody>
-      </p:sp>
-      <p:pic>
-        <p:nvPicPr>
-          <p:cNvPr id="40" name="Image 18" descr="public/logos/ge_healthcare.png">    </p:cNvPr>
-          <p:cNvPicPr>
-            <a:picLocks noChangeAspect="1"/>
-          </p:cNvPicPr>
-          <p:nvPr/>
-        </p:nvPicPr>
-        <p:blipFill>
-          <a:blip r:embed="rId19"/>
-          <a:srcRect l="0" r="0" t="0" b="0"/>
-          <a:stretch/>
-        </p:blipFill>
-        <p:spPr>
-          <a:xfrm>
-            <a:off x="7024160" y="3096768"/>
-            <a:ext cx="1417712" cy="405384"/>
-          </a:xfrm>
-          <a:prstGeom prst="rect">
-            <a:avLst/>
-          </a:prstGeom>
-        </p:spPr>
-      </p:pic>
-      <p:sp>
-        <p:nvSpPr>
-          <p:cNvPr id="41" name="Text 20"/>
-          <p:cNvSpPr/>
-          <p:nvPr/>
-        </p:nvSpPr>
-        <p:spPr>
-          <a:xfrm>
-            <a:off x="7024160" y="3502152"/>
-            <a:ext cx="1417712" cy="256032"/>
-          </a:xfrm>
-          <a:prstGeom prst="rect">
-            <a:avLst/>
-          </a:prstGeom>
-          <a:noFill/>
-          <a:ln/>
-        </p:spPr>
-        <p:txBody>
-          <a:bodyPr wrap="square" rtlCol="0" anchor="ctr"/>
-          <a:lstStyle/>
-          <a:p>
-            <a:pPr algn="ctr" indent="0" marL="0">
-              <a:buNone/>
-            </a:pPr>
-            <a:r>
-              <a:rPr lang="en-US" sz="900" dirty="0">
-                <a:solidFill>
-                  <a:srgbClr val="1A1A2E"/>
-                </a:solidFill>
-                <a:latin typeface="Calibri" pitchFamily="34" charset="0"/>
-                <a:ea typeface="Calibri" pitchFamily="34" charset="-122"/>
-                <a:cs typeface="Calibri" pitchFamily="34" charset="-120"/>
-              </a:rPr>
-              <a:t>GE Healthcare</a:t>
-            </a:r>
-            <a:endParaRPr lang="en-US" sz="900" dirty="0"/>
-          </a:p>
-        </p:txBody>
-      </p:sp>
-      <p:pic>
-        <p:nvPicPr>
-          <p:cNvPr id="42" name="Image 19" descr="public/logos/philips.png">    </p:cNvPr>
+          <p:cNvPr id="16" name="Image 6" descr="public/logos/Limbus-ai.png">
+            <a:hlinkClick r:id="rId21" tooltip="Limbus AI"/>
+          </p:cNvPr>
           <p:cNvPicPr>
             <a:picLocks noChangeAspect="1"/>
           </p:cNvPicPr>
@@ -4034,8 +4079,8 @@
         </p:blipFill>
         <p:spPr>
           <a:xfrm>
-            <a:off x="8661327" y="3096768"/>
-            <a:ext cx="1417712" cy="405384"/>
+            <a:off x="10298495" y="1298448"/>
+            <a:ext cx="1417712" cy="344424"/>
           </a:xfrm>
           <a:prstGeom prst="rect">
             <a:avLst/>
@@ -4044,13 +4089,13 @@
       </p:pic>
       <p:sp>
         <p:nvSpPr>
-          <p:cNvPr id="43" name="Text 21"/>
-          <p:cNvSpPr/>
-          <p:nvPr/>
-        </p:nvSpPr>
-        <p:spPr>
-          <a:xfrm>
-            <a:off x="8661327" y="3502152"/>
+          <p:cNvPr id="17" name="Text 8"/>
+          <p:cNvSpPr/>
+          <p:nvPr/>
+        </p:nvSpPr>
+        <p:spPr>
+          <a:xfrm>
+            <a:off x="10298495" y="1642872"/>
             <a:ext cx="1417712" cy="256032"/>
           </a:xfrm>
           <a:prstGeom prst="rect">
@@ -4067,15 +4112,22 @@
               <a:buNone/>
             </a:pPr>
             <a:r>
-              <a:rPr lang="en-US" sz="900" dirty="0">
+              <a:rPr lang="en-US" sz="900" u="sng" dirty="0">
                 <a:solidFill>
                   <a:srgbClr val="1A1A2E"/>
                 </a:solidFill>
                 <a:latin typeface="Calibri" pitchFamily="34" charset="0"/>
                 <a:ea typeface="Calibri" pitchFamily="34" charset="-122"/>
                 <a:cs typeface="Calibri" pitchFamily="34" charset="-120"/>
-              </a:rPr>
-              <a:t>Philips</a:t>
+                <a:hlinkClick r:id="rId22" invalidUrl="" action="" tgtFrame="" tooltip="" history="1" highlightClick="0" endSnd="0">
+                  <a:extLst>
+                    <a:ext uri="{A12FA001-AC4F-418D-AE19-62706E023703}">
+                      <ahyp:hlinkClr xmlns:ahyp="http://schemas.microsoft.com/office/drawing/2018/hyperlinkcolor" val="tx"/>
+                    </a:ext>
+                  </a:extLst>
+                </a:hlinkClick>
+              </a:rPr>
+              <a:t>Limbus AI</a:t>
             </a:r>
             <a:endParaRPr lang="en-US" sz="900" dirty="0"/>
           </a:p>
@@ -4083,131 +4135,9 @@
       </p:sp>
       <p:pic>
         <p:nvPicPr>
-          <p:cNvPr id="44" name="Image 20" descr="public/logos/siemens.png">    </p:cNvPr>
-          <p:cNvPicPr>
-            <a:picLocks noChangeAspect="1"/>
-          </p:cNvPicPr>
-          <p:nvPr/>
-        </p:nvPicPr>
-        <p:blipFill>
-          <a:blip r:embed="rId21"/>
-          <a:srcRect l="0" r="0" t="0" b="0"/>
-          <a:stretch/>
-        </p:blipFill>
-        <p:spPr>
-          <a:xfrm>
-            <a:off x="10298495" y="3096768"/>
-            <a:ext cx="1417712" cy="405384"/>
-          </a:xfrm>
-          <a:prstGeom prst="rect">
-            <a:avLst/>
-          </a:prstGeom>
-        </p:spPr>
-      </p:pic>
-      <p:sp>
-        <p:nvSpPr>
-          <p:cNvPr id="45" name="Text 22"/>
-          <p:cNvSpPr/>
-          <p:nvPr/>
-        </p:nvSpPr>
-        <p:spPr>
-          <a:xfrm>
-            <a:off x="10298495" y="3502152"/>
-            <a:ext cx="1417712" cy="256032"/>
-          </a:xfrm>
-          <a:prstGeom prst="rect">
-            <a:avLst/>
-          </a:prstGeom>
-          <a:noFill/>
-          <a:ln/>
-        </p:spPr>
-        <p:txBody>
-          <a:bodyPr wrap="square" rtlCol="0" anchor="ctr"/>
-          <a:lstStyle/>
-          <a:p>
-            <a:pPr algn="ctr" indent="0" marL="0">
-              <a:buNone/>
-            </a:pPr>
-            <a:r>
-              <a:rPr lang="en-US" sz="900" dirty="0">
-                <a:solidFill>
-                  <a:srgbClr val="1A1A2E"/>
-                </a:solidFill>
-                <a:latin typeface="Calibri" pitchFamily="34" charset="0"/>
-                <a:ea typeface="Calibri" pitchFamily="34" charset="-122"/>
-                <a:cs typeface="Calibri" pitchFamily="34" charset="-120"/>
-              </a:rPr>
-              <a:t>Siemens Healthineers</a:t>
-            </a:r>
-            <a:endParaRPr lang="en-US" sz="900" dirty="0"/>
-          </a:p>
-        </p:txBody>
-      </p:sp>
-      <p:pic>
-        <p:nvPicPr>
-          <p:cNvPr id="46" name="Image 21" descr="public/logos/canon.jpg">    </p:cNvPr>
-          <p:cNvPicPr>
-            <a:picLocks noChangeAspect="1"/>
-          </p:cNvPicPr>
-          <p:nvPr/>
-        </p:nvPicPr>
-        <p:blipFill>
-          <a:blip r:embed="rId22"/>
-          <a:srcRect l="0" r="0" t="0" b="0"/>
-          <a:stretch/>
-        </p:blipFill>
-        <p:spPr>
-          <a:xfrm>
-            <a:off x="475488" y="3995928"/>
-            <a:ext cx="1417712" cy="405384"/>
-          </a:xfrm>
-          <a:prstGeom prst="rect">
-            <a:avLst/>
-          </a:prstGeom>
-        </p:spPr>
-      </p:pic>
-      <p:sp>
-        <p:nvSpPr>
-          <p:cNvPr id="47" name="Text 23"/>
-          <p:cNvSpPr/>
-          <p:nvPr/>
-        </p:nvSpPr>
-        <p:spPr>
-          <a:xfrm>
-            <a:off x="475488" y="4401312"/>
-            <a:ext cx="1417712" cy="256032"/>
-          </a:xfrm>
-          <a:prstGeom prst="rect">
-            <a:avLst/>
-          </a:prstGeom>
-          <a:noFill/>
-          <a:ln/>
-        </p:spPr>
-        <p:txBody>
-          <a:bodyPr wrap="square" rtlCol="0" anchor="ctr"/>
-          <a:lstStyle/>
-          <a:p>
-            <a:pPr algn="ctr" indent="0" marL="0">
-              <a:buNone/>
-            </a:pPr>
-            <a:r>
-              <a:rPr lang="en-US" sz="900" dirty="0">
-                <a:solidFill>
-                  <a:srgbClr val="1A1A2E"/>
-                </a:solidFill>
-                <a:latin typeface="Calibri" pitchFamily="34" charset="0"/>
-                <a:ea typeface="Calibri" pitchFamily="34" charset="-122"/>
-                <a:cs typeface="Calibri" pitchFamily="34" charset="-120"/>
-              </a:rPr>
-              <a:t>Canon Medical Systems</a:t>
-            </a:r>
-            <a:endParaRPr lang="en-US" sz="900" dirty="0"/>
-          </a:p>
-        </p:txBody>
-      </p:sp>
-      <p:pic>
-        <p:nvPicPr>
-          <p:cNvPr id="48" name="Image 22" descr="public/logos/unitedimaging.png">    </p:cNvPr>
+          <p:cNvPr id="18" name="Image 7" descr="public/logos/manteia.png">
+            <a:hlinkClick r:id="rId24" tooltip="Manteia"/>
+          </p:cNvPr>
           <p:cNvPicPr>
             <a:picLocks noChangeAspect="1"/>
           </p:cNvPicPr>
@@ -4220,8 +4150,8 @@
         </p:blipFill>
         <p:spPr>
           <a:xfrm>
-            <a:off x="2112656" y="3995928"/>
-            <a:ext cx="1417712" cy="405384"/>
+            <a:off x="475488" y="2136648"/>
+            <a:ext cx="1417712" cy="344424"/>
           </a:xfrm>
           <a:prstGeom prst="rect">
             <a:avLst/>
@@ -4230,13 +4160,13 @@
       </p:pic>
       <p:sp>
         <p:nvSpPr>
-          <p:cNvPr id="49" name="Text 24"/>
-          <p:cNvSpPr/>
-          <p:nvPr/>
-        </p:nvSpPr>
-        <p:spPr>
-          <a:xfrm>
-            <a:off x="2112656" y="4401312"/>
+          <p:cNvPr id="19" name="Text 9"/>
+          <p:cNvSpPr/>
+          <p:nvPr/>
+        </p:nvSpPr>
+        <p:spPr>
+          <a:xfrm>
+            <a:off x="475488" y="2481072"/>
             <a:ext cx="1417712" cy="256032"/>
           </a:xfrm>
           <a:prstGeom prst="rect">
@@ -4253,15 +4183,22 @@
               <a:buNone/>
             </a:pPr>
             <a:r>
-              <a:rPr lang="en-US" sz="900" dirty="0">
+              <a:rPr lang="en-US" sz="900" u="sng" dirty="0">
                 <a:solidFill>
                   <a:srgbClr val="1A1A2E"/>
                 </a:solidFill>
                 <a:latin typeface="Calibri" pitchFamily="34" charset="0"/>
                 <a:ea typeface="Calibri" pitchFamily="34" charset="-122"/>
                 <a:cs typeface="Calibri" pitchFamily="34" charset="-120"/>
-              </a:rPr>
-              <a:t>United Imaging</a:t>
+                <a:hlinkClick r:id="rId25" invalidUrl="" action="" tgtFrame="" tooltip="" history="1" highlightClick="0" endSnd="0">
+                  <a:extLst>
+                    <a:ext uri="{A12FA001-AC4F-418D-AE19-62706E023703}">
+                      <ahyp:hlinkClr xmlns:ahyp="http://schemas.microsoft.com/office/drawing/2018/hyperlinkcolor" val="tx"/>
+                    </a:ext>
+                  </a:extLst>
+                </a:hlinkClick>
+              </a:rPr>
+              <a:t>Manteia</a:t>
             </a:r>
             <a:endParaRPr lang="en-US" sz="900" dirty="0"/>
           </a:p>
@@ -4269,131 +4206,9 @@
       </p:sp>
       <p:pic>
         <p:nvPicPr>
-          <p:cNvPr id="50" name="Image 23" descr="public/newsletters/2026-06/_logo-cache/Taiwan_MedImag.png">    </p:cNvPr>
-          <p:cNvPicPr>
-            <a:picLocks noChangeAspect="1"/>
-          </p:cNvPicPr>
-          <p:nvPr/>
-        </p:nvPicPr>
-        <p:blipFill>
-          <a:blip r:embed="rId24"/>
-          <a:srcRect l="0" r="0" t="0" b="0"/>
-          <a:stretch/>
-        </p:blipFill>
-        <p:spPr>
-          <a:xfrm>
-            <a:off x="3749824" y="3995928"/>
-            <a:ext cx="1417712" cy="405384"/>
-          </a:xfrm>
-          <a:prstGeom prst="rect">
-            <a:avLst/>
-          </a:prstGeom>
-        </p:spPr>
-      </p:pic>
-      <p:sp>
-        <p:nvSpPr>
-          <p:cNvPr id="51" name="Text 25"/>
-          <p:cNvSpPr/>
-          <p:nvPr/>
-        </p:nvSpPr>
-        <p:spPr>
-          <a:xfrm>
-            <a:off x="3749824" y="4401312"/>
-            <a:ext cx="1417712" cy="256032"/>
-          </a:xfrm>
-          <a:prstGeom prst="rect">
-            <a:avLst/>
-          </a:prstGeom>
-          <a:noFill/>
-          <a:ln/>
-        </p:spPr>
-        <p:txBody>
-          <a:bodyPr wrap="square" rtlCol="0" anchor="ctr"/>
-          <a:lstStyle/>
-          <a:p>
-            <a:pPr algn="ctr" indent="0" marL="0">
-              <a:buNone/>
-            </a:pPr>
-            <a:r>
-              <a:rPr lang="en-US" sz="900" dirty="0">
-                <a:solidFill>
-                  <a:srgbClr val="1A1A2E"/>
-                </a:solidFill>
-                <a:latin typeface="Calibri" pitchFamily="34" charset="0"/>
-                <a:ea typeface="Calibri" pitchFamily="34" charset="-122"/>
-                <a:cs typeface="Calibri" pitchFamily="34" charset="-120"/>
-              </a:rPr>
-              <a:t>Taiwan Medical Imaging Co.</a:t>
-            </a:r>
-            <a:endParaRPr lang="en-US" sz="900" dirty="0"/>
-          </a:p>
-        </p:txBody>
-      </p:sp>
-      <p:pic>
-        <p:nvPicPr>
-          <p:cNvPr id="52" name="Image 24" descr="public/logos/algomedica.png">    </p:cNvPr>
-          <p:cNvPicPr>
-            <a:picLocks noChangeAspect="1"/>
-          </p:cNvPicPr>
-          <p:nvPr/>
-        </p:nvPicPr>
-        <p:blipFill>
-          <a:blip r:embed="rId25"/>
-          <a:srcRect l="0" r="0" t="0" b="0"/>
-          <a:stretch/>
-        </p:blipFill>
-        <p:spPr>
-          <a:xfrm>
-            <a:off x="5386992" y="3995928"/>
-            <a:ext cx="1417712" cy="405384"/>
-          </a:xfrm>
-          <a:prstGeom prst="rect">
-            <a:avLst/>
-          </a:prstGeom>
-        </p:spPr>
-      </p:pic>
-      <p:sp>
-        <p:nvSpPr>
-          <p:cNvPr id="53" name="Text 26"/>
-          <p:cNvSpPr/>
-          <p:nvPr/>
-        </p:nvSpPr>
-        <p:spPr>
-          <a:xfrm>
-            <a:off x="5386992" y="4401312"/>
-            <a:ext cx="1417712" cy="256032"/>
-          </a:xfrm>
-          <a:prstGeom prst="rect">
-            <a:avLst/>
-          </a:prstGeom>
-          <a:noFill/>
-          <a:ln/>
-        </p:spPr>
-        <p:txBody>
-          <a:bodyPr wrap="square" rtlCol="0" anchor="ctr"/>
-          <a:lstStyle/>
-          <a:p>
-            <a:pPr algn="ctr" indent="0" marL="0">
-              <a:buNone/>
-            </a:pPr>
-            <a:r>
-              <a:rPr lang="en-US" sz="900" dirty="0">
-                <a:solidFill>
-                  <a:srgbClr val="1A1A2E"/>
-                </a:solidFill>
-                <a:latin typeface="Calibri" pitchFamily="34" charset="0"/>
-                <a:ea typeface="Calibri" pitchFamily="34" charset="-122"/>
-                <a:cs typeface="Calibri" pitchFamily="34" charset="-120"/>
-              </a:rPr>
-              <a:t>AlgoMedica</a:t>
-            </a:r>
-            <a:endParaRPr lang="en-US" sz="900" dirty="0"/>
-          </a:p>
-        </p:txBody>
-      </p:sp>
-      <p:pic>
-        <p:nvPicPr>
-          <p:cNvPr id="54" name="Image 25" descr="public/logos/spectronic-medical.jpg">    </p:cNvPr>
+          <p:cNvPr id="20" name="Image 8" descr="public/newsletters/2026-06/_logo-cache/mimsoftware.png">
+            <a:hlinkClick r:id="rId27" tooltip="MIM Software"/>
+          </p:cNvPr>
           <p:cNvPicPr>
             <a:picLocks noChangeAspect="1"/>
           </p:cNvPicPr>
@@ -4406,8 +4221,8 @@
         </p:blipFill>
         <p:spPr>
           <a:xfrm>
-            <a:off x="7024160" y="3995928"/>
-            <a:ext cx="1417712" cy="405384"/>
+            <a:off x="2112656" y="2136648"/>
+            <a:ext cx="1417712" cy="344424"/>
           </a:xfrm>
           <a:prstGeom prst="rect">
             <a:avLst/>
@@ -4416,13 +4231,13 @@
       </p:pic>
       <p:sp>
         <p:nvSpPr>
-          <p:cNvPr id="55" name="Text 27"/>
-          <p:cNvSpPr/>
-          <p:nvPr/>
-        </p:nvSpPr>
-        <p:spPr>
-          <a:xfrm>
-            <a:off x="7024160" y="4401312"/>
+          <p:cNvPr id="21" name="Text 10"/>
+          <p:cNvSpPr/>
+          <p:nvPr/>
+        </p:nvSpPr>
+        <p:spPr>
+          <a:xfrm>
+            <a:off x="2112656" y="2481072"/>
             <a:ext cx="1417712" cy="256032"/>
           </a:xfrm>
           <a:prstGeom prst="rect">
@@ -4439,15 +4254,22 @@
               <a:buNone/>
             </a:pPr>
             <a:r>
-              <a:rPr lang="en-US" sz="900" dirty="0">
+              <a:rPr lang="en-US" sz="900" u="sng" dirty="0">
                 <a:solidFill>
                   <a:srgbClr val="1A1A2E"/>
                 </a:solidFill>
                 <a:latin typeface="Calibri" pitchFamily="34" charset="0"/>
                 <a:ea typeface="Calibri" pitchFamily="34" charset="-122"/>
                 <a:cs typeface="Calibri" pitchFamily="34" charset="-120"/>
-              </a:rPr>
-              <a:t>Spectronic Medical</a:t>
+                <a:hlinkClick r:id="rId28" invalidUrl="" action="" tgtFrame="" tooltip="" history="1" highlightClick="0" endSnd="0">
+                  <a:extLst>
+                    <a:ext uri="{A12FA001-AC4F-418D-AE19-62706E023703}">
+                      <ahyp:hlinkClr xmlns:ahyp="http://schemas.microsoft.com/office/drawing/2018/hyperlinkcolor" val="tx"/>
+                    </a:ext>
+                  </a:extLst>
+                </a:hlinkClick>
+              </a:rPr>
+              <a:t>MIM Software</a:t>
             </a:r>
             <a:endParaRPr lang="en-US" sz="900" dirty="0"/>
           </a:p>
@@ -4455,131 +4277,9 @@
       </p:sp>
       <p:pic>
         <p:nvPicPr>
-          <p:cNvPr id="56" name="Image 26" descr="public/logos/syntheticMRI.png">    </p:cNvPr>
-          <p:cNvPicPr>
-            <a:picLocks noChangeAspect="1"/>
-          </p:cNvPicPr>
-          <p:nvPr/>
-        </p:nvPicPr>
-        <p:blipFill>
-          <a:blip r:embed="rId27"/>
-          <a:srcRect l="0" r="0" t="0" b="0"/>
-          <a:stretch/>
-        </p:blipFill>
-        <p:spPr>
-          <a:xfrm>
-            <a:off x="8661327" y="3995928"/>
-            <a:ext cx="1417712" cy="405384"/>
-          </a:xfrm>
-          <a:prstGeom prst="rect">
-            <a:avLst/>
-          </a:prstGeom>
-        </p:spPr>
-      </p:pic>
-      <p:sp>
-        <p:nvSpPr>
-          <p:cNvPr id="57" name="Text 28"/>
-          <p:cNvSpPr/>
-          <p:nvPr/>
-        </p:nvSpPr>
-        <p:spPr>
-          <a:xfrm>
-            <a:off x="8661327" y="4401312"/>
-            <a:ext cx="1417712" cy="256032"/>
-          </a:xfrm>
-          <a:prstGeom prst="rect">
-            <a:avLst/>
-          </a:prstGeom>
-          <a:noFill/>
-          <a:ln/>
-        </p:spPr>
-        <p:txBody>
-          <a:bodyPr wrap="square" rtlCol="0" anchor="ctr"/>
-          <a:lstStyle/>
-          <a:p>
-            <a:pPr algn="ctr" indent="0" marL="0">
-              <a:buNone/>
-            </a:pPr>
-            <a:r>
-              <a:rPr lang="en-US" sz="900" dirty="0">
-                <a:solidFill>
-                  <a:srgbClr val="1A1A2E"/>
-                </a:solidFill>
-                <a:latin typeface="Calibri" pitchFamily="34" charset="0"/>
-                <a:ea typeface="Calibri" pitchFamily="34" charset="-122"/>
-                <a:cs typeface="Calibri" pitchFamily="34" charset="-120"/>
-              </a:rPr>
-              <a:t>SyntheticMR</a:t>
-            </a:r>
-            <a:endParaRPr lang="en-US" sz="900" dirty="0"/>
-          </a:p>
-        </p:txBody>
-      </p:sp>
-      <p:pic>
-        <p:nvPicPr>
-          <p:cNvPr id="58" name="Image 27" descr="public/logos/raystation.jpg">    </p:cNvPr>
-          <p:cNvPicPr>
-            <a:picLocks noChangeAspect="1"/>
-          </p:cNvPicPr>
-          <p:nvPr/>
-        </p:nvPicPr>
-        <p:blipFill>
-          <a:blip r:embed="rId28"/>
-          <a:srcRect l="0" r="0" t="0" b="0"/>
-          <a:stretch/>
-        </p:blipFill>
-        <p:spPr>
-          <a:xfrm>
-            <a:off x="10298495" y="3995928"/>
-            <a:ext cx="1417712" cy="405384"/>
-          </a:xfrm>
-          <a:prstGeom prst="rect">
-            <a:avLst/>
-          </a:prstGeom>
-        </p:spPr>
-      </p:pic>
-      <p:sp>
-        <p:nvSpPr>
-          <p:cNvPr id="59" name="Text 29"/>
-          <p:cNvSpPr/>
-          <p:nvPr/>
-        </p:nvSpPr>
-        <p:spPr>
-          <a:xfrm>
-            <a:off x="10298495" y="4401312"/>
-            <a:ext cx="1417712" cy="256032"/>
-          </a:xfrm>
-          <a:prstGeom prst="rect">
-            <a:avLst/>
-          </a:prstGeom>
-          <a:noFill/>
-          <a:ln/>
-        </p:spPr>
-        <p:txBody>
-          <a:bodyPr wrap="square" rtlCol="0" anchor="ctr"/>
-          <a:lstStyle/>
-          <a:p>
-            <a:pPr algn="ctr" indent="0" marL="0">
-              <a:buNone/>
-            </a:pPr>
-            <a:r>
-              <a:rPr lang="en-US" sz="900" dirty="0">
-                <a:solidFill>
-                  <a:srgbClr val="1A1A2E"/>
-                </a:solidFill>
-                <a:latin typeface="Calibri" pitchFamily="34" charset="0"/>
-                <a:ea typeface="Calibri" pitchFamily="34" charset="-122"/>
-                <a:cs typeface="Calibri" pitchFamily="34" charset="-120"/>
-              </a:rPr>
-              <a:t>RaySearch Laboratories</a:t>
-            </a:r>
-            <a:endParaRPr lang="en-US" sz="900" dirty="0"/>
-          </a:p>
-        </p:txBody>
-      </p:sp>
-      <p:pic>
-        <p:nvPicPr>
-          <p:cNvPr id="60" name="Image 28" descr="public/logos/airs.jpg">    </p:cNvPr>
+          <p:cNvPr id="22" name="Image 9" descr="public/logos/mirada-medical.png">
+            <a:hlinkClick r:id="rId30" tooltip="Mirada Medical"/>
+          </p:cNvPr>
           <p:cNvPicPr>
             <a:picLocks noChangeAspect="1"/>
           </p:cNvPicPr>
@@ -4592,8 +4292,8 @@
         </p:blipFill>
         <p:spPr>
           <a:xfrm>
-            <a:off x="475488" y="4895088"/>
-            <a:ext cx="1417712" cy="405384"/>
+            <a:off x="3749824" y="2136648"/>
+            <a:ext cx="1417712" cy="344424"/>
           </a:xfrm>
           <a:prstGeom prst="rect">
             <a:avLst/>
@@ -4602,13 +4302,13 @@
       </p:pic>
       <p:sp>
         <p:nvSpPr>
-          <p:cNvPr id="61" name="Text 30"/>
-          <p:cNvSpPr/>
-          <p:nvPr/>
-        </p:nvSpPr>
-        <p:spPr>
-          <a:xfrm>
-            <a:off x="475488" y="5300472"/>
+          <p:cNvPr id="23" name="Text 11"/>
+          <p:cNvSpPr/>
+          <p:nvPr/>
+        </p:nvSpPr>
+        <p:spPr>
+          <a:xfrm>
+            <a:off x="3749824" y="2481072"/>
             <a:ext cx="1417712" cy="256032"/>
           </a:xfrm>
           <a:prstGeom prst="rect">
@@ -4625,15 +4325,22 @@
               <a:buNone/>
             </a:pPr>
             <a:r>
-              <a:rPr lang="en-US" sz="900" dirty="0">
+              <a:rPr lang="en-US" sz="900" u="sng" dirty="0">
                 <a:solidFill>
                   <a:srgbClr val="1A1A2E"/>
                 </a:solidFill>
                 <a:latin typeface="Calibri" pitchFamily="34" charset="0"/>
                 <a:ea typeface="Calibri" pitchFamily="34" charset="-122"/>
                 <a:cs typeface="Calibri" pitchFamily="34" charset="-120"/>
-              </a:rPr>
-              <a:t>AIRS Medical</a:t>
+                <a:hlinkClick r:id="rId31" invalidUrl="" action="" tgtFrame="" tooltip="" history="1" highlightClick="0" endSnd="0">
+                  <a:extLst>
+                    <a:ext uri="{A12FA001-AC4F-418D-AE19-62706E023703}">
+                      <ahyp:hlinkClr xmlns:ahyp="http://schemas.microsoft.com/office/drawing/2018/hyperlinkcolor" val="tx"/>
+                    </a:ext>
+                  </a:extLst>
+                </a:hlinkClick>
+              </a:rPr>
+              <a:t>Mirada Medical</a:t>
             </a:r>
             <a:endParaRPr lang="en-US" sz="900" dirty="0"/>
           </a:p>
@@ -4641,131 +4348,9 @@
       </p:sp>
       <p:pic>
         <p:nvPicPr>
-          <p:cNvPr id="62" name="Image 29" descr="public/logos/claripi.jpg">    </p:cNvPr>
-          <p:cNvPicPr>
-            <a:picLocks noChangeAspect="1"/>
-          </p:cNvPicPr>
-          <p:nvPr/>
-        </p:nvPicPr>
-        <p:blipFill>
-          <a:blip r:embed="rId30"/>
-          <a:srcRect l="0" r="0" t="0" b="0"/>
-          <a:stretch/>
-        </p:blipFill>
-        <p:spPr>
-          <a:xfrm>
-            <a:off x="2112656" y="4895088"/>
-            <a:ext cx="1417712" cy="405384"/>
-          </a:xfrm>
-          <a:prstGeom prst="rect">
-            <a:avLst/>
-          </a:prstGeom>
-        </p:spPr>
-      </p:pic>
-      <p:sp>
-        <p:nvSpPr>
-          <p:cNvPr id="63" name="Text 31"/>
-          <p:cNvSpPr/>
-          <p:nvPr/>
-        </p:nvSpPr>
-        <p:spPr>
-          <a:xfrm>
-            <a:off x="2112656" y="5300472"/>
-            <a:ext cx="1417712" cy="256032"/>
-          </a:xfrm>
-          <a:prstGeom prst="rect">
-            <a:avLst/>
-          </a:prstGeom>
-          <a:noFill/>
-          <a:ln/>
-        </p:spPr>
-        <p:txBody>
-          <a:bodyPr wrap="square" rtlCol="0" anchor="ctr"/>
-          <a:lstStyle/>
-          <a:p>
-            <a:pPr algn="ctr" indent="0" marL="0">
-              <a:buNone/>
-            </a:pPr>
-            <a:r>
-              <a:rPr lang="en-US" sz="900" dirty="0">
-                <a:solidFill>
-                  <a:srgbClr val="1A1A2E"/>
-                </a:solidFill>
-                <a:latin typeface="Calibri" pitchFamily="34" charset="0"/>
-                <a:ea typeface="Calibri" pitchFamily="34" charset="-122"/>
-                <a:cs typeface="Calibri" pitchFamily="34" charset="-120"/>
-              </a:rPr>
-              <a:t>ClariPi</a:t>
-            </a:r>
-            <a:endParaRPr lang="en-US" sz="900" dirty="0"/>
-          </a:p>
-        </p:txBody>
-      </p:sp>
-      <p:pic>
-        <p:nvPicPr>
-          <p:cNvPr id="64" name="Image 30" descr="public/logos/SubtleMedical.jpg">    </p:cNvPr>
-          <p:cNvPicPr>
-            <a:picLocks noChangeAspect="1"/>
-          </p:cNvPicPr>
-          <p:nvPr/>
-        </p:nvPicPr>
-        <p:blipFill>
-          <a:blip r:embed="rId31"/>
-          <a:srcRect l="0" r="0" t="0" b="0"/>
-          <a:stretch/>
-        </p:blipFill>
-        <p:spPr>
-          <a:xfrm>
-            <a:off x="3749824" y="4895088"/>
-            <a:ext cx="1417712" cy="405384"/>
-          </a:xfrm>
-          <a:prstGeom prst="rect">
-            <a:avLst/>
-          </a:prstGeom>
-        </p:spPr>
-      </p:pic>
-      <p:sp>
-        <p:nvSpPr>
-          <p:cNvPr id="65" name="Text 32"/>
-          <p:cNvSpPr/>
-          <p:nvPr/>
-        </p:nvSpPr>
-        <p:spPr>
-          <a:xfrm>
-            <a:off x="3749824" y="5300472"/>
-            <a:ext cx="1417712" cy="256032"/>
-          </a:xfrm>
-          <a:prstGeom prst="rect">
-            <a:avLst/>
-          </a:prstGeom>
-          <a:noFill/>
-          <a:ln/>
-        </p:spPr>
-        <p:txBody>
-          <a:bodyPr wrap="square" rtlCol="0" anchor="ctr"/>
-          <a:lstStyle/>
-          <a:p>
-            <a:pPr algn="ctr" indent="0" marL="0">
-              <a:buNone/>
-            </a:pPr>
-            <a:r>
-              <a:rPr lang="en-US" sz="900" dirty="0">
-                <a:solidFill>
-                  <a:srgbClr val="1A1A2E"/>
-                </a:solidFill>
-                <a:latin typeface="Calibri" pitchFamily="34" charset="0"/>
-                <a:ea typeface="Calibri" pitchFamily="34" charset="-122"/>
-                <a:cs typeface="Calibri" pitchFamily="34" charset="-120"/>
-              </a:rPr>
-              <a:t>Subtle Medical</a:t>
-            </a:r>
-            <a:endParaRPr lang="en-US" sz="900" dirty="0"/>
-          </a:p>
-        </p:txBody>
-      </p:sp>
-      <p:pic>
-        <p:nvPicPr>
-          <p:cNvPr id="66" name="Image 31" descr="public/logos/ptw.jpg">    </p:cNvPr>
+          <p:cNvPr id="24" name="Image 10" descr="public/logos/mvision-ai.png">
+            <a:hlinkClick r:id="rId33" tooltip="MVision AI"/>
+          </p:cNvPr>
           <p:cNvPicPr>
             <a:picLocks noChangeAspect="1"/>
           </p:cNvPicPr>
@@ -4778,8 +4363,8 @@
         </p:blipFill>
         <p:spPr>
           <a:xfrm>
-            <a:off x="5386992" y="4895088"/>
-            <a:ext cx="1417712" cy="405384"/>
+            <a:off x="5386992" y="2136648"/>
+            <a:ext cx="1417712" cy="344424"/>
           </a:xfrm>
           <a:prstGeom prst="rect">
             <a:avLst/>
@@ -4788,13 +4373,13 @@
       </p:pic>
       <p:sp>
         <p:nvSpPr>
-          <p:cNvPr id="67" name="Text 33"/>
-          <p:cNvSpPr/>
-          <p:nvPr/>
-        </p:nvSpPr>
-        <p:spPr>
-          <a:xfrm>
-            <a:off x="5386992" y="5300472"/>
+          <p:cNvPr id="25" name="Text 12"/>
+          <p:cNvSpPr/>
+          <p:nvPr/>
+        </p:nvSpPr>
+        <p:spPr>
+          <a:xfrm>
+            <a:off x="5386992" y="2481072"/>
             <a:ext cx="1417712" cy="256032"/>
           </a:xfrm>
           <a:prstGeom prst="rect">
@@ -4811,15 +4396,22 @@
               <a:buNone/>
             </a:pPr>
             <a:r>
-              <a:rPr lang="en-US" sz="900" dirty="0">
+              <a:rPr lang="en-US" sz="900" u="sng" dirty="0">
                 <a:solidFill>
                   <a:srgbClr val="1A1A2E"/>
                 </a:solidFill>
                 <a:latin typeface="Calibri" pitchFamily="34" charset="0"/>
                 <a:ea typeface="Calibri" pitchFamily="34" charset="-122"/>
                 <a:cs typeface="Calibri" pitchFamily="34" charset="-120"/>
-              </a:rPr>
-              <a:t>PTW</a:t>
+                <a:hlinkClick r:id="rId34" invalidUrl="" action="" tgtFrame="" tooltip="" history="1" highlightClick="0" endSnd="0">
+                  <a:extLst>
+                    <a:ext uri="{A12FA001-AC4F-418D-AE19-62706E023703}">
+                      <ahyp:hlinkClr xmlns:ahyp="http://schemas.microsoft.com/office/drawing/2018/hyperlinkcolor" val="tx"/>
+                    </a:ext>
+                  </a:extLst>
+                </a:hlinkClick>
+              </a:rPr>
+              <a:t>MVision AI</a:t>
             </a:r>
             <a:endParaRPr lang="en-US" sz="900" dirty="0"/>
           </a:p>
@@ -4827,131 +4419,9 @@
       </p:sp>
       <p:pic>
         <p:nvPicPr>
-          <p:cNvPr id="68" name="Image 32" descr="public/logos/pymedix.png">    </p:cNvPr>
-          <p:cNvPicPr>
-            <a:picLocks noChangeAspect="1"/>
-          </p:cNvPicPr>
-          <p:nvPr/>
-        </p:nvPicPr>
-        <p:blipFill>
-          <a:blip r:embed="rId33"/>
-          <a:srcRect l="0" r="0" t="0" b="0"/>
-          <a:stretch/>
-        </p:blipFill>
-        <p:spPr>
-          <a:xfrm>
-            <a:off x="7024160" y="4895088"/>
-            <a:ext cx="1417712" cy="405384"/>
-          </a:xfrm>
-          <a:prstGeom prst="rect">
-            <a:avLst/>
-          </a:prstGeom>
-        </p:spPr>
-      </p:pic>
-      <p:sp>
-        <p:nvSpPr>
-          <p:cNvPr id="69" name="Text 34"/>
-          <p:cNvSpPr/>
-          <p:nvPr/>
-        </p:nvSpPr>
-        <p:spPr>
-          <a:xfrm>
-            <a:off x="7024160" y="5300472"/>
-            <a:ext cx="1417712" cy="256032"/>
-          </a:xfrm>
-          <a:prstGeom prst="rect">
-            <a:avLst/>
-          </a:prstGeom>
-          <a:noFill/>
-          <a:ln/>
-        </p:spPr>
-        <p:txBody>
-          <a:bodyPr wrap="square" rtlCol="0" anchor="ctr"/>
-          <a:lstStyle/>
-          <a:p>
-            <a:pPr algn="ctr" indent="0" marL="0">
-              <a:buNone/>
-            </a:pPr>
-            <a:r>
-              <a:rPr lang="en-US" sz="900" dirty="0">
-                <a:solidFill>
-                  <a:srgbClr val="1A1A2E"/>
-                </a:solidFill>
-                <a:latin typeface="Calibri" pitchFamily="34" charset="0"/>
-                <a:ea typeface="Calibri" pitchFamily="34" charset="-122"/>
-                <a:cs typeface="Calibri" pitchFamily="34" charset="-120"/>
-              </a:rPr>
-              <a:t>PyMedix</a:t>
-            </a:r>
-            <a:endParaRPr lang="en-US" sz="900" dirty="0"/>
-          </a:p>
-        </p:txBody>
-      </p:sp>
-      <p:pic>
-        <p:nvPicPr>
-          <p:cNvPr id="70" name="Image 33" descr="public/logos/medlever.jpg">    </p:cNvPr>
-          <p:cNvPicPr>
-            <a:picLocks noChangeAspect="1"/>
-          </p:cNvPicPr>
-          <p:nvPr/>
-        </p:nvPicPr>
-        <p:blipFill>
-          <a:blip r:embed="rId34"/>
-          <a:srcRect l="0" r="0" t="0" b="0"/>
-          <a:stretch/>
-        </p:blipFill>
-        <p:spPr>
-          <a:xfrm>
-            <a:off x="8661327" y="4895088"/>
-            <a:ext cx="1417712" cy="405384"/>
-          </a:xfrm>
-          <a:prstGeom prst="rect">
-            <a:avLst/>
-          </a:prstGeom>
-        </p:spPr>
-      </p:pic>
-      <p:sp>
-        <p:nvSpPr>
-          <p:cNvPr id="71" name="Text 35"/>
-          <p:cNvSpPr/>
-          <p:nvPr/>
-        </p:nvSpPr>
-        <p:spPr>
-          <a:xfrm>
-            <a:off x="8661327" y="5300472"/>
-            <a:ext cx="1417712" cy="256032"/>
-          </a:xfrm>
-          <a:prstGeom prst="rect">
-            <a:avLst/>
-          </a:prstGeom>
-          <a:noFill/>
-          <a:ln/>
-        </p:spPr>
-        <p:txBody>
-          <a:bodyPr wrap="square" rtlCol="0" anchor="ctr"/>
-          <a:lstStyle/>
-          <a:p>
-            <a:pPr algn="ctr" indent="0" marL="0">
-              <a:buNone/>
-            </a:pPr>
-            <a:r>
-              <a:rPr lang="en-US" sz="900" dirty="0">
-                <a:solidFill>
-                  <a:srgbClr val="1A1A2E"/>
-                </a:solidFill>
-                <a:latin typeface="Calibri" pitchFamily="34" charset="0"/>
-                <a:ea typeface="Calibri" pitchFamily="34" charset="-122"/>
-                <a:cs typeface="Calibri" pitchFamily="34" charset="-120"/>
-              </a:rPr>
-              <a:t>MedLever, Inc.</a:t>
-            </a:r>
-            <a:endParaRPr lang="en-US" sz="900" dirty="0"/>
-          </a:p>
-        </p:txBody>
-      </p:sp>
-      <p:pic>
-        <p:nvPicPr>
-          <p:cNvPr id="72" name="Image 34" descr="public/logos/medmind.png">    </p:cNvPr>
+          <p:cNvPr id="26" name="Image 11" descr="public/newsletters/2026-06/_logo-cache/radformation.png">
+            <a:hlinkClick r:id="rId36" tooltip="RadFormation"/>
+          </p:cNvPr>
           <p:cNvPicPr>
             <a:picLocks noChangeAspect="1"/>
           </p:cNvPicPr>
@@ -4964,8 +4434,8 @@
         </p:blipFill>
         <p:spPr>
           <a:xfrm>
-            <a:off x="10298495" y="4895088"/>
-            <a:ext cx="1417712" cy="405384"/>
+            <a:off x="7024160" y="2136648"/>
+            <a:ext cx="1417712" cy="344424"/>
           </a:xfrm>
           <a:prstGeom prst="rect">
             <a:avLst/>
@@ -4974,13 +4444,13 @@
       </p:pic>
       <p:sp>
         <p:nvSpPr>
-          <p:cNvPr id="73" name="Text 36"/>
-          <p:cNvSpPr/>
-          <p:nvPr/>
-        </p:nvSpPr>
-        <p:spPr>
-          <a:xfrm>
-            <a:off x="10298495" y="5300472"/>
+          <p:cNvPr id="27" name="Text 13"/>
+          <p:cNvSpPr/>
+          <p:nvPr/>
+        </p:nvSpPr>
+        <p:spPr>
+          <a:xfrm>
+            <a:off x="7024160" y="2481072"/>
             <a:ext cx="1417712" cy="256032"/>
           </a:xfrm>
           <a:prstGeom prst="rect">
@@ -4997,15 +4467,22 @@
               <a:buNone/>
             </a:pPr>
             <a:r>
-              <a:rPr lang="en-US" sz="900" dirty="0">
+              <a:rPr lang="en-US" sz="900" u="sng" dirty="0">
                 <a:solidFill>
                   <a:srgbClr val="1A1A2E"/>
                 </a:solidFill>
                 <a:latin typeface="Calibri" pitchFamily="34" charset="0"/>
                 <a:ea typeface="Calibri" pitchFamily="34" charset="-122"/>
                 <a:cs typeface="Calibri" pitchFamily="34" charset="-120"/>
-              </a:rPr>
-              <a:t>MedMind Technology Co., Ltd.</a:t>
+                <a:hlinkClick r:id="rId37" invalidUrl="" action="" tgtFrame="" tooltip="" history="1" highlightClick="0" endSnd="0">
+                  <a:extLst>
+                    <a:ext uri="{A12FA001-AC4F-418D-AE19-62706E023703}">
+                      <ahyp:hlinkClr xmlns:ahyp="http://schemas.microsoft.com/office/drawing/2018/hyperlinkcolor" val="tx"/>
+                    </a:ext>
+                  </a:extLst>
+                </a:hlinkClick>
+              </a:rPr>
+              <a:t>RadFormation</a:t>
             </a:r>
             <a:endParaRPr lang="en-US" sz="900" dirty="0"/>
           </a:p>
@@ -5013,131 +4490,9 @@
       </p:sp>
       <p:pic>
         <p:nvPicPr>
-          <p:cNvPr id="74" name="Image 35" descr="public/logos/quanta-computer.png">    </p:cNvPr>
-          <p:cNvPicPr>
-            <a:picLocks noChangeAspect="1"/>
-          </p:cNvPicPr>
-          <p:nvPr/>
-        </p:nvPicPr>
-        <p:blipFill>
-          <a:blip r:embed="rId36"/>
-          <a:srcRect l="0" r="0" t="0" b="0"/>
-          <a:stretch/>
-        </p:blipFill>
-        <p:spPr>
-          <a:xfrm>
-            <a:off x="475488" y="5794248"/>
-            <a:ext cx="1417712" cy="405384"/>
-          </a:xfrm>
-          <a:prstGeom prst="rect">
-            <a:avLst/>
-          </a:prstGeom>
-        </p:spPr>
-      </p:pic>
-      <p:sp>
-        <p:nvSpPr>
-          <p:cNvPr id="75" name="Text 37"/>
-          <p:cNvSpPr/>
-          <p:nvPr/>
-        </p:nvSpPr>
-        <p:spPr>
-          <a:xfrm>
-            <a:off x="475488" y="6199632"/>
-            <a:ext cx="1417712" cy="256032"/>
-          </a:xfrm>
-          <a:prstGeom prst="rect">
-            <a:avLst/>
-          </a:prstGeom>
-          <a:noFill/>
-          <a:ln/>
-        </p:spPr>
-        <p:txBody>
-          <a:bodyPr wrap="square" rtlCol="0" anchor="ctr"/>
-          <a:lstStyle/>
-          <a:p>
-            <a:pPr algn="ctr" indent="0" marL="0">
-              <a:buNone/>
-            </a:pPr>
-            <a:r>
-              <a:rPr lang="en-US" sz="900" dirty="0">
-                <a:solidFill>
-                  <a:srgbClr val="1A1A2E"/>
-                </a:solidFill>
-                <a:latin typeface="Calibri" pitchFamily="34" charset="0"/>
-                <a:ea typeface="Calibri" pitchFamily="34" charset="-122"/>
-                <a:cs typeface="Calibri" pitchFamily="34" charset="-120"/>
-              </a:rPr>
-              <a:t>Quanta Computer Inc.</a:t>
-            </a:r>
-            <a:endParaRPr lang="en-US" sz="900" dirty="0"/>
-          </a:p>
-        </p:txBody>
-      </p:sp>
-      <p:pic>
-        <p:nvPicPr>
-          <p:cNvPr id="76" name="Image 36" descr="public/logos/Elekta.png">    </p:cNvPr>
-          <p:cNvPicPr>
-            <a:picLocks noChangeAspect="1"/>
-          </p:cNvPicPr>
-          <p:nvPr/>
-        </p:nvPicPr>
-        <p:blipFill>
-          <a:blip r:embed="rId37"/>
-          <a:srcRect l="0" r="0" t="0" b="0"/>
-          <a:stretch/>
-        </p:blipFill>
-        <p:spPr>
-          <a:xfrm>
-            <a:off x="2112656" y="5794248"/>
-            <a:ext cx="1417712" cy="405384"/>
-          </a:xfrm>
-          <a:prstGeom prst="rect">
-            <a:avLst/>
-          </a:prstGeom>
-        </p:spPr>
-      </p:pic>
-      <p:sp>
-        <p:nvSpPr>
-          <p:cNvPr id="77" name="Text 38"/>
-          <p:cNvSpPr/>
-          <p:nvPr/>
-        </p:nvSpPr>
-        <p:spPr>
-          <a:xfrm>
-            <a:off x="2112656" y="6199632"/>
-            <a:ext cx="1417712" cy="256032"/>
-          </a:xfrm>
-          <a:prstGeom prst="rect">
-            <a:avLst/>
-          </a:prstGeom>
-          <a:noFill/>
-          <a:ln/>
-        </p:spPr>
-        <p:txBody>
-          <a:bodyPr wrap="square" rtlCol="0" anchor="ctr"/>
-          <a:lstStyle/>
-          <a:p>
-            <a:pPr algn="ctr" indent="0" marL="0">
-              <a:buNone/>
-            </a:pPr>
-            <a:r>
-              <a:rPr lang="en-US" sz="900" dirty="0">
-                <a:solidFill>
-                  <a:srgbClr val="1A1A2E"/>
-                </a:solidFill>
-                <a:latin typeface="Calibri" pitchFamily="34" charset="0"/>
-                <a:ea typeface="Calibri" pitchFamily="34" charset="-122"/>
-                <a:cs typeface="Calibri" pitchFamily="34" charset="-120"/>
-              </a:rPr>
-              <a:t>Elekta</a:t>
-            </a:r>
-            <a:endParaRPr lang="en-US" sz="900" dirty="0"/>
-          </a:p>
-        </p:txBody>
-      </p:sp>
-      <p:pic>
-        <p:nvPicPr>
-          <p:cNvPr id="78" name="Image 37" descr="public/logos/accuray.png">    </p:cNvPr>
+          <p:cNvPr id="28" name="Image 12" descr="public/logos/synaptiq.png">
+            <a:hlinkClick r:id="rId39" tooltip="Synaptiq"/>
+          </p:cNvPr>
           <p:cNvPicPr>
             <a:picLocks noChangeAspect="1"/>
           </p:cNvPicPr>
@@ -5150,8 +4505,8 @@
         </p:blipFill>
         <p:spPr>
           <a:xfrm>
-            <a:off x="3749824" y="5794248"/>
-            <a:ext cx="1417712" cy="405384"/>
+            <a:off x="8661327" y="2136648"/>
+            <a:ext cx="1417712" cy="344424"/>
           </a:xfrm>
           <a:prstGeom prst="rect">
             <a:avLst/>
@@ -5160,13 +4515,13 @@
       </p:pic>
       <p:sp>
         <p:nvSpPr>
-          <p:cNvPr id="79" name="Text 39"/>
-          <p:cNvSpPr/>
-          <p:nvPr/>
-        </p:nvSpPr>
-        <p:spPr>
-          <a:xfrm>
-            <a:off x="3749824" y="6199632"/>
+          <p:cNvPr id="29" name="Text 14"/>
+          <p:cNvSpPr/>
+          <p:nvPr/>
+        </p:nvSpPr>
+        <p:spPr>
+          <a:xfrm>
+            <a:off x="8661327" y="2481072"/>
             <a:ext cx="1417712" cy="256032"/>
           </a:xfrm>
           <a:prstGeom prst="rect">
@@ -5183,15 +4538,22 @@
               <a:buNone/>
             </a:pPr>
             <a:r>
-              <a:rPr lang="en-US" sz="900" dirty="0">
+              <a:rPr lang="en-US" sz="900" u="sng" dirty="0">
                 <a:solidFill>
                   <a:srgbClr val="1A1A2E"/>
                 </a:solidFill>
                 <a:latin typeface="Calibri" pitchFamily="34" charset="0"/>
                 <a:ea typeface="Calibri" pitchFamily="34" charset="-122"/>
                 <a:cs typeface="Calibri" pitchFamily="34" charset="-120"/>
-              </a:rPr>
-              <a:t>Accuray®</a:t>
+                <a:hlinkClick r:id="rId40" invalidUrl="" action="" tgtFrame="" tooltip="" history="1" highlightClick="0" endSnd="0">
+                  <a:extLst>
+                    <a:ext uri="{A12FA001-AC4F-418D-AE19-62706E023703}">
+                      <ahyp:hlinkClr xmlns:ahyp="http://schemas.microsoft.com/office/drawing/2018/hyperlinkcolor" val="tx"/>
+                    </a:ext>
+                  </a:extLst>
+                </a:hlinkClick>
+              </a:rPr>
+              <a:t>Synaptiq</a:t>
             </a:r>
             <a:endParaRPr lang="en-US" sz="900" dirty="0"/>
           </a:p>
@@ -5199,131 +4561,9 @@
       </p:sp>
       <p:pic>
         <p:nvPicPr>
-          <p:cNvPr id="80" name="Image 38" descr="public/logos/SunNuclear.png">    </p:cNvPr>
-          <p:cNvPicPr>
-            <a:picLocks noChangeAspect="1"/>
-          </p:cNvPicPr>
-          <p:nvPr/>
-        </p:nvPicPr>
-        <p:blipFill>
-          <a:blip r:embed="rId39"/>
-          <a:srcRect l="0" r="0" t="0" b="0"/>
-          <a:stretch/>
-        </p:blipFill>
-        <p:spPr>
-          <a:xfrm>
-            <a:off x="5386992" y="5794248"/>
-            <a:ext cx="1417712" cy="405384"/>
-          </a:xfrm>
-          <a:prstGeom prst="rect">
-            <a:avLst/>
-          </a:prstGeom>
-        </p:spPr>
-      </p:pic>
-      <p:sp>
-        <p:nvSpPr>
-          <p:cNvPr id="81" name="Text 40"/>
-          <p:cNvSpPr/>
-          <p:nvPr/>
-        </p:nvSpPr>
-        <p:spPr>
-          <a:xfrm>
-            <a:off x="5386992" y="6199632"/>
-            <a:ext cx="1417712" cy="256032"/>
-          </a:xfrm>
-          <a:prstGeom prst="rect">
-            <a:avLst/>
-          </a:prstGeom>
-          <a:noFill/>
-          <a:ln/>
-        </p:spPr>
-        <p:txBody>
-          <a:bodyPr wrap="square" rtlCol="0" anchor="ctr"/>
-          <a:lstStyle/>
-          <a:p>
-            <a:pPr algn="ctr" indent="0" marL="0">
-              <a:buNone/>
-            </a:pPr>
-            <a:r>
-              <a:rPr lang="en-US" sz="900" dirty="0">
-                <a:solidFill>
-                  <a:srgbClr val="1A1A2E"/>
-                </a:solidFill>
-                <a:latin typeface="Calibri" pitchFamily="34" charset="0"/>
-                <a:ea typeface="Calibri" pitchFamily="34" charset="-122"/>
-                <a:cs typeface="Calibri" pitchFamily="34" charset="-120"/>
-              </a:rPr>
-              <a:t>Sun Nuclear (Mirion Medical)</a:t>
-            </a:r>
-            <a:endParaRPr lang="en-US" sz="900" dirty="0"/>
-          </a:p>
-        </p:txBody>
-      </p:sp>
-      <p:pic>
-        <p:nvPicPr>
-          <p:cNvPr id="82" name="Image 39" descr="public/newsletters/2026-06/_logo-cache/md_anderson.png">    </p:cNvPr>
-          <p:cNvPicPr>
-            <a:picLocks noChangeAspect="1"/>
-          </p:cNvPicPr>
-          <p:nvPr/>
-        </p:nvPicPr>
-        <p:blipFill>
-          <a:blip r:embed="rId40"/>
-          <a:srcRect l="0" r="0" t="0" b="0"/>
-          <a:stretch/>
-        </p:blipFill>
-        <p:spPr>
-          <a:xfrm>
-            <a:off x="7024160" y="5794248"/>
-            <a:ext cx="1417712" cy="405384"/>
-          </a:xfrm>
-          <a:prstGeom prst="rect">
-            <a:avLst/>
-          </a:prstGeom>
-        </p:spPr>
-      </p:pic>
-      <p:sp>
-        <p:nvSpPr>
-          <p:cNvPr id="83" name="Text 41"/>
-          <p:cNvSpPr/>
-          <p:nvPr/>
-        </p:nvSpPr>
-        <p:spPr>
-          <a:xfrm>
-            <a:off x="7024160" y="6199632"/>
-            <a:ext cx="1417712" cy="256032"/>
-          </a:xfrm>
-          <a:prstGeom prst="rect">
-            <a:avLst/>
-          </a:prstGeom>
-          <a:noFill/>
-          <a:ln/>
-        </p:spPr>
-        <p:txBody>
-          <a:bodyPr wrap="square" rtlCol="0" anchor="ctr"/>
-          <a:lstStyle/>
-          <a:p>
-            <a:pPr algn="ctr" indent="0" marL="0">
-              <a:buNone/>
-            </a:pPr>
-            <a:r>
-              <a:rPr lang="en-US" sz="900" dirty="0">
-                <a:solidFill>
-                  <a:srgbClr val="1A1A2E"/>
-                </a:solidFill>
-                <a:latin typeface="Calibri" pitchFamily="34" charset="0"/>
-                <a:ea typeface="Calibri" pitchFamily="34" charset="-122"/>
-                <a:cs typeface="Calibri" pitchFamily="34" charset="-120"/>
-              </a:rPr>
-              <a:t>MD Anderson Cancer Center</a:t>
-            </a:r>
-            <a:endParaRPr lang="en-US" sz="900" dirty="0"/>
-          </a:p>
-        </p:txBody>
-      </p:sp>
-      <p:pic>
-        <p:nvPicPr>
-          <p:cNvPr id="84" name="Image 40" descr="public/logos/Brainlab.jpg">    </p:cNvPr>
+          <p:cNvPr id="30" name="Image 13" descr="public/logos/therapanacea.png">
+            <a:hlinkClick r:id="rId42" tooltip="Therapanacea"/>
+          </p:cNvPr>
           <p:cNvPicPr>
             <a:picLocks noChangeAspect="1"/>
           </p:cNvPicPr>
@@ -5336,8 +4576,8 @@
         </p:blipFill>
         <p:spPr>
           <a:xfrm>
-            <a:off x="8661327" y="5794248"/>
-            <a:ext cx="1417712" cy="405384"/>
+            <a:off x="10298495" y="2136648"/>
+            <a:ext cx="1417712" cy="344424"/>
           </a:xfrm>
           <a:prstGeom prst="rect">
             <a:avLst/>
@@ -5346,13 +4586,13 @@
       </p:pic>
       <p:sp>
         <p:nvSpPr>
-          <p:cNvPr id="85" name="Text 42"/>
-          <p:cNvSpPr/>
-          <p:nvPr/>
-        </p:nvSpPr>
-        <p:spPr>
-          <a:xfrm>
-            <a:off x="8661327" y="6199632"/>
+          <p:cNvPr id="31" name="Text 15"/>
+          <p:cNvSpPr/>
+          <p:nvPr/>
+        </p:nvSpPr>
+        <p:spPr>
+          <a:xfrm>
+            <a:off x="10298495" y="2481072"/>
             <a:ext cx="1417712" cy="256032"/>
           </a:xfrm>
           <a:prstGeom prst="rect">
@@ -5369,15 +4609,22 @@
               <a:buNone/>
             </a:pPr>
             <a:r>
-              <a:rPr lang="en-US" sz="900" dirty="0">
+              <a:rPr lang="en-US" sz="900" u="sng" dirty="0">
                 <a:solidFill>
                   <a:srgbClr val="1A1A2E"/>
                 </a:solidFill>
                 <a:latin typeface="Calibri" pitchFamily="34" charset="0"/>
                 <a:ea typeface="Calibri" pitchFamily="34" charset="-122"/>
                 <a:cs typeface="Calibri" pitchFamily="34" charset="-120"/>
-              </a:rPr>
-              <a:t>Brainlab</a:t>
+                <a:hlinkClick r:id="rId43" invalidUrl="" action="" tgtFrame="" tooltip="" history="1" highlightClick="0" endSnd="0">
+                  <a:extLst>
+                    <a:ext uri="{A12FA001-AC4F-418D-AE19-62706E023703}">
+                      <ahyp:hlinkClr xmlns:ahyp="http://schemas.microsoft.com/office/drawing/2018/hyperlinkcolor" val="tx"/>
+                    </a:ext>
+                  </a:extLst>
+                </a:hlinkClick>
+              </a:rPr>
+              <a:t>Therapanacea</a:t>
             </a:r>
             <a:endParaRPr lang="en-US" sz="900" dirty="0"/>
           </a:p>
@@ -5385,21 +4632,23 @@
       </p:sp>
       <p:pic>
         <p:nvPicPr>
-          <p:cNvPr id="86" name="Image 41" descr="public/logos/varian.jpg">    </p:cNvPr>
+          <p:cNvPr id="32" name="Image 14" descr="public/logos/vysioner.png">
+            <a:hlinkClick r:id="rId45" tooltip="Vysioner"/>
+          </p:cNvPr>
           <p:cNvPicPr>
             <a:picLocks noChangeAspect="1"/>
           </p:cNvPicPr>
           <p:nvPr/>
         </p:nvPicPr>
         <p:blipFill>
-          <a:blip r:embed="rId42"/>
+          <a:blip r:embed="rId44"/>
           <a:srcRect l="0" r="0" t="0" b="0"/>
           <a:stretch/>
         </p:blipFill>
         <p:spPr>
           <a:xfrm>
-            <a:off x="10298495" y="5794248"/>
-            <a:ext cx="1417712" cy="405384"/>
+            <a:off x="475488" y="2974848"/>
+            <a:ext cx="1417712" cy="344424"/>
           </a:xfrm>
           <a:prstGeom prst="rect">
             <a:avLst/>
@@ -5408,13 +4657,1930 @@
       </p:pic>
       <p:sp>
         <p:nvSpPr>
+          <p:cNvPr id="33" name="Text 16"/>
+          <p:cNvSpPr/>
+          <p:nvPr/>
+        </p:nvSpPr>
+        <p:spPr>
+          <a:xfrm>
+            <a:off x="475488" y="3319272"/>
+            <a:ext cx="1417712" cy="256032"/>
+          </a:xfrm>
+          <a:prstGeom prst="rect">
+            <a:avLst/>
+          </a:prstGeom>
+          <a:noFill/>
+          <a:ln/>
+        </p:spPr>
+        <p:txBody>
+          <a:bodyPr wrap="square" rtlCol="0" anchor="ctr"/>
+          <a:lstStyle/>
+          <a:p>
+            <a:pPr algn="ctr" indent="0" marL="0">
+              <a:buNone/>
+            </a:pPr>
+            <a:r>
+              <a:rPr lang="en-US" sz="900" u="sng" dirty="0">
+                <a:solidFill>
+                  <a:srgbClr val="1A1A2E"/>
+                </a:solidFill>
+                <a:latin typeface="Calibri" pitchFamily="34" charset="0"/>
+                <a:ea typeface="Calibri" pitchFamily="34" charset="-122"/>
+                <a:cs typeface="Calibri" pitchFamily="34" charset="-120"/>
+                <a:hlinkClick r:id="rId46" invalidUrl="" action="" tgtFrame="" tooltip="" history="1" highlightClick="0" endSnd="0">
+                  <a:extLst>
+                    <a:ext uri="{A12FA001-AC4F-418D-AE19-62706E023703}">
+                      <ahyp:hlinkClr xmlns:ahyp="http://schemas.microsoft.com/office/drawing/2018/hyperlinkcolor" val="tx"/>
+                    </a:ext>
+                  </a:extLst>
+                </a:hlinkClick>
+              </a:rPr>
+              <a:t>Vysioner</a:t>
+            </a:r>
+            <a:endParaRPr lang="en-US" sz="900" dirty="0"/>
+          </a:p>
+        </p:txBody>
+      </p:sp>
+      <p:pic>
+        <p:nvPicPr>
+          <p:cNvPr id="34" name="Image 15" descr="public/logos/wisdom-tech.png">
+            <a:hlinkClick r:id="rId48" tooltip="Wisdom Tech"/>
+          </p:cNvPr>
+          <p:cNvPicPr>
+            <a:picLocks noChangeAspect="1"/>
+          </p:cNvPicPr>
+          <p:nvPr/>
+        </p:nvPicPr>
+        <p:blipFill>
+          <a:blip r:embed="rId47"/>
+          <a:srcRect l="0" r="0" t="0" b="0"/>
+          <a:stretch/>
+        </p:blipFill>
+        <p:spPr>
+          <a:xfrm>
+            <a:off x="2112656" y="2974848"/>
+            <a:ext cx="1417712" cy="344424"/>
+          </a:xfrm>
+          <a:prstGeom prst="rect">
+            <a:avLst/>
+          </a:prstGeom>
+        </p:spPr>
+      </p:pic>
+      <p:sp>
+        <p:nvSpPr>
+          <p:cNvPr id="35" name="Text 17"/>
+          <p:cNvSpPr/>
+          <p:nvPr/>
+        </p:nvSpPr>
+        <p:spPr>
+          <a:xfrm>
+            <a:off x="2112656" y="3319272"/>
+            <a:ext cx="1417712" cy="256032"/>
+          </a:xfrm>
+          <a:prstGeom prst="rect">
+            <a:avLst/>
+          </a:prstGeom>
+          <a:noFill/>
+          <a:ln/>
+        </p:spPr>
+        <p:txBody>
+          <a:bodyPr wrap="square" rtlCol="0" anchor="ctr"/>
+          <a:lstStyle/>
+          <a:p>
+            <a:pPr algn="ctr" indent="0" marL="0">
+              <a:buNone/>
+            </a:pPr>
+            <a:r>
+              <a:rPr lang="en-US" sz="900" u="sng" dirty="0">
+                <a:solidFill>
+                  <a:srgbClr val="1A1A2E"/>
+                </a:solidFill>
+                <a:latin typeface="Calibri" pitchFamily="34" charset="0"/>
+                <a:ea typeface="Calibri" pitchFamily="34" charset="-122"/>
+                <a:cs typeface="Calibri" pitchFamily="34" charset="-120"/>
+                <a:hlinkClick r:id="rId49" invalidUrl="" action="" tgtFrame="" tooltip="" history="1" highlightClick="0" endSnd="0">
+                  <a:extLst>
+                    <a:ext uri="{A12FA001-AC4F-418D-AE19-62706E023703}">
+                      <ahyp:hlinkClr xmlns:ahyp="http://schemas.microsoft.com/office/drawing/2018/hyperlinkcolor" val="tx"/>
+                    </a:ext>
+                  </a:extLst>
+                </a:hlinkClick>
+              </a:rPr>
+              <a:t>Wisdom Tech</a:t>
+            </a:r>
+            <a:endParaRPr lang="en-US" sz="900" dirty="0"/>
+          </a:p>
+        </p:txBody>
+      </p:sp>
+      <p:pic>
+        <p:nvPicPr>
+          <p:cNvPr id="36" name="Image 16" descr="public/logos/oncosoft.png">
+            <a:hlinkClick r:id="rId51" tooltip="Oncosoft"/>
+          </p:cNvPr>
+          <p:cNvPicPr>
+            <a:picLocks noChangeAspect="1"/>
+          </p:cNvPicPr>
+          <p:nvPr/>
+        </p:nvPicPr>
+        <p:blipFill>
+          <a:blip r:embed="rId50"/>
+          <a:srcRect l="0" r="0" t="0" b="0"/>
+          <a:stretch/>
+        </p:blipFill>
+        <p:spPr>
+          <a:xfrm>
+            <a:off x="3749824" y="2974848"/>
+            <a:ext cx="1417712" cy="344424"/>
+          </a:xfrm>
+          <a:prstGeom prst="rect">
+            <a:avLst/>
+          </a:prstGeom>
+        </p:spPr>
+      </p:pic>
+      <p:sp>
+        <p:nvSpPr>
+          <p:cNvPr id="37" name="Text 18"/>
+          <p:cNvSpPr/>
+          <p:nvPr/>
+        </p:nvSpPr>
+        <p:spPr>
+          <a:xfrm>
+            <a:off x="3749824" y="3319272"/>
+            <a:ext cx="1417712" cy="256032"/>
+          </a:xfrm>
+          <a:prstGeom prst="rect">
+            <a:avLst/>
+          </a:prstGeom>
+          <a:noFill/>
+          <a:ln/>
+        </p:spPr>
+        <p:txBody>
+          <a:bodyPr wrap="square" rtlCol="0" anchor="ctr"/>
+          <a:lstStyle/>
+          <a:p>
+            <a:pPr algn="ctr" indent="0" marL="0">
+              <a:buNone/>
+            </a:pPr>
+            <a:r>
+              <a:rPr lang="en-US" sz="900" u="sng" dirty="0">
+                <a:solidFill>
+                  <a:srgbClr val="1A1A2E"/>
+                </a:solidFill>
+                <a:latin typeface="Calibri" pitchFamily="34" charset="0"/>
+                <a:ea typeface="Calibri" pitchFamily="34" charset="-122"/>
+                <a:cs typeface="Calibri" pitchFamily="34" charset="-120"/>
+                <a:hlinkClick r:id="rId52" invalidUrl="" action="" tgtFrame="" tooltip="" history="1" highlightClick="0" endSnd="0">
+                  <a:extLst>
+                    <a:ext uri="{A12FA001-AC4F-418D-AE19-62706E023703}">
+                      <ahyp:hlinkClr xmlns:ahyp="http://schemas.microsoft.com/office/drawing/2018/hyperlinkcolor" val="tx"/>
+                    </a:ext>
+                  </a:extLst>
+                </a:hlinkClick>
+              </a:rPr>
+              <a:t>Oncosoft</a:t>
+            </a:r>
+            <a:endParaRPr lang="en-US" sz="900" dirty="0"/>
+          </a:p>
+        </p:txBody>
+      </p:sp>
+      <p:pic>
+        <p:nvPicPr>
+          <p:cNvPr id="38" name="Image 17" descr="public/logos/medcom.png">
+            <a:hlinkClick r:id="rId54" tooltip="MedCom"/>
+          </p:cNvPr>
+          <p:cNvPicPr>
+            <a:picLocks noChangeAspect="1"/>
+          </p:cNvPicPr>
+          <p:nvPr/>
+        </p:nvPicPr>
+        <p:blipFill>
+          <a:blip r:embed="rId53"/>
+          <a:srcRect l="0" r="0" t="0" b="0"/>
+          <a:stretch/>
+        </p:blipFill>
+        <p:spPr>
+          <a:xfrm>
+            <a:off x="5386992" y="2974848"/>
+            <a:ext cx="1417712" cy="344424"/>
+          </a:xfrm>
+          <a:prstGeom prst="rect">
+            <a:avLst/>
+          </a:prstGeom>
+        </p:spPr>
+      </p:pic>
+      <p:sp>
+        <p:nvSpPr>
+          <p:cNvPr id="39" name="Text 19"/>
+          <p:cNvSpPr/>
+          <p:nvPr/>
+        </p:nvSpPr>
+        <p:spPr>
+          <a:xfrm>
+            <a:off x="5386992" y="3319272"/>
+            <a:ext cx="1417712" cy="256032"/>
+          </a:xfrm>
+          <a:prstGeom prst="rect">
+            <a:avLst/>
+          </a:prstGeom>
+          <a:noFill/>
+          <a:ln/>
+        </p:spPr>
+        <p:txBody>
+          <a:bodyPr wrap="square" rtlCol="0" anchor="ctr"/>
+          <a:lstStyle/>
+          <a:p>
+            <a:pPr algn="ctr" indent="0" marL="0">
+              <a:buNone/>
+            </a:pPr>
+            <a:r>
+              <a:rPr lang="en-US" sz="900" u="sng" dirty="0">
+                <a:solidFill>
+                  <a:srgbClr val="1A1A2E"/>
+                </a:solidFill>
+                <a:latin typeface="Calibri" pitchFamily="34" charset="0"/>
+                <a:ea typeface="Calibri" pitchFamily="34" charset="-122"/>
+                <a:cs typeface="Calibri" pitchFamily="34" charset="-120"/>
+                <a:hlinkClick r:id="rId55" invalidUrl="" action="" tgtFrame="" tooltip="" history="1" highlightClick="0" endSnd="0">
+                  <a:extLst>
+                    <a:ext uri="{A12FA001-AC4F-418D-AE19-62706E023703}">
+                      <ahyp:hlinkClr xmlns:ahyp="http://schemas.microsoft.com/office/drawing/2018/hyperlinkcolor" val="tx"/>
+                    </a:ext>
+                  </a:extLst>
+                </a:hlinkClick>
+              </a:rPr>
+              <a:t>MedCom</a:t>
+            </a:r>
+            <a:endParaRPr lang="en-US" sz="900" dirty="0"/>
+          </a:p>
+        </p:txBody>
+      </p:sp>
+      <p:pic>
+        <p:nvPicPr>
+          <p:cNvPr id="40" name="Image 18" descr="public/logos/ge_healthcare.png">
+            <a:hlinkClick r:id="rId57" tooltip="GE Healthcare"/>
+          </p:cNvPr>
+          <p:cNvPicPr>
+            <a:picLocks noChangeAspect="1"/>
+          </p:cNvPicPr>
+          <p:nvPr/>
+        </p:nvPicPr>
+        <p:blipFill>
+          <a:blip r:embed="rId56"/>
+          <a:srcRect l="0" r="0" t="0" b="0"/>
+          <a:stretch/>
+        </p:blipFill>
+        <p:spPr>
+          <a:xfrm>
+            <a:off x="7024160" y="2974848"/>
+            <a:ext cx="1417712" cy="344424"/>
+          </a:xfrm>
+          <a:prstGeom prst="rect">
+            <a:avLst/>
+          </a:prstGeom>
+        </p:spPr>
+      </p:pic>
+      <p:sp>
+        <p:nvSpPr>
+          <p:cNvPr id="41" name="Text 20"/>
+          <p:cNvSpPr/>
+          <p:nvPr/>
+        </p:nvSpPr>
+        <p:spPr>
+          <a:xfrm>
+            <a:off x="7024160" y="3319272"/>
+            <a:ext cx="1417712" cy="256032"/>
+          </a:xfrm>
+          <a:prstGeom prst="rect">
+            <a:avLst/>
+          </a:prstGeom>
+          <a:noFill/>
+          <a:ln/>
+        </p:spPr>
+        <p:txBody>
+          <a:bodyPr wrap="square" rtlCol="0" anchor="ctr"/>
+          <a:lstStyle/>
+          <a:p>
+            <a:pPr algn="ctr" indent="0" marL="0">
+              <a:buNone/>
+            </a:pPr>
+            <a:r>
+              <a:rPr lang="en-US" sz="900" u="sng" dirty="0">
+                <a:solidFill>
+                  <a:srgbClr val="1A1A2E"/>
+                </a:solidFill>
+                <a:latin typeface="Calibri" pitchFamily="34" charset="0"/>
+                <a:ea typeface="Calibri" pitchFamily="34" charset="-122"/>
+                <a:cs typeface="Calibri" pitchFamily="34" charset="-120"/>
+                <a:hlinkClick r:id="rId58" invalidUrl="" action="" tgtFrame="" tooltip="" history="1" highlightClick="0" endSnd="0">
+                  <a:extLst>
+                    <a:ext uri="{A12FA001-AC4F-418D-AE19-62706E023703}">
+                      <ahyp:hlinkClr xmlns:ahyp="http://schemas.microsoft.com/office/drawing/2018/hyperlinkcolor" val="tx"/>
+                    </a:ext>
+                  </a:extLst>
+                </a:hlinkClick>
+              </a:rPr>
+              <a:t>GE Healthcare</a:t>
+            </a:r>
+            <a:endParaRPr lang="en-US" sz="900" dirty="0"/>
+          </a:p>
+        </p:txBody>
+      </p:sp>
+      <p:pic>
+        <p:nvPicPr>
+          <p:cNvPr id="42" name="Image 19" descr="public/logos/philips.png">
+            <a:hlinkClick r:id="rId60" tooltip="Philips"/>
+          </p:cNvPr>
+          <p:cNvPicPr>
+            <a:picLocks noChangeAspect="1"/>
+          </p:cNvPicPr>
+          <p:nvPr/>
+        </p:nvPicPr>
+        <p:blipFill>
+          <a:blip r:embed="rId59"/>
+          <a:srcRect l="0" r="0" t="0" b="0"/>
+          <a:stretch/>
+        </p:blipFill>
+        <p:spPr>
+          <a:xfrm>
+            <a:off x="8661327" y="2974848"/>
+            <a:ext cx="1417712" cy="344424"/>
+          </a:xfrm>
+          <a:prstGeom prst="rect">
+            <a:avLst/>
+          </a:prstGeom>
+        </p:spPr>
+      </p:pic>
+      <p:sp>
+        <p:nvSpPr>
+          <p:cNvPr id="43" name="Text 21"/>
+          <p:cNvSpPr/>
+          <p:nvPr/>
+        </p:nvSpPr>
+        <p:spPr>
+          <a:xfrm>
+            <a:off x="8661327" y="3319272"/>
+            <a:ext cx="1417712" cy="256032"/>
+          </a:xfrm>
+          <a:prstGeom prst="rect">
+            <a:avLst/>
+          </a:prstGeom>
+          <a:noFill/>
+          <a:ln/>
+        </p:spPr>
+        <p:txBody>
+          <a:bodyPr wrap="square" rtlCol="0" anchor="ctr"/>
+          <a:lstStyle/>
+          <a:p>
+            <a:pPr algn="ctr" indent="0" marL="0">
+              <a:buNone/>
+            </a:pPr>
+            <a:r>
+              <a:rPr lang="en-US" sz="900" u="sng" dirty="0">
+                <a:solidFill>
+                  <a:srgbClr val="1A1A2E"/>
+                </a:solidFill>
+                <a:latin typeface="Calibri" pitchFamily="34" charset="0"/>
+                <a:ea typeface="Calibri" pitchFamily="34" charset="-122"/>
+                <a:cs typeface="Calibri" pitchFamily="34" charset="-120"/>
+                <a:hlinkClick r:id="rId61" invalidUrl="" action="" tgtFrame="" tooltip="" history="1" highlightClick="0" endSnd="0">
+                  <a:extLst>
+                    <a:ext uri="{A12FA001-AC4F-418D-AE19-62706E023703}">
+                      <ahyp:hlinkClr xmlns:ahyp="http://schemas.microsoft.com/office/drawing/2018/hyperlinkcolor" val="tx"/>
+                    </a:ext>
+                  </a:extLst>
+                </a:hlinkClick>
+              </a:rPr>
+              <a:t>Philips</a:t>
+            </a:r>
+            <a:endParaRPr lang="en-US" sz="900" dirty="0"/>
+          </a:p>
+        </p:txBody>
+      </p:sp>
+      <p:pic>
+        <p:nvPicPr>
+          <p:cNvPr id="44" name="Image 20" descr="public/logos/siemens.png">
+            <a:hlinkClick r:id="rId63" tooltip="Siemens Healthineers"/>
+          </p:cNvPr>
+          <p:cNvPicPr>
+            <a:picLocks noChangeAspect="1"/>
+          </p:cNvPicPr>
+          <p:nvPr/>
+        </p:nvPicPr>
+        <p:blipFill>
+          <a:blip r:embed="rId62"/>
+          <a:srcRect l="0" r="0" t="0" b="0"/>
+          <a:stretch/>
+        </p:blipFill>
+        <p:spPr>
+          <a:xfrm>
+            <a:off x="10298495" y="2974848"/>
+            <a:ext cx="1417712" cy="344424"/>
+          </a:xfrm>
+          <a:prstGeom prst="rect">
+            <a:avLst/>
+          </a:prstGeom>
+        </p:spPr>
+      </p:pic>
+      <p:sp>
+        <p:nvSpPr>
+          <p:cNvPr id="45" name="Text 22"/>
+          <p:cNvSpPr/>
+          <p:nvPr/>
+        </p:nvSpPr>
+        <p:spPr>
+          <a:xfrm>
+            <a:off x="10298495" y="3319272"/>
+            <a:ext cx="1417712" cy="256032"/>
+          </a:xfrm>
+          <a:prstGeom prst="rect">
+            <a:avLst/>
+          </a:prstGeom>
+          <a:noFill/>
+          <a:ln/>
+        </p:spPr>
+        <p:txBody>
+          <a:bodyPr wrap="square" rtlCol="0" anchor="ctr"/>
+          <a:lstStyle/>
+          <a:p>
+            <a:pPr algn="ctr" indent="0" marL="0">
+              <a:buNone/>
+            </a:pPr>
+            <a:r>
+              <a:rPr lang="en-US" sz="900" u="sng" dirty="0">
+                <a:solidFill>
+                  <a:srgbClr val="1A1A2E"/>
+                </a:solidFill>
+                <a:latin typeface="Calibri" pitchFamily="34" charset="0"/>
+                <a:ea typeface="Calibri" pitchFamily="34" charset="-122"/>
+                <a:cs typeface="Calibri" pitchFamily="34" charset="-120"/>
+                <a:hlinkClick r:id="rId64" invalidUrl="" action="" tgtFrame="" tooltip="" history="1" highlightClick="0" endSnd="0">
+                  <a:extLst>
+                    <a:ext uri="{A12FA001-AC4F-418D-AE19-62706E023703}">
+                      <ahyp:hlinkClr xmlns:ahyp="http://schemas.microsoft.com/office/drawing/2018/hyperlinkcolor" val="tx"/>
+                    </a:ext>
+                  </a:extLst>
+                </a:hlinkClick>
+              </a:rPr>
+              <a:t>Siemens Healthineers</a:t>
+            </a:r>
+            <a:endParaRPr lang="en-US" sz="900" dirty="0"/>
+          </a:p>
+        </p:txBody>
+      </p:sp>
+      <p:pic>
+        <p:nvPicPr>
+          <p:cNvPr id="46" name="Image 21" descr="public/logos/canon.jpg">
+            <a:hlinkClick r:id="rId66" tooltip="Canon Medical Systems"/>
+          </p:cNvPr>
+          <p:cNvPicPr>
+            <a:picLocks noChangeAspect="1"/>
+          </p:cNvPicPr>
+          <p:nvPr/>
+        </p:nvPicPr>
+        <p:blipFill>
+          <a:blip r:embed="rId65"/>
+          <a:srcRect l="0" r="0" t="0" b="0"/>
+          <a:stretch/>
+        </p:blipFill>
+        <p:spPr>
+          <a:xfrm>
+            <a:off x="475488" y="3813048"/>
+            <a:ext cx="1417712" cy="344424"/>
+          </a:xfrm>
+          <a:prstGeom prst="rect">
+            <a:avLst/>
+          </a:prstGeom>
+        </p:spPr>
+      </p:pic>
+      <p:sp>
+        <p:nvSpPr>
+          <p:cNvPr id="47" name="Text 23"/>
+          <p:cNvSpPr/>
+          <p:nvPr/>
+        </p:nvSpPr>
+        <p:spPr>
+          <a:xfrm>
+            <a:off x="475488" y="4157472"/>
+            <a:ext cx="1417712" cy="256032"/>
+          </a:xfrm>
+          <a:prstGeom prst="rect">
+            <a:avLst/>
+          </a:prstGeom>
+          <a:noFill/>
+          <a:ln/>
+        </p:spPr>
+        <p:txBody>
+          <a:bodyPr wrap="square" rtlCol="0" anchor="ctr"/>
+          <a:lstStyle/>
+          <a:p>
+            <a:pPr algn="ctr" indent="0" marL="0">
+              <a:buNone/>
+            </a:pPr>
+            <a:r>
+              <a:rPr lang="en-US" sz="900" u="sng" dirty="0">
+                <a:solidFill>
+                  <a:srgbClr val="1A1A2E"/>
+                </a:solidFill>
+                <a:latin typeface="Calibri" pitchFamily="34" charset="0"/>
+                <a:ea typeface="Calibri" pitchFamily="34" charset="-122"/>
+                <a:cs typeface="Calibri" pitchFamily="34" charset="-120"/>
+                <a:hlinkClick r:id="rId67" invalidUrl="" action="" tgtFrame="" tooltip="" history="1" highlightClick="0" endSnd="0">
+                  <a:extLst>
+                    <a:ext uri="{A12FA001-AC4F-418D-AE19-62706E023703}">
+                      <ahyp:hlinkClr xmlns:ahyp="http://schemas.microsoft.com/office/drawing/2018/hyperlinkcolor" val="tx"/>
+                    </a:ext>
+                  </a:extLst>
+                </a:hlinkClick>
+              </a:rPr>
+              <a:t>Canon Medical Systems</a:t>
+            </a:r>
+            <a:endParaRPr lang="en-US" sz="900" dirty="0"/>
+          </a:p>
+        </p:txBody>
+      </p:sp>
+      <p:pic>
+        <p:nvPicPr>
+          <p:cNvPr id="48" name="Image 22" descr="public/logos/unitedimaging.png">
+            <a:hlinkClick r:id="rId69" tooltip="United Imaging"/>
+          </p:cNvPr>
+          <p:cNvPicPr>
+            <a:picLocks noChangeAspect="1"/>
+          </p:cNvPicPr>
+          <p:nvPr/>
+        </p:nvPicPr>
+        <p:blipFill>
+          <a:blip r:embed="rId68"/>
+          <a:srcRect l="0" r="0" t="0" b="0"/>
+          <a:stretch/>
+        </p:blipFill>
+        <p:spPr>
+          <a:xfrm>
+            <a:off x="2112656" y="3813048"/>
+            <a:ext cx="1417712" cy="344424"/>
+          </a:xfrm>
+          <a:prstGeom prst="rect">
+            <a:avLst/>
+          </a:prstGeom>
+        </p:spPr>
+      </p:pic>
+      <p:sp>
+        <p:nvSpPr>
+          <p:cNvPr id="49" name="Text 24"/>
+          <p:cNvSpPr/>
+          <p:nvPr/>
+        </p:nvSpPr>
+        <p:spPr>
+          <a:xfrm>
+            <a:off x="2112656" y="4157472"/>
+            <a:ext cx="1417712" cy="256032"/>
+          </a:xfrm>
+          <a:prstGeom prst="rect">
+            <a:avLst/>
+          </a:prstGeom>
+          <a:noFill/>
+          <a:ln/>
+        </p:spPr>
+        <p:txBody>
+          <a:bodyPr wrap="square" rtlCol="0" anchor="ctr"/>
+          <a:lstStyle/>
+          <a:p>
+            <a:pPr algn="ctr" indent="0" marL="0">
+              <a:buNone/>
+            </a:pPr>
+            <a:r>
+              <a:rPr lang="en-US" sz="900" u="sng" dirty="0">
+                <a:solidFill>
+                  <a:srgbClr val="1A1A2E"/>
+                </a:solidFill>
+                <a:latin typeface="Calibri" pitchFamily="34" charset="0"/>
+                <a:ea typeface="Calibri" pitchFamily="34" charset="-122"/>
+                <a:cs typeface="Calibri" pitchFamily="34" charset="-120"/>
+                <a:hlinkClick r:id="rId70" invalidUrl="" action="" tgtFrame="" tooltip="" history="1" highlightClick="0" endSnd="0">
+                  <a:extLst>
+                    <a:ext uri="{A12FA001-AC4F-418D-AE19-62706E023703}">
+                      <ahyp:hlinkClr xmlns:ahyp="http://schemas.microsoft.com/office/drawing/2018/hyperlinkcolor" val="tx"/>
+                    </a:ext>
+                  </a:extLst>
+                </a:hlinkClick>
+              </a:rPr>
+              <a:t>United Imaging</a:t>
+            </a:r>
+            <a:endParaRPr lang="en-US" sz="900" dirty="0"/>
+          </a:p>
+        </p:txBody>
+      </p:sp>
+      <p:pic>
+        <p:nvPicPr>
+          <p:cNvPr id="50" name="Image 23" descr="public/newsletters/2026-06/_logo-cache/Taiwan_MedImag.png">
+            <a:hlinkClick r:id="rId72" tooltip="Taiwan Medical Imaging Co."/>
+          </p:cNvPr>
+          <p:cNvPicPr>
+            <a:picLocks noChangeAspect="1"/>
+          </p:cNvPicPr>
+          <p:nvPr/>
+        </p:nvPicPr>
+        <p:blipFill>
+          <a:blip r:embed="rId71"/>
+          <a:srcRect l="0" r="0" t="0" b="0"/>
+          <a:stretch/>
+        </p:blipFill>
+        <p:spPr>
+          <a:xfrm>
+            <a:off x="3749824" y="3813048"/>
+            <a:ext cx="1417712" cy="344424"/>
+          </a:xfrm>
+          <a:prstGeom prst="rect">
+            <a:avLst/>
+          </a:prstGeom>
+        </p:spPr>
+      </p:pic>
+      <p:sp>
+        <p:nvSpPr>
+          <p:cNvPr id="51" name="Text 25"/>
+          <p:cNvSpPr/>
+          <p:nvPr/>
+        </p:nvSpPr>
+        <p:spPr>
+          <a:xfrm>
+            <a:off x="3749824" y="4157472"/>
+            <a:ext cx="1417712" cy="256032"/>
+          </a:xfrm>
+          <a:prstGeom prst="rect">
+            <a:avLst/>
+          </a:prstGeom>
+          <a:noFill/>
+          <a:ln/>
+        </p:spPr>
+        <p:txBody>
+          <a:bodyPr wrap="square" rtlCol="0" anchor="ctr"/>
+          <a:lstStyle/>
+          <a:p>
+            <a:pPr algn="ctr" indent="0" marL="0">
+              <a:buNone/>
+            </a:pPr>
+            <a:r>
+              <a:rPr lang="en-US" sz="900" u="sng" dirty="0">
+                <a:solidFill>
+                  <a:srgbClr val="1A1A2E"/>
+                </a:solidFill>
+                <a:latin typeface="Calibri" pitchFamily="34" charset="0"/>
+                <a:ea typeface="Calibri" pitchFamily="34" charset="-122"/>
+                <a:cs typeface="Calibri" pitchFamily="34" charset="-120"/>
+                <a:hlinkClick r:id="rId73" invalidUrl="" action="" tgtFrame="" tooltip="" history="1" highlightClick="0" endSnd="0">
+                  <a:extLst>
+                    <a:ext uri="{A12FA001-AC4F-418D-AE19-62706E023703}">
+                      <ahyp:hlinkClr xmlns:ahyp="http://schemas.microsoft.com/office/drawing/2018/hyperlinkcolor" val="tx"/>
+                    </a:ext>
+                  </a:extLst>
+                </a:hlinkClick>
+              </a:rPr>
+              <a:t>Taiwan Medical Imaging Co.</a:t>
+            </a:r>
+            <a:endParaRPr lang="en-US" sz="900" dirty="0"/>
+          </a:p>
+        </p:txBody>
+      </p:sp>
+      <p:pic>
+        <p:nvPicPr>
+          <p:cNvPr id="52" name="Image 24" descr="public/logos/algomedica.png">
+            <a:hlinkClick r:id="rId75" tooltip="AlgoMedica"/>
+          </p:cNvPr>
+          <p:cNvPicPr>
+            <a:picLocks noChangeAspect="1"/>
+          </p:cNvPicPr>
+          <p:nvPr/>
+        </p:nvPicPr>
+        <p:blipFill>
+          <a:blip r:embed="rId74"/>
+          <a:srcRect l="0" r="0" t="0" b="0"/>
+          <a:stretch/>
+        </p:blipFill>
+        <p:spPr>
+          <a:xfrm>
+            <a:off x="5386992" y="3813048"/>
+            <a:ext cx="1417712" cy="344424"/>
+          </a:xfrm>
+          <a:prstGeom prst="rect">
+            <a:avLst/>
+          </a:prstGeom>
+        </p:spPr>
+      </p:pic>
+      <p:sp>
+        <p:nvSpPr>
+          <p:cNvPr id="53" name="Text 26"/>
+          <p:cNvSpPr/>
+          <p:nvPr/>
+        </p:nvSpPr>
+        <p:spPr>
+          <a:xfrm>
+            <a:off x="5386992" y="4157472"/>
+            <a:ext cx="1417712" cy="256032"/>
+          </a:xfrm>
+          <a:prstGeom prst="rect">
+            <a:avLst/>
+          </a:prstGeom>
+          <a:noFill/>
+          <a:ln/>
+        </p:spPr>
+        <p:txBody>
+          <a:bodyPr wrap="square" rtlCol="0" anchor="ctr"/>
+          <a:lstStyle/>
+          <a:p>
+            <a:pPr algn="ctr" indent="0" marL="0">
+              <a:buNone/>
+            </a:pPr>
+            <a:r>
+              <a:rPr lang="en-US" sz="900" u="sng" dirty="0">
+                <a:solidFill>
+                  <a:srgbClr val="1A1A2E"/>
+                </a:solidFill>
+                <a:latin typeface="Calibri" pitchFamily="34" charset="0"/>
+                <a:ea typeface="Calibri" pitchFamily="34" charset="-122"/>
+                <a:cs typeface="Calibri" pitchFamily="34" charset="-120"/>
+                <a:hlinkClick r:id="rId76" invalidUrl="" action="" tgtFrame="" tooltip="" history="1" highlightClick="0" endSnd="0">
+                  <a:extLst>
+                    <a:ext uri="{A12FA001-AC4F-418D-AE19-62706E023703}">
+                      <ahyp:hlinkClr xmlns:ahyp="http://schemas.microsoft.com/office/drawing/2018/hyperlinkcolor" val="tx"/>
+                    </a:ext>
+                  </a:extLst>
+                </a:hlinkClick>
+              </a:rPr>
+              <a:t>AlgoMedica</a:t>
+            </a:r>
+            <a:endParaRPr lang="en-US" sz="900" dirty="0"/>
+          </a:p>
+        </p:txBody>
+      </p:sp>
+      <p:pic>
+        <p:nvPicPr>
+          <p:cNvPr id="54" name="Image 25" descr="public/logos/spectronic-medical.jpg">
+            <a:hlinkClick r:id="rId78" tooltip="Spectronic Medical"/>
+          </p:cNvPr>
+          <p:cNvPicPr>
+            <a:picLocks noChangeAspect="1"/>
+          </p:cNvPicPr>
+          <p:nvPr/>
+        </p:nvPicPr>
+        <p:blipFill>
+          <a:blip r:embed="rId77"/>
+          <a:srcRect l="0" r="0" t="0" b="0"/>
+          <a:stretch/>
+        </p:blipFill>
+        <p:spPr>
+          <a:xfrm>
+            <a:off x="7024160" y="3813048"/>
+            <a:ext cx="1417712" cy="344424"/>
+          </a:xfrm>
+          <a:prstGeom prst="rect">
+            <a:avLst/>
+          </a:prstGeom>
+        </p:spPr>
+      </p:pic>
+      <p:sp>
+        <p:nvSpPr>
+          <p:cNvPr id="55" name="Text 27"/>
+          <p:cNvSpPr/>
+          <p:nvPr/>
+        </p:nvSpPr>
+        <p:spPr>
+          <a:xfrm>
+            <a:off x="7024160" y="4157472"/>
+            <a:ext cx="1417712" cy="256032"/>
+          </a:xfrm>
+          <a:prstGeom prst="rect">
+            <a:avLst/>
+          </a:prstGeom>
+          <a:noFill/>
+          <a:ln/>
+        </p:spPr>
+        <p:txBody>
+          <a:bodyPr wrap="square" rtlCol="0" anchor="ctr"/>
+          <a:lstStyle/>
+          <a:p>
+            <a:pPr algn="ctr" indent="0" marL="0">
+              <a:buNone/>
+            </a:pPr>
+            <a:r>
+              <a:rPr lang="en-US" sz="900" u="sng" dirty="0">
+                <a:solidFill>
+                  <a:srgbClr val="1A1A2E"/>
+                </a:solidFill>
+                <a:latin typeface="Calibri" pitchFamily="34" charset="0"/>
+                <a:ea typeface="Calibri" pitchFamily="34" charset="-122"/>
+                <a:cs typeface="Calibri" pitchFamily="34" charset="-120"/>
+                <a:hlinkClick r:id="rId79" invalidUrl="" action="" tgtFrame="" tooltip="" history="1" highlightClick="0" endSnd="0">
+                  <a:extLst>
+                    <a:ext uri="{A12FA001-AC4F-418D-AE19-62706E023703}">
+                      <ahyp:hlinkClr xmlns:ahyp="http://schemas.microsoft.com/office/drawing/2018/hyperlinkcolor" val="tx"/>
+                    </a:ext>
+                  </a:extLst>
+                </a:hlinkClick>
+              </a:rPr>
+              <a:t>Spectronic Medical</a:t>
+            </a:r>
+            <a:endParaRPr lang="en-US" sz="900" dirty="0"/>
+          </a:p>
+        </p:txBody>
+      </p:sp>
+      <p:pic>
+        <p:nvPicPr>
+          <p:cNvPr id="56" name="Image 26" descr="public/logos/syntheticMRI.png">
+            <a:hlinkClick r:id="rId81" tooltip="SyntheticMR"/>
+          </p:cNvPr>
+          <p:cNvPicPr>
+            <a:picLocks noChangeAspect="1"/>
+          </p:cNvPicPr>
+          <p:nvPr/>
+        </p:nvPicPr>
+        <p:blipFill>
+          <a:blip r:embed="rId80"/>
+          <a:srcRect l="0" r="0" t="0" b="0"/>
+          <a:stretch/>
+        </p:blipFill>
+        <p:spPr>
+          <a:xfrm>
+            <a:off x="8661327" y="3813048"/>
+            <a:ext cx="1417712" cy="344424"/>
+          </a:xfrm>
+          <a:prstGeom prst="rect">
+            <a:avLst/>
+          </a:prstGeom>
+        </p:spPr>
+      </p:pic>
+      <p:sp>
+        <p:nvSpPr>
+          <p:cNvPr id="57" name="Text 28"/>
+          <p:cNvSpPr/>
+          <p:nvPr/>
+        </p:nvSpPr>
+        <p:spPr>
+          <a:xfrm>
+            <a:off x="8661327" y="4157472"/>
+            <a:ext cx="1417712" cy="256032"/>
+          </a:xfrm>
+          <a:prstGeom prst="rect">
+            <a:avLst/>
+          </a:prstGeom>
+          <a:noFill/>
+          <a:ln/>
+        </p:spPr>
+        <p:txBody>
+          <a:bodyPr wrap="square" rtlCol="0" anchor="ctr"/>
+          <a:lstStyle/>
+          <a:p>
+            <a:pPr algn="ctr" indent="0" marL="0">
+              <a:buNone/>
+            </a:pPr>
+            <a:r>
+              <a:rPr lang="en-US" sz="900" u="sng" dirty="0">
+                <a:solidFill>
+                  <a:srgbClr val="1A1A2E"/>
+                </a:solidFill>
+                <a:latin typeface="Calibri" pitchFamily="34" charset="0"/>
+                <a:ea typeface="Calibri" pitchFamily="34" charset="-122"/>
+                <a:cs typeface="Calibri" pitchFamily="34" charset="-120"/>
+                <a:hlinkClick r:id="rId82" invalidUrl="" action="" tgtFrame="" tooltip="" history="1" highlightClick="0" endSnd="0">
+                  <a:extLst>
+                    <a:ext uri="{A12FA001-AC4F-418D-AE19-62706E023703}">
+                      <ahyp:hlinkClr xmlns:ahyp="http://schemas.microsoft.com/office/drawing/2018/hyperlinkcolor" val="tx"/>
+                    </a:ext>
+                  </a:extLst>
+                </a:hlinkClick>
+              </a:rPr>
+              <a:t>SyntheticMR</a:t>
+            </a:r>
+            <a:endParaRPr lang="en-US" sz="900" dirty="0"/>
+          </a:p>
+        </p:txBody>
+      </p:sp>
+      <p:pic>
+        <p:nvPicPr>
+          <p:cNvPr id="58" name="Image 27" descr="public/logos/raystation.jpg">
+            <a:hlinkClick r:id="rId84" tooltip="RaySearch Laboratories"/>
+          </p:cNvPr>
+          <p:cNvPicPr>
+            <a:picLocks noChangeAspect="1"/>
+          </p:cNvPicPr>
+          <p:nvPr/>
+        </p:nvPicPr>
+        <p:blipFill>
+          <a:blip r:embed="rId83"/>
+          <a:srcRect l="0" r="0" t="0" b="0"/>
+          <a:stretch/>
+        </p:blipFill>
+        <p:spPr>
+          <a:xfrm>
+            <a:off x="10298495" y="3813048"/>
+            <a:ext cx="1417712" cy="344424"/>
+          </a:xfrm>
+          <a:prstGeom prst="rect">
+            <a:avLst/>
+          </a:prstGeom>
+        </p:spPr>
+      </p:pic>
+      <p:sp>
+        <p:nvSpPr>
+          <p:cNvPr id="59" name="Text 29"/>
+          <p:cNvSpPr/>
+          <p:nvPr/>
+        </p:nvSpPr>
+        <p:spPr>
+          <a:xfrm>
+            <a:off x="10298495" y="4157472"/>
+            <a:ext cx="1417712" cy="256032"/>
+          </a:xfrm>
+          <a:prstGeom prst="rect">
+            <a:avLst/>
+          </a:prstGeom>
+          <a:noFill/>
+          <a:ln/>
+        </p:spPr>
+        <p:txBody>
+          <a:bodyPr wrap="square" rtlCol="0" anchor="ctr"/>
+          <a:lstStyle/>
+          <a:p>
+            <a:pPr algn="ctr" indent="0" marL="0">
+              <a:buNone/>
+            </a:pPr>
+            <a:r>
+              <a:rPr lang="en-US" sz="900" u="sng" dirty="0">
+                <a:solidFill>
+                  <a:srgbClr val="1A1A2E"/>
+                </a:solidFill>
+                <a:latin typeface="Calibri" pitchFamily="34" charset="0"/>
+                <a:ea typeface="Calibri" pitchFamily="34" charset="-122"/>
+                <a:cs typeface="Calibri" pitchFamily="34" charset="-120"/>
+                <a:hlinkClick r:id="rId85" invalidUrl="" action="" tgtFrame="" tooltip="" history="1" highlightClick="0" endSnd="0">
+                  <a:extLst>
+                    <a:ext uri="{A12FA001-AC4F-418D-AE19-62706E023703}">
+                      <ahyp:hlinkClr xmlns:ahyp="http://schemas.microsoft.com/office/drawing/2018/hyperlinkcolor" val="tx"/>
+                    </a:ext>
+                  </a:extLst>
+                </a:hlinkClick>
+              </a:rPr>
+              <a:t>RaySearch Laboratories</a:t>
+            </a:r>
+            <a:endParaRPr lang="en-US" sz="900" dirty="0"/>
+          </a:p>
+        </p:txBody>
+      </p:sp>
+      <p:pic>
+        <p:nvPicPr>
+          <p:cNvPr id="60" name="Image 28" descr="public/logos/airs.jpg">
+            <a:hlinkClick r:id="rId87" tooltip="AIRS Medical"/>
+          </p:cNvPr>
+          <p:cNvPicPr>
+            <a:picLocks noChangeAspect="1"/>
+          </p:cNvPicPr>
+          <p:nvPr/>
+        </p:nvPicPr>
+        <p:blipFill>
+          <a:blip r:embed="rId86"/>
+          <a:srcRect l="0" r="0" t="0" b="0"/>
+          <a:stretch/>
+        </p:blipFill>
+        <p:spPr>
+          <a:xfrm>
+            <a:off x="475488" y="4651248"/>
+            <a:ext cx="1417712" cy="344424"/>
+          </a:xfrm>
+          <a:prstGeom prst="rect">
+            <a:avLst/>
+          </a:prstGeom>
+        </p:spPr>
+      </p:pic>
+      <p:sp>
+        <p:nvSpPr>
+          <p:cNvPr id="61" name="Text 30"/>
+          <p:cNvSpPr/>
+          <p:nvPr/>
+        </p:nvSpPr>
+        <p:spPr>
+          <a:xfrm>
+            <a:off x="475488" y="4995672"/>
+            <a:ext cx="1417712" cy="256032"/>
+          </a:xfrm>
+          <a:prstGeom prst="rect">
+            <a:avLst/>
+          </a:prstGeom>
+          <a:noFill/>
+          <a:ln/>
+        </p:spPr>
+        <p:txBody>
+          <a:bodyPr wrap="square" rtlCol="0" anchor="ctr"/>
+          <a:lstStyle/>
+          <a:p>
+            <a:pPr algn="ctr" indent="0" marL="0">
+              <a:buNone/>
+            </a:pPr>
+            <a:r>
+              <a:rPr lang="en-US" sz="900" u="sng" dirty="0">
+                <a:solidFill>
+                  <a:srgbClr val="1A1A2E"/>
+                </a:solidFill>
+                <a:latin typeface="Calibri" pitchFamily="34" charset="0"/>
+                <a:ea typeface="Calibri" pitchFamily="34" charset="-122"/>
+                <a:cs typeface="Calibri" pitchFamily="34" charset="-120"/>
+                <a:hlinkClick r:id="rId88" invalidUrl="" action="" tgtFrame="" tooltip="" history="1" highlightClick="0" endSnd="0">
+                  <a:extLst>
+                    <a:ext uri="{A12FA001-AC4F-418D-AE19-62706E023703}">
+                      <ahyp:hlinkClr xmlns:ahyp="http://schemas.microsoft.com/office/drawing/2018/hyperlinkcolor" val="tx"/>
+                    </a:ext>
+                  </a:extLst>
+                </a:hlinkClick>
+              </a:rPr>
+              <a:t>AIRS Medical</a:t>
+            </a:r>
+            <a:endParaRPr lang="en-US" sz="900" dirty="0"/>
+          </a:p>
+        </p:txBody>
+      </p:sp>
+      <p:pic>
+        <p:nvPicPr>
+          <p:cNvPr id="62" name="Image 29" descr="public/logos/claripi.jpg">
+            <a:hlinkClick r:id="rId90" tooltip="ClariPi"/>
+          </p:cNvPr>
+          <p:cNvPicPr>
+            <a:picLocks noChangeAspect="1"/>
+          </p:cNvPicPr>
+          <p:nvPr/>
+        </p:nvPicPr>
+        <p:blipFill>
+          <a:blip r:embed="rId89"/>
+          <a:srcRect l="0" r="0" t="0" b="0"/>
+          <a:stretch/>
+        </p:blipFill>
+        <p:spPr>
+          <a:xfrm>
+            <a:off x="2112656" y="4651248"/>
+            <a:ext cx="1417712" cy="344424"/>
+          </a:xfrm>
+          <a:prstGeom prst="rect">
+            <a:avLst/>
+          </a:prstGeom>
+        </p:spPr>
+      </p:pic>
+      <p:sp>
+        <p:nvSpPr>
+          <p:cNvPr id="63" name="Text 31"/>
+          <p:cNvSpPr/>
+          <p:nvPr/>
+        </p:nvSpPr>
+        <p:spPr>
+          <a:xfrm>
+            <a:off x="2112656" y="4995672"/>
+            <a:ext cx="1417712" cy="256032"/>
+          </a:xfrm>
+          <a:prstGeom prst="rect">
+            <a:avLst/>
+          </a:prstGeom>
+          <a:noFill/>
+          <a:ln/>
+        </p:spPr>
+        <p:txBody>
+          <a:bodyPr wrap="square" rtlCol="0" anchor="ctr"/>
+          <a:lstStyle/>
+          <a:p>
+            <a:pPr algn="ctr" indent="0" marL="0">
+              <a:buNone/>
+            </a:pPr>
+            <a:r>
+              <a:rPr lang="en-US" sz="900" u="sng" dirty="0">
+                <a:solidFill>
+                  <a:srgbClr val="1A1A2E"/>
+                </a:solidFill>
+                <a:latin typeface="Calibri" pitchFamily="34" charset="0"/>
+                <a:ea typeface="Calibri" pitchFamily="34" charset="-122"/>
+                <a:cs typeface="Calibri" pitchFamily="34" charset="-120"/>
+                <a:hlinkClick r:id="rId91" invalidUrl="" action="" tgtFrame="" tooltip="" history="1" highlightClick="0" endSnd="0">
+                  <a:extLst>
+                    <a:ext uri="{A12FA001-AC4F-418D-AE19-62706E023703}">
+                      <ahyp:hlinkClr xmlns:ahyp="http://schemas.microsoft.com/office/drawing/2018/hyperlinkcolor" val="tx"/>
+                    </a:ext>
+                  </a:extLst>
+                </a:hlinkClick>
+              </a:rPr>
+              <a:t>ClariPi</a:t>
+            </a:r>
+            <a:endParaRPr lang="en-US" sz="900" dirty="0"/>
+          </a:p>
+        </p:txBody>
+      </p:sp>
+      <p:pic>
+        <p:nvPicPr>
+          <p:cNvPr id="64" name="Image 30" descr="public/logos/SubtleMedical.jpg">
+            <a:hlinkClick r:id="rId93" tooltip="Subtle Medical"/>
+          </p:cNvPr>
+          <p:cNvPicPr>
+            <a:picLocks noChangeAspect="1"/>
+          </p:cNvPicPr>
+          <p:nvPr/>
+        </p:nvPicPr>
+        <p:blipFill>
+          <a:blip r:embed="rId92"/>
+          <a:srcRect l="0" r="0" t="0" b="0"/>
+          <a:stretch/>
+        </p:blipFill>
+        <p:spPr>
+          <a:xfrm>
+            <a:off x="3749824" y="4651248"/>
+            <a:ext cx="1417712" cy="344424"/>
+          </a:xfrm>
+          <a:prstGeom prst="rect">
+            <a:avLst/>
+          </a:prstGeom>
+        </p:spPr>
+      </p:pic>
+      <p:sp>
+        <p:nvSpPr>
+          <p:cNvPr id="65" name="Text 32"/>
+          <p:cNvSpPr/>
+          <p:nvPr/>
+        </p:nvSpPr>
+        <p:spPr>
+          <a:xfrm>
+            <a:off x="3749824" y="4995672"/>
+            <a:ext cx="1417712" cy="256032"/>
+          </a:xfrm>
+          <a:prstGeom prst="rect">
+            <a:avLst/>
+          </a:prstGeom>
+          <a:noFill/>
+          <a:ln/>
+        </p:spPr>
+        <p:txBody>
+          <a:bodyPr wrap="square" rtlCol="0" anchor="ctr"/>
+          <a:lstStyle/>
+          <a:p>
+            <a:pPr algn="ctr" indent="0" marL="0">
+              <a:buNone/>
+            </a:pPr>
+            <a:r>
+              <a:rPr lang="en-US" sz="900" u="sng" dirty="0">
+                <a:solidFill>
+                  <a:srgbClr val="1A1A2E"/>
+                </a:solidFill>
+                <a:latin typeface="Calibri" pitchFamily="34" charset="0"/>
+                <a:ea typeface="Calibri" pitchFamily="34" charset="-122"/>
+                <a:cs typeface="Calibri" pitchFamily="34" charset="-120"/>
+                <a:hlinkClick r:id="rId94" invalidUrl="" action="" tgtFrame="" tooltip="" history="1" highlightClick="0" endSnd="0">
+                  <a:extLst>
+                    <a:ext uri="{A12FA001-AC4F-418D-AE19-62706E023703}">
+                      <ahyp:hlinkClr xmlns:ahyp="http://schemas.microsoft.com/office/drawing/2018/hyperlinkcolor" val="tx"/>
+                    </a:ext>
+                  </a:extLst>
+                </a:hlinkClick>
+              </a:rPr>
+              <a:t>Subtle Medical</a:t>
+            </a:r>
+            <a:endParaRPr lang="en-US" sz="900" dirty="0"/>
+          </a:p>
+        </p:txBody>
+      </p:sp>
+      <p:pic>
+        <p:nvPicPr>
+          <p:cNvPr id="66" name="Image 31" descr="public/logos/ptw.jpg">
+            <a:hlinkClick r:id="rId96" tooltip="PTW"/>
+          </p:cNvPr>
+          <p:cNvPicPr>
+            <a:picLocks noChangeAspect="1"/>
+          </p:cNvPicPr>
+          <p:nvPr/>
+        </p:nvPicPr>
+        <p:blipFill>
+          <a:blip r:embed="rId95"/>
+          <a:srcRect l="0" r="0" t="0" b="0"/>
+          <a:stretch/>
+        </p:blipFill>
+        <p:spPr>
+          <a:xfrm>
+            <a:off x="5386992" y="4651248"/>
+            <a:ext cx="1417712" cy="344424"/>
+          </a:xfrm>
+          <a:prstGeom prst="rect">
+            <a:avLst/>
+          </a:prstGeom>
+        </p:spPr>
+      </p:pic>
+      <p:sp>
+        <p:nvSpPr>
+          <p:cNvPr id="67" name="Text 33"/>
+          <p:cNvSpPr/>
+          <p:nvPr/>
+        </p:nvSpPr>
+        <p:spPr>
+          <a:xfrm>
+            <a:off x="5386992" y="4995672"/>
+            <a:ext cx="1417712" cy="256032"/>
+          </a:xfrm>
+          <a:prstGeom prst="rect">
+            <a:avLst/>
+          </a:prstGeom>
+          <a:noFill/>
+          <a:ln/>
+        </p:spPr>
+        <p:txBody>
+          <a:bodyPr wrap="square" rtlCol="0" anchor="ctr"/>
+          <a:lstStyle/>
+          <a:p>
+            <a:pPr algn="ctr" indent="0" marL="0">
+              <a:buNone/>
+            </a:pPr>
+            <a:r>
+              <a:rPr lang="en-US" sz="900" u="sng" dirty="0">
+                <a:solidFill>
+                  <a:srgbClr val="1A1A2E"/>
+                </a:solidFill>
+                <a:latin typeface="Calibri" pitchFamily="34" charset="0"/>
+                <a:ea typeface="Calibri" pitchFamily="34" charset="-122"/>
+                <a:cs typeface="Calibri" pitchFamily="34" charset="-120"/>
+                <a:hlinkClick r:id="rId97" invalidUrl="" action="" tgtFrame="" tooltip="" history="1" highlightClick="0" endSnd="0">
+                  <a:extLst>
+                    <a:ext uri="{A12FA001-AC4F-418D-AE19-62706E023703}">
+                      <ahyp:hlinkClr xmlns:ahyp="http://schemas.microsoft.com/office/drawing/2018/hyperlinkcolor" val="tx"/>
+                    </a:ext>
+                  </a:extLst>
+                </a:hlinkClick>
+              </a:rPr>
+              <a:t>PTW</a:t>
+            </a:r>
+            <a:endParaRPr lang="en-US" sz="900" dirty="0"/>
+          </a:p>
+        </p:txBody>
+      </p:sp>
+      <p:pic>
+        <p:nvPicPr>
+          <p:cNvPr id="68" name="Image 32" descr="public/logos/pymedix.png">
+            <a:hlinkClick r:id="rId99" tooltip="PyMedix"/>
+          </p:cNvPr>
+          <p:cNvPicPr>
+            <a:picLocks noChangeAspect="1"/>
+          </p:cNvPicPr>
+          <p:nvPr/>
+        </p:nvPicPr>
+        <p:blipFill>
+          <a:blip r:embed="rId98"/>
+          <a:srcRect l="0" r="0" t="0" b="0"/>
+          <a:stretch/>
+        </p:blipFill>
+        <p:spPr>
+          <a:xfrm>
+            <a:off x="7024160" y="4651248"/>
+            <a:ext cx="1417712" cy="344424"/>
+          </a:xfrm>
+          <a:prstGeom prst="rect">
+            <a:avLst/>
+          </a:prstGeom>
+        </p:spPr>
+      </p:pic>
+      <p:sp>
+        <p:nvSpPr>
+          <p:cNvPr id="69" name="Text 34"/>
+          <p:cNvSpPr/>
+          <p:nvPr/>
+        </p:nvSpPr>
+        <p:spPr>
+          <a:xfrm>
+            <a:off x="7024160" y="4995672"/>
+            <a:ext cx="1417712" cy="256032"/>
+          </a:xfrm>
+          <a:prstGeom prst="rect">
+            <a:avLst/>
+          </a:prstGeom>
+          <a:noFill/>
+          <a:ln/>
+        </p:spPr>
+        <p:txBody>
+          <a:bodyPr wrap="square" rtlCol="0" anchor="ctr"/>
+          <a:lstStyle/>
+          <a:p>
+            <a:pPr algn="ctr" indent="0" marL="0">
+              <a:buNone/>
+            </a:pPr>
+            <a:r>
+              <a:rPr lang="en-US" sz="900" u="sng" dirty="0">
+                <a:solidFill>
+                  <a:srgbClr val="1A1A2E"/>
+                </a:solidFill>
+                <a:latin typeface="Calibri" pitchFamily="34" charset="0"/>
+                <a:ea typeface="Calibri" pitchFamily="34" charset="-122"/>
+                <a:cs typeface="Calibri" pitchFamily="34" charset="-120"/>
+                <a:hlinkClick r:id="rId100" invalidUrl="" action="" tgtFrame="" tooltip="" history="1" highlightClick="0" endSnd="0">
+                  <a:extLst>
+                    <a:ext uri="{A12FA001-AC4F-418D-AE19-62706E023703}">
+                      <ahyp:hlinkClr xmlns:ahyp="http://schemas.microsoft.com/office/drawing/2018/hyperlinkcolor" val="tx"/>
+                    </a:ext>
+                  </a:extLst>
+                </a:hlinkClick>
+              </a:rPr>
+              <a:t>PyMedix</a:t>
+            </a:r>
+            <a:endParaRPr lang="en-US" sz="900" dirty="0"/>
+          </a:p>
+        </p:txBody>
+      </p:sp>
+      <p:pic>
+        <p:nvPicPr>
+          <p:cNvPr id="70" name="Image 33" descr="public/logos/medlever.jpg">
+            <a:hlinkClick r:id="rId102" tooltip="MedLever, Inc."/>
+          </p:cNvPr>
+          <p:cNvPicPr>
+            <a:picLocks noChangeAspect="1"/>
+          </p:cNvPicPr>
+          <p:nvPr/>
+        </p:nvPicPr>
+        <p:blipFill>
+          <a:blip r:embed="rId101"/>
+          <a:srcRect l="0" r="0" t="0" b="0"/>
+          <a:stretch/>
+        </p:blipFill>
+        <p:spPr>
+          <a:xfrm>
+            <a:off x="8661327" y="4651248"/>
+            <a:ext cx="1417712" cy="344424"/>
+          </a:xfrm>
+          <a:prstGeom prst="rect">
+            <a:avLst/>
+          </a:prstGeom>
+        </p:spPr>
+      </p:pic>
+      <p:sp>
+        <p:nvSpPr>
+          <p:cNvPr id="71" name="Text 35"/>
+          <p:cNvSpPr/>
+          <p:nvPr/>
+        </p:nvSpPr>
+        <p:spPr>
+          <a:xfrm>
+            <a:off x="8661327" y="4995672"/>
+            <a:ext cx="1417712" cy="256032"/>
+          </a:xfrm>
+          <a:prstGeom prst="rect">
+            <a:avLst/>
+          </a:prstGeom>
+          <a:noFill/>
+          <a:ln/>
+        </p:spPr>
+        <p:txBody>
+          <a:bodyPr wrap="square" rtlCol="0" anchor="ctr"/>
+          <a:lstStyle/>
+          <a:p>
+            <a:pPr algn="ctr" indent="0" marL="0">
+              <a:buNone/>
+            </a:pPr>
+            <a:r>
+              <a:rPr lang="en-US" sz="900" u="sng" dirty="0">
+                <a:solidFill>
+                  <a:srgbClr val="1A1A2E"/>
+                </a:solidFill>
+                <a:latin typeface="Calibri" pitchFamily="34" charset="0"/>
+                <a:ea typeface="Calibri" pitchFamily="34" charset="-122"/>
+                <a:cs typeface="Calibri" pitchFamily="34" charset="-120"/>
+                <a:hlinkClick r:id="rId103" invalidUrl="" action="" tgtFrame="" tooltip="" history="1" highlightClick="0" endSnd="0">
+                  <a:extLst>
+                    <a:ext uri="{A12FA001-AC4F-418D-AE19-62706E023703}">
+                      <ahyp:hlinkClr xmlns:ahyp="http://schemas.microsoft.com/office/drawing/2018/hyperlinkcolor" val="tx"/>
+                    </a:ext>
+                  </a:extLst>
+                </a:hlinkClick>
+              </a:rPr>
+              <a:t>MedLever, Inc.</a:t>
+            </a:r>
+            <a:endParaRPr lang="en-US" sz="900" dirty="0"/>
+          </a:p>
+        </p:txBody>
+      </p:sp>
+      <p:pic>
+        <p:nvPicPr>
+          <p:cNvPr id="72" name="Image 34" descr="public/logos/medmind.png">
+            <a:hlinkClick r:id="rId105" tooltip="MedMind Technology Co., Ltd."/>
+          </p:cNvPr>
+          <p:cNvPicPr>
+            <a:picLocks noChangeAspect="1"/>
+          </p:cNvPicPr>
+          <p:nvPr/>
+        </p:nvPicPr>
+        <p:blipFill>
+          <a:blip r:embed="rId104"/>
+          <a:srcRect l="0" r="0" t="0" b="0"/>
+          <a:stretch/>
+        </p:blipFill>
+        <p:spPr>
+          <a:xfrm>
+            <a:off x="10298495" y="4651248"/>
+            <a:ext cx="1417712" cy="344424"/>
+          </a:xfrm>
+          <a:prstGeom prst="rect">
+            <a:avLst/>
+          </a:prstGeom>
+        </p:spPr>
+      </p:pic>
+      <p:sp>
+        <p:nvSpPr>
+          <p:cNvPr id="73" name="Text 36"/>
+          <p:cNvSpPr/>
+          <p:nvPr/>
+        </p:nvSpPr>
+        <p:spPr>
+          <a:xfrm>
+            <a:off x="10298495" y="4995672"/>
+            <a:ext cx="1417712" cy="256032"/>
+          </a:xfrm>
+          <a:prstGeom prst="rect">
+            <a:avLst/>
+          </a:prstGeom>
+          <a:noFill/>
+          <a:ln/>
+        </p:spPr>
+        <p:txBody>
+          <a:bodyPr wrap="square" rtlCol="0" anchor="ctr"/>
+          <a:lstStyle/>
+          <a:p>
+            <a:pPr algn="ctr" indent="0" marL="0">
+              <a:buNone/>
+            </a:pPr>
+            <a:r>
+              <a:rPr lang="en-US" sz="900" u="sng" dirty="0">
+                <a:solidFill>
+                  <a:srgbClr val="1A1A2E"/>
+                </a:solidFill>
+                <a:latin typeface="Calibri" pitchFamily="34" charset="0"/>
+                <a:ea typeface="Calibri" pitchFamily="34" charset="-122"/>
+                <a:cs typeface="Calibri" pitchFamily="34" charset="-120"/>
+                <a:hlinkClick r:id="rId106" invalidUrl="" action="" tgtFrame="" tooltip="" history="1" highlightClick="0" endSnd="0">
+                  <a:extLst>
+                    <a:ext uri="{A12FA001-AC4F-418D-AE19-62706E023703}">
+                      <ahyp:hlinkClr xmlns:ahyp="http://schemas.microsoft.com/office/drawing/2018/hyperlinkcolor" val="tx"/>
+                    </a:ext>
+                  </a:extLst>
+                </a:hlinkClick>
+              </a:rPr>
+              <a:t>MedMind Technology Co., Ltd.</a:t>
+            </a:r>
+            <a:endParaRPr lang="en-US" sz="900" dirty="0"/>
+          </a:p>
+        </p:txBody>
+      </p:sp>
+      <p:pic>
+        <p:nvPicPr>
+          <p:cNvPr id="74" name="Image 35" descr="public/logos/quanta-computer.png">
+            <a:hlinkClick r:id="rId108" tooltip="Quanta Computer Inc."/>
+          </p:cNvPr>
+          <p:cNvPicPr>
+            <a:picLocks noChangeAspect="1"/>
+          </p:cNvPicPr>
+          <p:nvPr/>
+        </p:nvPicPr>
+        <p:blipFill>
+          <a:blip r:embed="rId107"/>
+          <a:srcRect l="0" r="0" t="0" b="0"/>
+          <a:stretch/>
+        </p:blipFill>
+        <p:spPr>
+          <a:xfrm>
+            <a:off x="475488" y="5489448"/>
+            <a:ext cx="1417712" cy="344424"/>
+          </a:xfrm>
+          <a:prstGeom prst="rect">
+            <a:avLst/>
+          </a:prstGeom>
+        </p:spPr>
+      </p:pic>
+      <p:sp>
+        <p:nvSpPr>
+          <p:cNvPr id="75" name="Text 37"/>
+          <p:cNvSpPr/>
+          <p:nvPr/>
+        </p:nvSpPr>
+        <p:spPr>
+          <a:xfrm>
+            <a:off x="475488" y="5833872"/>
+            <a:ext cx="1417712" cy="256032"/>
+          </a:xfrm>
+          <a:prstGeom prst="rect">
+            <a:avLst/>
+          </a:prstGeom>
+          <a:noFill/>
+          <a:ln/>
+        </p:spPr>
+        <p:txBody>
+          <a:bodyPr wrap="square" rtlCol="0" anchor="ctr"/>
+          <a:lstStyle/>
+          <a:p>
+            <a:pPr algn="ctr" indent="0" marL="0">
+              <a:buNone/>
+            </a:pPr>
+            <a:r>
+              <a:rPr lang="en-US" sz="900" u="sng" dirty="0">
+                <a:solidFill>
+                  <a:srgbClr val="1A1A2E"/>
+                </a:solidFill>
+                <a:latin typeface="Calibri" pitchFamily="34" charset="0"/>
+                <a:ea typeface="Calibri" pitchFamily="34" charset="-122"/>
+                <a:cs typeface="Calibri" pitchFamily="34" charset="-120"/>
+                <a:hlinkClick r:id="rId109" invalidUrl="" action="" tgtFrame="" tooltip="" history="1" highlightClick="0" endSnd="0">
+                  <a:extLst>
+                    <a:ext uri="{A12FA001-AC4F-418D-AE19-62706E023703}">
+                      <ahyp:hlinkClr xmlns:ahyp="http://schemas.microsoft.com/office/drawing/2018/hyperlinkcolor" val="tx"/>
+                    </a:ext>
+                  </a:extLst>
+                </a:hlinkClick>
+              </a:rPr>
+              <a:t>Quanta Computer Inc.</a:t>
+            </a:r>
+            <a:endParaRPr lang="en-US" sz="900" dirty="0"/>
+          </a:p>
+        </p:txBody>
+      </p:sp>
+      <p:pic>
+        <p:nvPicPr>
+          <p:cNvPr id="76" name="Image 36" descr="public/logos/Elekta.png">
+            <a:hlinkClick r:id="rId111" tooltip="Elekta"/>
+          </p:cNvPr>
+          <p:cNvPicPr>
+            <a:picLocks noChangeAspect="1"/>
+          </p:cNvPicPr>
+          <p:nvPr/>
+        </p:nvPicPr>
+        <p:blipFill>
+          <a:blip r:embed="rId110"/>
+          <a:srcRect l="0" r="0" t="0" b="0"/>
+          <a:stretch/>
+        </p:blipFill>
+        <p:spPr>
+          <a:xfrm>
+            <a:off x="2112656" y="5489448"/>
+            <a:ext cx="1417712" cy="344424"/>
+          </a:xfrm>
+          <a:prstGeom prst="rect">
+            <a:avLst/>
+          </a:prstGeom>
+        </p:spPr>
+      </p:pic>
+      <p:sp>
+        <p:nvSpPr>
+          <p:cNvPr id="77" name="Text 38"/>
+          <p:cNvSpPr/>
+          <p:nvPr/>
+        </p:nvSpPr>
+        <p:spPr>
+          <a:xfrm>
+            <a:off x="2112656" y="5833872"/>
+            <a:ext cx="1417712" cy="256032"/>
+          </a:xfrm>
+          <a:prstGeom prst="rect">
+            <a:avLst/>
+          </a:prstGeom>
+          <a:noFill/>
+          <a:ln/>
+        </p:spPr>
+        <p:txBody>
+          <a:bodyPr wrap="square" rtlCol="0" anchor="ctr"/>
+          <a:lstStyle/>
+          <a:p>
+            <a:pPr algn="ctr" indent="0" marL="0">
+              <a:buNone/>
+            </a:pPr>
+            <a:r>
+              <a:rPr lang="en-US" sz="900" u="sng" dirty="0">
+                <a:solidFill>
+                  <a:srgbClr val="1A1A2E"/>
+                </a:solidFill>
+                <a:latin typeface="Calibri" pitchFamily="34" charset="0"/>
+                <a:ea typeface="Calibri" pitchFamily="34" charset="-122"/>
+                <a:cs typeface="Calibri" pitchFamily="34" charset="-120"/>
+                <a:hlinkClick r:id="rId112" invalidUrl="" action="" tgtFrame="" tooltip="" history="1" highlightClick="0" endSnd="0">
+                  <a:extLst>
+                    <a:ext uri="{A12FA001-AC4F-418D-AE19-62706E023703}">
+                      <ahyp:hlinkClr xmlns:ahyp="http://schemas.microsoft.com/office/drawing/2018/hyperlinkcolor" val="tx"/>
+                    </a:ext>
+                  </a:extLst>
+                </a:hlinkClick>
+              </a:rPr>
+              <a:t>Elekta</a:t>
+            </a:r>
+            <a:endParaRPr lang="en-US" sz="900" dirty="0"/>
+          </a:p>
+        </p:txBody>
+      </p:sp>
+      <p:pic>
+        <p:nvPicPr>
+          <p:cNvPr id="78" name="Image 37" descr="public/logos/accuray.png">
+            <a:hlinkClick r:id="rId114" tooltip="Accuray®"/>
+          </p:cNvPr>
+          <p:cNvPicPr>
+            <a:picLocks noChangeAspect="1"/>
+          </p:cNvPicPr>
+          <p:nvPr/>
+        </p:nvPicPr>
+        <p:blipFill>
+          <a:blip r:embed="rId113"/>
+          <a:srcRect l="0" r="0" t="0" b="0"/>
+          <a:stretch/>
+        </p:blipFill>
+        <p:spPr>
+          <a:xfrm>
+            <a:off x="3749824" y="5489448"/>
+            <a:ext cx="1417712" cy="344424"/>
+          </a:xfrm>
+          <a:prstGeom prst="rect">
+            <a:avLst/>
+          </a:prstGeom>
+        </p:spPr>
+      </p:pic>
+      <p:sp>
+        <p:nvSpPr>
+          <p:cNvPr id="79" name="Text 39"/>
+          <p:cNvSpPr/>
+          <p:nvPr/>
+        </p:nvSpPr>
+        <p:spPr>
+          <a:xfrm>
+            <a:off x="3749824" y="5833872"/>
+            <a:ext cx="1417712" cy="256032"/>
+          </a:xfrm>
+          <a:prstGeom prst="rect">
+            <a:avLst/>
+          </a:prstGeom>
+          <a:noFill/>
+          <a:ln/>
+        </p:spPr>
+        <p:txBody>
+          <a:bodyPr wrap="square" rtlCol="0" anchor="ctr"/>
+          <a:lstStyle/>
+          <a:p>
+            <a:pPr algn="ctr" indent="0" marL="0">
+              <a:buNone/>
+            </a:pPr>
+            <a:r>
+              <a:rPr lang="en-US" sz="900" u="sng" dirty="0">
+                <a:solidFill>
+                  <a:srgbClr val="1A1A2E"/>
+                </a:solidFill>
+                <a:latin typeface="Calibri" pitchFamily="34" charset="0"/>
+                <a:ea typeface="Calibri" pitchFamily="34" charset="-122"/>
+                <a:cs typeface="Calibri" pitchFamily="34" charset="-120"/>
+                <a:hlinkClick r:id="rId115" invalidUrl="" action="" tgtFrame="" tooltip="" history="1" highlightClick="0" endSnd="0">
+                  <a:extLst>
+                    <a:ext uri="{A12FA001-AC4F-418D-AE19-62706E023703}">
+                      <ahyp:hlinkClr xmlns:ahyp="http://schemas.microsoft.com/office/drawing/2018/hyperlinkcolor" val="tx"/>
+                    </a:ext>
+                  </a:extLst>
+                </a:hlinkClick>
+              </a:rPr>
+              <a:t>Accuray®</a:t>
+            </a:r>
+            <a:endParaRPr lang="en-US" sz="900" dirty="0"/>
+          </a:p>
+        </p:txBody>
+      </p:sp>
+      <p:pic>
+        <p:nvPicPr>
+          <p:cNvPr id="80" name="Image 38" descr="public/logos/SunNuclear.png">
+            <a:hlinkClick r:id="rId117" tooltip="Sun Nuclear (Mirion Medical)"/>
+          </p:cNvPr>
+          <p:cNvPicPr>
+            <a:picLocks noChangeAspect="1"/>
+          </p:cNvPicPr>
+          <p:nvPr/>
+        </p:nvPicPr>
+        <p:blipFill>
+          <a:blip r:embed="rId116"/>
+          <a:srcRect l="0" r="0" t="0" b="0"/>
+          <a:stretch/>
+        </p:blipFill>
+        <p:spPr>
+          <a:xfrm>
+            <a:off x="5386992" y="5489448"/>
+            <a:ext cx="1417712" cy="344424"/>
+          </a:xfrm>
+          <a:prstGeom prst="rect">
+            <a:avLst/>
+          </a:prstGeom>
+        </p:spPr>
+      </p:pic>
+      <p:sp>
+        <p:nvSpPr>
+          <p:cNvPr id="81" name="Text 40"/>
+          <p:cNvSpPr/>
+          <p:nvPr/>
+        </p:nvSpPr>
+        <p:spPr>
+          <a:xfrm>
+            <a:off x="5386992" y="5833872"/>
+            <a:ext cx="1417712" cy="256032"/>
+          </a:xfrm>
+          <a:prstGeom prst="rect">
+            <a:avLst/>
+          </a:prstGeom>
+          <a:noFill/>
+          <a:ln/>
+        </p:spPr>
+        <p:txBody>
+          <a:bodyPr wrap="square" rtlCol="0" anchor="ctr"/>
+          <a:lstStyle/>
+          <a:p>
+            <a:pPr algn="ctr" indent="0" marL="0">
+              <a:buNone/>
+            </a:pPr>
+            <a:r>
+              <a:rPr lang="en-US" sz="900" u="sng" dirty="0">
+                <a:solidFill>
+                  <a:srgbClr val="1A1A2E"/>
+                </a:solidFill>
+                <a:latin typeface="Calibri" pitchFamily="34" charset="0"/>
+                <a:ea typeface="Calibri" pitchFamily="34" charset="-122"/>
+                <a:cs typeface="Calibri" pitchFamily="34" charset="-120"/>
+                <a:hlinkClick r:id="rId118" invalidUrl="" action="" tgtFrame="" tooltip="" history="1" highlightClick="0" endSnd="0">
+                  <a:extLst>
+                    <a:ext uri="{A12FA001-AC4F-418D-AE19-62706E023703}">
+                      <ahyp:hlinkClr xmlns:ahyp="http://schemas.microsoft.com/office/drawing/2018/hyperlinkcolor" val="tx"/>
+                    </a:ext>
+                  </a:extLst>
+                </a:hlinkClick>
+              </a:rPr>
+              <a:t>Sun Nuclear (Mirion Medical)</a:t>
+            </a:r>
+            <a:endParaRPr lang="en-US" sz="900" dirty="0"/>
+          </a:p>
+        </p:txBody>
+      </p:sp>
+      <p:pic>
+        <p:nvPicPr>
+          <p:cNvPr id="82" name="Image 39" descr="public/newsletters/2026-06/_logo-cache/md_anderson.png">
+            <a:hlinkClick r:id="rId120" tooltip="MD Anderson Cancer Center"/>
+          </p:cNvPr>
+          <p:cNvPicPr>
+            <a:picLocks noChangeAspect="1"/>
+          </p:cNvPicPr>
+          <p:nvPr/>
+        </p:nvPicPr>
+        <p:blipFill>
+          <a:blip r:embed="rId119"/>
+          <a:srcRect l="0" r="0" t="0" b="0"/>
+          <a:stretch/>
+        </p:blipFill>
+        <p:spPr>
+          <a:xfrm>
+            <a:off x="7024160" y="5489448"/>
+            <a:ext cx="1417712" cy="344424"/>
+          </a:xfrm>
+          <a:prstGeom prst="rect">
+            <a:avLst/>
+          </a:prstGeom>
+        </p:spPr>
+      </p:pic>
+      <p:sp>
+        <p:nvSpPr>
+          <p:cNvPr id="83" name="Text 41"/>
+          <p:cNvSpPr/>
+          <p:nvPr/>
+        </p:nvSpPr>
+        <p:spPr>
+          <a:xfrm>
+            <a:off x="7024160" y="5833872"/>
+            <a:ext cx="1417712" cy="256032"/>
+          </a:xfrm>
+          <a:prstGeom prst="rect">
+            <a:avLst/>
+          </a:prstGeom>
+          <a:noFill/>
+          <a:ln/>
+        </p:spPr>
+        <p:txBody>
+          <a:bodyPr wrap="square" rtlCol="0" anchor="ctr"/>
+          <a:lstStyle/>
+          <a:p>
+            <a:pPr algn="ctr" indent="0" marL="0">
+              <a:buNone/>
+            </a:pPr>
+            <a:r>
+              <a:rPr lang="en-US" sz="900" u="sng" dirty="0">
+                <a:solidFill>
+                  <a:srgbClr val="1A1A2E"/>
+                </a:solidFill>
+                <a:latin typeface="Calibri" pitchFamily="34" charset="0"/>
+                <a:ea typeface="Calibri" pitchFamily="34" charset="-122"/>
+                <a:cs typeface="Calibri" pitchFamily="34" charset="-120"/>
+                <a:hlinkClick r:id="rId121" invalidUrl="" action="" tgtFrame="" tooltip="" history="1" highlightClick="0" endSnd="0">
+                  <a:extLst>
+                    <a:ext uri="{A12FA001-AC4F-418D-AE19-62706E023703}">
+                      <ahyp:hlinkClr xmlns:ahyp="http://schemas.microsoft.com/office/drawing/2018/hyperlinkcolor" val="tx"/>
+                    </a:ext>
+                  </a:extLst>
+                </a:hlinkClick>
+              </a:rPr>
+              <a:t>MD Anderson Cancer Center</a:t>
+            </a:r>
+            <a:endParaRPr lang="en-US" sz="900" dirty="0"/>
+          </a:p>
+        </p:txBody>
+      </p:sp>
+      <p:pic>
+        <p:nvPicPr>
+          <p:cNvPr id="84" name="Image 40" descr="public/logos/Brainlab.jpg">
+            <a:hlinkClick r:id="rId123" tooltip="Brainlab"/>
+          </p:cNvPr>
+          <p:cNvPicPr>
+            <a:picLocks noChangeAspect="1"/>
+          </p:cNvPicPr>
+          <p:nvPr/>
+        </p:nvPicPr>
+        <p:blipFill>
+          <a:blip r:embed="rId122"/>
+          <a:srcRect l="0" r="0" t="0" b="0"/>
+          <a:stretch/>
+        </p:blipFill>
+        <p:spPr>
+          <a:xfrm>
+            <a:off x="8661327" y="5489448"/>
+            <a:ext cx="1417712" cy="344424"/>
+          </a:xfrm>
+          <a:prstGeom prst="rect">
+            <a:avLst/>
+          </a:prstGeom>
+        </p:spPr>
+      </p:pic>
+      <p:sp>
+        <p:nvSpPr>
+          <p:cNvPr id="85" name="Text 42"/>
+          <p:cNvSpPr/>
+          <p:nvPr/>
+        </p:nvSpPr>
+        <p:spPr>
+          <a:xfrm>
+            <a:off x="8661327" y="5833872"/>
+            <a:ext cx="1417712" cy="256032"/>
+          </a:xfrm>
+          <a:prstGeom prst="rect">
+            <a:avLst/>
+          </a:prstGeom>
+          <a:noFill/>
+          <a:ln/>
+        </p:spPr>
+        <p:txBody>
+          <a:bodyPr wrap="square" rtlCol="0" anchor="ctr"/>
+          <a:lstStyle/>
+          <a:p>
+            <a:pPr algn="ctr" indent="0" marL="0">
+              <a:buNone/>
+            </a:pPr>
+            <a:r>
+              <a:rPr lang="en-US" sz="900" u="sng" dirty="0">
+                <a:solidFill>
+                  <a:srgbClr val="1A1A2E"/>
+                </a:solidFill>
+                <a:latin typeface="Calibri" pitchFamily="34" charset="0"/>
+                <a:ea typeface="Calibri" pitchFamily="34" charset="-122"/>
+                <a:cs typeface="Calibri" pitchFamily="34" charset="-120"/>
+                <a:hlinkClick r:id="rId124" invalidUrl="" action="" tgtFrame="" tooltip="" history="1" highlightClick="0" endSnd="0">
+                  <a:extLst>
+                    <a:ext uri="{A12FA001-AC4F-418D-AE19-62706E023703}">
+                      <ahyp:hlinkClr xmlns:ahyp="http://schemas.microsoft.com/office/drawing/2018/hyperlinkcolor" val="tx"/>
+                    </a:ext>
+                  </a:extLst>
+                </a:hlinkClick>
+              </a:rPr>
+              <a:t>Brainlab</a:t>
+            </a:r>
+            <a:endParaRPr lang="en-US" sz="900" dirty="0"/>
+          </a:p>
+        </p:txBody>
+      </p:sp>
+      <p:pic>
+        <p:nvPicPr>
+          <p:cNvPr id="86" name="Image 41" descr="public/logos/varian.jpg">
+            <a:hlinkClick r:id="rId126" tooltip="Varian (Siemens Healthineers)"/>
+          </p:cNvPr>
+          <p:cNvPicPr>
+            <a:picLocks noChangeAspect="1"/>
+          </p:cNvPicPr>
+          <p:nvPr/>
+        </p:nvPicPr>
+        <p:blipFill>
+          <a:blip r:embed="rId125"/>
+          <a:srcRect l="0" r="0" t="0" b="0"/>
+          <a:stretch/>
+        </p:blipFill>
+        <p:spPr>
+          <a:xfrm>
+            <a:off x="10298495" y="5489448"/>
+            <a:ext cx="1417712" cy="344424"/>
+          </a:xfrm>
+          <a:prstGeom prst="rect">
+            <a:avLst/>
+          </a:prstGeom>
+        </p:spPr>
+      </p:pic>
+      <p:sp>
+        <p:nvSpPr>
           <p:cNvPr id="87" name="Text 43"/>
           <p:cNvSpPr/>
           <p:nvPr/>
         </p:nvSpPr>
         <p:spPr>
           <a:xfrm>
-            <a:off x="10298495" y="6199632"/>
+            <a:off x="10298495" y="5833872"/>
             <a:ext cx="1417712" cy="256032"/>
           </a:xfrm>
           <a:prstGeom prst="rect">
@@ -5431,13 +6597,20 @@
               <a:buNone/>
             </a:pPr>
             <a:r>
-              <a:rPr lang="en-US" sz="900" dirty="0">
+              <a:rPr lang="en-US" sz="900" u="sng" dirty="0">
                 <a:solidFill>
                   <a:srgbClr val="1A1A2E"/>
                 </a:solidFill>
                 <a:latin typeface="Calibri" pitchFamily="34" charset="0"/>
                 <a:ea typeface="Calibri" pitchFamily="34" charset="-122"/>
                 <a:cs typeface="Calibri" pitchFamily="34" charset="-120"/>
+                <a:hlinkClick r:id="rId127" invalidUrl="" action="" tgtFrame="" tooltip="" history="1" highlightClick="0" endSnd="0">
+                  <a:extLst>
+                    <a:ext uri="{A12FA001-AC4F-418D-AE19-62706E023703}">
+                      <ahyp:hlinkClr xmlns:ahyp="http://schemas.microsoft.com/office/drawing/2018/hyperlinkcolor" val="tx"/>
+                    </a:ext>
+                  </a:extLst>
+                </a:hlinkClick>
               </a:rPr>
               <a:t>Varian (Siemens Healthineers)</a:t>
             </a:r>
@@ -5445,6 +6618,162 @@
           </a:p>
         </p:txBody>
       </p:sp>
+      <p:pic>
+        <p:nvPicPr>
+          <p:cNvPr id="88" name="Image 42" descr="public/newsletters/2026-06/_assets/dlinrt-logo.png">
+            <a:hlinkClick r:id="rId129" tooltip="dlinrt.eu"/>
+          </p:cNvPr>
+          <p:cNvPicPr>
+            <a:picLocks noChangeAspect="1"/>
+          </p:cNvPicPr>
+          <p:nvPr/>
+        </p:nvPicPr>
+        <p:blipFill>
+          <a:blip r:embed="rId128"/>
+          <a:srcRect l="0" r="0" t="0" b="0"/>
+          <a:stretch/>
+        </p:blipFill>
+        <p:spPr>
+          <a:xfrm>
+            <a:off x="274320" y="6492240"/>
+            <a:ext cx="292608" cy="292608"/>
+          </a:xfrm>
+          <a:prstGeom prst="rect">
+            <a:avLst/>
+          </a:prstGeom>
+        </p:spPr>
+      </p:pic>
+      <p:sp>
+        <p:nvSpPr>
+          <p:cNvPr id="89" name="Text 44"/>
+          <p:cNvSpPr/>
+          <p:nvPr/>
+        </p:nvSpPr>
+        <p:spPr>
+          <a:xfrm>
+            <a:off x="621792" y="6510528"/>
+            <a:ext cx="1828800" cy="274320"/>
+          </a:xfrm>
+          <a:prstGeom prst="rect">
+            <a:avLst/>
+          </a:prstGeom>
+          <a:noFill/>
+          <a:ln/>
+        </p:spPr>
+        <p:txBody>
+          <a:bodyPr wrap="square" rtlCol="0" anchor="ctr"/>
+          <a:lstStyle/>
+          <a:p>
+            <a:pPr indent="0" marL="0">
+              <a:buNone/>
+            </a:pPr>
+            <a:r>
+              <a:rPr lang="en-US" sz="1100" b="1" u="sng" dirty="0">
+                <a:solidFill>
+                  <a:srgbClr val="5090D0"/>
+                </a:solidFill>
+                <a:latin typeface="Calibri" pitchFamily="34" charset="0"/>
+                <a:ea typeface="Calibri" pitchFamily="34" charset="-122"/>
+                <a:cs typeface="Calibri" pitchFamily="34" charset="-120"/>
+                <a:hlinkClick r:id="rId130" invalidUrl="" action="" tgtFrame="" tooltip="" history="1" highlightClick="0" endSnd="0">
+                  <a:extLst>
+                    <a:ext uri="{A12FA001-AC4F-418D-AE19-62706E023703}">
+                      <ahyp:hlinkClr xmlns:ahyp="http://schemas.microsoft.com/office/drawing/2018/hyperlinkcolor" val="tx"/>
+                    </a:ext>
+                  </a:extLst>
+                </a:hlinkClick>
+              </a:rPr>
+              <a:t>dlinrt.eu</a:t>
+            </a:r>
+            <a:endParaRPr lang="en-US" sz="1100" dirty="0"/>
+          </a:p>
+        </p:txBody>
+      </p:sp>
+      <p:sp>
+        <p:nvSpPr>
+          <p:cNvPr id="90" name="Text 45"/>
+          <p:cNvSpPr/>
+          <p:nvPr/>
+        </p:nvSpPr>
+        <p:spPr>
+          <a:xfrm>
+            <a:off x="2743200" y="6510528"/>
+            <a:ext cx="6705295" cy="274320"/>
+          </a:xfrm>
+          <a:prstGeom prst="rect">
+            <a:avLst/>
+          </a:prstGeom>
+          <a:noFill/>
+          <a:ln/>
+        </p:spPr>
+        <p:txBody>
+          <a:bodyPr wrap="square" rtlCol="0" anchor="ctr"/>
+          <a:lstStyle/>
+          <a:p>
+            <a:pPr algn="ctr" indent="0" marL="0">
+              <a:buNone/>
+            </a:pPr>
+            <a:r>
+              <a:rPr lang="en-US" sz="1100" dirty="0">
+                <a:solidFill>
+                  <a:srgbClr val="6B7280"/>
+                </a:solidFill>
+                <a:latin typeface="Calibri" pitchFamily="34" charset="0"/>
+                <a:ea typeface="Calibri" pitchFamily="34" charset="-122"/>
+                <a:cs typeface="Calibri" pitchFamily="34" charset="-120"/>
+              </a:rPr>
+              <a:t>2026-06-16  ·  </a:t>
+            </a:r>
+            <a:pPr algn="ctr" indent="0" marL="0">
+              <a:buNone/>
+            </a:pPr>
+            <a:r>
+              <a:rPr lang="en-US" sz="1100" u="sng" dirty="0">
+                <a:solidFill>
+                  <a:srgbClr val="5090D0"/>
+                </a:solidFill>
+                <a:latin typeface="Calibri" pitchFamily="34" charset="0"/>
+                <a:ea typeface="Calibri" pitchFamily="34" charset="-122"/>
+                <a:cs typeface="Calibri" pitchFamily="34" charset="-120"/>
+                <a:hlinkClick r:id="rId131" invalidUrl="" action="" tgtFrame="" tooltip="" history="1" highlightClick="0" endSnd="0">
+                  <a:extLst>
+                    <a:ext uri="{A12FA001-AC4F-418D-AE19-62706E023703}">
+                      <ahyp:hlinkClr xmlns:ahyp="http://schemas.microsoft.com/office/drawing/2018/hyperlinkcolor" val="tx"/>
+                    </a:ext>
+                  </a:extLst>
+                </a:hlinkClick>
+              </a:rPr>
+              <a:t>CC BY 4.0</a:t>
+            </a:r>
+            <a:endParaRPr lang="en-US" sz="1100" dirty="0"/>
+          </a:p>
+        </p:txBody>
+      </p:sp>
+      <p:pic>
+        <p:nvPicPr>
+          <p:cNvPr id="91" name="Image 43" descr="public/newsletters/2026-06/_assets/linkedin.png">
+            <a:hlinkClick r:id="rId133" tooltip="DLinRT on LinkedIn"/>
+          </p:cNvPr>
+          <p:cNvPicPr>
+            <a:picLocks noChangeAspect="1"/>
+          </p:cNvPicPr>
+          <p:nvPr/>
+        </p:nvPicPr>
+        <p:blipFill>
+          <a:blip r:embed="rId132"/>
+          <a:srcRect l="0" r="0" t="0" b="0"/>
+          <a:stretch/>
+        </p:blipFill>
+        <p:spPr>
+          <a:xfrm>
+            <a:off x="11688775" y="6492240"/>
+            <a:ext cx="292608" cy="292608"/>
+          </a:xfrm>
+          <a:prstGeom prst="rect">
+            <a:avLst/>
+          </a:prstGeom>
+        </p:spPr>
+      </p:pic>
     </p:spTree>
   </p:cSld>
   <p:clrMapOvr>
@@ -5510,8 +6839,8 @@
         </p:nvSpPr>
         <p:spPr>
           <a:xfrm>
-            <a:off x="640080" y="365760"/>
-            <a:ext cx="10911535" cy="731520"/>
+            <a:off x="640080" y="320040"/>
+            <a:ext cx="10911535" cy="640080"/>
           </a:xfrm>
           <a:prstGeom prst="rect">
             <a:avLst/>
@@ -5527,17 +6856,24 @@
               <a:buNone/>
             </a:pPr>
             <a:r>
-              <a:rPr lang="en-US" sz="3200" b="1" dirty="0">
+              <a:rPr lang="en-US" sz="3000" b="1" u="sng" dirty="0">
                 <a:solidFill>
                   <a:srgbClr val="1A1A2E"/>
                 </a:solidFill>
                 <a:latin typeface="Calibri" pitchFamily="34" charset="0"/>
                 <a:ea typeface="Calibri" pitchFamily="34" charset="-122"/>
                 <a:cs typeface="Calibri" pitchFamily="34" charset="-120"/>
-              </a:rPr>
-              <a:t>Support &amp; Transparency</a:t>
-            </a:r>
-            <a:endParaRPr lang="en-US" sz="3200" dirty="0"/>
+                <a:hlinkClick r:id="rId1" invalidUrl="" action="" tgtFrame="" tooltip="" history="1" highlightClick="0" endSnd="0">
+                  <a:extLst>
+                    <a:ext uri="{A12FA001-AC4F-418D-AE19-62706E023703}">
+                      <ahyp:hlinkClr xmlns:ahyp="http://schemas.microsoft.com/office/drawing/2018/hyperlinkcolor" val="tx"/>
+                    </a:ext>
+                  </a:extLst>
+                </a:hlinkClick>
+              </a:rPr>
+              <a:t>Support, Transparency &amp; People</a:t>
+            </a:r>
+            <a:endParaRPr lang="en-US" sz="3000" dirty="0"/>
           </a:p>
         </p:txBody>
       </p:sp>
@@ -5549,8 +6885,8 @@
         </p:nvSpPr>
         <p:spPr>
           <a:xfrm>
-            <a:off x="640080" y="1280160"/>
-            <a:ext cx="10911535" cy="457200"/>
+            <a:off x="640080" y="1051560"/>
+            <a:ext cx="10911535" cy="411480"/>
           </a:xfrm>
           <a:prstGeom prst="rect">
             <a:avLst/>
@@ -5566,7 +6902,7 @@
               <a:buNone/>
             </a:pPr>
             <a:r>
-              <a:rPr lang="en-US" sz="2200" b="1" dirty="0">
+              <a:rPr lang="en-US" sz="2000" b="1" dirty="0">
                 <a:solidFill>
                   <a:srgbClr val="5090D0"/>
                 </a:solidFill>
@@ -5576,7 +6912,7 @@
               </a:rPr>
               <a:t>UMC Utrecht backs the platform</a:t>
             </a:r>
-            <a:endParaRPr lang="en-US" sz="2200" dirty="0"/>
+            <a:endParaRPr lang="en-US" sz="2000" dirty="0"/>
           </a:p>
         </p:txBody>
       </p:sp>
@@ -5588,8 +6924,8 @@
         </p:nvSpPr>
         <p:spPr>
           <a:xfrm>
-            <a:off x="640080" y="1737360"/>
-            <a:ext cx="10911535" cy="1463040"/>
+            <a:off x="640080" y="1463040"/>
+            <a:ext cx="10911535" cy="1280160"/>
           </a:xfrm>
           <a:prstGeom prst="rect">
             <a:avLst/>
@@ -5608,7 +6944,7 @@
               <a:buNone/>
             </a:pPr>
             <a:r>
-              <a:rPr lang="en-US" sz="1800" dirty="0">
+              <a:rPr lang="en-US" sz="1600" dirty="0">
                 <a:solidFill>
                   <a:srgbClr val="1A1A2E"/>
                 </a:solidFill>
@@ -5618,7 +6954,7 @@
               </a:rPr>
               <a:t>Through the Radiotherapy Medical Physics Traineeship, UMC Utrecht has agreed to cover the running costs of DLinRT.eu — safeguarding the independence and continuity of the initiative. A huge thank you to the Radiotherapy Department for this support.</a:t>
             </a:r>
-            <a:endParaRPr lang="en-US" sz="1800" dirty="0"/>
+            <a:endParaRPr lang="en-US" sz="1600" dirty="0"/>
           </a:p>
         </p:txBody>
       </p:sp>
@@ -5630,7 +6966,46 @@
         </p:nvSpPr>
         <p:spPr>
           <a:xfrm>
-            <a:off x="640080" y="3383280"/>
+            <a:off x="640080" y="2788920"/>
+            <a:ext cx="10911535" cy="411480"/>
+          </a:xfrm>
+          <a:prstGeom prst="rect">
+            <a:avLst/>
+          </a:prstGeom>
+          <a:noFill/>
+          <a:ln/>
+        </p:spPr>
+        <p:txBody>
+          <a:bodyPr wrap="square" rtlCol="0" anchor="ctr"/>
+          <a:lstStyle/>
+          <a:p>
+            <a:pPr indent="0" marL="0">
+              <a:buNone/>
+            </a:pPr>
+            <a:r>
+              <a:rPr lang="en-US" sz="2000" b="1" dirty="0">
+                <a:solidFill>
+                  <a:srgbClr val="5090D0"/>
+                </a:solidFill>
+                <a:latin typeface="Calibri" pitchFamily="34" charset="0"/>
+                <a:ea typeface="Calibri" pitchFamily="34" charset="-122"/>
+                <a:cs typeface="Calibri" pitchFamily="34" charset="-120"/>
+              </a:rPr>
+              <a:t>Running costs, in the open</a:t>
+            </a:r>
+            <a:endParaRPr lang="en-US" sz="2000" dirty="0"/>
+          </a:p>
+        </p:txBody>
+      </p:sp>
+      <p:sp>
+        <p:nvSpPr>
+          <p:cNvPr id="7" name="Text 5"/>
+          <p:cNvSpPr/>
+          <p:nvPr/>
+        </p:nvSpPr>
+        <p:spPr>
+          <a:xfrm>
+            <a:off x="640080" y="3200400"/>
             <a:ext cx="10911535" cy="457200"/>
           </a:xfrm>
           <a:prstGeom prst="rect">
@@ -5647,29 +7022,216 @@
               <a:buNone/>
             </a:pPr>
             <a:r>
-              <a:rPr lang="en-US" sz="2200" b="1" dirty="0">
+              <a:rPr lang="en-US" sz="1600" dirty="0">
+                <a:solidFill>
+                  <a:srgbClr val="1A1A2E"/>
+                </a:solidFill>
+                <a:latin typeface="Calibri" pitchFamily="34" charset="0"/>
+                <a:ea typeface="Calibri" pitchFamily="34" charset="-122"/>
+                <a:cs typeface="Calibri" pitchFamily="34" charset="-120"/>
+              </a:rPr>
+              <a:t>We publish our running costs and keep them up to date at </a:t>
+            </a:r>
+            <a:pPr indent="0" marL="0">
+              <a:buNone/>
+            </a:pPr>
+            <a:r>
+              <a:rPr lang="en-US" sz="1600" b="1" u="sng" dirty="0">
                 <a:solidFill>
                   <a:srgbClr val="5090D0"/>
                 </a:solidFill>
                 <a:latin typeface="Calibri" pitchFamily="34" charset="0"/>
                 <a:ea typeface="Calibri" pitchFamily="34" charset="-122"/>
                 <a:cs typeface="Calibri" pitchFamily="34" charset="-120"/>
-              </a:rPr>
-              <a:t>Running costs, in the open</a:t>
-            </a:r>
-            <a:endParaRPr lang="en-US" sz="2200" dirty="0"/>
-          </a:p>
-        </p:txBody>
-      </p:sp>
-      <p:sp>
-        <p:nvSpPr>
-          <p:cNvPr id="7" name="Text 5"/>
-          <p:cNvSpPr/>
-          <p:nvPr/>
-        </p:nvSpPr>
-        <p:spPr>
-          <a:xfrm>
-            <a:off x="640080" y="3840480"/>
+                <a:hlinkClick r:id="rId2" invalidUrl="" action="" tgtFrame="" tooltip="" history="1" highlightClick="0" endSnd="0">
+                  <a:extLst>
+                    <a:ext uri="{A12FA001-AC4F-418D-AE19-62706E023703}">
+                      <ahyp:hlinkClr xmlns:ahyp="http://schemas.microsoft.com/office/drawing/2018/hyperlinkcolor" val="tx"/>
+                    </a:ext>
+                  </a:extLst>
+                </a:hlinkClick>
+              </a:rPr>
+              <a:t>dlinrt.eu/transparency</a:t>
+            </a:r>
+            <a:pPr indent="0" marL="0">
+              <a:buNone/>
+            </a:pPr>
+            <a:r>
+              <a:rPr lang="en-US" sz="1600" dirty="0">
+                <a:solidFill>
+                  <a:srgbClr val="1A1A2E"/>
+                </a:solidFill>
+                <a:latin typeface="Calibri" pitchFamily="34" charset="0"/>
+                <a:ea typeface="Calibri" pitchFamily="34" charset="-122"/>
+                <a:cs typeface="Calibri" pitchFamily="34" charset="-120"/>
+              </a:rPr>
+              <a:t>.</a:t>
+            </a:r>
+            <a:endParaRPr lang="en-US" sz="1600" dirty="0"/>
+          </a:p>
+        </p:txBody>
+      </p:sp>
+      <p:sp>
+        <p:nvSpPr>
+          <p:cNvPr id="8" name="Text 6"/>
+          <p:cNvSpPr/>
+          <p:nvPr/>
+        </p:nvSpPr>
+        <p:spPr>
+          <a:xfrm>
+            <a:off x="640080" y="3749040"/>
+            <a:ext cx="10911535" cy="411480"/>
+          </a:xfrm>
+          <a:prstGeom prst="rect">
+            <a:avLst/>
+          </a:prstGeom>
+          <a:noFill/>
+          <a:ln/>
+        </p:spPr>
+        <p:txBody>
+          <a:bodyPr wrap="square" rtlCol="0" anchor="ctr"/>
+          <a:lstStyle/>
+          <a:p>
+            <a:pPr indent="0" marL="0">
+              <a:buNone/>
+            </a:pPr>
+            <a:r>
+              <a:rPr lang="en-US" sz="2000" b="1" dirty="0">
+                <a:solidFill>
+                  <a:srgbClr val="5090D0"/>
+                </a:solidFill>
+                <a:latin typeface="Calibri" pitchFamily="34" charset="0"/>
+                <a:ea typeface="Calibri" pitchFamily="34" charset="-122"/>
+                <a:cs typeface="Calibri" pitchFamily="34" charset="-120"/>
+              </a:rPr>
+              <a:t>Welcome Szabolcs David · thanks to all 12 reviewers</a:t>
+            </a:r>
+            <a:endParaRPr lang="en-US" sz="2000" dirty="0"/>
+          </a:p>
+        </p:txBody>
+      </p:sp>
+      <p:sp>
+        <p:nvSpPr>
+          <p:cNvPr id="9" name="Text 7"/>
+          <p:cNvSpPr/>
+          <p:nvPr/>
+        </p:nvSpPr>
+        <p:spPr>
+          <a:xfrm>
+            <a:off x="640080" y="4160520"/>
+            <a:ext cx="10911535" cy="822960"/>
+          </a:xfrm>
+          <a:prstGeom prst="rect">
+            <a:avLst/>
+          </a:prstGeom>
+          <a:noFill/>
+          <a:ln/>
+        </p:spPr>
+        <p:txBody>
+          <a:bodyPr wrap="square" rtlCol="0" anchor="ctr"/>
+          <a:lstStyle/>
+          <a:p>
+            <a:pPr indent="0" marL="0">
+              <a:buNone/>
+            </a:pPr>
+            <a:r>
+              <a:rPr lang="en-US" sz="1600" dirty="0">
+                <a:solidFill>
+                  <a:srgbClr val="1A1A2E"/>
+                </a:solidFill>
+                <a:latin typeface="Calibri" pitchFamily="34" charset="0"/>
+                <a:ea typeface="Calibri" pitchFamily="34" charset="-122"/>
+                <a:cs typeface="Calibri" pitchFamily="34" charset="-120"/>
+              </a:rPr>
+              <a:t>A warm welcome to Szabolcs David, who joins the reviewer team. Huge thanks to all 12 reviewers keeping the catalogue trustworthy — full list on the </a:t>
+            </a:r>
+            <a:pPr indent="0" marL="0">
+              <a:buNone/>
+            </a:pPr>
+            <a:r>
+              <a:rPr lang="en-US" sz="1600" b="1" u="sng" dirty="0">
+                <a:solidFill>
+                  <a:srgbClr val="5090D0"/>
+                </a:solidFill>
+                <a:latin typeface="Calibri" pitchFamily="34" charset="0"/>
+                <a:ea typeface="Calibri" pitchFamily="34" charset="-122"/>
+                <a:cs typeface="Calibri" pitchFamily="34" charset="-120"/>
+                <a:hlinkClick r:id="rId3" invalidUrl="" action="" tgtFrame="" tooltip="" history="1" highlightClick="0" endSnd="0">
+                  <a:extLst>
+                    <a:ext uri="{A12FA001-AC4F-418D-AE19-62706E023703}">
+                      <ahyp:hlinkClr xmlns:ahyp="http://schemas.microsoft.com/office/drawing/2018/hyperlinkcolor" val="tx"/>
+                    </a:ext>
+                  </a:extLst>
+                </a:hlinkClick>
+              </a:rPr>
+              <a:t>About page</a:t>
+            </a:r>
+            <a:pPr indent="0" marL="0">
+              <a:buNone/>
+            </a:pPr>
+            <a:r>
+              <a:rPr lang="en-US" sz="1600" dirty="0">
+                <a:solidFill>
+                  <a:srgbClr val="1A1A2E"/>
+                </a:solidFill>
+                <a:latin typeface="Calibri" pitchFamily="34" charset="0"/>
+                <a:ea typeface="Calibri" pitchFamily="34" charset="-122"/>
+                <a:cs typeface="Calibri" pitchFamily="34" charset="-120"/>
+              </a:rPr>
+              <a:t>.</a:t>
+            </a:r>
+            <a:endParaRPr lang="en-US" sz="1600" dirty="0"/>
+          </a:p>
+        </p:txBody>
+      </p:sp>
+      <p:sp>
+        <p:nvSpPr>
+          <p:cNvPr id="10" name="Text 8"/>
+          <p:cNvSpPr/>
+          <p:nvPr/>
+        </p:nvSpPr>
+        <p:spPr>
+          <a:xfrm>
+            <a:off x="640080" y="5074920"/>
+            <a:ext cx="10911535" cy="411480"/>
+          </a:xfrm>
+          <a:prstGeom prst="rect">
+            <a:avLst/>
+          </a:prstGeom>
+          <a:noFill/>
+          <a:ln/>
+        </p:spPr>
+        <p:txBody>
+          <a:bodyPr wrap="square" rtlCol="0" anchor="ctr"/>
+          <a:lstStyle/>
+          <a:p>
+            <a:pPr indent="0" marL="0">
+              <a:buNone/>
+            </a:pPr>
+            <a:r>
+              <a:rPr lang="en-US" sz="2000" b="1" i="1" dirty="0">
+                <a:solidFill>
+                  <a:srgbClr val="5090D0"/>
+                </a:solidFill>
+                <a:latin typeface="Calibri" pitchFamily="34" charset="0"/>
+                <a:ea typeface="Calibri" pitchFamily="34" charset="-122"/>
+                <a:cs typeface="Calibri" pitchFamily="34" charset="-120"/>
+              </a:rPr>
+              <a:t>Errare humanum est</a:t>
+            </a:r>
+            <a:endParaRPr lang="en-US" sz="2000" dirty="0"/>
+          </a:p>
+        </p:txBody>
+      </p:sp>
+      <p:sp>
+        <p:nvSpPr>
+          <p:cNvPr id="11" name="Text 9"/>
+          <p:cNvSpPr/>
+          <p:nvPr/>
+        </p:nvSpPr>
+        <p:spPr>
+          <a:xfrm>
+            <a:off x="640080" y="5486400"/>
             <a:ext cx="10911535" cy="731520"/>
           </a:xfrm>
           <a:prstGeom prst="rect">
@@ -5686,7 +7248,7 @@
               <a:buNone/>
             </a:pPr>
             <a:r>
-              <a:rPr lang="en-US" sz="1800" dirty="0">
+              <a:rPr lang="en-US" sz="1600" dirty="0">
                 <a:solidFill>
                   <a:srgbClr val="1A1A2E"/>
                 </a:solidFill>
@@ -5694,77 +7256,34 @@
                 <a:ea typeface="Calibri" pitchFamily="34" charset="-122"/>
                 <a:cs typeface="Calibri" pitchFamily="34" charset="-120"/>
               </a:rPr>
-              <a:t>We publish our running costs and will keep them up to date at dlinrt.eu/transparency.</a:t>
-            </a:r>
-            <a:endParaRPr lang="en-US" sz="1800" dirty="0"/>
-          </a:p>
-        </p:txBody>
-      </p:sp>
-      <p:sp>
-        <p:nvSpPr>
-          <p:cNvPr id="8" name="Text 6"/>
-          <p:cNvSpPr/>
-          <p:nvPr/>
-        </p:nvSpPr>
-        <p:spPr>
-          <a:xfrm>
-            <a:off x="640080" y="4846320"/>
-            <a:ext cx="10911535" cy="457200"/>
-          </a:xfrm>
-          <a:prstGeom prst="rect">
-            <a:avLst/>
-          </a:prstGeom>
-          <a:noFill/>
-          <a:ln/>
-        </p:spPr>
-        <p:txBody>
-          <a:bodyPr wrap="square" rtlCol="0" anchor="ctr"/>
-          <a:lstStyle/>
-          <a:p>
+              <a:t>We strive for accuracy and, alongside the AI tooling, we still value human revision. If you spot an imprecision or error, please </a:t>
+            </a:r>
             <a:pPr indent="0" marL="0">
               <a:buNone/>
             </a:pPr>
             <a:r>
-              <a:rPr lang="en-US" sz="2200" b="1" i="1" dirty="0">
+              <a:rPr lang="en-US" sz="1600" b="1" u="sng" dirty="0">
                 <a:solidFill>
                   <a:srgbClr val="5090D0"/>
                 </a:solidFill>
                 <a:latin typeface="Calibri" pitchFamily="34" charset="0"/>
                 <a:ea typeface="Calibri" pitchFamily="34" charset="-122"/>
                 <a:cs typeface="Calibri" pitchFamily="34" charset="-120"/>
-              </a:rPr>
-              <a:t>Errare humanum est</a:t>
-            </a:r>
-            <a:endParaRPr lang="en-US" sz="2200" dirty="0"/>
-          </a:p>
-        </p:txBody>
-      </p:sp>
-      <p:sp>
-        <p:nvSpPr>
-          <p:cNvPr id="9" name="Text 7"/>
-          <p:cNvSpPr/>
-          <p:nvPr/>
-        </p:nvSpPr>
-        <p:spPr>
-          <a:xfrm>
-            <a:off x="640080" y="5303520"/>
-            <a:ext cx="10911535" cy="1097280"/>
-          </a:xfrm>
-          <a:prstGeom prst="rect">
-            <a:avLst/>
-          </a:prstGeom>
-          <a:noFill/>
-          <a:ln/>
-        </p:spPr>
-        <p:txBody>
-          <a:bodyPr wrap="square" rtlCol="0" anchor="ctr"/>
-          <a:lstStyle/>
-          <a:p>
+                <a:hlinkClick r:id="rId4" invalidUrl="" action="" tgtFrame="" tooltip="" history="1" highlightClick="0" endSnd="0">
+                  <a:extLst>
+                    <a:ext uri="{A12FA001-AC4F-418D-AE19-62706E023703}">
+                      <ahyp:hlinkClr xmlns:ahyp="http://schemas.microsoft.com/office/drawing/2018/hyperlinkcolor" val="tx"/>
+                    </a:ext>
+                  </a:extLst>
+                </a:hlinkClick>
+              </a:rPr>
+              <a:t>reach out</a:t>
+            </a:r>
             <a:pPr indent="0" marL="0">
               <a:buNone/>
             </a:pPr>
             <a:r>
-              <a:rPr lang="en-US" sz="1800" dirty="0">
+              <a:rPr lang="en-US" sz="1600" dirty="0">
                 <a:solidFill>
                   <a:srgbClr val="1A1A2E"/>
                 </a:solidFill>
@@ -5772,12 +7291,168 @@
                 <a:ea typeface="Calibri" pitchFamily="34" charset="-122"/>
                 <a:cs typeface="Calibri" pitchFamily="34" charset="-120"/>
               </a:rPr>
-              <a:t>We strive for accuracy and, alongside the AI tooling, we still value human revision. If you spot an imprecision or error, please reach out — we will take action.</a:t>
-            </a:r>
-            <a:endParaRPr lang="en-US" sz="1800" dirty="0"/>
-          </a:p>
-        </p:txBody>
-      </p:sp>
+              <a:t> — we will take action.</a:t>
+            </a:r>
+            <a:endParaRPr lang="en-US" sz="1600" dirty="0"/>
+          </a:p>
+        </p:txBody>
+      </p:sp>
+      <p:pic>
+        <p:nvPicPr>
+          <p:cNvPr id="12" name="Image 0" descr="public/newsletters/2026-06/_assets/dlinrt-logo.png">
+            <a:hlinkClick r:id="rId6" tooltip="dlinrt.eu"/>
+          </p:cNvPr>
+          <p:cNvPicPr>
+            <a:picLocks noChangeAspect="1"/>
+          </p:cNvPicPr>
+          <p:nvPr/>
+        </p:nvPicPr>
+        <p:blipFill>
+          <a:blip r:embed="rId5"/>
+          <a:srcRect l="0" r="0" t="0" b="0"/>
+          <a:stretch/>
+        </p:blipFill>
+        <p:spPr>
+          <a:xfrm>
+            <a:off x="274320" y="6492240"/>
+            <a:ext cx="292608" cy="292608"/>
+          </a:xfrm>
+          <a:prstGeom prst="rect">
+            <a:avLst/>
+          </a:prstGeom>
+        </p:spPr>
+      </p:pic>
+      <p:sp>
+        <p:nvSpPr>
+          <p:cNvPr id="13" name="Text 10"/>
+          <p:cNvSpPr/>
+          <p:nvPr/>
+        </p:nvSpPr>
+        <p:spPr>
+          <a:xfrm>
+            <a:off x="621792" y="6510528"/>
+            <a:ext cx="1828800" cy="274320"/>
+          </a:xfrm>
+          <a:prstGeom prst="rect">
+            <a:avLst/>
+          </a:prstGeom>
+          <a:noFill/>
+          <a:ln/>
+        </p:spPr>
+        <p:txBody>
+          <a:bodyPr wrap="square" rtlCol="0" anchor="ctr"/>
+          <a:lstStyle/>
+          <a:p>
+            <a:pPr indent="0" marL="0">
+              <a:buNone/>
+            </a:pPr>
+            <a:r>
+              <a:rPr lang="en-US" sz="1100" b="1" u="sng" dirty="0">
+                <a:solidFill>
+                  <a:srgbClr val="5090D0"/>
+                </a:solidFill>
+                <a:latin typeface="Calibri" pitchFamily="34" charset="0"/>
+                <a:ea typeface="Calibri" pitchFamily="34" charset="-122"/>
+                <a:cs typeface="Calibri" pitchFamily="34" charset="-120"/>
+                <a:hlinkClick r:id="rId7" invalidUrl="" action="" tgtFrame="" tooltip="" history="1" highlightClick="0" endSnd="0">
+                  <a:extLst>
+                    <a:ext uri="{A12FA001-AC4F-418D-AE19-62706E023703}">
+                      <ahyp:hlinkClr xmlns:ahyp="http://schemas.microsoft.com/office/drawing/2018/hyperlinkcolor" val="tx"/>
+                    </a:ext>
+                  </a:extLst>
+                </a:hlinkClick>
+              </a:rPr>
+              <a:t>dlinrt.eu</a:t>
+            </a:r>
+            <a:endParaRPr lang="en-US" sz="1100" dirty="0"/>
+          </a:p>
+        </p:txBody>
+      </p:sp>
+      <p:sp>
+        <p:nvSpPr>
+          <p:cNvPr id="14" name="Text 11"/>
+          <p:cNvSpPr/>
+          <p:nvPr/>
+        </p:nvSpPr>
+        <p:spPr>
+          <a:xfrm>
+            <a:off x="2743200" y="6510528"/>
+            <a:ext cx="6705295" cy="274320"/>
+          </a:xfrm>
+          <a:prstGeom prst="rect">
+            <a:avLst/>
+          </a:prstGeom>
+          <a:noFill/>
+          <a:ln/>
+        </p:spPr>
+        <p:txBody>
+          <a:bodyPr wrap="square" rtlCol="0" anchor="ctr"/>
+          <a:lstStyle/>
+          <a:p>
+            <a:pPr algn="ctr" indent="0" marL="0">
+              <a:buNone/>
+            </a:pPr>
+            <a:r>
+              <a:rPr lang="en-US" sz="1100" dirty="0">
+                <a:solidFill>
+                  <a:srgbClr val="6B7280"/>
+                </a:solidFill>
+                <a:latin typeface="Calibri" pitchFamily="34" charset="0"/>
+                <a:ea typeface="Calibri" pitchFamily="34" charset="-122"/>
+                <a:cs typeface="Calibri" pitchFamily="34" charset="-120"/>
+              </a:rPr>
+              <a:t>2026-06-16  ·  </a:t>
+            </a:r>
+            <a:pPr algn="ctr" indent="0" marL="0">
+              <a:buNone/>
+            </a:pPr>
+            <a:r>
+              <a:rPr lang="en-US" sz="1100" u="sng" dirty="0">
+                <a:solidFill>
+                  <a:srgbClr val="5090D0"/>
+                </a:solidFill>
+                <a:latin typeface="Calibri" pitchFamily="34" charset="0"/>
+                <a:ea typeface="Calibri" pitchFamily="34" charset="-122"/>
+                <a:cs typeface="Calibri" pitchFamily="34" charset="-120"/>
+                <a:hlinkClick r:id="rId8" invalidUrl="" action="" tgtFrame="" tooltip="" history="1" highlightClick="0" endSnd="0">
+                  <a:extLst>
+                    <a:ext uri="{A12FA001-AC4F-418D-AE19-62706E023703}">
+                      <ahyp:hlinkClr xmlns:ahyp="http://schemas.microsoft.com/office/drawing/2018/hyperlinkcolor" val="tx"/>
+                    </a:ext>
+                  </a:extLst>
+                </a:hlinkClick>
+              </a:rPr>
+              <a:t>CC BY 4.0</a:t>
+            </a:r>
+            <a:endParaRPr lang="en-US" sz="1100" dirty="0"/>
+          </a:p>
+        </p:txBody>
+      </p:sp>
+      <p:pic>
+        <p:nvPicPr>
+          <p:cNvPr id="15" name="Image 1" descr="public/newsletters/2026-06/_assets/linkedin.png">
+            <a:hlinkClick r:id="rId10" tooltip="DLinRT on LinkedIn"/>
+          </p:cNvPr>
+          <p:cNvPicPr>
+            <a:picLocks noChangeAspect="1"/>
+          </p:cNvPicPr>
+          <p:nvPr/>
+        </p:nvPicPr>
+        <p:blipFill>
+          <a:blip r:embed="rId9"/>
+          <a:srcRect l="0" r="0" t="0" b="0"/>
+          <a:stretch/>
+        </p:blipFill>
+        <p:spPr>
+          <a:xfrm>
+            <a:off x="11688775" y="6492240"/>
+            <a:ext cx="292608" cy="292608"/>
+          </a:xfrm>
+          <a:prstGeom prst="rect">
+            <a:avLst/>
+          </a:prstGeom>
+        </p:spPr>
+      </p:pic>
     </p:spTree>
   </p:cSld>
   <p:clrMapOvr>
@@ -5899,13 +7574,20 @@
               <a:buNone/>
             </a:pPr>
             <a:r>
-              <a:rPr lang="en-US" sz="2000" b="1" dirty="0">
+              <a:rPr lang="en-US" sz="2000" b="1" u="sng" dirty="0">
                 <a:solidFill>
                   <a:srgbClr val="5090D0"/>
                 </a:solidFill>
                 <a:latin typeface="Calibri" pitchFamily="34" charset="0"/>
                 <a:ea typeface="Calibri" pitchFamily="34" charset="-122"/>
                 <a:cs typeface="Calibri" pitchFamily="34" charset="-120"/>
+                <a:hlinkClick r:id="rId1" invalidUrl="" action="" tgtFrame="" tooltip="" history="1" highlightClick="0" endSnd="0">
+                  <a:extLst>
+                    <a:ext uri="{A12FA001-AC4F-418D-AE19-62706E023703}">
+                      <ahyp:hlinkClr xmlns:ahyp="http://schemas.microsoft.com/office/drawing/2018/hyperlinkcolor" val="tx"/>
+                    </a:ext>
+                  </a:extLst>
+                </a:hlinkClick>
               </a:rPr>
               <a:t>Certification round opens</a:t>
             </a:r>
@@ -5922,7 +7604,7 @@
         <p:spPr>
           <a:xfrm>
             <a:off x="640080" y="1783080"/>
-            <a:ext cx="10911535" cy="685800"/>
+            <a:ext cx="10911535" cy="640080"/>
           </a:xfrm>
           <a:prstGeom prst="rect">
             <a:avLst/>
@@ -5938,7 +7620,7 @@
               <a:buNone/>
             </a:pPr>
             <a:r>
-              <a:rPr lang="en-US" sz="1600" dirty="0">
+              <a:rPr lang="en-US" sz="1500" dirty="0">
                 <a:solidFill>
                   <a:srgbClr val="CADCFC"/>
                 </a:solidFill>
@@ -5946,9 +7628,44 @@
                 <a:ea typeface="Calibri" pitchFamily="34" charset="-122"/>
                 <a:cs typeface="Calibri" pitchFamily="34" charset="-120"/>
               </a:rPr>
-              <a:t>Manufacturers can now certify their product listings. Synaptiq — first certified, two CE-marked products. Congratulations.</a:t>
-            </a:r>
-            <a:endParaRPr lang="en-US" sz="1600" dirty="0"/>
+              <a:t>Manufacturers can now certify their product listings. </a:t>
+            </a:r>
+            <a:pPr indent="0" marL="0">
+              <a:buNone/>
+            </a:pPr>
+            <a:r>
+              <a:rPr lang="en-US" sz="1500" b="1" u="sng" dirty="0">
+                <a:solidFill>
+                  <a:srgbClr val="FFFFFF"/>
+                </a:solidFill>
+                <a:latin typeface="Calibri" pitchFamily="34" charset="0"/>
+                <a:ea typeface="Calibri" pitchFamily="34" charset="-122"/>
+                <a:cs typeface="Calibri" pitchFamily="34" charset="-120"/>
+                <a:hlinkClick r:id="rId2" invalidUrl="" action="" tgtFrame="" tooltip="" history="1" highlightClick="0" endSnd="0">
+                  <a:extLst>
+                    <a:ext uri="{A12FA001-AC4F-418D-AE19-62706E023703}">
+                      <ahyp:hlinkClr xmlns:ahyp="http://schemas.microsoft.com/office/drawing/2018/hyperlinkcolor" val="tx"/>
+                    </a:ext>
+                  </a:extLst>
+                </a:hlinkClick>
+              </a:rPr>
+              <a:t>Synaptiq</a:t>
+            </a:r>
+            <a:pPr indent="0" marL="0">
+              <a:buNone/>
+            </a:pPr>
+            <a:r>
+              <a:rPr lang="en-US" sz="1500" dirty="0">
+                <a:solidFill>
+                  <a:srgbClr val="CADCFC"/>
+                </a:solidFill>
+                <a:latin typeface="Calibri" pitchFamily="34" charset="0"/>
+                <a:ea typeface="Calibri" pitchFamily="34" charset="-122"/>
+                <a:cs typeface="Calibri" pitchFamily="34" charset="-120"/>
+              </a:rPr>
+              <a:t> — first certified, two CE-marked products. Congratulations.</a:t>
+            </a:r>
+            <a:endParaRPr lang="en-US" sz="1500" dirty="0"/>
           </a:p>
         </p:txBody>
       </p:sp>
@@ -5960,7 +7677,7 @@
         </p:nvSpPr>
         <p:spPr>
           <a:xfrm>
-            <a:off x="640080" y="2606040"/>
+            <a:off x="640080" y="2514600"/>
             <a:ext cx="10911535" cy="411480"/>
           </a:xfrm>
           <a:prstGeom prst="rect">
@@ -5977,13 +7694,20 @@
               <a:buNone/>
             </a:pPr>
             <a:r>
-              <a:rPr lang="en-US" sz="2000" b="1" dirty="0">
+              <a:rPr lang="en-US" sz="2000" b="1" u="sng" dirty="0">
                 <a:solidFill>
                   <a:srgbClr val="5090D0"/>
                 </a:solidFill>
                 <a:latin typeface="Calibri" pitchFamily="34" charset="0"/>
                 <a:ea typeface="Calibri" pitchFamily="34" charset="-122"/>
                 <a:cs typeface="Calibri" pitchFamily="34" charset="-120"/>
+                <a:hlinkClick r:id="rId3" invalidUrl="" action="" tgtFrame="" tooltip="" history="1" highlightClick="0" endSnd="0">
+                  <a:extLst>
+                    <a:ext uri="{A12FA001-AC4F-418D-AE19-62706E023703}">
+                      <ahyp:hlinkClr xmlns:ahyp="http://schemas.microsoft.com/office/drawing/2018/hyperlinkcolor" val="tx"/>
+                    </a:ext>
+                  </a:extLst>
+                </a:hlinkClick>
               </a:rPr>
               <a:t>MAIRT @ MICCAI · Oct 1, 2026</a:t>
             </a:r>
@@ -5999,8 +7723,8 @@
         </p:nvSpPr>
         <p:spPr>
           <a:xfrm>
-            <a:off x="640080" y="3017520"/>
-            <a:ext cx="10911535" cy="685800"/>
+            <a:off x="640080" y="2926080"/>
+            <a:ext cx="10911535" cy="640080"/>
           </a:xfrm>
           <a:prstGeom prst="rect">
             <a:avLst/>
@@ -6016,7 +7740,7 @@
               <a:buNone/>
             </a:pPr>
             <a:r>
-              <a:rPr lang="en-US" sz="1600" dirty="0">
+              <a:rPr lang="en-US" sz="1500" dirty="0">
                 <a:solidFill>
                   <a:srgbClr val="CADCFC"/>
                 </a:solidFill>
@@ -6024,9 +7748,30 @@
                 <a:ea typeface="Calibri" pitchFamily="34" charset="-122"/>
                 <a:cs typeface="Calibri" pitchFamily="34" charset="-120"/>
               </a:rPr>
-              <a:t>First fully dedicated radiotherapy satellite event at MICCAI, Strasbourg. miart-workshop.github.io</a:t>
-            </a:r>
-            <a:endParaRPr lang="en-US" sz="1600" dirty="0"/>
+              <a:t>First fully dedicated radiotherapy satellite event at MICCAI, Strasbourg. </a:t>
+            </a:r>
+            <a:pPr indent="0" marL="0">
+              <a:buNone/>
+            </a:pPr>
+            <a:r>
+              <a:rPr lang="en-US" sz="1500" b="1" u="sng" dirty="0">
+                <a:solidFill>
+                  <a:srgbClr val="FFFFFF"/>
+                </a:solidFill>
+                <a:latin typeface="Calibri" pitchFamily="34" charset="0"/>
+                <a:ea typeface="Calibri" pitchFamily="34" charset="-122"/>
+                <a:cs typeface="Calibri" pitchFamily="34" charset="-120"/>
+                <a:hlinkClick r:id="rId4" invalidUrl="" action="" tgtFrame="" tooltip="" history="1" highlightClick="0" endSnd="0">
+                  <a:extLst>
+                    <a:ext uri="{A12FA001-AC4F-418D-AE19-62706E023703}">
+                      <ahyp:hlinkClr xmlns:ahyp="http://schemas.microsoft.com/office/drawing/2018/hyperlinkcolor" val="tx"/>
+                    </a:ext>
+                  </a:extLst>
+                </a:hlinkClick>
+              </a:rPr>
+              <a:t>miart-workshop.github.io</a:t>
+            </a:r>
+            <a:endParaRPr lang="en-US" sz="1500" dirty="0"/>
           </a:p>
         </p:txBody>
       </p:sp>
@@ -6038,7 +7783,7 @@
         </p:nvSpPr>
         <p:spPr>
           <a:xfrm>
-            <a:off x="640080" y="3840480"/>
+            <a:off x="640080" y="3657600"/>
             <a:ext cx="10911535" cy="411480"/>
           </a:xfrm>
           <a:prstGeom prst="rect">
@@ -6055,13 +7800,20 @@
               <a:buNone/>
             </a:pPr>
             <a:r>
-              <a:rPr lang="en-US" sz="2000" b="1" dirty="0">
+              <a:rPr lang="en-US" sz="2000" b="1" u="sng" dirty="0">
                 <a:solidFill>
                   <a:srgbClr val="5090D0"/>
                 </a:solidFill>
                 <a:latin typeface="Calibri" pitchFamily="34" charset="0"/>
                 <a:ea typeface="Calibri" pitchFamily="34" charset="-122"/>
                 <a:cs typeface="Calibri" pitchFamily="34" charset="-120"/>
+                <a:hlinkClick r:id="rId5" invalidUrl="" action="" tgtFrame="" tooltip="" history="1" highlightClick="0" endSnd="0">
+                  <a:extLst>
+                    <a:ext uri="{A12FA001-AC4F-418D-AE19-62706E023703}">
+                      <ahyp:hlinkClr xmlns:ahyp="http://schemas.microsoft.com/office/drawing/2018/hyperlinkcolor" val="tx"/>
+                    </a:ext>
+                  </a:extLst>
+                </a:hlinkClick>
               </a:rPr>
               <a:t>Next review round · Nov 1 → Dec 15, 2026</a:t>
             </a:r>
@@ -6077,8 +7829,8 @@
         </p:nvSpPr>
         <p:spPr>
           <a:xfrm>
-            <a:off x="640080" y="4251960"/>
-            <a:ext cx="10911535" cy="685800"/>
+            <a:off x="640080" y="4069080"/>
+            <a:ext cx="10911535" cy="640080"/>
           </a:xfrm>
           <a:prstGeom prst="rect">
             <a:avLst/>
@@ -6094,7 +7846,7 @@
               <a:buNone/>
             </a:pPr>
             <a:r>
-              <a:rPr lang="en-US" sz="1600" dirty="0">
+              <a:rPr lang="en-US" sz="1500" dirty="0">
                 <a:solidFill>
                   <a:srgbClr val="CADCFC"/>
                 </a:solidFill>
@@ -6102,9 +7854,44 @@
                 <a:ea typeface="Calibri" pitchFamily="34" charset="-122"/>
                 <a:cs typeface="Calibri" pitchFamily="34" charset="-120"/>
               </a:rPr>
-              <a:t>We are looking for more reviewers — many hands make the workload lighter.</a:t>
-            </a:r>
-            <a:endParaRPr lang="en-US" sz="1600" dirty="0"/>
+              <a:t>We are looking for more reviewers — many hands make the workload lighter. </a:t>
+            </a:r>
+            <a:pPr indent="0" marL="0">
+              <a:buNone/>
+            </a:pPr>
+            <a:r>
+              <a:rPr lang="en-US" sz="1500" b="1" u="sng" dirty="0">
+                <a:solidFill>
+                  <a:srgbClr val="FFFFFF"/>
+                </a:solidFill>
+                <a:latin typeface="Calibri" pitchFamily="34" charset="0"/>
+                <a:ea typeface="Calibri" pitchFamily="34" charset="-122"/>
+                <a:cs typeface="Calibri" pitchFamily="34" charset="-120"/>
+                <a:hlinkClick r:id="rId6" invalidUrl="" action="" tgtFrame="" tooltip="" history="1" highlightClick="0" endSnd="0">
+                  <a:extLst>
+                    <a:ext uri="{A12FA001-AC4F-418D-AE19-62706E023703}">
+                      <ahyp:hlinkClr xmlns:ahyp="http://schemas.microsoft.com/office/drawing/2018/hyperlinkcolor" val="tx"/>
+                    </a:ext>
+                  </a:extLst>
+                </a:hlinkClick>
+              </a:rPr>
+              <a:t>Get in touch</a:t>
+            </a:r>
+            <a:pPr indent="0" marL="0">
+              <a:buNone/>
+            </a:pPr>
+            <a:r>
+              <a:rPr lang="en-US" sz="1500" dirty="0">
+                <a:solidFill>
+                  <a:srgbClr val="CADCFC"/>
+                </a:solidFill>
+                <a:latin typeface="Calibri" pitchFamily="34" charset="0"/>
+                <a:ea typeface="Calibri" pitchFamily="34" charset="-122"/>
+                <a:cs typeface="Calibri" pitchFamily="34" charset="-120"/>
+              </a:rPr>
+              <a:t>.</a:t>
+            </a:r>
+            <a:endParaRPr lang="en-US" sz="1500" dirty="0"/>
           </a:p>
         </p:txBody>
       </p:sp>
@@ -6116,7 +7903,7 @@
         </p:nvSpPr>
         <p:spPr>
           <a:xfrm>
-            <a:off x="640080" y="5074920"/>
+            <a:off x="640080" y="4800600"/>
             <a:ext cx="10911535" cy="411480"/>
           </a:xfrm>
           <a:prstGeom prst="rect">
@@ -6133,15 +7920,22 @@
               <a:buNone/>
             </a:pPr>
             <a:r>
-              <a:rPr lang="en-US" sz="2000" b="1" dirty="0">
+              <a:rPr lang="en-US" sz="2000" b="1" u="sng" dirty="0">
                 <a:solidFill>
                   <a:srgbClr val="5090D0"/>
                 </a:solidFill>
                 <a:latin typeface="Calibri" pitchFamily="34" charset="0"/>
                 <a:ea typeface="Calibri" pitchFamily="34" charset="-122"/>
                 <a:cs typeface="Calibri" pitchFamily="34" charset="-120"/>
-              </a:rPr>
-              <a:t>Welcome Szabolcs David</a:t>
+                <a:hlinkClick r:id="rId7" invalidUrl="" action="" tgtFrame="" tooltip="" history="1" highlightClick="0" endSnd="0">
+                  <a:extLst>
+                    <a:ext uri="{A12FA001-AC4F-418D-AE19-62706E023703}">
+                      <ahyp:hlinkClr xmlns:ahyp="http://schemas.microsoft.com/office/drawing/2018/hyperlinkcolor" val="tx"/>
+                    </a:ext>
+                  </a:extLst>
+                </a:hlinkClick>
+              </a:rPr>
+              <a:t>3-axis evidence system live</a:t>
             </a:r>
             <a:endParaRPr lang="en-US" sz="2000" dirty="0"/>
           </a:p>
@@ -6155,8 +7949,8 @@
         </p:nvSpPr>
         <p:spPr>
           <a:xfrm>
-            <a:off x="640080" y="5486400"/>
-            <a:ext cx="10911535" cy="685800"/>
+            <a:off x="640080" y="5212080"/>
+            <a:ext cx="10911535" cy="640080"/>
           </a:xfrm>
           <a:prstGeom prst="rect">
             <a:avLst/>
@@ -6172,7 +7966,7 @@
               <a:buNone/>
             </a:pPr>
             <a:r>
-              <a:rPr lang="en-US" sz="1600" dirty="0">
+              <a:rPr lang="en-US" sz="1500" dirty="0">
                 <a:solidFill>
                   <a:srgbClr val="CADCFC"/>
                 </a:solidFill>
@@ -6180,12 +7974,203 @@
                 <a:ea typeface="Calibri" pitchFamily="34" charset="-122"/>
                 <a:cs typeface="Calibri" pitchFamily="34" charset="-120"/>
               </a:rPr>
-              <a:t>New reviewer on board. Thanks to all 12 reviewers — full list on dlinrt.eu/about.</a:t>
-            </a:r>
-            <a:endParaRPr lang="en-US" sz="1600" dirty="0"/>
-          </a:p>
-        </p:txBody>
-      </p:sp>
+              <a:t>Browse the Evidence Matrix to see how the catalogue distributes across rigor (E0–E3) and impact (I0–I5): </a:t>
+            </a:r>
+            <a:pPr indent="0" marL="0">
+              <a:buNone/>
+            </a:pPr>
+            <a:r>
+              <a:rPr lang="en-US" sz="1500" b="1" u="sng" dirty="0">
+                <a:solidFill>
+                  <a:srgbClr val="FFFFFF"/>
+                </a:solidFill>
+                <a:latin typeface="Calibri" pitchFamily="34" charset="0"/>
+                <a:ea typeface="Calibri" pitchFamily="34" charset="-122"/>
+                <a:cs typeface="Calibri" pitchFamily="34" charset="-120"/>
+                <a:hlinkClick r:id="rId8" invalidUrl="" action="" tgtFrame="" tooltip="" history="1" highlightClick="0" endSnd="0">
+                  <a:extLst>
+                    <a:ext uri="{A12FA001-AC4F-418D-AE19-62706E023703}">
+                      <ahyp:hlinkClr xmlns:ahyp="http://schemas.microsoft.com/office/drawing/2018/hyperlinkcolor" val="tx"/>
+                    </a:ext>
+                  </a:extLst>
+                </a:hlinkClick>
+              </a:rPr>
+              <a:t>dlinrt.eu/dashboard</a:t>
+            </a:r>
+            <a:pPr indent="0" marL="0">
+              <a:buNone/>
+            </a:pPr>
+            <a:r>
+              <a:rPr lang="en-US" sz="1500" dirty="0">
+                <a:solidFill>
+                  <a:srgbClr val="CADCFC"/>
+                </a:solidFill>
+                <a:latin typeface="Calibri" pitchFamily="34" charset="0"/>
+                <a:ea typeface="Calibri" pitchFamily="34" charset="-122"/>
+                <a:cs typeface="Calibri" pitchFamily="34" charset="-120"/>
+              </a:rPr>
+              <a:t>.</a:t>
+            </a:r>
+            <a:endParaRPr lang="en-US" sz="1500" dirty="0"/>
+          </a:p>
+        </p:txBody>
+      </p:sp>
+      <p:pic>
+        <p:nvPicPr>
+          <p:cNvPr id="12" name="Image 0" descr="public/newsletters/2026-06/_assets/dlinrt-logo.png">
+            <a:hlinkClick r:id="rId10" tooltip="dlinrt.eu"/>
+          </p:cNvPr>
+          <p:cNvPicPr>
+            <a:picLocks noChangeAspect="1"/>
+          </p:cNvPicPr>
+          <p:nvPr/>
+        </p:nvPicPr>
+        <p:blipFill>
+          <a:blip r:embed="rId9"/>
+          <a:srcRect l="0" r="0" t="0" b="0"/>
+          <a:stretch/>
+        </p:blipFill>
+        <p:spPr>
+          <a:xfrm>
+            <a:off x="274320" y="6492240"/>
+            <a:ext cx="292608" cy="292608"/>
+          </a:xfrm>
+          <a:prstGeom prst="rect">
+            <a:avLst/>
+          </a:prstGeom>
+        </p:spPr>
+      </p:pic>
+      <p:sp>
+        <p:nvSpPr>
+          <p:cNvPr id="13" name="Text 10"/>
+          <p:cNvSpPr/>
+          <p:nvPr/>
+        </p:nvSpPr>
+        <p:spPr>
+          <a:xfrm>
+            <a:off x="621792" y="6510528"/>
+            <a:ext cx="1828800" cy="274320"/>
+          </a:xfrm>
+          <a:prstGeom prst="rect">
+            <a:avLst/>
+          </a:prstGeom>
+          <a:noFill/>
+          <a:ln/>
+        </p:spPr>
+        <p:txBody>
+          <a:bodyPr wrap="square" rtlCol="0" anchor="ctr"/>
+          <a:lstStyle/>
+          <a:p>
+            <a:pPr indent="0" marL="0">
+              <a:buNone/>
+            </a:pPr>
+            <a:r>
+              <a:rPr lang="en-US" sz="1100" b="1" u="sng" dirty="0">
+                <a:solidFill>
+                  <a:srgbClr val="FFFFFF"/>
+                </a:solidFill>
+                <a:latin typeface="Calibri" pitchFamily="34" charset="0"/>
+                <a:ea typeface="Calibri" pitchFamily="34" charset="-122"/>
+                <a:cs typeface="Calibri" pitchFamily="34" charset="-120"/>
+                <a:hlinkClick r:id="rId11" invalidUrl="" action="" tgtFrame="" tooltip="" history="1" highlightClick="0" endSnd="0">
+                  <a:extLst>
+                    <a:ext uri="{A12FA001-AC4F-418D-AE19-62706E023703}">
+                      <ahyp:hlinkClr xmlns:ahyp="http://schemas.microsoft.com/office/drawing/2018/hyperlinkcolor" val="tx"/>
+                    </a:ext>
+                  </a:extLst>
+                </a:hlinkClick>
+              </a:rPr>
+              <a:t>dlinrt.eu</a:t>
+            </a:r>
+            <a:endParaRPr lang="en-US" sz="1100" dirty="0"/>
+          </a:p>
+        </p:txBody>
+      </p:sp>
+      <p:sp>
+        <p:nvSpPr>
+          <p:cNvPr id="14" name="Text 11"/>
+          <p:cNvSpPr/>
+          <p:nvPr/>
+        </p:nvSpPr>
+        <p:spPr>
+          <a:xfrm>
+            <a:off x="2743200" y="6510528"/>
+            <a:ext cx="6705295" cy="274320"/>
+          </a:xfrm>
+          <a:prstGeom prst="rect">
+            <a:avLst/>
+          </a:prstGeom>
+          <a:noFill/>
+          <a:ln/>
+        </p:spPr>
+        <p:txBody>
+          <a:bodyPr wrap="square" rtlCol="0" anchor="ctr"/>
+          <a:lstStyle/>
+          <a:p>
+            <a:pPr algn="ctr" indent="0" marL="0">
+              <a:buNone/>
+            </a:pPr>
+            <a:r>
+              <a:rPr lang="en-US" sz="1100" dirty="0">
+                <a:solidFill>
+                  <a:srgbClr val="CADCFC"/>
+                </a:solidFill>
+                <a:latin typeface="Calibri" pitchFamily="34" charset="0"/>
+                <a:ea typeface="Calibri" pitchFamily="34" charset="-122"/>
+                <a:cs typeface="Calibri" pitchFamily="34" charset="-120"/>
+              </a:rPr>
+              <a:t>2026-06-16  ·  </a:t>
+            </a:r>
+            <a:pPr algn="ctr" indent="0" marL="0">
+              <a:buNone/>
+            </a:pPr>
+            <a:r>
+              <a:rPr lang="en-US" sz="1100" u="sng" dirty="0">
+                <a:solidFill>
+                  <a:srgbClr val="FFFFFF"/>
+                </a:solidFill>
+                <a:latin typeface="Calibri" pitchFamily="34" charset="0"/>
+                <a:ea typeface="Calibri" pitchFamily="34" charset="-122"/>
+                <a:cs typeface="Calibri" pitchFamily="34" charset="-120"/>
+                <a:hlinkClick r:id="rId12" invalidUrl="" action="" tgtFrame="" tooltip="" history="1" highlightClick="0" endSnd="0">
+                  <a:extLst>
+                    <a:ext uri="{A12FA001-AC4F-418D-AE19-62706E023703}">
+                      <ahyp:hlinkClr xmlns:ahyp="http://schemas.microsoft.com/office/drawing/2018/hyperlinkcolor" val="tx"/>
+                    </a:ext>
+                  </a:extLst>
+                </a:hlinkClick>
+              </a:rPr>
+              <a:t>CC BY 4.0</a:t>
+            </a:r>
+            <a:endParaRPr lang="en-US" sz="1100" dirty="0"/>
+          </a:p>
+        </p:txBody>
+      </p:sp>
+      <p:pic>
+        <p:nvPicPr>
+          <p:cNvPr id="15" name="Image 1" descr="public/newsletters/2026-06/_assets/linkedin.png">
+            <a:hlinkClick r:id="rId14" tooltip="DLinRT on LinkedIn"/>
+          </p:cNvPr>
+          <p:cNvPicPr>
+            <a:picLocks noChangeAspect="1"/>
+          </p:cNvPicPr>
+          <p:nvPr/>
+        </p:nvPicPr>
+        <p:blipFill>
+          <a:blip r:embed="rId13"/>
+          <a:srcRect l="0" r="0" t="0" b="0"/>
+          <a:stretch/>
+        </p:blipFill>
+        <p:spPr>
+          <a:xfrm>
+            <a:off x="11688775" y="6492240"/>
+            <a:ext cx="292608" cy="292608"/>
+          </a:xfrm>
+          <a:prstGeom prst="rect">
+            <a:avLst/>
+          </a:prstGeom>
+        </p:spPr>
+      </p:pic>
     </p:spTree>
   </p:cSld>
   <p:clrMapOvr>

--- a/public/newsletters/2026-06/dlinrt-2026-06-update.pptx
+++ b/public/newsletters/2026-06/dlinrt-2026-06-update.pptx
@@ -2104,8 +2104,8 @@
         </p:nvSpPr>
         <p:spPr>
           <a:xfrm>
-            <a:off x="0" y="6693408"/>
-            <a:ext cx="12191695" cy="164592"/>
+            <a:off x="0" y="6355080"/>
+            <a:ext cx="12191695" cy="27432"/>
           </a:xfrm>
           <a:prstGeom prst="rect">
             <a:avLst/>
@@ -2262,8 +2262,8 @@
         </p:blipFill>
         <p:spPr>
           <a:xfrm>
-            <a:off x="274320" y="6492240"/>
-            <a:ext cx="292608" cy="292608"/>
+            <a:off x="274320" y="6519672"/>
+            <a:ext cx="885871" cy="256032"/>
           </a:xfrm>
           <a:prstGeom prst="rect">
             <a:avLst/>
@@ -2278,24 +2278,38 @@
         </p:nvSpPr>
         <p:spPr>
           <a:xfrm>
-            <a:off x="621792" y="6510528"/>
-            <a:ext cx="1828800" cy="274320"/>
-          </a:xfrm>
-          <a:prstGeom prst="rect">
-            <a:avLst/>
-          </a:prstGeom>
-          <a:noFill/>
-          <a:ln/>
-        </p:spPr>
-        <p:txBody>
-          <a:bodyPr wrap="square" rtlCol="0" anchor="ctr"/>
-          <a:lstStyle/>
-          <a:p>
-            <a:pPr indent="0" marL="0">
-              <a:buNone/>
-            </a:pPr>
-            <a:r>
-              <a:rPr lang="en-US" sz="1100" b="1" u="sng" dirty="0">
+            <a:off x="2743200" y="6510528"/>
+            <a:ext cx="6705295" cy="274320"/>
+          </a:xfrm>
+          <a:prstGeom prst="rect">
+            <a:avLst/>
+          </a:prstGeom>
+          <a:noFill/>
+          <a:ln/>
+        </p:spPr>
+        <p:txBody>
+          <a:bodyPr wrap="square" rtlCol="0" anchor="ctr"/>
+          <a:lstStyle/>
+          <a:p>
+            <a:pPr algn="ctr" indent="0" marL="0">
+              <a:buNone/>
+            </a:pPr>
+            <a:r>
+              <a:rPr lang="en-US" sz="1100" dirty="0">
+                <a:solidFill>
+                  <a:srgbClr val="CADCFC"/>
+                </a:solidFill>
+                <a:latin typeface="Calibri" pitchFamily="34" charset="0"/>
+                <a:ea typeface="Calibri" pitchFamily="34" charset="-122"/>
+                <a:cs typeface="Calibri" pitchFamily="34" charset="-120"/>
+              </a:rPr>
+              <a:t>2026-06-16  ·  </a:t>
+            </a:r>
+            <a:pPr algn="ctr" indent="0" marL="0">
+              <a:buNone/>
+            </a:pPr>
+            <a:r>
+              <a:rPr lang="en-US" sz="1100" u="sng" dirty="0">
                 <a:solidFill>
                   <a:srgbClr val="FFFFFF"/>
                 </a:solidFill>
@@ -2310,66 +2324,6 @@
                   </a:extLst>
                 </a:hlinkClick>
               </a:rPr>
-              <a:t>dlinrt.eu</a:t>
-            </a:r>
-            <a:endParaRPr lang="en-US" sz="1100" dirty="0"/>
-          </a:p>
-        </p:txBody>
-      </p:sp>
-      <p:sp>
-        <p:nvSpPr>
-          <p:cNvPr id="8" name="Text 5"/>
-          <p:cNvSpPr/>
-          <p:nvPr/>
-        </p:nvSpPr>
-        <p:spPr>
-          <a:xfrm>
-            <a:off x="2743200" y="6510528"/>
-            <a:ext cx="6705295" cy="274320"/>
-          </a:xfrm>
-          <a:prstGeom prst="rect">
-            <a:avLst/>
-          </a:prstGeom>
-          <a:noFill/>
-          <a:ln/>
-        </p:spPr>
-        <p:txBody>
-          <a:bodyPr wrap="square" rtlCol="0" anchor="ctr"/>
-          <a:lstStyle/>
-          <a:p>
-            <a:pPr algn="ctr" indent="0" marL="0">
-              <a:buNone/>
-            </a:pPr>
-            <a:r>
-              <a:rPr lang="en-US" sz="1100" dirty="0">
-                <a:solidFill>
-                  <a:srgbClr val="CADCFC"/>
-                </a:solidFill>
-                <a:latin typeface="Calibri" pitchFamily="34" charset="0"/>
-                <a:ea typeface="Calibri" pitchFamily="34" charset="-122"/>
-                <a:cs typeface="Calibri" pitchFamily="34" charset="-120"/>
-              </a:rPr>
-              <a:t>2026-06-16  ·  </a:t>
-            </a:r>
-            <a:pPr algn="ctr" indent="0" marL="0">
-              <a:buNone/>
-            </a:pPr>
-            <a:r>
-              <a:rPr lang="en-US" sz="1100" u="sng" dirty="0">
-                <a:solidFill>
-                  <a:srgbClr val="FFFFFF"/>
-                </a:solidFill>
-                <a:latin typeface="Calibri" pitchFamily="34" charset="0"/>
-                <a:ea typeface="Calibri" pitchFamily="34" charset="-122"/>
-                <a:cs typeface="Calibri" pitchFamily="34" charset="-120"/>
-                <a:hlinkClick r:id="rId5" invalidUrl="" action="" tgtFrame="" tooltip="" history="1" highlightClick="0" endSnd="0">
-                  <a:extLst>
-                    <a:ext uri="{A12FA001-AC4F-418D-AE19-62706E023703}">
-                      <ahyp:hlinkClr xmlns:ahyp="http://schemas.microsoft.com/office/drawing/2018/hyperlinkcolor" val="tx"/>
-                    </a:ext>
-                  </a:extLst>
-                </a:hlinkClick>
-              </a:rPr>
               <a:t>CC BY 4.0</a:t>
             </a:r>
             <a:endParaRPr lang="en-US" sz="1100" dirty="0"/>
@@ -2378,8 +2332,8 @@
       </p:sp>
       <p:pic>
         <p:nvPicPr>
-          <p:cNvPr id="9" name="Image 1" descr="public/newsletters/2026-06/_assets/linkedin.png">
-            <a:hlinkClick r:id="rId7" tooltip="DLinRT on LinkedIn"/>
+          <p:cNvPr id="8" name="Image 1" descr="public/newsletters/2026-06/_assets/linkedin.png">
+            <a:hlinkClick r:id="rId6" tooltip="DLinRT on LinkedIn"/>
           </p:cNvPr>
           <p:cNvPicPr>
             <a:picLocks noChangeAspect="1"/>
@@ -2387,7 +2341,7 @@
           <p:nvPr/>
         </p:nvPicPr>
         <p:blipFill>
-          <a:blip r:embed="rId6"/>
+          <a:blip r:embed="rId5"/>
           <a:srcRect l="0" r="0" t="0" b="0"/>
           <a:stretch/>
         </p:blipFill>
@@ -2551,8 +2505,8 @@
         </p:blipFill>
         <p:spPr>
           <a:xfrm>
-            <a:off x="274320" y="6492240"/>
-            <a:ext cx="292608" cy="292608"/>
+            <a:off x="274320" y="6519672"/>
+            <a:ext cx="885871" cy="256032"/>
           </a:xfrm>
           <a:prstGeom prst="rect">
             <a:avLst/>
@@ -2567,24 +2521,38 @@
         </p:nvSpPr>
         <p:spPr>
           <a:xfrm>
-            <a:off x="621792" y="6510528"/>
-            <a:ext cx="1828800" cy="274320"/>
-          </a:xfrm>
-          <a:prstGeom prst="rect">
-            <a:avLst/>
-          </a:prstGeom>
-          <a:noFill/>
-          <a:ln/>
-        </p:spPr>
-        <p:txBody>
-          <a:bodyPr wrap="square" rtlCol="0" anchor="ctr"/>
-          <a:lstStyle/>
-          <a:p>
-            <a:pPr indent="0" marL="0">
-              <a:buNone/>
-            </a:pPr>
-            <a:r>
-              <a:rPr lang="en-US" sz="1100" b="1" u="sng" dirty="0">
+            <a:off x="2743200" y="6510528"/>
+            <a:ext cx="6705295" cy="274320"/>
+          </a:xfrm>
+          <a:prstGeom prst="rect">
+            <a:avLst/>
+          </a:prstGeom>
+          <a:noFill/>
+          <a:ln/>
+        </p:spPr>
+        <p:txBody>
+          <a:bodyPr wrap="square" rtlCol="0" anchor="ctr"/>
+          <a:lstStyle/>
+          <a:p>
+            <a:pPr algn="ctr" indent="0" marL="0">
+              <a:buNone/>
+            </a:pPr>
+            <a:r>
+              <a:rPr lang="en-US" sz="1100" dirty="0">
+                <a:solidFill>
+                  <a:srgbClr val="6B7280"/>
+                </a:solidFill>
+                <a:latin typeface="Calibri" pitchFamily="34" charset="0"/>
+                <a:ea typeface="Calibri" pitchFamily="34" charset="-122"/>
+                <a:cs typeface="Calibri" pitchFamily="34" charset="-120"/>
+              </a:rPr>
+              <a:t>2026-06-16  ·  </a:t>
+            </a:r>
+            <a:pPr algn="ctr" indent="0" marL="0">
+              <a:buNone/>
+            </a:pPr>
+            <a:r>
+              <a:rPr lang="en-US" sz="1100" u="sng" dirty="0">
                 <a:solidFill>
                   <a:srgbClr val="5090D0"/>
                 </a:solidFill>
@@ -2599,66 +2567,6 @@
                   </a:extLst>
                 </a:hlinkClick>
               </a:rPr>
-              <a:t>dlinrt.eu</a:t>
-            </a:r>
-            <a:endParaRPr lang="en-US" sz="1100" dirty="0"/>
-          </a:p>
-        </p:txBody>
-      </p:sp>
-      <p:sp>
-        <p:nvSpPr>
-          <p:cNvPr id="7" name="Text 3"/>
-          <p:cNvSpPr/>
-          <p:nvPr/>
-        </p:nvSpPr>
-        <p:spPr>
-          <a:xfrm>
-            <a:off x="2743200" y="6510528"/>
-            <a:ext cx="6705295" cy="274320"/>
-          </a:xfrm>
-          <a:prstGeom prst="rect">
-            <a:avLst/>
-          </a:prstGeom>
-          <a:noFill/>
-          <a:ln/>
-        </p:spPr>
-        <p:txBody>
-          <a:bodyPr wrap="square" rtlCol="0" anchor="ctr"/>
-          <a:lstStyle/>
-          <a:p>
-            <a:pPr algn="ctr" indent="0" marL="0">
-              <a:buNone/>
-            </a:pPr>
-            <a:r>
-              <a:rPr lang="en-US" sz="1100" dirty="0">
-                <a:solidFill>
-                  <a:srgbClr val="6B7280"/>
-                </a:solidFill>
-                <a:latin typeface="Calibri" pitchFamily="34" charset="0"/>
-                <a:ea typeface="Calibri" pitchFamily="34" charset="-122"/>
-                <a:cs typeface="Calibri" pitchFamily="34" charset="-120"/>
-              </a:rPr>
-              <a:t>2026-06-16  ·  </a:t>
-            </a:r>
-            <a:pPr algn="ctr" indent="0" marL="0">
-              <a:buNone/>
-            </a:pPr>
-            <a:r>
-              <a:rPr lang="en-US" sz="1100" u="sng" dirty="0">
-                <a:solidFill>
-                  <a:srgbClr val="5090D0"/>
-                </a:solidFill>
-                <a:latin typeface="Calibri" pitchFamily="34" charset="0"/>
-                <a:ea typeface="Calibri" pitchFamily="34" charset="-122"/>
-                <a:cs typeface="Calibri" pitchFamily="34" charset="-120"/>
-                <a:hlinkClick r:id="rId6" invalidUrl="" action="" tgtFrame="" tooltip="" history="1" highlightClick="0" endSnd="0">
-                  <a:extLst>
-                    <a:ext uri="{A12FA001-AC4F-418D-AE19-62706E023703}">
-                      <ahyp:hlinkClr xmlns:ahyp="http://schemas.microsoft.com/office/drawing/2018/hyperlinkcolor" val="tx"/>
-                    </a:ext>
-                  </a:extLst>
-                </a:hlinkClick>
-              </a:rPr>
               <a:t>CC BY 4.0</a:t>
             </a:r>
             <a:endParaRPr lang="en-US" sz="1100" dirty="0"/>
@@ -2667,8 +2575,8 @@
       </p:sp>
       <p:pic>
         <p:nvPicPr>
-          <p:cNvPr id="8" name="Image 1" descr="public/newsletters/2026-06/_assets/linkedin.png">
-            <a:hlinkClick r:id="rId8" tooltip="DLinRT on LinkedIn"/>
+          <p:cNvPr id="7" name="Image 1" descr="public/newsletters/2026-06/_assets/linkedin.png">
+            <a:hlinkClick r:id="rId7" tooltip="DLinRT on LinkedIn"/>
           </p:cNvPr>
           <p:cNvPicPr>
             <a:picLocks noChangeAspect="1"/>
@@ -2676,7 +2584,7 @@
           <p:nvPr/>
         </p:nvPicPr>
         <p:blipFill>
-          <a:blip r:embed="rId7"/>
+          <a:blip r:embed="rId6"/>
           <a:srcRect l="0" r="0" t="0" b="0"/>
           <a:stretch/>
         </p:blipFill>
@@ -3380,8 +3288,8 @@
         </p:blipFill>
         <p:spPr>
           <a:xfrm>
-            <a:off x="274320" y="6492240"/>
-            <a:ext cx="292608" cy="292608"/>
+            <a:off x="274320" y="6519672"/>
+            <a:ext cx="885871" cy="256032"/>
           </a:xfrm>
           <a:prstGeom prst="rect">
             <a:avLst/>
@@ -3396,24 +3304,38 @@
         </p:nvSpPr>
         <p:spPr>
           <a:xfrm>
-            <a:off x="621792" y="6510528"/>
-            <a:ext cx="1828800" cy="274320"/>
-          </a:xfrm>
-          <a:prstGeom prst="rect">
-            <a:avLst/>
-          </a:prstGeom>
-          <a:noFill/>
-          <a:ln/>
-        </p:spPr>
-        <p:txBody>
-          <a:bodyPr wrap="square" rtlCol="0" anchor="ctr"/>
-          <a:lstStyle/>
-          <a:p>
-            <a:pPr indent="0" marL="0">
-              <a:buNone/>
-            </a:pPr>
-            <a:r>
-              <a:rPr lang="en-US" sz="1100" b="1" u="sng" dirty="0">
+            <a:off x="2743200" y="6510528"/>
+            <a:ext cx="6705295" cy="274320"/>
+          </a:xfrm>
+          <a:prstGeom prst="rect">
+            <a:avLst/>
+          </a:prstGeom>
+          <a:noFill/>
+          <a:ln/>
+        </p:spPr>
+        <p:txBody>
+          <a:bodyPr wrap="square" rtlCol="0" anchor="ctr"/>
+          <a:lstStyle/>
+          <a:p>
+            <a:pPr algn="ctr" indent="0" marL="0">
+              <a:buNone/>
+            </a:pPr>
+            <a:r>
+              <a:rPr lang="en-US" sz="1100" dirty="0">
+                <a:solidFill>
+                  <a:srgbClr val="6B7280"/>
+                </a:solidFill>
+                <a:latin typeface="Calibri" pitchFamily="34" charset="0"/>
+                <a:ea typeface="Calibri" pitchFamily="34" charset="-122"/>
+                <a:cs typeface="Calibri" pitchFamily="34" charset="-120"/>
+              </a:rPr>
+              <a:t>2026-06-16  ·  </a:t>
+            </a:r>
+            <a:pPr algn="ctr" indent="0" marL="0">
+              <a:buNone/>
+            </a:pPr>
+            <a:r>
+              <a:rPr lang="en-US" sz="1100" u="sng" dirty="0">
                 <a:solidFill>
                   <a:srgbClr val="5090D0"/>
                 </a:solidFill>
@@ -3428,66 +3350,6 @@
                   </a:extLst>
                 </a:hlinkClick>
               </a:rPr>
-              <a:t>dlinrt.eu</a:t>
-            </a:r>
-            <a:endParaRPr lang="en-US" sz="1100" dirty="0"/>
-          </a:p>
-        </p:txBody>
-      </p:sp>
-      <p:sp>
-        <p:nvSpPr>
-          <p:cNvPr id="16" name="Text 12"/>
-          <p:cNvSpPr/>
-          <p:nvPr/>
-        </p:nvSpPr>
-        <p:spPr>
-          <a:xfrm>
-            <a:off x="2743200" y="6510528"/>
-            <a:ext cx="6705295" cy="274320"/>
-          </a:xfrm>
-          <a:prstGeom prst="rect">
-            <a:avLst/>
-          </a:prstGeom>
-          <a:noFill/>
-          <a:ln/>
-        </p:spPr>
-        <p:txBody>
-          <a:bodyPr wrap="square" rtlCol="0" anchor="ctr"/>
-          <a:lstStyle/>
-          <a:p>
-            <a:pPr algn="ctr" indent="0" marL="0">
-              <a:buNone/>
-            </a:pPr>
-            <a:r>
-              <a:rPr lang="en-US" sz="1100" dirty="0">
-                <a:solidFill>
-                  <a:srgbClr val="6B7280"/>
-                </a:solidFill>
-                <a:latin typeface="Calibri" pitchFamily="34" charset="0"/>
-                <a:ea typeface="Calibri" pitchFamily="34" charset="-122"/>
-                <a:cs typeface="Calibri" pitchFamily="34" charset="-120"/>
-              </a:rPr>
-              <a:t>2026-06-16  ·  </a:t>
-            </a:r>
-            <a:pPr algn="ctr" indent="0" marL="0">
-              <a:buNone/>
-            </a:pPr>
-            <a:r>
-              <a:rPr lang="en-US" sz="1100" u="sng" dirty="0">
-                <a:solidFill>
-                  <a:srgbClr val="5090D0"/>
-                </a:solidFill>
-                <a:latin typeface="Calibri" pitchFamily="34" charset="0"/>
-                <a:ea typeface="Calibri" pitchFamily="34" charset="-122"/>
-                <a:cs typeface="Calibri" pitchFamily="34" charset="-120"/>
-                <a:hlinkClick r:id="rId15" invalidUrl="" action="" tgtFrame="" tooltip="" history="1" highlightClick="0" endSnd="0">
-                  <a:extLst>
-                    <a:ext uri="{A12FA001-AC4F-418D-AE19-62706E023703}">
-                      <ahyp:hlinkClr xmlns:ahyp="http://schemas.microsoft.com/office/drawing/2018/hyperlinkcolor" val="tx"/>
-                    </a:ext>
-                  </a:extLst>
-                </a:hlinkClick>
-              </a:rPr>
               <a:t>CC BY 4.0</a:t>
             </a:r>
             <a:endParaRPr lang="en-US" sz="1100" dirty="0"/>
@@ -3496,8 +3358,8 @@
       </p:sp>
       <p:pic>
         <p:nvPicPr>
-          <p:cNvPr id="17" name="Image 1" descr="public/newsletters/2026-06/_assets/linkedin.png">
-            <a:hlinkClick r:id="rId17" tooltip="DLinRT on LinkedIn"/>
+          <p:cNvPr id="16" name="Image 1" descr="public/newsletters/2026-06/_assets/linkedin.png">
+            <a:hlinkClick r:id="rId16" tooltip="DLinRT on LinkedIn"/>
           </p:cNvPr>
           <p:cNvPicPr>
             <a:picLocks noChangeAspect="1"/>
@@ -3505,7 +3367,7 @@
           <p:nvPr/>
         </p:nvPicPr>
         <p:blipFill>
-          <a:blip r:embed="rId16"/>
+          <a:blip r:embed="rId15"/>
           <a:srcRect l="0" r="0" t="0" b="0"/>
           <a:stretch/>
         </p:blipFill>
@@ -6635,8 +6497,8 @@
         </p:blipFill>
         <p:spPr>
           <a:xfrm>
-            <a:off x="274320" y="6492240"/>
-            <a:ext cx="292608" cy="292608"/>
+            <a:off x="274320" y="6519672"/>
+            <a:ext cx="885871" cy="256032"/>
           </a:xfrm>
           <a:prstGeom prst="rect">
             <a:avLst/>
@@ -6651,24 +6513,38 @@
         </p:nvSpPr>
         <p:spPr>
           <a:xfrm>
-            <a:off x="621792" y="6510528"/>
-            <a:ext cx="1828800" cy="274320"/>
-          </a:xfrm>
-          <a:prstGeom prst="rect">
-            <a:avLst/>
-          </a:prstGeom>
-          <a:noFill/>
-          <a:ln/>
-        </p:spPr>
-        <p:txBody>
-          <a:bodyPr wrap="square" rtlCol="0" anchor="ctr"/>
-          <a:lstStyle/>
-          <a:p>
-            <a:pPr indent="0" marL="0">
-              <a:buNone/>
-            </a:pPr>
-            <a:r>
-              <a:rPr lang="en-US" sz="1100" b="1" u="sng" dirty="0">
+            <a:off x="2743200" y="6510528"/>
+            <a:ext cx="6705295" cy="274320"/>
+          </a:xfrm>
+          <a:prstGeom prst="rect">
+            <a:avLst/>
+          </a:prstGeom>
+          <a:noFill/>
+          <a:ln/>
+        </p:spPr>
+        <p:txBody>
+          <a:bodyPr wrap="square" rtlCol="0" anchor="ctr"/>
+          <a:lstStyle/>
+          <a:p>
+            <a:pPr algn="ctr" indent="0" marL="0">
+              <a:buNone/>
+            </a:pPr>
+            <a:r>
+              <a:rPr lang="en-US" sz="1100" dirty="0">
+                <a:solidFill>
+                  <a:srgbClr val="6B7280"/>
+                </a:solidFill>
+                <a:latin typeface="Calibri" pitchFamily="34" charset="0"/>
+                <a:ea typeface="Calibri" pitchFamily="34" charset="-122"/>
+                <a:cs typeface="Calibri" pitchFamily="34" charset="-120"/>
+              </a:rPr>
+              <a:t>2026-06-16  ·  </a:t>
+            </a:r>
+            <a:pPr algn="ctr" indent="0" marL="0">
+              <a:buNone/>
+            </a:pPr>
+            <a:r>
+              <a:rPr lang="en-US" sz="1100" u="sng" dirty="0">
                 <a:solidFill>
                   <a:srgbClr val="5090D0"/>
                 </a:solidFill>
@@ -6683,66 +6559,6 @@
                   </a:extLst>
                 </a:hlinkClick>
               </a:rPr>
-              <a:t>dlinrt.eu</a:t>
-            </a:r>
-            <a:endParaRPr lang="en-US" sz="1100" dirty="0"/>
-          </a:p>
-        </p:txBody>
-      </p:sp>
-      <p:sp>
-        <p:nvSpPr>
-          <p:cNvPr id="90" name="Text 45"/>
-          <p:cNvSpPr/>
-          <p:nvPr/>
-        </p:nvSpPr>
-        <p:spPr>
-          <a:xfrm>
-            <a:off x="2743200" y="6510528"/>
-            <a:ext cx="6705295" cy="274320"/>
-          </a:xfrm>
-          <a:prstGeom prst="rect">
-            <a:avLst/>
-          </a:prstGeom>
-          <a:noFill/>
-          <a:ln/>
-        </p:spPr>
-        <p:txBody>
-          <a:bodyPr wrap="square" rtlCol="0" anchor="ctr"/>
-          <a:lstStyle/>
-          <a:p>
-            <a:pPr algn="ctr" indent="0" marL="0">
-              <a:buNone/>
-            </a:pPr>
-            <a:r>
-              <a:rPr lang="en-US" sz="1100" dirty="0">
-                <a:solidFill>
-                  <a:srgbClr val="6B7280"/>
-                </a:solidFill>
-                <a:latin typeface="Calibri" pitchFamily="34" charset="0"/>
-                <a:ea typeface="Calibri" pitchFamily="34" charset="-122"/>
-                <a:cs typeface="Calibri" pitchFamily="34" charset="-120"/>
-              </a:rPr>
-              <a:t>2026-06-16  ·  </a:t>
-            </a:r>
-            <a:pPr algn="ctr" indent="0" marL="0">
-              <a:buNone/>
-            </a:pPr>
-            <a:r>
-              <a:rPr lang="en-US" sz="1100" u="sng" dirty="0">
-                <a:solidFill>
-                  <a:srgbClr val="5090D0"/>
-                </a:solidFill>
-                <a:latin typeface="Calibri" pitchFamily="34" charset="0"/>
-                <a:ea typeface="Calibri" pitchFamily="34" charset="-122"/>
-                <a:cs typeface="Calibri" pitchFamily="34" charset="-120"/>
-                <a:hlinkClick r:id="rId131" invalidUrl="" action="" tgtFrame="" tooltip="" history="1" highlightClick="0" endSnd="0">
-                  <a:extLst>
-                    <a:ext uri="{A12FA001-AC4F-418D-AE19-62706E023703}">
-                      <ahyp:hlinkClr xmlns:ahyp="http://schemas.microsoft.com/office/drawing/2018/hyperlinkcolor" val="tx"/>
-                    </a:ext>
-                  </a:extLst>
-                </a:hlinkClick>
-              </a:rPr>
               <a:t>CC BY 4.0</a:t>
             </a:r>
             <a:endParaRPr lang="en-US" sz="1100" dirty="0"/>
@@ -6751,8 +6567,8 @@
       </p:sp>
       <p:pic>
         <p:nvPicPr>
-          <p:cNvPr id="91" name="Image 43" descr="public/newsletters/2026-06/_assets/linkedin.png">
-            <a:hlinkClick r:id="rId133" tooltip="DLinRT on LinkedIn"/>
+          <p:cNvPr id="90" name="Image 43" descr="public/newsletters/2026-06/_assets/linkedin.png">
+            <a:hlinkClick r:id="rId132" tooltip="DLinRT on LinkedIn"/>
           </p:cNvPr>
           <p:cNvPicPr>
             <a:picLocks noChangeAspect="1"/>
@@ -6760,7 +6576,7 @@
           <p:nvPr/>
         </p:nvPicPr>
         <p:blipFill>
-          <a:blip r:embed="rId132"/>
+          <a:blip r:embed="rId131"/>
           <a:srcRect l="0" r="0" t="0" b="0"/>
           <a:stretch/>
         </p:blipFill>
@@ -7314,8 +7130,8 @@
         </p:blipFill>
         <p:spPr>
           <a:xfrm>
-            <a:off x="274320" y="6492240"/>
-            <a:ext cx="292608" cy="292608"/>
+            <a:off x="274320" y="6519672"/>
+            <a:ext cx="885871" cy="256032"/>
           </a:xfrm>
           <a:prstGeom prst="rect">
             <a:avLst/>
@@ -7330,24 +7146,38 @@
         </p:nvSpPr>
         <p:spPr>
           <a:xfrm>
-            <a:off x="621792" y="6510528"/>
-            <a:ext cx="1828800" cy="274320"/>
-          </a:xfrm>
-          <a:prstGeom prst="rect">
-            <a:avLst/>
-          </a:prstGeom>
-          <a:noFill/>
-          <a:ln/>
-        </p:spPr>
-        <p:txBody>
-          <a:bodyPr wrap="square" rtlCol="0" anchor="ctr"/>
-          <a:lstStyle/>
-          <a:p>
-            <a:pPr indent="0" marL="0">
-              <a:buNone/>
-            </a:pPr>
-            <a:r>
-              <a:rPr lang="en-US" sz="1100" b="1" u="sng" dirty="0">
+            <a:off x="2743200" y="6510528"/>
+            <a:ext cx="6705295" cy="274320"/>
+          </a:xfrm>
+          <a:prstGeom prst="rect">
+            <a:avLst/>
+          </a:prstGeom>
+          <a:noFill/>
+          <a:ln/>
+        </p:spPr>
+        <p:txBody>
+          <a:bodyPr wrap="square" rtlCol="0" anchor="ctr"/>
+          <a:lstStyle/>
+          <a:p>
+            <a:pPr algn="ctr" indent="0" marL="0">
+              <a:buNone/>
+            </a:pPr>
+            <a:r>
+              <a:rPr lang="en-US" sz="1100" dirty="0">
+                <a:solidFill>
+                  <a:srgbClr val="6B7280"/>
+                </a:solidFill>
+                <a:latin typeface="Calibri" pitchFamily="34" charset="0"/>
+                <a:ea typeface="Calibri" pitchFamily="34" charset="-122"/>
+                <a:cs typeface="Calibri" pitchFamily="34" charset="-120"/>
+              </a:rPr>
+              <a:t>2026-06-16  ·  </a:t>
+            </a:r>
+            <a:pPr algn="ctr" indent="0" marL="0">
+              <a:buNone/>
+            </a:pPr>
+            <a:r>
+              <a:rPr lang="en-US" sz="1100" u="sng" dirty="0">
                 <a:solidFill>
                   <a:srgbClr val="5090D0"/>
                 </a:solidFill>
@@ -7362,66 +7192,6 @@
                   </a:extLst>
                 </a:hlinkClick>
               </a:rPr>
-              <a:t>dlinrt.eu</a:t>
-            </a:r>
-            <a:endParaRPr lang="en-US" sz="1100" dirty="0"/>
-          </a:p>
-        </p:txBody>
-      </p:sp>
-      <p:sp>
-        <p:nvSpPr>
-          <p:cNvPr id="14" name="Text 11"/>
-          <p:cNvSpPr/>
-          <p:nvPr/>
-        </p:nvSpPr>
-        <p:spPr>
-          <a:xfrm>
-            <a:off x="2743200" y="6510528"/>
-            <a:ext cx="6705295" cy="274320"/>
-          </a:xfrm>
-          <a:prstGeom prst="rect">
-            <a:avLst/>
-          </a:prstGeom>
-          <a:noFill/>
-          <a:ln/>
-        </p:spPr>
-        <p:txBody>
-          <a:bodyPr wrap="square" rtlCol="0" anchor="ctr"/>
-          <a:lstStyle/>
-          <a:p>
-            <a:pPr algn="ctr" indent="0" marL="0">
-              <a:buNone/>
-            </a:pPr>
-            <a:r>
-              <a:rPr lang="en-US" sz="1100" dirty="0">
-                <a:solidFill>
-                  <a:srgbClr val="6B7280"/>
-                </a:solidFill>
-                <a:latin typeface="Calibri" pitchFamily="34" charset="0"/>
-                <a:ea typeface="Calibri" pitchFamily="34" charset="-122"/>
-                <a:cs typeface="Calibri" pitchFamily="34" charset="-120"/>
-              </a:rPr>
-              <a:t>2026-06-16  ·  </a:t>
-            </a:r>
-            <a:pPr algn="ctr" indent="0" marL="0">
-              <a:buNone/>
-            </a:pPr>
-            <a:r>
-              <a:rPr lang="en-US" sz="1100" u="sng" dirty="0">
-                <a:solidFill>
-                  <a:srgbClr val="5090D0"/>
-                </a:solidFill>
-                <a:latin typeface="Calibri" pitchFamily="34" charset="0"/>
-                <a:ea typeface="Calibri" pitchFamily="34" charset="-122"/>
-                <a:cs typeface="Calibri" pitchFamily="34" charset="-120"/>
-                <a:hlinkClick r:id="rId8" invalidUrl="" action="" tgtFrame="" tooltip="" history="1" highlightClick="0" endSnd="0">
-                  <a:extLst>
-                    <a:ext uri="{A12FA001-AC4F-418D-AE19-62706E023703}">
-                      <ahyp:hlinkClr xmlns:ahyp="http://schemas.microsoft.com/office/drawing/2018/hyperlinkcolor" val="tx"/>
-                    </a:ext>
-                  </a:extLst>
-                </a:hlinkClick>
-              </a:rPr>
               <a:t>CC BY 4.0</a:t>
             </a:r>
             <a:endParaRPr lang="en-US" sz="1100" dirty="0"/>
@@ -7430,8 +7200,8 @@
       </p:sp>
       <p:pic>
         <p:nvPicPr>
-          <p:cNvPr id="15" name="Image 1" descr="public/newsletters/2026-06/_assets/linkedin.png">
-            <a:hlinkClick r:id="rId10" tooltip="DLinRT on LinkedIn"/>
+          <p:cNvPr id="14" name="Image 1" descr="public/newsletters/2026-06/_assets/linkedin.png">
+            <a:hlinkClick r:id="rId9" tooltip="DLinRT on LinkedIn"/>
           </p:cNvPr>
           <p:cNvPicPr>
             <a:picLocks noChangeAspect="1"/>
@@ -7439,7 +7209,7 @@
           <p:nvPr/>
         </p:nvPicPr>
         <p:blipFill>
-          <a:blip r:embed="rId9"/>
+          <a:blip r:embed="rId8"/>
           <a:srcRect l="0" r="0" t="0" b="0"/>
           <a:stretch/>
         </p:blipFill>
@@ -7557,8 +7327,8 @@
         </p:nvSpPr>
         <p:spPr>
           <a:xfrm>
-            <a:off x="640080" y="1371600"/>
-            <a:ext cx="10911535" cy="411480"/>
+            <a:off x="640080" y="1188720"/>
+            <a:ext cx="10911535" cy="365760"/>
           </a:xfrm>
           <a:prstGeom prst="rect">
             <a:avLst/>
@@ -7574,7 +7344,7 @@
               <a:buNone/>
             </a:pPr>
             <a:r>
-              <a:rPr lang="en-US" sz="2000" b="1" u="sng" dirty="0">
+              <a:rPr lang="en-US" sz="1800" b="1" u="sng" dirty="0">
                 <a:solidFill>
                   <a:srgbClr val="5090D0"/>
                 </a:solidFill>
@@ -7589,9 +7359,9 @@
                   </a:extLst>
                 </a:hlinkClick>
               </a:rPr>
-              <a:t>Certification round opens</a:t>
-            </a:r>
-            <a:endParaRPr lang="en-US" sz="2000" dirty="0"/>
+              <a:t>Save the date · DLinRT workshop, Utrecht · March 2026</a:t>
+            </a:r>
+            <a:endParaRPr lang="en-US" sz="1800" dirty="0"/>
           </a:p>
         </p:txBody>
       </p:sp>
@@ -7603,8 +7373,8 @@
         </p:nvSpPr>
         <p:spPr>
           <a:xfrm>
-            <a:off x="640080" y="1783080"/>
-            <a:ext cx="10911535" cy="640080"/>
+            <a:off x="640080" y="1554480"/>
+            <a:ext cx="10911535" cy="566928"/>
           </a:xfrm>
           <a:prstGeom prst="rect">
             <a:avLst/>
@@ -7620,7 +7390,7 @@
               <a:buNone/>
             </a:pPr>
             <a:r>
-              <a:rPr lang="en-US" sz="1500" dirty="0">
+              <a:rPr lang="en-US" sz="1300" dirty="0">
                 <a:solidFill>
                   <a:srgbClr val="CADCFC"/>
                 </a:solidFill>
@@ -7628,13 +7398,13 @@
                 <a:ea typeface="Calibri" pitchFamily="34" charset="-122"/>
                 <a:cs typeface="Calibri" pitchFamily="34" charset="-120"/>
               </a:rPr>
-              <a:t>Manufacturers can now certify their product listings. </a:t>
+              <a:t>DLinRT.eu will support the organisation of a two-day international workshop in Utrecht around March 2026. Dates and venue are being finalised — details will follow around September on </a:t>
             </a:r>
             <a:pPr indent="0" marL="0">
               <a:buNone/>
             </a:pPr>
             <a:r>
-              <a:rPr lang="en-US" sz="1500" b="1" u="sng" dirty="0">
+              <a:rPr lang="en-US" sz="1300" b="1" u="sng" dirty="0">
                 <a:solidFill>
                   <a:srgbClr val="FFFFFF"/>
                 </a:solidFill>
@@ -7649,13 +7419,13 @@
                   </a:extLst>
                 </a:hlinkClick>
               </a:rPr>
-              <a:t>Synaptiq</a:t>
+              <a:t>dlinrt.eu</a:t>
             </a:r>
             <a:pPr indent="0" marL="0">
               <a:buNone/>
             </a:pPr>
             <a:r>
-              <a:rPr lang="en-US" sz="1500" dirty="0">
+              <a:rPr lang="en-US" sz="1300" dirty="0">
                 <a:solidFill>
                   <a:srgbClr val="CADCFC"/>
                 </a:solidFill>
@@ -7663,40 +7433,15 @@
                 <a:ea typeface="Calibri" pitchFamily="34" charset="-122"/>
                 <a:cs typeface="Calibri" pitchFamily="34" charset="-120"/>
               </a:rPr>
-              <a:t> — first certified, two CE-marked products. Congratulations.</a:t>
-            </a:r>
-            <a:endParaRPr lang="en-US" sz="1500" dirty="0"/>
-          </a:p>
-        </p:txBody>
-      </p:sp>
-      <p:sp>
-        <p:nvSpPr>
-          <p:cNvPr id="6" name="Text 4"/>
-          <p:cNvSpPr/>
-          <p:nvPr/>
-        </p:nvSpPr>
-        <p:spPr>
-          <a:xfrm>
-            <a:off x="640080" y="2514600"/>
-            <a:ext cx="10911535" cy="411480"/>
-          </a:xfrm>
-          <a:prstGeom prst="rect">
-            <a:avLst/>
-          </a:prstGeom>
-          <a:noFill/>
-          <a:ln/>
-        </p:spPr>
-        <p:txBody>
-          <a:bodyPr wrap="square" rtlCol="0" anchor="ctr"/>
-          <a:lstStyle/>
-          <a:p>
+              <a:t> and </a:t>
+            </a:r>
             <a:pPr indent="0" marL="0">
               <a:buNone/>
             </a:pPr>
             <a:r>
-              <a:rPr lang="en-US" sz="2000" b="1" u="sng" dirty="0">
-                <a:solidFill>
-                  <a:srgbClr val="5090D0"/>
+              <a:rPr lang="en-US" sz="1300" b="1" u="sng" dirty="0">
+                <a:solidFill>
+                  <a:srgbClr val="FFFFFF"/>
                 </a:solidFill>
                 <a:latin typeface="Calibri" pitchFamily="34" charset="0"/>
                 <a:ea typeface="Calibri" pitchFamily="34" charset="-122"/>
@@ -7709,38 +7454,13 @@
                   </a:extLst>
                 </a:hlinkClick>
               </a:rPr>
-              <a:t>MAIRT @ MICCAI · Oct 1, 2026</a:t>
-            </a:r>
-            <a:endParaRPr lang="en-US" sz="2000" dirty="0"/>
-          </a:p>
-        </p:txBody>
-      </p:sp>
-      <p:sp>
-        <p:nvSpPr>
-          <p:cNvPr id="7" name="Text 5"/>
-          <p:cNvSpPr/>
-          <p:nvPr/>
-        </p:nvSpPr>
-        <p:spPr>
-          <a:xfrm>
-            <a:off x="640080" y="2926080"/>
-            <a:ext cx="10911535" cy="640080"/>
-          </a:xfrm>
-          <a:prstGeom prst="rect">
-            <a:avLst/>
-          </a:prstGeom>
-          <a:noFill/>
-          <a:ln/>
-        </p:spPr>
-        <p:txBody>
-          <a:bodyPr wrap="square" rtlCol="0" anchor="ctr"/>
-          <a:lstStyle/>
-          <a:p>
+              <a:t>dlinrt.org</a:t>
+            </a:r>
             <a:pPr indent="0" marL="0">
               <a:buNone/>
             </a:pPr>
             <a:r>
-              <a:rPr lang="en-US" sz="1500" dirty="0">
+              <a:rPr lang="en-US" sz="1300" dirty="0">
                 <a:solidFill>
                   <a:srgbClr val="CADCFC"/>
                 </a:solidFill>
@@ -7748,15 +7468,40 @@
                 <a:ea typeface="Calibri" pitchFamily="34" charset="-122"/>
                 <a:cs typeface="Calibri" pitchFamily="34" charset="-120"/>
               </a:rPr>
-              <a:t>First fully dedicated radiotherapy satellite event at MICCAI, Strasbourg. </a:t>
-            </a:r>
+              <a:t>.</a:t>
+            </a:r>
+            <a:endParaRPr lang="en-US" sz="1300" dirty="0"/>
+          </a:p>
+        </p:txBody>
+      </p:sp>
+      <p:sp>
+        <p:nvSpPr>
+          <p:cNvPr id="6" name="Text 4"/>
+          <p:cNvSpPr/>
+          <p:nvPr/>
+        </p:nvSpPr>
+        <p:spPr>
+          <a:xfrm>
+            <a:off x="640080" y="2148840"/>
+            <a:ext cx="10911535" cy="365760"/>
+          </a:xfrm>
+          <a:prstGeom prst="rect">
+            <a:avLst/>
+          </a:prstGeom>
+          <a:noFill/>
+          <a:ln/>
+        </p:spPr>
+        <p:txBody>
+          <a:bodyPr wrap="square" rtlCol="0" anchor="ctr"/>
+          <a:lstStyle/>
+          <a:p>
             <a:pPr indent="0" marL="0">
               <a:buNone/>
             </a:pPr>
             <a:r>
-              <a:rPr lang="en-US" sz="1500" b="1" u="sng" dirty="0">
-                <a:solidFill>
-                  <a:srgbClr val="FFFFFF"/>
+              <a:rPr lang="en-US" sz="1800" b="1" u="sng" dirty="0">
+                <a:solidFill>
+                  <a:srgbClr val="5090D0"/>
                 </a:solidFill>
                 <a:latin typeface="Calibri" pitchFamily="34" charset="0"/>
                 <a:ea typeface="Calibri" pitchFamily="34" charset="-122"/>
@@ -7769,22 +7514,22 @@
                   </a:extLst>
                 </a:hlinkClick>
               </a:rPr>
-              <a:t>miart-workshop.github.io</a:t>
-            </a:r>
-            <a:endParaRPr lang="en-US" sz="1500" dirty="0"/>
-          </a:p>
-        </p:txBody>
-      </p:sp>
-      <p:sp>
-        <p:nvSpPr>
-          <p:cNvPr id="8" name="Text 6"/>
-          <p:cNvSpPr/>
-          <p:nvPr/>
-        </p:nvSpPr>
-        <p:spPr>
-          <a:xfrm>
-            <a:off x="640080" y="3657600"/>
-            <a:ext cx="10911535" cy="411480"/>
+              <a:t>Certification round opens</a:t>
+            </a:r>
+            <a:endParaRPr lang="en-US" sz="1800" dirty="0"/>
+          </a:p>
+        </p:txBody>
+      </p:sp>
+      <p:sp>
+        <p:nvSpPr>
+          <p:cNvPr id="7" name="Text 5"/>
+          <p:cNvSpPr/>
+          <p:nvPr/>
+        </p:nvSpPr>
+        <p:spPr>
+          <a:xfrm>
+            <a:off x="640080" y="2514600"/>
+            <a:ext cx="10911535" cy="566928"/>
           </a:xfrm>
           <a:prstGeom prst="rect">
             <a:avLst/>
@@ -7800,9 +7545,23 @@
               <a:buNone/>
             </a:pPr>
             <a:r>
-              <a:rPr lang="en-US" sz="2000" b="1" u="sng" dirty="0">
-                <a:solidFill>
-                  <a:srgbClr val="5090D0"/>
+              <a:rPr lang="en-US" sz="1300" dirty="0">
+                <a:solidFill>
+                  <a:srgbClr val="CADCFC"/>
+                </a:solidFill>
+                <a:latin typeface="Calibri" pitchFamily="34" charset="0"/>
+                <a:ea typeface="Calibri" pitchFamily="34" charset="-122"/>
+                <a:cs typeface="Calibri" pitchFamily="34" charset="-120"/>
+              </a:rPr>
+              <a:t>Manufacturers can now certify their product listings. </a:t>
+            </a:r>
+            <a:pPr indent="0" marL="0">
+              <a:buNone/>
+            </a:pPr>
+            <a:r>
+              <a:rPr lang="en-US" sz="1300" b="1" u="sng" dirty="0">
+                <a:solidFill>
+                  <a:srgbClr val="FFFFFF"/>
                 </a:solidFill>
                 <a:latin typeface="Calibri" pitchFamily="34" charset="0"/>
                 <a:ea typeface="Calibri" pitchFamily="34" charset="-122"/>
@@ -7815,38 +7574,13 @@
                   </a:extLst>
                 </a:hlinkClick>
               </a:rPr>
-              <a:t>Next review round · Nov 1 → Dec 15, 2026</a:t>
-            </a:r>
-            <a:endParaRPr lang="en-US" sz="2000" dirty="0"/>
-          </a:p>
-        </p:txBody>
-      </p:sp>
-      <p:sp>
-        <p:nvSpPr>
-          <p:cNvPr id="9" name="Text 7"/>
-          <p:cNvSpPr/>
-          <p:nvPr/>
-        </p:nvSpPr>
-        <p:spPr>
-          <a:xfrm>
-            <a:off x="640080" y="4069080"/>
-            <a:ext cx="10911535" cy="640080"/>
-          </a:xfrm>
-          <a:prstGeom prst="rect">
-            <a:avLst/>
-          </a:prstGeom>
-          <a:noFill/>
-          <a:ln/>
-        </p:spPr>
-        <p:txBody>
-          <a:bodyPr wrap="square" rtlCol="0" anchor="ctr"/>
-          <a:lstStyle/>
-          <a:p>
+              <a:t>Synaptiq</a:t>
+            </a:r>
             <a:pPr indent="0" marL="0">
               <a:buNone/>
             </a:pPr>
             <a:r>
-              <a:rPr lang="en-US" sz="1500" dirty="0">
+              <a:rPr lang="en-US" sz="1300" dirty="0">
                 <a:solidFill>
                   <a:srgbClr val="CADCFC"/>
                 </a:solidFill>
@@ -7854,15 +7588,40 @@
                 <a:ea typeface="Calibri" pitchFamily="34" charset="-122"/>
                 <a:cs typeface="Calibri" pitchFamily="34" charset="-120"/>
               </a:rPr>
-              <a:t>We are looking for more reviewers — many hands make the workload lighter. </a:t>
-            </a:r>
+              <a:t> — first certified, two CE-marked products. Congratulations.</a:t>
+            </a:r>
+            <a:endParaRPr lang="en-US" sz="1300" dirty="0"/>
+          </a:p>
+        </p:txBody>
+      </p:sp>
+      <p:sp>
+        <p:nvSpPr>
+          <p:cNvPr id="8" name="Text 6"/>
+          <p:cNvSpPr/>
+          <p:nvPr/>
+        </p:nvSpPr>
+        <p:spPr>
+          <a:xfrm>
+            <a:off x="640080" y="3108960"/>
+            <a:ext cx="10911535" cy="365760"/>
+          </a:xfrm>
+          <a:prstGeom prst="rect">
+            <a:avLst/>
+          </a:prstGeom>
+          <a:noFill/>
+          <a:ln/>
+        </p:spPr>
+        <p:txBody>
+          <a:bodyPr wrap="square" rtlCol="0" anchor="ctr"/>
+          <a:lstStyle/>
+          <a:p>
             <a:pPr indent="0" marL="0">
               <a:buNone/>
             </a:pPr>
             <a:r>
-              <a:rPr lang="en-US" sz="1500" b="1" u="sng" dirty="0">
-                <a:solidFill>
-                  <a:srgbClr val="FFFFFF"/>
+              <a:rPr lang="en-US" sz="1800" b="1" u="sng" dirty="0">
+                <a:solidFill>
+                  <a:srgbClr val="5090D0"/>
                 </a:solidFill>
                 <a:latin typeface="Calibri" pitchFamily="34" charset="0"/>
                 <a:ea typeface="Calibri" pitchFamily="34" charset="-122"/>
@@ -7875,13 +7634,38 @@
                   </a:extLst>
                 </a:hlinkClick>
               </a:rPr>
-              <a:t>Get in touch</a:t>
-            </a:r>
+              <a:t>MAIRT @ MICCAI · Oct 1, 2026</a:t>
+            </a:r>
+            <a:endParaRPr lang="en-US" sz="1800" dirty="0"/>
+          </a:p>
+        </p:txBody>
+      </p:sp>
+      <p:sp>
+        <p:nvSpPr>
+          <p:cNvPr id="9" name="Text 7"/>
+          <p:cNvSpPr/>
+          <p:nvPr/>
+        </p:nvSpPr>
+        <p:spPr>
+          <a:xfrm>
+            <a:off x="640080" y="3474720"/>
+            <a:ext cx="10911535" cy="566928"/>
+          </a:xfrm>
+          <a:prstGeom prst="rect">
+            <a:avLst/>
+          </a:prstGeom>
+          <a:noFill/>
+          <a:ln/>
+        </p:spPr>
+        <p:txBody>
+          <a:bodyPr wrap="square" rtlCol="0" anchor="ctr"/>
+          <a:lstStyle/>
+          <a:p>
             <a:pPr indent="0" marL="0">
               <a:buNone/>
             </a:pPr>
             <a:r>
-              <a:rPr lang="en-US" sz="1500" dirty="0">
+              <a:rPr lang="en-US" sz="1300" dirty="0">
                 <a:solidFill>
                   <a:srgbClr val="CADCFC"/>
                 </a:solidFill>
@@ -7889,40 +7673,15 @@
                 <a:ea typeface="Calibri" pitchFamily="34" charset="-122"/>
                 <a:cs typeface="Calibri" pitchFamily="34" charset="-120"/>
               </a:rPr>
-              <a:t>.</a:t>
-            </a:r>
-            <a:endParaRPr lang="en-US" sz="1500" dirty="0"/>
-          </a:p>
-        </p:txBody>
-      </p:sp>
-      <p:sp>
-        <p:nvSpPr>
-          <p:cNvPr id="10" name="Text 8"/>
-          <p:cNvSpPr/>
-          <p:nvPr/>
-        </p:nvSpPr>
-        <p:spPr>
-          <a:xfrm>
-            <a:off x="640080" y="4800600"/>
-            <a:ext cx="10911535" cy="411480"/>
-          </a:xfrm>
-          <a:prstGeom prst="rect">
-            <a:avLst/>
-          </a:prstGeom>
-          <a:noFill/>
-          <a:ln/>
-        </p:spPr>
-        <p:txBody>
-          <a:bodyPr wrap="square" rtlCol="0" anchor="ctr"/>
-          <a:lstStyle/>
-          <a:p>
+              <a:t>First fully dedicated radiotherapy satellite event at MICCAI, Strasbourg. </a:t>
+            </a:r>
             <a:pPr indent="0" marL="0">
               <a:buNone/>
             </a:pPr>
             <a:r>
-              <a:rPr lang="en-US" sz="2000" b="1" u="sng" dirty="0">
-                <a:solidFill>
-                  <a:srgbClr val="5090D0"/>
+              <a:rPr lang="en-US" sz="1300" b="1" u="sng" dirty="0">
+                <a:solidFill>
+                  <a:srgbClr val="FFFFFF"/>
                 </a:solidFill>
                 <a:latin typeface="Calibri" pitchFamily="34" charset="0"/>
                 <a:ea typeface="Calibri" pitchFamily="34" charset="-122"/>
@@ -7935,22 +7694,22 @@
                   </a:extLst>
                 </a:hlinkClick>
               </a:rPr>
-              <a:t>3-axis evidence system live</a:t>
-            </a:r>
-            <a:endParaRPr lang="en-US" sz="2000" dirty="0"/>
-          </a:p>
-        </p:txBody>
-      </p:sp>
-      <p:sp>
-        <p:nvSpPr>
-          <p:cNvPr id="11" name="Text 9"/>
-          <p:cNvSpPr/>
-          <p:nvPr/>
-        </p:nvSpPr>
-        <p:spPr>
-          <a:xfrm>
-            <a:off x="640080" y="5212080"/>
-            <a:ext cx="10911535" cy="640080"/>
+              <a:t>miart-workshop.github.io</a:t>
+            </a:r>
+            <a:endParaRPr lang="en-US" sz="1300" dirty="0"/>
+          </a:p>
+        </p:txBody>
+      </p:sp>
+      <p:sp>
+        <p:nvSpPr>
+          <p:cNvPr id="10" name="Text 8"/>
+          <p:cNvSpPr/>
+          <p:nvPr/>
+        </p:nvSpPr>
+        <p:spPr>
+          <a:xfrm>
+            <a:off x="640080" y="4069080"/>
+            <a:ext cx="10911535" cy="365760"/>
           </a:xfrm>
           <a:prstGeom prst="rect">
             <a:avLst/>
@@ -7966,23 +7725,9 @@
               <a:buNone/>
             </a:pPr>
             <a:r>
-              <a:rPr lang="en-US" sz="1500" dirty="0">
-                <a:solidFill>
-                  <a:srgbClr val="CADCFC"/>
-                </a:solidFill>
-                <a:latin typeface="Calibri" pitchFamily="34" charset="0"/>
-                <a:ea typeface="Calibri" pitchFamily="34" charset="-122"/>
-                <a:cs typeface="Calibri" pitchFamily="34" charset="-120"/>
-              </a:rPr>
-              <a:t>Browse the Evidence Matrix to see how the catalogue distributes across rigor (E0–E3) and impact (I0–I5): </a:t>
-            </a:r>
-            <a:pPr indent="0" marL="0">
-              <a:buNone/>
-            </a:pPr>
-            <a:r>
-              <a:rPr lang="en-US" sz="1500" b="1" u="sng" dirty="0">
-                <a:solidFill>
-                  <a:srgbClr val="FFFFFF"/>
+              <a:rPr lang="en-US" sz="1800" b="1" u="sng" dirty="0">
+                <a:solidFill>
+                  <a:srgbClr val="5090D0"/>
                 </a:solidFill>
                 <a:latin typeface="Calibri" pitchFamily="34" charset="0"/>
                 <a:ea typeface="Calibri" pitchFamily="34" charset="-122"/>
@@ -7995,13 +7740,38 @@
                   </a:extLst>
                 </a:hlinkClick>
               </a:rPr>
-              <a:t>dlinrt.eu/dashboard</a:t>
-            </a:r>
+              <a:t>Next review round · Nov 1 → Dec 15, 2026</a:t>
+            </a:r>
+            <a:endParaRPr lang="en-US" sz="1800" dirty="0"/>
+          </a:p>
+        </p:txBody>
+      </p:sp>
+      <p:sp>
+        <p:nvSpPr>
+          <p:cNvPr id="11" name="Text 9"/>
+          <p:cNvSpPr/>
+          <p:nvPr/>
+        </p:nvSpPr>
+        <p:spPr>
+          <a:xfrm>
+            <a:off x="640080" y="4434840"/>
+            <a:ext cx="10911535" cy="566928"/>
+          </a:xfrm>
+          <a:prstGeom prst="rect">
+            <a:avLst/>
+          </a:prstGeom>
+          <a:noFill/>
+          <a:ln/>
+        </p:spPr>
+        <p:txBody>
+          <a:bodyPr wrap="square" rtlCol="0" anchor="ctr"/>
+          <a:lstStyle/>
+          <a:p>
             <a:pPr indent="0" marL="0">
               <a:buNone/>
             </a:pPr>
             <a:r>
-              <a:rPr lang="en-US" sz="1500" dirty="0">
+              <a:rPr lang="en-US" sz="1300" dirty="0">
                 <a:solidFill>
                   <a:srgbClr val="CADCFC"/>
                 </a:solidFill>
@@ -8009,47 +7779,57 @@
                 <a:ea typeface="Calibri" pitchFamily="34" charset="-122"/>
                 <a:cs typeface="Calibri" pitchFamily="34" charset="-120"/>
               </a:rPr>
+              <a:t>We are looking for more reviewers — many hands make the workload lighter. </a:t>
+            </a:r>
+            <a:pPr indent="0" marL="0">
+              <a:buNone/>
+            </a:pPr>
+            <a:r>
+              <a:rPr lang="en-US" sz="1300" b="1" u="sng" dirty="0">
+                <a:solidFill>
+                  <a:srgbClr val="FFFFFF"/>
+                </a:solidFill>
+                <a:latin typeface="Calibri" pitchFamily="34" charset="0"/>
+                <a:ea typeface="Calibri" pitchFamily="34" charset="-122"/>
+                <a:cs typeface="Calibri" pitchFamily="34" charset="-120"/>
+                <a:hlinkClick r:id="rId9" invalidUrl="" action="" tgtFrame="" tooltip="" history="1" highlightClick="0" endSnd="0">
+                  <a:extLst>
+                    <a:ext uri="{A12FA001-AC4F-418D-AE19-62706E023703}">
+                      <ahyp:hlinkClr xmlns:ahyp="http://schemas.microsoft.com/office/drawing/2018/hyperlinkcolor" val="tx"/>
+                    </a:ext>
+                  </a:extLst>
+                </a:hlinkClick>
+              </a:rPr>
+              <a:t>Get in touch</a:t>
+            </a:r>
+            <a:pPr indent="0" marL="0">
+              <a:buNone/>
+            </a:pPr>
+            <a:r>
+              <a:rPr lang="en-US" sz="1300" dirty="0">
+                <a:solidFill>
+                  <a:srgbClr val="CADCFC"/>
+                </a:solidFill>
+                <a:latin typeface="Calibri" pitchFamily="34" charset="0"/>
+                <a:ea typeface="Calibri" pitchFamily="34" charset="-122"/>
+                <a:cs typeface="Calibri" pitchFamily="34" charset="-120"/>
+              </a:rPr>
               <a:t>.</a:t>
             </a:r>
-            <a:endParaRPr lang="en-US" sz="1500" dirty="0"/>
-          </a:p>
-        </p:txBody>
-      </p:sp>
-      <p:pic>
-        <p:nvPicPr>
-          <p:cNvPr id="12" name="Image 0" descr="public/newsletters/2026-06/_assets/dlinrt-logo.png">
-            <a:hlinkClick r:id="rId10" tooltip="dlinrt.eu"/>
-          </p:cNvPr>
-          <p:cNvPicPr>
-            <a:picLocks noChangeAspect="1"/>
-          </p:cNvPicPr>
-          <p:nvPr/>
-        </p:nvPicPr>
-        <p:blipFill>
-          <a:blip r:embed="rId9"/>
-          <a:srcRect l="0" r="0" t="0" b="0"/>
-          <a:stretch/>
-        </p:blipFill>
-        <p:spPr>
-          <a:xfrm>
-            <a:off x="274320" y="6492240"/>
-            <a:ext cx="292608" cy="292608"/>
-          </a:xfrm>
-          <a:prstGeom prst="rect">
-            <a:avLst/>
-          </a:prstGeom>
-        </p:spPr>
-      </p:pic>
-      <p:sp>
-        <p:nvSpPr>
-          <p:cNvPr id="13" name="Text 10"/>
-          <p:cNvSpPr/>
-          <p:nvPr/>
-        </p:nvSpPr>
-        <p:spPr>
-          <a:xfrm>
-            <a:off x="621792" y="6510528"/>
-            <a:ext cx="1828800" cy="274320"/>
+            <a:endParaRPr lang="en-US" sz="1300" dirty="0"/>
+          </a:p>
+        </p:txBody>
+      </p:sp>
+      <p:sp>
+        <p:nvSpPr>
+          <p:cNvPr id="12" name="Text 10"/>
+          <p:cNvSpPr/>
+          <p:nvPr/>
+        </p:nvSpPr>
+        <p:spPr>
+          <a:xfrm>
+            <a:off x="640080" y="5029200"/>
+            <a:ext cx="10911535" cy="365760"/>
           </a:xfrm>
           <a:prstGeom prst="rect">
             <a:avLst/>
@@ -8065,7 +7845,67 @@
               <a:buNone/>
             </a:pPr>
             <a:r>
-              <a:rPr lang="en-US" sz="1100" b="1" u="sng" dirty="0">
+              <a:rPr lang="en-US" sz="1800" b="1" u="sng" dirty="0">
+                <a:solidFill>
+                  <a:srgbClr val="5090D0"/>
+                </a:solidFill>
+                <a:latin typeface="Calibri" pitchFamily="34" charset="0"/>
+                <a:ea typeface="Calibri" pitchFamily="34" charset="-122"/>
+                <a:cs typeface="Calibri" pitchFamily="34" charset="-120"/>
+                <a:hlinkClick r:id="rId10" invalidUrl="" action="" tgtFrame="" tooltip="" history="1" highlightClick="0" endSnd="0">
+                  <a:extLst>
+                    <a:ext uri="{A12FA001-AC4F-418D-AE19-62706E023703}">
+                      <ahyp:hlinkClr xmlns:ahyp="http://schemas.microsoft.com/office/drawing/2018/hyperlinkcolor" val="tx"/>
+                    </a:ext>
+                  </a:extLst>
+                </a:hlinkClick>
+              </a:rPr>
+              <a:t>3-axis evidence system live</a:t>
+            </a:r>
+            <a:endParaRPr lang="en-US" sz="1800" dirty="0"/>
+          </a:p>
+        </p:txBody>
+      </p:sp>
+      <p:sp>
+        <p:nvSpPr>
+          <p:cNvPr id="13" name="Text 11"/>
+          <p:cNvSpPr/>
+          <p:nvPr/>
+        </p:nvSpPr>
+        <p:spPr>
+          <a:xfrm>
+            <a:off x="640080" y="5394960"/>
+            <a:ext cx="10911535" cy="566928"/>
+          </a:xfrm>
+          <a:prstGeom prst="rect">
+            <a:avLst/>
+          </a:prstGeom>
+          <a:noFill/>
+          <a:ln/>
+        </p:spPr>
+        <p:txBody>
+          <a:bodyPr wrap="square" rtlCol="0" anchor="ctr"/>
+          <a:lstStyle/>
+          <a:p>
+            <a:pPr indent="0" marL="0">
+              <a:buNone/>
+            </a:pPr>
+            <a:r>
+              <a:rPr lang="en-US" sz="1300" dirty="0">
+                <a:solidFill>
+                  <a:srgbClr val="CADCFC"/>
+                </a:solidFill>
+                <a:latin typeface="Calibri" pitchFamily="34" charset="0"/>
+                <a:ea typeface="Calibri" pitchFamily="34" charset="-122"/>
+                <a:cs typeface="Calibri" pitchFamily="34" charset="-120"/>
+              </a:rPr>
+              <a:t>Browse the Evidence Matrix to see how the catalogue distributes across rigor (E0–E3) and impact (I0–I5): </a:t>
+            </a:r>
+            <a:pPr indent="0" marL="0">
+              <a:buNone/>
+            </a:pPr>
+            <a:r>
+              <a:rPr lang="en-US" sz="1300" b="1" u="sng" dirty="0">
                 <a:solidFill>
                   <a:srgbClr val="FFFFFF"/>
                 </a:solidFill>
@@ -8080,15 +7920,54 @@
                   </a:extLst>
                 </a:hlinkClick>
               </a:rPr>
-              <a:t>dlinrt.eu</a:t>
-            </a:r>
-            <a:endParaRPr lang="en-US" sz="1100" dirty="0"/>
-          </a:p>
-        </p:txBody>
-      </p:sp>
-      <p:sp>
-        <p:nvSpPr>
-          <p:cNvPr id="14" name="Text 11"/>
+              <a:t>dlinrt.eu/dashboard</a:t>
+            </a:r>
+            <a:pPr indent="0" marL="0">
+              <a:buNone/>
+            </a:pPr>
+            <a:r>
+              <a:rPr lang="en-US" sz="1300" dirty="0">
+                <a:solidFill>
+                  <a:srgbClr val="CADCFC"/>
+                </a:solidFill>
+                <a:latin typeface="Calibri" pitchFamily="34" charset="0"/>
+                <a:ea typeface="Calibri" pitchFamily="34" charset="-122"/>
+                <a:cs typeface="Calibri" pitchFamily="34" charset="-120"/>
+              </a:rPr>
+              <a:t>.</a:t>
+            </a:r>
+            <a:endParaRPr lang="en-US" sz="1300" dirty="0"/>
+          </a:p>
+        </p:txBody>
+      </p:sp>
+      <p:pic>
+        <p:nvPicPr>
+          <p:cNvPr id="14" name="Image 0" descr="public/newsletters/2026-06/_assets/dlinrt-logo.png">
+            <a:hlinkClick r:id="rId13" tooltip="dlinrt.eu"/>
+          </p:cNvPr>
+          <p:cNvPicPr>
+            <a:picLocks noChangeAspect="1"/>
+          </p:cNvPicPr>
+          <p:nvPr/>
+        </p:nvPicPr>
+        <p:blipFill>
+          <a:blip r:embed="rId12"/>
+          <a:srcRect l="0" r="0" t="0" b="0"/>
+          <a:stretch/>
+        </p:blipFill>
+        <p:spPr>
+          <a:xfrm>
+            <a:off x="274320" y="6519672"/>
+            <a:ext cx="885871" cy="256032"/>
+          </a:xfrm>
+          <a:prstGeom prst="rect">
+            <a:avLst/>
+          </a:prstGeom>
+        </p:spPr>
+      </p:pic>
+      <p:sp>
+        <p:nvSpPr>
+          <p:cNvPr id="15" name="Text 12"/>
           <p:cNvSpPr/>
           <p:nvPr/>
         </p:nvSpPr>
@@ -8132,7 +8011,7 @@
                 <a:latin typeface="Calibri" pitchFamily="34" charset="0"/>
                 <a:ea typeface="Calibri" pitchFamily="34" charset="-122"/>
                 <a:cs typeface="Calibri" pitchFamily="34" charset="-120"/>
-                <a:hlinkClick r:id="rId12" invalidUrl="" action="" tgtFrame="" tooltip="" history="1" highlightClick="0" endSnd="0">
+                <a:hlinkClick r:id="rId14" invalidUrl="" action="" tgtFrame="" tooltip="" history="1" highlightClick="0" endSnd="0">
                   <a:extLst>
                     <a:ext uri="{A12FA001-AC4F-418D-AE19-62706E023703}">
                       <ahyp:hlinkClr xmlns:ahyp="http://schemas.microsoft.com/office/drawing/2018/hyperlinkcolor" val="tx"/>
@@ -8148,8 +8027,8 @@
       </p:sp>
       <p:pic>
         <p:nvPicPr>
-          <p:cNvPr id="15" name="Image 1" descr="public/newsletters/2026-06/_assets/linkedin.png">
-            <a:hlinkClick r:id="rId14" tooltip="DLinRT on LinkedIn"/>
+          <p:cNvPr id="16" name="Image 1" descr="public/newsletters/2026-06/_assets/linkedin.png">
+            <a:hlinkClick r:id="rId16" tooltip="DLinRT on LinkedIn"/>
           </p:cNvPr>
           <p:cNvPicPr>
             <a:picLocks noChangeAspect="1"/>
@@ -8157,7 +8036,7 @@
           <p:nvPr/>
         </p:nvPicPr>
         <p:blipFill>
-          <a:blip r:embed="rId13"/>
+          <a:blip r:embed="rId15"/>
           <a:srcRect l="0" r="0" t="0" b="0"/>
           <a:stretch/>
         </p:blipFill>

--- a/public/newsletters/2026-06/dlinrt-2026-06-update.pptx
+++ b/public/newsletters/2026-06/dlinrt-2026-06-update.pptx
@@ -3510,13 +3510,14 @@
         </p:nvPicPr>
         <p:blipFill>
           <a:blip r:embed="rId2"/>
-          <a:srcRect l="0" r="0" t="0" b="0"/>
-          <a:stretch/>
+          <a:stretch>
+            <a:fillRect/>
+          </a:stretch>
         </p:blipFill>
         <p:spPr>
           <a:xfrm>
-            <a:off x="475488" y="1298448"/>
-            <a:ext cx="1417712" cy="344424"/>
+            <a:off x="475488" y="1310048"/>
+            <a:ext cx="1417712" cy="321224"/>
           </a:xfrm>
           <a:prstGeom prst="rect">
             <a:avLst/>
@@ -3581,13 +3582,14 @@
         </p:nvPicPr>
         <p:blipFill>
           <a:blip r:embed="rId5"/>
-          <a:srcRect l="0" r="0" t="0" b="0"/>
-          <a:stretch/>
+          <a:stretch>
+            <a:fillRect/>
+          </a:stretch>
         </p:blipFill>
         <p:spPr>
           <a:xfrm>
-            <a:off x="2112656" y="1298448"/>
-            <a:ext cx="1417712" cy="344424"/>
+            <a:off x="2434886" y="1298448"/>
+            <a:ext cx="773252" cy="344424"/>
           </a:xfrm>
           <a:prstGeom prst="rect">
             <a:avLst/>
@@ -3652,13 +3654,14 @@
         </p:nvPicPr>
         <p:blipFill>
           <a:blip r:embed="rId8"/>
-          <a:srcRect l="0" r="0" t="0" b="0"/>
-          <a:stretch/>
+          <a:stretch>
+            <a:fillRect/>
+          </a:stretch>
         </p:blipFill>
         <p:spPr>
           <a:xfrm>
-            <a:off x="3749824" y="1298448"/>
-            <a:ext cx="1417712" cy="344424"/>
+            <a:off x="4286468" y="1298448"/>
+            <a:ext cx="344424" cy="344424"/>
           </a:xfrm>
           <a:prstGeom prst="rect">
             <a:avLst/>
@@ -3723,13 +3726,14 @@
         </p:nvPicPr>
         <p:blipFill>
           <a:blip r:embed="rId11"/>
-          <a:srcRect l="0" r="0" t="0" b="0"/>
-          <a:stretch/>
+          <a:stretch>
+            <a:fillRect/>
+          </a:stretch>
         </p:blipFill>
         <p:spPr>
           <a:xfrm>
-            <a:off x="5386992" y="1298448"/>
-            <a:ext cx="1417712" cy="344424"/>
+            <a:off x="5789369" y="1298448"/>
+            <a:ext cx="612958" cy="344424"/>
           </a:xfrm>
           <a:prstGeom prst="rect">
             <a:avLst/>
@@ -3794,13 +3798,14 @@
         </p:nvPicPr>
         <p:blipFill>
           <a:blip r:embed="rId14"/>
-          <a:srcRect l="0" r="0" t="0" b="0"/>
-          <a:stretch/>
+          <a:stretch>
+            <a:fillRect/>
+          </a:stretch>
         </p:blipFill>
         <p:spPr>
           <a:xfrm>
-            <a:off x="7024160" y="1298448"/>
-            <a:ext cx="1417712" cy="344424"/>
+            <a:off x="7339617" y="1298448"/>
+            <a:ext cx="786796" cy="344424"/>
           </a:xfrm>
           <a:prstGeom prst="rect">
             <a:avLst/>
@@ -3865,13 +3870,14 @@
         </p:nvPicPr>
         <p:blipFill>
           <a:blip r:embed="rId17"/>
-          <a:srcRect l="0" r="0" t="0" b="0"/>
-          <a:stretch/>
+          <a:stretch>
+            <a:fillRect/>
+          </a:stretch>
         </p:blipFill>
         <p:spPr>
           <a:xfrm>
-            <a:off x="8661327" y="1298448"/>
-            <a:ext cx="1417712" cy="344424"/>
+            <a:off x="8784428" y="1298448"/>
+            <a:ext cx="1171510" cy="344424"/>
           </a:xfrm>
           <a:prstGeom prst="rect">
             <a:avLst/>
@@ -3936,13 +3942,14 @@
         </p:nvPicPr>
         <p:blipFill>
           <a:blip r:embed="rId20"/>
-          <a:srcRect l="0" r="0" t="0" b="0"/>
-          <a:stretch/>
+          <a:stretch>
+            <a:fillRect/>
+          </a:stretch>
         </p:blipFill>
         <p:spPr>
           <a:xfrm>
-            <a:off x="10298495" y="1298448"/>
-            <a:ext cx="1417712" cy="344424"/>
+            <a:off x="10298495" y="1316852"/>
+            <a:ext cx="1417712" cy="307617"/>
           </a:xfrm>
           <a:prstGeom prst="rect">
             <a:avLst/>
@@ -4007,13 +4014,14 @@
         </p:nvPicPr>
         <p:blipFill>
           <a:blip r:embed="rId23"/>
-          <a:srcRect l="0" r="0" t="0" b="0"/>
-          <a:stretch/>
+          <a:stretch>
+            <a:fillRect/>
+          </a:stretch>
         </p:blipFill>
         <p:spPr>
           <a:xfrm>
-            <a:off x="475488" y="2136648"/>
-            <a:ext cx="1417712" cy="344424"/>
+            <a:off x="856321" y="2136648"/>
+            <a:ext cx="656046" cy="344424"/>
           </a:xfrm>
           <a:prstGeom prst="rect">
             <a:avLst/>
@@ -4078,13 +4086,14 @@
         </p:nvPicPr>
         <p:blipFill>
           <a:blip r:embed="rId26"/>
-          <a:srcRect l="0" r="0" t="0" b="0"/>
-          <a:stretch/>
+          <a:stretch>
+            <a:fillRect/>
+          </a:stretch>
         </p:blipFill>
         <p:spPr>
           <a:xfrm>
-            <a:off x="2112656" y="2136648"/>
-            <a:ext cx="1417712" cy="344424"/>
+            <a:off x="2568878" y="2136648"/>
+            <a:ext cx="505267" cy="344424"/>
           </a:xfrm>
           <a:prstGeom prst="rect">
             <a:avLst/>
@@ -4149,13 +4158,14 @@
         </p:nvPicPr>
         <p:blipFill>
           <a:blip r:embed="rId29"/>
-          <a:srcRect l="0" r="0" t="0" b="0"/>
-          <a:stretch/>
+          <a:stretch>
+            <a:fillRect/>
+          </a:stretch>
         </p:blipFill>
         <p:spPr>
           <a:xfrm>
-            <a:off x="3749824" y="2136648"/>
-            <a:ext cx="1417712" cy="344424"/>
+            <a:off x="3822820" y="2136648"/>
+            <a:ext cx="1271719" cy="344424"/>
           </a:xfrm>
           <a:prstGeom prst="rect">
             <a:avLst/>
@@ -4220,13 +4230,14 @@
         </p:nvPicPr>
         <p:blipFill>
           <a:blip r:embed="rId32"/>
-          <a:srcRect l="0" r="0" t="0" b="0"/>
-          <a:stretch/>
+          <a:stretch>
+            <a:fillRect/>
+          </a:stretch>
         </p:blipFill>
         <p:spPr>
           <a:xfrm>
-            <a:off x="5386992" y="2136648"/>
-            <a:ext cx="1417712" cy="344424"/>
+            <a:off x="5503780" y="2136648"/>
+            <a:ext cx="1184135" cy="344424"/>
           </a:xfrm>
           <a:prstGeom prst="rect">
             <a:avLst/>
@@ -4291,13 +4302,14 @@
         </p:nvPicPr>
         <p:blipFill>
           <a:blip r:embed="rId35"/>
-          <a:srcRect l="0" r="0" t="0" b="0"/>
-          <a:stretch/>
+          <a:stretch>
+            <a:fillRect/>
+          </a:stretch>
         </p:blipFill>
         <p:spPr>
           <a:xfrm>
-            <a:off x="7024160" y="2136648"/>
-            <a:ext cx="1417712" cy="344424"/>
+            <a:off x="7165284" y="2136648"/>
+            <a:ext cx="1135464" cy="344424"/>
           </a:xfrm>
           <a:prstGeom prst="rect">
             <a:avLst/>
@@ -4362,13 +4374,14 @@
         </p:nvPicPr>
         <p:blipFill>
           <a:blip r:embed="rId38"/>
-          <a:srcRect l="0" r="0" t="0" b="0"/>
-          <a:stretch/>
+          <a:stretch>
+            <a:fillRect/>
+          </a:stretch>
         </p:blipFill>
         <p:spPr>
           <a:xfrm>
-            <a:off x="8661327" y="2136648"/>
-            <a:ext cx="1417712" cy="344424"/>
+            <a:off x="8931950" y="2136648"/>
+            <a:ext cx="876468" cy="344424"/>
           </a:xfrm>
           <a:prstGeom prst="rect">
             <a:avLst/>
@@ -4433,13 +4446,14 @@
         </p:nvPicPr>
         <p:blipFill>
           <a:blip r:embed="rId41"/>
-          <a:srcRect l="0" r="0" t="0" b="0"/>
-          <a:stretch/>
+          <a:stretch>
+            <a:fillRect/>
+          </a:stretch>
         </p:blipFill>
         <p:spPr>
           <a:xfrm>
-            <a:off x="10298495" y="2136648"/>
-            <a:ext cx="1417712" cy="344424"/>
+            <a:off x="10576312" y="2136648"/>
+            <a:ext cx="862079" cy="344424"/>
           </a:xfrm>
           <a:prstGeom prst="rect">
             <a:avLst/>
@@ -4504,13 +4518,14 @@
         </p:nvPicPr>
         <p:blipFill>
           <a:blip r:embed="rId44"/>
-          <a:srcRect l="0" r="0" t="0" b="0"/>
-          <a:stretch/>
+          <a:stretch>
+            <a:fillRect/>
+          </a:stretch>
         </p:blipFill>
         <p:spPr>
           <a:xfrm>
-            <a:off x="475488" y="2974848"/>
-            <a:ext cx="1417712" cy="344424"/>
+            <a:off x="857141" y="2974848"/>
+            <a:ext cx="654406" cy="344424"/>
           </a:xfrm>
           <a:prstGeom prst="rect">
             <a:avLst/>
@@ -4575,13 +4590,14 @@
         </p:nvPicPr>
         <p:blipFill>
           <a:blip r:embed="rId47"/>
-          <a:srcRect l="0" r="0" t="0" b="0"/>
-          <a:stretch/>
+          <a:stretch>
+            <a:fillRect/>
+          </a:stretch>
         </p:blipFill>
         <p:spPr>
           <a:xfrm>
-            <a:off x="2112656" y="2974848"/>
-            <a:ext cx="1417712" cy="344424"/>
+            <a:off x="2669475" y="2974848"/>
+            <a:ext cx="304073" cy="344424"/>
           </a:xfrm>
           <a:prstGeom prst="rect">
             <a:avLst/>
@@ -4646,13 +4662,14 @@
         </p:nvPicPr>
         <p:blipFill>
           <a:blip r:embed="rId50"/>
-          <a:srcRect l="0" r="0" t="0" b="0"/>
-          <a:stretch/>
+          <a:stretch>
+            <a:fillRect/>
+          </a:stretch>
         </p:blipFill>
         <p:spPr>
           <a:xfrm>
-            <a:off x="3749824" y="2974848"/>
-            <a:ext cx="1417712" cy="344424"/>
+            <a:off x="3749824" y="2975871"/>
+            <a:ext cx="1417712" cy="342377"/>
           </a:xfrm>
           <a:prstGeom prst="rect">
             <a:avLst/>
@@ -4717,13 +4734,14 @@
         </p:nvPicPr>
         <p:blipFill>
           <a:blip r:embed="rId53"/>
-          <a:srcRect l="0" r="0" t="0" b="0"/>
-          <a:stretch/>
+          <a:stretch>
+            <a:fillRect/>
+          </a:stretch>
         </p:blipFill>
         <p:spPr>
           <a:xfrm>
-            <a:off x="5386992" y="2974848"/>
-            <a:ext cx="1417712" cy="344424"/>
+            <a:off x="5386992" y="3015393"/>
+            <a:ext cx="1417712" cy="263333"/>
           </a:xfrm>
           <a:prstGeom prst="rect">
             <a:avLst/>
@@ -4788,13 +4806,14 @@
         </p:nvPicPr>
         <p:blipFill>
           <a:blip r:embed="rId56"/>
-          <a:srcRect l="0" r="0" t="0" b="0"/>
-          <a:stretch/>
+          <a:stretch>
+            <a:fillRect/>
+          </a:stretch>
         </p:blipFill>
         <p:spPr>
           <a:xfrm>
-            <a:off x="7024160" y="2974848"/>
-            <a:ext cx="1417712" cy="344424"/>
+            <a:off x="7024160" y="2989229"/>
+            <a:ext cx="1417712" cy="315662"/>
           </a:xfrm>
           <a:prstGeom prst="rect">
             <a:avLst/>
@@ -4859,13 +4878,14 @@
         </p:nvPicPr>
         <p:blipFill>
           <a:blip r:embed="rId59"/>
-          <a:srcRect l="0" r="0" t="0" b="0"/>
-          <a:stretch/>
+          <a:stretch>
+            <a:fillRect/>
+          </a:stretch>
         </p:blipFill>
         <p:spPr>
           <a:xfrm>
-            <a:off x="8661327" y="2974848"/>
-            <a:ext cx="1417712" cy="344424"/>
+            <a:off x="9064029" y="2974848"/>
+            <a:ext cx="612309" cy="344424"/>
           </a:xfrm>
           <a:prstGeom prst="rect">
             <a:avLst/>
@@ -4930,13 +4950,14 @@
         </p:nvPicPr>
         <p:blipFill>
           <a:blip r:embed="rId62"/>
-          <a:srcRect l="0" r="0" t="0" b="0"/>
-          <a:stretch/>
+          <a:stretch>
+            <a:fillRect/>
+          </a:stretch>
         </p:blipFill>
         <p:spPr>
           <a:xfrm>
-            <a:off x="10298495" y="2974848"/>
-            <a:ext cx="1417712" cy="344424"/>
+            <a:off x="10315428" y="2974848"/>
+            <a:ext cx="1383846" cy="344424"/>
           </a:xfrm>
           <a:prstGeom prst="rect">
             <a:avLst/>
@@ -5001,13 +5022,14 @@
         </p:nvPicPr>
         <p:blipFill>
           <a:blip r:embed="rId65"/>
-          <a:srcRect l="0" r="0" t="0" b="0"/>
-          <a:stretch/>
+          <a:stretch>
+            <a:fillRect/>
+          </a:stretch>
         </p:blipFill>
         <p:spPr>
           <a:xfrm>
-            <a:off x="475488" y="3813048"/>
-            <a:ext cx="1417712" cy="344424"/>
+            <a:off x="1012132" y="3813048"/>
+            <a:ext cx="344424" cy="344424"/>
           </a:xfrm>
           <a:prstGeom prst="rect">
             <a:avLst/>
@@ -5072,13 +5094,14 @@
         </p:nvPicPr>
         <p:blipFill>
           <a:blip r:embed="rId68"/>
-          <a:srcRect l="0" r="0" t="0" b="0"/>
-          <a:stretch/>
+          <a:stretch>
+            <a:fillRect/>
+          </a:stretch>
         </p:blipFill>
         <p:spPr>
           <a:xfrm>
-            <a:off x="2112656" y="3813048"/>
-            <a:ext cx="1417712" cy="344424"/>
+            <a:off x="2112656" y="3817292"/>
+            <a:ext cx="1417712" cy="335936"/>
           </a:xfrm>
           <a:prstGeom prst="rect">
             <a:avLst/>
@@ -5143,13 +5166,14 @@
         </p:nvPicPr>
         <p:blipFill>
           <a:blip r:embed="rId71"/>
-          <a:srcRect l="0" r="0" t="0" b="0"/>
-          <a:stretch/>
+          <a:stretch>
+            <a:fillRect/>
+          </a:stretch>
         </p:blipFill>
         <p:spPr>
           <a:xfrm>
-            <a:off x="3749824" y="3813048"/>
-            <a:ext cx="1417712" cy="344424"/>
+            <a:off x="3749824" y="3836400"/>
+            <a:ext cx="1417712" cy="297719"/>
           </a:xfrm>
           <a:prstGeom prst="rect">
             <a:avLst/>
@@ -5214,13 +5238,14 @@
         </p:nvPicPr>
         <p:blipFill>
           <a:blip r:embed="rId74"/>
-          <a:srcRect l="0" r="0" t="0" b="0"/>
-          <a:stretch/>
+          <a:stretch>
+            <a:fillRect/>
+          </a:stretch>
         </p:blipFill>
         <p:spPr>
           <a:xfrm>
-            <a:off x="5386992" y="3813048"/>
-            <a:ext cx="1417712" cy="344424"/>
+            <a:off x="5386992" y="3839487"/>
+            <a:ext cx="1417712" cy="291546"/>
           </a:xfrm>
           <a:prstGeom prst="rect">
             <a:avLst/>
@@ -5285,13 +5310,14 @@
         </p:nvPicPr>
         <p:blipFill>
           <a:blip r:embed="rId77"/>
-          <a:srcRect l="0" r="0" t="0" b="0"/>
-          <a:stretch/>
+          <a:stretch>
+            <a:fillRect/>
+          </a:stretch>
         </p:blipFill>
         <p:spPr>
           <a:xfrm>
-            <a:off x="7024160" y="3813048"/>
-            <a:ext cx="1417712" cy="344424"/>
+            <a:off x="7087220" y="3813048"/>
+            <a:ext cx="1291590" cy="344424"/>
           </a:xfrm>
           <a:prstGeom prst="rect">
             <a:avLst/>
@@ -5356,13 +5382,14 @@
         </p:nvPicPr>
         <p:blipFill>
           <a:blip r:embed="rId80"/>
-          <a:srcRect l="0" r="0" t="0" b="0"/>
-          <a:stretch/>
+          <a:stretch>
+            <a:fillRect/>
+          </a:stretch>
         </p:blipFill>
         <p:spPr>
           <a:xfrm>
-            <a:off x="8661327" y="3813048"/>
-            <a:ext cx="1417712" cy="344424"/>
+            <a:off x="8976843" y="3813048"/>
+            <a:ext cx="786680" cy="344424"/>
           </a:xfrm>
           <a:prstGeom prst="rect">
             <a:avLst/>
@@ -5427,8 +5454,9 @@
         </p:nvPicPr>
         <p:blipFill>
           <a:blip r:embed="rId83"/>
-          <a:srcRect l="0" r="0" t="0" b="0"/>
-          <a:stretch/>
+          <a:stretch>
+            <a:fillRect/>
+          </a:stretch>
         </p:blipFill>
         <p:spPr>
           <a:xfrm>
@@ -5498,13 +5526,14 @@
         </p:nvPicPr>
         <p:blipFill>
           <a:blip r:embed="rId86"/>
-          <a:srcRect l="0" r="0" t="0" b="0"/>
-          <a:stretch/>
+          <a:stretch>
+            <a:fillRect/>
+          </a:stretch>
         </p:blipFill>
         <p:spPr>
           <a:xfrm>
-            <a:off x="475488" y="4651248"/>
-            <a:ext cx="1417712" cy="344424"/>
+            <a:off x="697462" y="4651248"/>
+            <a:ext cx="973764" cy="344424"/>
           </a:xfrm>
           <a:prstGeom prst="rect">
             <a:avLst/>
@@ -5569,13 +5598,14 @@
         </p:nvPicPr>
         <p:blipFill>
           <a:blip r:embed="rId89"/>
-          <a:srcRect l="0" r="0" t="0" b="0"/>
-          <a:stretch/>
+          <a:stretch>
+            <a:fillRect/>
+          </a:stretch>
         </p:blipFill>
         <p:spPr>
           <a:xfrm>
-            <a:off x="2112656" y="4651248"/>
-            <a:ext cx="1417712" cy="344424"/>
+            <a:off x="2390982" y="4651248"/>
+            <a:ext cx="861060" cy="344424"/>
           </a:xfrm>
           <a:prstGeom prst="rect">
             <a:avLst/>
@@ -5640,13 +5670,14 @@
         </p:nvPicPr>
         <p:blipFill>
           <a:blip r:embed="rId92"/>
-          <a:srcRect l="0" r="0" t="0" b="0"/>
-          <a:stretch/>
+          <a:stretch>
+            <a:fillRect/>
+          </a:stretch>
         </p:blipFill>
         <p:spPr>
           <a:xfrm>
-            <a:off x="3749824" y="4651248"/>
-            <a:ext cx="1417712" cy="344424"/>
+            <a:off x="4131518" y="4651248"/>
+            <a:ext cx="654323" cy="344424"/>
           </a:xfrm>
           <a:prstGeom prst="rect">
             <a:avLst/>
@@ -5711,13 +5742,14 @@
         </p:nvPicPr>
         <p:blipFill>
           <a:blip r:embed="rId95"/>
-          <a:srcRect l="0" r="0" t="0" b="0"/>
-          <a:stretch/>
+          <a:stretch>
+            <a:fillRect/>
+          </a:stretch>
         </p:blipFill>
         <p:spPr>
           <a:xfrm>
-            <a:off x="5386992" y="4651248"/>
-            <a:ext cx="1417712" cy="344424"/>
+            <a:off x="5539727" y="4651248"/>
+            <a:ext cx="1112241" cy="344424"/>
           </a:xfrm>
           <a:prstGeom prst="rect">
             <a:avLst/>
@@ -5782,13 +5814,14 @@
         </p:nvPicPr>
         <p:blipFill>
           <a:blip r:embed="rId98"/>
-          <a:srcRect l="0" r="0" t="0" b="0"/>
-          <a:stretch/>
+          <a:stretch>
+            <a:fillRect/>
+          </a:stretch>
         </p:blipFill>
         <p:spPr>
           <a:xfrm>
-            <a:off x="7024160" y="4651248"/>
-            <a:ext cx="1417712" cy="344424"/>
+            <a:off x="7255924" y="4651248"/>
+            <a:ext cx="954182" cy="344424"/>
           </a:xfrm>
           <a:prstGeom prst="rect">
             <a:avLst/>
@@ -5853,13 +5886,14 @@
         </p:nvPicPr>
         <p:blipFill>
           <a:blip r:embed="rId101"/>
-          <a:srcRect l="0" r="0" t="0" b="0"/>
-          <a:stretch/>
+          <a:stretch>
+            <a:fillRect/>
+          </a:stretch>
         </p:blipFill>
         <p:spPr>
           <a:xfrm>
-            <a:off x="8661327" y="4651248"/>
-            <a:ext cx="1417712" cy="344424"/>
+            <a:off x="8814661" y="4651248"/>
+            <a:ext cx="1111045" cy="344424"/>
           </a:xfrm>
           <a:prstGeom prst="rect">
             <a:avLst/>
@@ -5924,13 +5958,14 @@
         </p:nvPicPr>
         <p:blipFill>
           <a:blip r:embed="rId104"/>
-          <a:srcRect l="0" r="0" t="0" b="0"/>
-          <a:stretch/>
+          <a:stretch>
+            <a:fillRect/>
+          </a:stretch>
         </p:blipFill>
         <p:spPr>
           <a:xfrm>
-            <a:off x="10298495" y="4651248"/>
-            <a:ext cx="1417712" cy="344424"/>
+            <a:off x="10457384" y="4651248"/>
+            <a:ext cx="1099935" cy="344424"/>
           </a:xfrm>
           <a:prstGeom prst="rect">
             <a:avLst/>
@@ -5995,13 +6030,14 @@
         </p:nvPicPr>
         <p:blipFill>
           <a:blip r:embed="rId107"/>
-          <a:srcRect l="0" r="0" t="0" b="0"/>
-          <a:stretch/>
+          <a:stretch>
+            <a:fillRect/>
+          </a:stretch>
         </p:blipFill>
         <p:spPr>
           <a:xfrm>
-            <a:off x="475488" y="5489448"/>
-            <a:ext cx="1417712" cy="344424"/>
+            <a:off x="487486" y="5489448"/>
+            <a:ext cx="1393716" cy="344424"/>
           </a:xfrm>
           <a:prstGeom prst="rect">
             <a:avLst/>
@@ -6066,13 +6102,14 @@
         </p:nvPicPr>
         <p:blipFill>
           <a:blip r:embed="rId110"/>
-          <a:srcRect l="0" r="0" t="0" b="0"/>
-          <a:stretch/>
+          <a:stretch>
+            <a:fillRect/>
+          </a:stretch>
         </p:blipFill>
         <p:spPr>
           <a:xfrm>
-            <a:off x="2112656" y="5489448"/>
-            <a:ext cx="1417712" cy="344424"/>
+            <a:off x="2273175" y="5489448"/>
+            <a:ext cx="1096673" cy="344424"/>
           </a:xfrm>
           <a:prstGeom prst="rect">
             <a:avLst/>
@@ -6137,13 +6174,14 @@
         </p:nvPicPr>
         <p:blipFill>
           <a:blip r:embed="rId113"/>
-          <a:srcRect l="0" r="0" t="0" b="0"/>
-          <a:stretch/>
+          <a:stretch>
+            <a:fillRect/>
+          </a:stretch>
         </p:blipFill>
         <p:spPr>
           <a:xfrm>
-            <a:off x="3749824" y="5489448"/>
-            <a:ext cx="1417712" cy="344424"/>
+            <a:off x="3749824" y="5525932"/>
+            <a:ext cx="1417712" cy="271456"/>
           </a:xfrm>
           <a:prstGeom prst="rect">
             <a:avLst/>
@@ -6208,13 +6246,14 @@
         </p:nvPicPr>
         <p:blipFill>
           <a:blip r:embed="rId116"/>
-          <a:srcRect l="0" r="0" t="0" b="0"/>
-          <a:stretch/>
+          <a:stretch>
+            <a:fillRect/>
+          </a:stretch>
         </p:blipFill>
         <p:spPr>
           <a:xfrm>
-            <a:off x="5386992" y="5489448"/>
-            <a:ext cx="1417712" cy="344424"/>
+            <a:off x="5386992" y="5539805"/>
+            <a:ext cx="1417712" cy="243710"/>
           </a:xfrm>
           <a:prstGeom prst="rect">
             <a:avLst/>
@@ -6279,13 +6318,14 @@
         </p:nvPicPr>
         <p:blipFill>
           <a:blip r:embed="rId119"/>
-          <a:srcRect l="0" r="0" t="0" b="0"/>
-          <a:stretch/>
+          <a:stretch>
+            <a:fillRect/>
+          </a:stretch>
         </p:blipFill>
         <p:spPr>
           <a:xfrm>
-            <a:off x="7024160" y="5489448"/>
-            <a:ext cx="1417712" cy="344424"/>
+            <a:off x="7395345" y="5489448"/>
+            <a:ext cx="675341" cy="344424"/>
           </a:xfrm>
           <a:prstGeom prst="rect">
             <a:avLst/>
@@ -6350,13 +6390,14 @@
         </p:nvPicPr>
         <p:blipFill>
           <a:blip r:embed="rId122"/>
-          <a:srcRect l="0" r="0" t="0" b="0"/>
-          <a:stretch/>
+          <a:stretch>
+            <a:fillRect/>
+          </a:stretch>
         </p:blipFill>
         <p:spPr>
           <a:xfrm>
-            <a:off x="8661327" y="5489448"/>
-            <a:ext cx="1417712" cy="344424"/>
+            <a:off x="9051591" y="5489448"/>
+            <a:ext cx="637184" cy="344424"/>
           </a:xfrm>
           <a:prstGeom prst="rect">
             <a:avLst/>
@@ -6421,13 +6462,14 @@
         </p:nvPicPr>
         <p:blipFill>
           <a:blip r:embed="rId125"/>
-          <a:srcRect l="0" r="0" t="0" b="0"/>
-          <a:stretch/>
+          <a:stretch>
+            <a:fillRect/>
+          </a:stretch>
         </p:blipFill>
         <p:spPr>
           <a:xfrm>
-            <a:off x="10298495" y="5489448"/>
-            <a:ext cx="1417712" cy="344424"/>
+            <a:off x="10318503" y="5489448"/>
+            <a:ext cx="1377696" cy="344424"/>
           </a:xfrm>
           <a:prstGeom prst="rect">
             <a:avLst/>

--- a/public/newsletters/2026-06/dlinrt-2026-06-update.pptx
+++ b/public/newsletters/2026-06/dlinrt-2026-06-update.pptx
@@ -241,13 +241,13 @@
                   <c:v>43</c:v>
                 </c:pt>
                 <c:pt idx="8">
-                  <c:v>52</c:v>
+                  <c:v>51</c:v>
                 </c:pt>
                 <c:pt idx="9">
-                  <c:v>69</c:v>
+                  <c:v>68</c:v>
                 </c:pt>
                 <c:pt idx="10">
-                  <c:v>78</c:v>
+                  <c:v>77</c:v>
                 </c:pt>
               </c:numCache>
             </c:numRef>
@@ -822,7 +822,7 @@
                   <c:v>13</c:v>
                 </c:pt>
                 <c:pt idx="3">
-                  <c:v>9</c:v>
+                  <c:v>8</c:v>
                 </c:pt>
                 <c:pt idx="4">
                   <c:v>8</c:v>
@@ -2466,7 +2466,7 @@
                 <a:ea typeface="Calibri" pitchFamily="34" charset="-122"/>
                 <a:cs typeface="Calibri" pitchFamily="34" charset="-120"/>
               </a:rPr>
-              <a:t>Based on declared product release dates · n = 88 products total</a:t>
+              <a:t>Based on declared product release dates · n = 87 products total</a:t>
             </a:r>
             <a:endParaRPr lang="en-US" sz="1400" dirty="0"/>
           </a:p>
@@ -2709,7 +2709,7 @@
                 <a:ea typeface="Calibri" pitchFamily="34" charset="-122"/>
                 <a:cs typeface="Calibri" pitchFamily="34" charset="-120"/>
               </a:rPr>
-              <a:t>n = 88 products · primary category only · click a category to browse</a:t>
+              <a:t>n = 87 products · primary category only · click a category to browse</a:t>
             </a:r>
             <a:endParaRPr lang="en-US" sz="1400" dirty="0"/>
           </a:p>
@@ -2965,7 +2965,7 @@
                 <a:ea typeface="Calibri" pitchFamily="34" charset="-122"/>
                 <a:cs typeface="Calibri" pitchFamily="34" charset="-120"/>
               </a:rPr>
-              <a:t>: 9</a:t>
+              <a:t>: 8</a:t>
             </a:r>
             <a:endParaRPr lang="en-US" sz="1500" dirty="0"/>
           </a:p>
@@ -3492,7 +3492,7 @@
                 <a:ea typeface="Calibri" pitchFamily="34" charset="-122"/>
                 <a:cs typeface="Calibri" pitchFamily="34" charset="-120"/>
               </a:rPr>
-              <a:t>42 active companies · click any logo to open its page</a:t>
+              <a:t>41 active companies · click any logo to open its page</a:t>
             </a:r>
             <a:endParaRPr lang="en-US" sz="1300" dirty="0"/>
           </a:p>
@@ -5372,8 +5372,8 @@
       </p:sp>
       <p:pic>
         <p:nvPicPr>
-          <p:cNvPr id="56" name="Image 26" descr="public/logos/syntheticMRI.png">
-            <a:hlinkClick r:id="rId81" tooltip="SyntheticMR"/>
+          <p:cNvPr id="56" name="Image 26" descr="public/logos/raystation.jpg">
+            <a:hlinkClick r:id="rId81" tooltip="RaySearch Laboratories"/>
           </p:cNvPr>
           <p:cNvPicPr>
             <a:picLocks noChangeAspect="1"/>
@@ -5388,8 +5388,8 @@
         </p:blipFill>
         <p:spPr>
           <a:xfrm>
-            <a:off x="8976843" y="3813048"/>
-            <a:ext cx="786680" cy="344424"/>
+            <a:off x="8661327" y="3813048"/>
+            <a:ext cx="1417712" cy="344424"/>
           </a:xfrm>
           <a:prstGeom prst="rect">
             <a:avLst/>
@@ -5436,7 +5436,7 @@
                   </a:extLst>
                 </a:hlinkClick>
               </a:rPr>
-              <a:t>SyntheticMR</a:t>
+              <a:t>RaySearch Laboratories</a:t>
             </a:r>
             <a:endParaRPr lang="en-US" sz="900" dirty="0"/>
           </a:p>
@@ -5444,8 +5444,8 @@
       </p:sp>
       <p:pic>
         <p:nvPicPr>
-          <p:cNvPr id="58" name="Image 27" descr="public/logos/raystation.jpg">
-            <a:hlinkClick r:id="rId84" tooltip="RaySearch Laboratories"/>
+          <p:cNvPr id="58" name="Image 27" descr="public/logos/airs.jpg">
+            <a:hlinkClick r:id="rId84" tooltip="AIRS Medical"/>
           </p:cNvPr>
           <p:cNvPicPr>
             <a:picLocks noChangeAspect="1"/>
@@ -5460,8 +5460,8 @@
         </p:blipFill>
         <p:spPr>
           <a:xfrm>
-            <a:off x="10298495" y="3813048"/>
-            <a:ext cx="1417712" cy="344424"/>
+            <a:off x="10520469" y="3813048"/>
+            <a:ext cx="973764" cy="344424"/>
           </a:xfrm>
           <a:prstGeom prst="rect">
             <a:avLst/>
@@ -5508,7 +5508,7 @@
                   </a:extLst>
                 </a:hlinkClick>
               </a:rPr>
-              <a:t>RaySearch Laboratories</a:t>
+              <a:t>AIRS Medical</a:t>
             </a:r>
             <a:endParaRPr lang="en-US" sz="900" dirty="0"/>
           </a:p>
@@ -5516,8 +5516,8 @@
       </p:sp>
       <p:pic>
         <p:nvPicPr>
-          <p:cNvPr id="60" name="Image 28" descr="public/logos/airs.jpg">
-            <a:hlinkClick r:id="rId87" tooltip="AIRS Medical"/>
+          <p:cNvPr id="60" name="Image 28" descr="public/logos/claripi.jpg">
+            <a:hlinkClick r:id="rId87" tooltip="ClariPi"/>
           </p:cNvPr>
           <p:cNvPicPr>
             <a:picLocks noChangeAspect="1"/>
@@ -5532,8 +5532,8 @@
         </p:blipFill>
         <p:spPr>
           <a:xfrm>
-            <a:off x="697462" y="4651248"/>
-            <a:ext cx="973764" cy="344424"/>
+            <a:off x="753814" y="4651248"/>
+            <a:ext cx="861060" cy="344424"/>
           </a:xfrm>
           <a:prstGeom prst="rect">
             <a:avLst/>
@@ -5580,7 +5580,7 @@
                   </a:extLst>
                 </a:hlinkClick>
               </a:rPr>
-              <a:t>AIRS Medical</a:t>
+              <a:t>ClariPi</a:t>
             </a:r>
             <a:endParaRPr lang="en-US" sz="900" dirty="0"/>
           </a:p>
@@ -5588,8 +5588,8 @@
       </p:sp>
       <p:pic>
         <p:nvPicPr>
-          <p:cNvPr id="62" name="Image 29" descr="public/logos/claripi.jpg">
-            <a:hlinkClick r:id="rId90" tooltip="ClariPi"/>
+          <p:cNvPr id="62" name="Image 29" descr="public/logos/SubtleMedical.jpg">
+            <a:hlinkClick r:id="rId90" tooltip="Subtle Medical"/>
           </p:cNvPr>
           <p:cNvPicPr>
             <a:picLocks noChangeAspect="1"/>
@@ -5604,8 +5604,8 @@
         </p:blipFill>
         <p:spPr>
           <a:xfrm>
-            <a:off x="2390982" y="4651248"/>
-            <a:ext cx="861060" cy="344424"/>
+            <a:off x="2494350" y="4651248"/>
+            <a:ext cx="654323" cy="344424"/>
           </a:xfrm>
           <a:prstGeom prst="rect">
             <a:avLst/>
@@ -5652,7 +5652,7 @@
                   </a:extLst>
                 </a:hlinkClick>
               </a:rPr>
-              <a:t>ClariPi</a:t>
+              <a:t>Subtle Medical</a:t>
             </a:r>
             <a:endParaRPr lang="en-US" sz="900" dirty="0"/>
           </a:p>
@@ -5660,8 +5660,8 @@
       </p:sp>
       <p:pic>
         <p:nvPicPr>
-          <p:cNvPr id="64" name="Image 30" descr="public/logos/SubtleMedical.jpg">
-            <a:hlinkClick r:id="rId93" tooltip="Subtle Medical"/>
+          <p:cNvPr id="64" name="Image 30" descr="public/logos/ptw.jpg">
+            <a:hlinkClick r:id="rId93" tooltip="PTW"/>
           </p:cNvPr>
           <p:cNvPicPr>
             <a:picLocks noChangeAspect="1"/>
@@ -5676,8 +5676,8 @@
         </p:blipFill>
         <p:spPr>
           <a:xfrm>
-            <a:off x="4131518" y="4651248"/>
-            <a:ext cx="654323" cy="344424"/>
+            <a:off x="3902559" y="4651248"/>
+            <a:ext cx="1112241" cy="344424"/>
           </a:xfrm>
           <a:prstGeom prst="rect">
             <a:avLst/>
@@ -5724,7 +5724,7 @@
                   </a:extLst>
                 </a:hlinkClick>
               </a:rPr>
-              <a:t>Subtle Medical</a:t>
+              <a:t>PTW</a:t>
             </a:r>
             <a:endParaRPr lang="en-US" sz="900" dirty="0"/>
           </a:p>
@@ -5732,8 +5732,8 @@
       </p:sp>
       <p:pic>
         <p:nvPicPr>
-          <p:cNvPr id="66" name="Image 31" descr="public/logos/ptw.jpg">
-            <a:hlinkClick r:id="rId96" tooltip="PTW"/>
+          <p:cNvPr id="66" name="Image 31" descr="public/logos/pymedix.png">
+            <a:hlinkClick r:id="rId96" tooltip="PyMedix"/>
           </p:cNvPr>
           <p:cNvPicPr>
             <a:picLocks noChangeAspect="1"/>
@@ -5748,8 +5748,8 @@
         </p:blipFill>
         <p:spPr>
           <a:xfrm>
-            <a:off x="5539727" y="4651248"/>
-            <a:ext cx="1112241" cy="344424"/>
+            <a:off x="5618757" y="4651248"/>
+            <a:ext cx="954182" cy="344424"/>
           </a:xfrm>
           <a:prstGeom prst="rect">
             <a:avLst/>
@@ -5796,7 +5796,7 @@
                   </a:extLst>
                 </a:hlinkClick>
               </a:rPr>
-              <a:t>PTW</a:t>
+              <a:t>PyMedix</a:t>
             </a:r>
             <a:endParaRPr lang="en-US" sz="900" dirty="0"/>
           </a:p>
@@ -5804,8 +5804,8 @@
       </p:sp>
       <p:pic>
         <p:nvPicPr>
-          <p:cNvPr id="68" name="Image 32" descr="public/logos/pymedix.png">
-            <a:hlinkClick r:id="rId99" tooltip="PyMedix"/>
+          <p:cNvPr id="68" name="Image 32" descr="public/logos/medlever.jpg">
+            <a:hlinkClick r:id="rId99" tooltip="MedLever, Inc."/>
           </p:cNvPr>
           <p:cNvPicPr>
             <a:picLocks noChangeAspect="1"/>
@@ -5820,8 +5820,8 @@
         </p:blipFill>
         <p:spPr>
           <a:xfrm>
-            <a:off x="7255924" y="4651248"/>
-            <a:ext cx="954182" cy="344424"/>
+            <a:off x="7177493" y="4651248"/>
+            <a:ext cx="1111045" cy="344424"/>
           </a:xfrm>
           <a:prstGeom prst="rect">
             <a:avLst/>
@@ -5868,7 +5868,7 @@
                   </a:extLst>
                 </a:hlinkClick>
               </a:rPr>
-              <a:t>PyMedix</a:t>
+              <a:t>MedLever, Inc.</a:t>
             </a:r>
             <a:endParaRPr lang="en-US" sz="900" dirty="0"/>
           </a:p>
@@ -5876,8 +5876,8 @@
       </p:sp>
       <p:pic>
         <p:nvPicPr>
-          <p:cNvPr id="70" name="Image 33" descr="public/logos/medlever.jpg">
-            <a:hlinkClick r:id="rId102" tooltip="MedLever, Inc."/>
+          <p:cNvPr id="70" name="Image 33" descr="public/logos/medmind.png">
+            <a:hlinkClick r:id="rId102" tooltip="MedMind Technology Co., Ltd."/>
           </p:cNvPr>
           <p:cNvPicPr>
             <a:picLocks noChangeAspect="1"/>
@@ -5892,8 +5892,8 @@
         </p:blipFill>
         <p:spPr>
           <a:xfrm>
-            <a:off x="8814661" y="4651248"/>
-            <a:ext cx="1111045" cy="344424"/>
+            <a:off x="8820216" y="4651248"/>
+            <a:ext cx="1099935" cy="344424"/>
           </a:xfrm>
           <a:prstGeom prst="rect">
             <a:avLst/>
@@ -5940,7 +5940,7 @@
                   </a:extLst>
                 </a:hlinkClick>
               </a:rPr>
-              <a:t>MedLever, Inc.</a:t>
+              <a:t>MedMind Technology Co., Ltd.</a:t>
             </a:r>
             <a:endParaRPr lang="en-US" sz="900" dirty="0"/>
           </a:p>
@@ -5948,8 +5948,8 @@
       </p:sp>
       <p:pic>
         <p:nvPicPr>
-          <p:cNvPr id="72" name="Image 34" descr="public/logos/medmind.png">
-            <a:hlinkClick r:id="rId105" tooltip="MedMind Technology Co., Ltd."/>
+          <p:cNvPr id="72" name="Image 34" descr="public/logos/quanta-computer.png">
+            <a:hlinkClick r:id="rId105" tooltip="Quanta Computer Inc."/>
           </p:cNvPr>
           <p:cNvPicPr>
             <a:picLocks noChangeAspect="1"/>
@@ -5964,8 +5964,8 @@
         </p:blipFill>
         <p:spPr>
           <a:xfrm>
-            <a:off x="10457384" y="4651248"/>
-            <a:ext cx="1099935" cy="344424"/>
+            <a:off x="10310493" y="4651248"/>
+            <a:ext cx="1393716" cy="344424"/>
           </a:xfrm>
           <a:prstGeom prst="rect">
             <a:avLst/>
@@ -6012,7 +6012,7 @@
                   </a:extLst>
                 </a:hlinkClick>
               </a:rPr>
-              <a:t>MedMind Technology Co., Ltd.</a:t>
+              <a:t>Quanta Computer Inc.</a:t>
             </a:r>
             <a:endParaRPr lang="en-US" sz="900" dirty="0"/>
           </a:p>
@@ -6020,8 +6020,8 @@
       </p:sp>
       <p:pic>
         <p:nvPicPr>
-          <p:cNvPr id="74" name="Image 35" descr="public/logos/quanta-computer.png">
-            <a:hlinkClick r:id="rId108" tooltip="Quanta Computer Inc."/>
+          <p:cNvPr id="74" name="Image 35" descr="public/logos/Elekta.png">
+            <a:hlinkClick r:id="rId108" tooltip="Elekta"/>
           </p:cNvPr>
           <p:cNvPicPr>
             <a:picLocks noChangeAspect="1"/>
@@ -6036,8 +6036,8 @@
         </p:blipFill>
         <p:spPr>
           <a:xfrm>
-            <a:off x="487486" y="5489448"/>
-            <a:ext cx="1393716" cy="344424"/>
+            <a:off x="636007" y="5489448"/>
+            <a:ext cx="1096673" cy="344424"/>
           </a:xfrm>
           <a:prstGeom prst="rect">
             <a:avLst/>
@@ -6084,7 +6084,7 @@
                   </a:extLst>
                 </a:hlinkClick>
               </a:rPr>
-              <a:t>Quanta Computer Inc.</a:t>
+              <a:t>Elekta</a:t>
             </a:r>
             <a:endParaRPr lang="en-US" sz="900" dirty="0"/>
           </a:p>
@@ -6092,8 +6092,8 @@
       </p:sp>
       <p:pic>
         <p:nvPicPr>
-          <p:cNvPr id="76" name="Image 36" descr="public/logos/Elekta.png">
-            <a:hlinkClick r:id="rId111" tooltip="Elekta"/>
+          <p:cNvPr id="76" name="Image 36" descr="public/logos/accuray.png">
+            <a:hlinkClick r:id="rId111" tooltip="Accuray®"/>
           </p:cNvPr>
           <p:cNvPicPr>
             <a:picLocks noChangeAspect="1"/>
@@ -6108,8 +6108,8 @@
         </p:blipFill>
         <p:spPr>
           <a:xfrm>
-            <a:off x="2273175" y="5489448"/>
-            <a:ext cx="1096673" cy="344424"/>
+            <a:off x="2112656" y="5525932"/>
+            <a:ext cx="1417712" cy="271456"/>
           </a:xfrm>
           <a:prstGeom prst="rect">
             <a:avLst/>
@@ -6156,7 +6156,7 @@
                   </a:extLst>
                 </a:hlinkClick>
               </a:rPr>
-              <a:t>Elekta</a:t>
+              <a:t>Accuray®</a:t>
             </a:r>
             <a:endParaRPr lang="en-US" sz="900" dirty="0"/>
           </a:p>
@@ -6164,8 +6164,8 @@
       </p:sp>
       <p:pic>
         <p:nvPicPr>
-          <p:cNvPr id="78" name="Image 37" descr="public/logos/accuray.png">
-            <a:hlinkClick r:id="rId114" tooltip="Accuray®"/>
+          <p:cNvPr id="78" name="Image 37" descr="public/logos/SunNuclear.png">
+            <a:hlinkClick r:id="rId114" tooltip="Sun Nuclear (Mirion Medical)"/>
           </p:cNvPr>
           <p:cNvPicPr>
             <a:picLocks noChangeAspect="1"/>
@@ -6180,8 +6180,8 @@
         </p:blipFill>
         <p:spPr>
           <a:xfrm>
-            <a:off x="3749824" y="5525932"/>
-            <a:ext cx="1417712" cy="271456"/>
+            <a:off x="3749824" y="5539805"/>
+            <a:ext cx="1417712" cy="243710"/>
           </a:xfrm>
           <a:prstGeom prst="rect">
             <a:avLst/>
@@ -6228,7 +6228,7 @@
                   </a:extLst>
                 </a:hlinkClick>
               </a:rPr>
-              <a:t>Accuray®</a:t>
+              <a:t>Sun Nuclear (Mirion Medical)</a:t>
             </a:r>
             <a:endParaRPr lang="en-US" sz="900" dirty="0"/>
           </a:p>
@@ -6236,8 +6236,8 @@
       </p:sp>
       <p:pic>
         <p:nvPicPr>
-          <p:cNvPr id="80" name="Image 38" descr="public/logos/SunNuclear.png">
-            <a:hlinkClick r:id="rId117" tooltip="Sun Nuclear (Mirion Medical)"/>
+          <p:cNvPr id="80" name="Image 38" descr="public/newsletters/2026-06/_logo-cache/md_anderson.png">
+            <a:hlinkClick r:id="rId117" tooltip="MD Anderson Cancer Center"/>
           </p:cNvPr>
           <p:cNvPicPr>
             <a:picLocks noChangeAspect="1"/>
@@ -6252,8 +6252,8 @@
         </p:blipFill>
         <p:spPr>
           <a:xfrm>
-            <a:off x="5386992" y="5539805"/>
-            <a:ext cx="1417712" cy="243710"/>
+            <a:off x="5758177" y="5489448"/>
+            <a:ext cx="675341" cy="344424"/>
           </a:xfrm>
           <a:prstGeom prst="rect">
             <a:avLst/>
@@ -6300,7 +6300,7 @@
                   </a:extLst>
                 </a:hlinkClick>
               </a:rPr>
-              <a:t>Sun Nuclear (Mirion Medical)</a:t>
+              <a:t>MD Anderson Cancer Center</a:t>
             </a:r>
             <a:endParaRPr lang="en-US" sz="900" dirty="0"/>
           </a:p>
@@ -6308,8 +6308,8 @@
       </p:sp>
       <p:pic>
         <p:nvPicPr>
-          <p:cNvPr id="82" name="Image 39" descr="public/newsletters/2026-06/_logo-cache/md_anderson.png">
-            <a:hlinkClick r:id="rId120" tooltip="MD Anderson Cancer Center"/>
+          <p:cNvPr id="82" name="Image 39" descr="public/logos/Brainlab.jpg">
+            <a:hlinkClick r:id="rId120" tooltip="Brainlab"/>
           </p:cNvPr>
           <p:cNvPicPr>
             <a:picLocks noChangeAspect="1"/>
@@ -6324,8 +6324,8 @@
         </p:blipFill>
         <p:spPr>
           <a:xfrm>
-            <a:off x="7395345" y="5489448"/>
-            <a:ext cx="675341" cy="344424"/>
+            <a:off x="7414423" y="5489448"/>
+            <a:ext cx="637184" cy="344424"/>
           </a:xfrm>
           <a:prstGeom prst="rect">
             <a:avLst/>
@@ -6372,7 +6372,7 @@
                   </a:extLst>
                 </a:hlinkClick>
               </a:rPr>
-              <a:t>MD Anderson Cancer Center</a:t>
+              <a:t>Brainlab</a:t>
             </a:r>
             <a:endParaRPr lang="en-US" sz="900" dirty="0"/>
           </a:p>
@@ -6380,8 +6380,8 @@
       </p:sp>
       <p:pic>
         <p:nvPicPr>
-          <p:cNvPr id="84" name="Image 40" descr="public/logos/Brainlab.jpg">
-            <a:hlinkClick r:id="rId123" tooltip="Brainlab"/>
+          <p:cNvPr id="84" name="Image 40" descr="public/logos/varian.jpg">
+            <a:hlinkClick r:id="rId123" tooltip="Varian (Siemens Healthineers)"/>
           </p:cNvPr>
           <p:cNvPicPr>
             <a:picLocks noChangeAspect="1"/>
@@ -6396,8 +6396,8 @@
         </p:blipFill>
         <p:spPr>
           <a:xfrm>
-            <a:off x="9051591" y="5489448"/>
-            <a:ext cx="637184" cy="344424"/>
+            <a:off x="8681335" y="5489448"/>
+            <a:ext cx="1377696" cy="344424"/>
           </a:xfrm>
           <a:prstGeom prst="rect">
             <a:avLst/>
@@ -6444,7 +6444,7 @@
                   </a:extLst>
                 </a:hlinkClick>
               </a:rPr>
-              <a:t>Brainlab</a:t>
+              <a:t>Varian (Siemens Healthineers)</a:t>
             </a:r>
             <a:endParaRPr lang="en-US" sz="900" dirty="0"/>
           </a:p>
@@ -6452,8 +6452,8 @@
       </p:sp>
       <p:pic>
         <p:nvPicPr>
-          <p:cNvPr id="86" name="Image 41" descr="public/logos/varian.jpg">
-            <a:hlinkClick r:id="rId126" tooltip="Varian (Siemens Healthineers)"/>
+          <p:cNvPr id="86" name="Image 41" descr="public/newsletters/2026-06/_assets/dlinrt-logo.png">
+            <a:hlinkClick r:id="rId126" tooltip="dlinrt.eu"/>
           </p:cNvPr>
           <p:cNvPicPr>
             <a:picLocks noChangeAspect="1"/>
@@ -6462,14 +6462,13 @@
         </p:nvPicPr>
         <p:blipFill>
           <a:blip r:embed="rId125"/>
-          <a:stretch>
-            <a:fillRect/>
-          </a:stretch>
+          <a:srcRect l="0" r="0" t="0" b="0"/>
+          <a:stretch/>
         </p:blipFill>
         <p:spPr>
           <a:xfrm>
-            <a:off x="10318503" y="5489448"/>
-            <a:ext cx="1377696" cy="344424"/>
+            <a:off x="274320" y="6519672"/>
+            <a:ext cx="885871" cy="256032"/>
           </a:xfrm>
           <a:prstGeom prst="rect">
             <a:avLst/>
@@ -6484,8 +6483,8 @@
         </p:nvSpPr>
         <p:spPr>
           <a:xfrm>
-            <a:off x="10298495" y="5833872"/>
-            <a:ext cx="1417712" cy="256032"/>
+            <a:off x="2743200" y="6510528"/>
+            <a:ext cx="6705295" cy="274320"/>
           </a:xfrm>
           <a:prstGeom prst="rect">
             <a:avLst/>
@@ -6501,9 +6500,23 @@
               <a:buNone/>
             </a:pPr>
             <a:r>
-              <a:rPr lang="en-US" sz="900" u="sng" dirty="0">
-                <a:solidFill>
-                  <a:srgbClr val="1A1A2E"/>
+              <a:rPr lang="en-US" sz="1100" dirty="0">
+                <a:solidFill>
+                  <a:srgbClr val="6B7280"/>
+                </a:solidFill>
+                <a:latin typeface="Calibri" pitchFamily="34" charset="0"/>
+                <a:ea typeface="Calibri" pitchFamily="34" charset="-122"/>
+                <a:cs typeface="Calibri" pitchFamily="34" charset="-120"/>
+              </a:rPr>
+              <a:t>2026-06-16  ·  </a:t>
+            </a:r>
+            <a:pPr algn="ctr" indent="0" marL="0">
+              <a:buNone/>
+            </a:pPr>
+            <a:r>
+              <a:rPr lang="en-US" sz="1100" u="sng" dirty="0">
+                <a:solidFill>
+                  <a:srgbClr val="5090D0"/>
                 </a:solidFill>
                 <a:latin typeface="Calibri" pitchFamily="34" charset="0"/>
                 <a:ea typeface="Calibri" pitchFamily="34" charset="-122"/>
@@ -6516,16 +6529,16 @@
                   </a:extLst>
                 </a:hlinkClick>
               </a:rPr>
-              <a:t>Varian (Siemens Healthineers)</a:t>
-            </a:r>
-            <a:endParaRPr lang="en-US" sz="900" dirty="0"/>
+              <a:t>CC BY 4.0</a:t>
+            </a:r>
+            <a:endParaRPr lang="en-US" sz="1100" dirty="0"/>
           </a:p>
         </p:txBody>
       </p:sp>
       <p:pic>
         <p:nvPicPr>
-          <p:cNvPr id="88" name="Image 42" descr="public/newsletters/2026-06/_assets/dlinrt-logo.png">
-            <a:hlinkClick r:id="rId129" tooltip="dlinrt.eu"/>
+          <p:cNvPr id="88" name="Image 42" descr="public/newsletters/2026-06/_assets/linkedin.png">
+            <a:hlinkClick r:id="rId129" tooltip="DLinRT on LinkedIn"/>
           </p:cNvPr>
           <p:cNvPicPr>
             <a:picLocks noChangeAspect="1"/>
@@ -6534,91 +6547,6 @@
         </p:nvPicPr>
         <p:blipFill>
           <a:blip r:embed="rId128"/>
-          <a:srcRect l="0" r="0" t="0" b="0"/>
-          <a:stretch/>
-        </p:blipFill>
-        <p:spPr>
-          <a:xfrm>
-            <a:off x="274320" y="6519672"/>
-            <a:ext cx="885871" cy="256032"/>
-          </a:xfrm>
-          <a:prstGeom prst="rect">
-            <a:avLst/>
-          </a:prstGeom>
-        </p:spPr>
-      </p:pic>
-      <p:sp>
-        <p:nvSpPr>
-          <p:cNvPr id="89" name="Text 44"/>
-          <p:cNvSpPr/>
-          <p:nvPr/>
-        </p:nvSpPr>
-        <p:spPr>
-          <a:xfrm>
-            <a:off x="2743200" y="6510528"/>
-            <a:ext cx="6705295" cy="274320"/>
-          </a:xfrm>
-          <a:prstGeom prst="rect">
-            <a:avLst/>
-          </a:prstGeom>
-          <a:noFill/>
-          <a:ln/>
-        </p:spPr>
-        <p:txBody>
-          <a:bodyPr wrap="square" rtlCol="0" anchor="ctr"/>
-          <a:lstStyle/>
-          <a:p>
-            <a:pPr algn="ctr" indent="0" marL="0">
-              <a:buNone/>
-            </a:pPr>
-            <a:r>
-              <a:rPr lang="en-US" sz="1100" dirty="0">
-                <a:solidFill>
-                  <a:srgbClr val="6B7280"/>
-                </a:solidFill>
-                <a:latin typeface="Calibri" pitchFamily="34" charset="0"/>
-                <a:ea typeface="Calibri" pitchFamily="34" charset="-122"/>
-                <a:cs typeface="Calibri" pitchFamily="34" charset="-120"/>
-              </a:rPr>
-              <a:t>2026-06-16  ·  </a:t>
-            </a:r>
-            <a:pPr algn="ctr" indent="0" marL="0">
-              <a:buNone/>
-            </a:pPr>
-            <a:r>
-              <a:rPr lang="en-US" sz="1100" u="sng" dirty="0">
-                <a:solidFill>
-                  <a:srgbClr val="5090D0"/>
-                </a:solidFill>
-                <a:latin typeface="Calibri" pitchFamily="34" charset="0"/>
-                <a:ea typeface="Calibri" pitchFamily="34" charset="-122"/>
-                <a:cs typeface="Calibri" pitchFamily="34" charset="-120"/>
-                <a:hlinkClick r:id="rId130" invalidUrl="" action="" tgtFrame="" tooltip="" history="1" highlightClick="0" endSnd="0">
-                  <a:extLst>
-                    <a:ext uri="{A12FA001-AC4F-418D-AE19-62706E023703}">
-                      <ahyp:hlinkClr xmlns:ahyp="http://schemas.microsoft.com/office/drawing/2018/hyperlinkcolor" val="tx"/>
-                    </a:ext>
-                  </a:extLst>
-                </a:hlinkClick>
-              </a:rPr>
-              <a:t>CC BY 4.0</a:t>
-            </a:r>
-            <a:endParaRPr lang="en-US" sz="1100" dirty="0"/>
-          </a:p>
-        </p:txBody>
-      </p:sp>
-      <p:pic>
-        <p:nvPicPr>
-          <p:cNvPr id="90" name="Image 43" descr="public/newsletters/2026-06/_assets/linkedin.png">
-            <a:hlinkClick r:id="rId132" tooltip="DLinRT on LinkedIn"/>
-          </p:cNvPr>
-          <p:cNvPicPr>
-            <a:picLocks noChangeAspect="1"/>
-          </p:cNvPicPr>
-          <p:nvPr/>
-        </p:nvPicPr>
-        <p:blipFill>
-          <a:blip r:embed="rId131"/>
           <a:srcRect l="0" r="0" t="0" b="0"/>
           <a:stretch/>
         </p:blipFill>

--- a/public/newsletters/2026-06/dlinrt-2026-06-update.pptx
+++ b/public/newsletters/2026-06/dlinrt-2026-06-update.pptx
@@ -226,7 +226,7 @@
                   <c:v>6</c:v>
                 </c:pt>
                 <c:pt idx="3">
-                  <c:v>10</c:v>
+                  <c:v>11</c:v>
                 </c:pt>
                 <c:pt idx="4">
                   <c:v>14</c:v>
@@ -235,7 +235,7 @@
                   <c:v>21</c:v>
                 </c:pt>
                 <c:pt idx="6">
-                  <c:v>31</c:v>
+                  <c:v>30</c:v>
                 </c:pt>
                 <c:pt idx="7">
                   <c:v>43</c:v>
@@ -244,10 +244,10 @@
                   <c:v>51</c:v>
                 </c:pt>
                 <c:pt idx="9">
-                  <c:v>68</c:v>
+                  <c:v>67</c:v>
                 </c:pt>
                 <c:pt idx="10">
-                  <c:v>77</c:v>
+                  <c:v>76</c:v>
                 </c:pt>
               </c:numCache>
             </c:numRef>
@@ -519,6 +519,16 @@
             <c:spPr>
               <a:solidFill>
                 <a:srgbClr val="EC4899"/>
+              </a:solidFill>
+              <a:effectLst/>
+            </c:spPr>
+          </c:dPt>
+          <c:dPt>
+            <c:idx val="9"/>
+            <c:bubble3D val="0"/>
+            <c:spPr>
+              <a:solidFill>
+                <a:srgbClr val="64748B"/>
               </a:solidFill>
               <a:effectLst/>
             </c:spPr>
@@ -749,6 +759,31 @@
               <c:showPercent val="1"/>
               <c:showBubbleSize val="0"/>
             </c:dLbl>
+            <c:dLbl>
+              <c:idx val="9"/>
+              <c:numFmt formatCode="0%" sourceLinked="0"/>
+              <c:spPr/>
+              <c:txPr>
+                <a:bodyPr/>
+                <a:lstStyle/>
+                <a:p>
+                  <a:pPr>
+                    <a:defRPr sz="1200" b="1" i="0" u="none" strike="noStrike">
+                      <a:solidFill>
+                        <a:srgbClr val="FFFFFF"/>
+                      </a:solidFill>
+                      <a:latin typeface="Arial"/>
+                    </a:defRPr>
+                  </a:pPr>
+                </a:p>
+              </c:txPr>
+              <c:showLegendKey val="0"/>
+              <c:showVal val="0"/>
+              <c:showCatName val="0"/>
+              <c:showSerName val="0"/>
+              <c:showPercent val="1"/>
+              <c:showBubbleSize val="0"/>
+            </c:dLbl>
             <c:numFmt formatCode="0%" sourceLinked="0"/>
             <c:txPr>
               <a:bodyPr/>
@@ -774,17 +809,17 @@
           </c:dLbls>
           <c:cat>
             <c:strRef>
-              <c:f>Sheet1!$A$2:$A$10</c:f>
+              <c:f>Sheet1!$A$2:$A$11</c:f>
               <c:strCache>
-                <c:ptCount val="9"/>
+                <c:ptCount val="10"/>
                 <c:pt idx="0">
                   <c:v>Auto-Contouring</c:v>
                 </c:pt>
                 <c:pt idx="1">
-                  <c:v>Image Enhancement</c:v>
+                  <c:v>Reconstruction</c:v>
                 </c:pt>
                 <c:pt idx="2">
-                  <c:v>Reconstruction</c:v>
+                  <c:v>Image Enhancement</c:v>
                 </c:pt>
                 <c:pt idx="3">
                   <c:v>Image Synthesis</c:v>
@@ -804,22 +839,25 @@
                 <c:pt idx="8">
                   <c:v>Tracking</c:v>
                 </c:pt>
+                <c:pt idx="9">
+                  <c:v>Positioning</c:v>
+                </c:pt>
               </c:strCache>
             </c:strRef>
           </c:cat>
           <c:val>
             <c:numRef>
-              <c:f>Sheet1!$B$2:$B$10</c:f>
+              <c:f>Sheet1!$B$2:$B$11</c:f>
               <c:numCache>
-                <c:ptCount val="9"/>
+                <c:ptCount val="10"/>
                 <c:pt idx="0">
                   <c:v>33</c:v>
                 </c:pt>
                 <c:pt idx="1">
-                  <c:v>14</c:v>
+                  <c:v>15</c:v>
                 </c:pt>
                 <c:pt idx="2">
-                  <c:v>13</c:v>
+                  <c:v>11</c:v>
                 </c:pt>
                 <c:pt idx="3">
                   <c:v>8</c:v>
@@ -837,6 +875,9 @@
                   <c:v>2</c:v>
                 </c:pt>
                 <c:pt idx="8">
+                  <c:v>1</c:v>
+                </c:pt>
+                <c:pt idx="9">
                   <c:v>1</c:v>
                 </c:pt>
               </c:numCache>
@@ -2239,7 +2280,7 @@
                 <a:ea typeface="Calibri" pitchFamily="34" charset="-122"/>
                 <a:cs typeface="Calibri" pitchFamily="34" charset="-120"/>
               </a:rPr>
-              <a:t>June 2026 update — refreshed catalogue, new evidence system, first certified company, new reviewer, MAIRT @ MICCAI.</a:t>
+              <a:t>June 2026 update — refreshed catalog, new evidence system, first certified company, new reviewer, MIART @ MICCAI.</a:t>
             </a:r>
             <a:endParaRPr lang="en-US" sz="2200" dirty="0"/>
           </a:p>
@@ -2247,7 +2288,7 @@
       </p:sp>
       <p:pic>
         <p:nvPicPr>
-          <p:cNvPr id="6" name="Image 0" descr="public/newsletters/2026-06/_assets/dlinrt-logo.png">
+          <p:cNvPr id="6" name="Image 0" descr="public\newsletters\2026-06\_assets\dlinrt-logo.png">
             <a:hlinkClick r:id="rId3" tooltip="dlinrt.eu"/>
           </p:cNvPr>
           <p:cNvPicPr>
@@ -2303,7 +2344,7 @@
                 <a:ea typeface="Calibri" pitchFamily="34" charset="-122"/>
                 <a:cs typeface="Calibri" pitchFamily="34" charset="-120"/>
               </a:rPr>
-              <a:t>2026-06-16  ·  </a:t>
+              <a:t>2026-06-18  ·  </a:t>
             </a:r>
             <a:pPr algn="ctr" indent="0" marL="0">
               <a:buNone/>
@@ -2332,7 +2373,7 @@
       </p:sp>
       <p:pic>
         <p:nvPicPr>
-          <p:cNvPr id="8" name="Image 1" descr="public/newsletters/2026-06/_assets/linkedin.png">
+          <p:cNvPr id="8" name="Image 1" descr="public\newsletters\2026-06\_assets\linkedin.png">
             <a:hlinkClick r:id="rId6" tooltip="DLinRT on LinkedIn"/>
           </p:cNvPr>
           <p:cNvPicPr>
@@ -2427,7 +2468,7 @@
                   </a:extLst>
                 </a:hlinkClick>
               </a:rPr>
-              <a:t>Cumulative products in the catalogue</a:t>
+              <a:t>Cumulative products in the catalog</a:t>
             </a:r>
             <a:endParaRPr lang="en-US" sz="3000" dirty="0"/>
           </a:p>
@@ -2466,7 +2507,7 @@
                 <a:ea typeface="Calibri" pitchFamily="34" charset="-122"/>
                 <a:cs typeface="Calibri" pitchFamily="34" charset="-120"/>
               </a:rPr>
-              <a:t>Based on declared product release dates · n = 87 products total</a:t>
+              <a:t>Based on declared product release dates · n = 87 products (78 active + 9 pipeline)</a:t>
             </a:r>
             <a:endParaRPr lang="en-US" sz="1400" dirty="0"/>
           </a:p>
@@ -2490,7 +2531,7 @@
       </p:graphicFrame>
       <p:pic>
         <p:nvPicPr>
-          <p:cNvPr id="5" name="Image 0" descr="public/newsletters/2026-06/_assets/dlinrt-logo.png">
+          <p:cNvPr id="5" name="Image 0" descr="public\newsletters\2026-06\_assets\dlinrt-logo.png">
             <a:hlinkClick r:id="rId4" tooltip="dlinrt.eu"/>
           </p:cNvPr>
           <p:cNvPicPr>
@@ -2546,7 +2587,7 @@
                 <a:ea typeface="Calibri" pitchFamily="34" charset="-122"/>
                 <a:cs typeface="Calibri" pitchFamily="34" charset="-120"/>
               </a:rPr>
-              <a:t>2026-06-16  ·  </a:t>
+              <a:t>2026-06-18  ·  </a:t>
             </a:r>
             <a:pPr algn="ctr" indent="0" marL="0">
               <a:buNone/>
@@ -2575,7 +2616,7 @@
       </p:sp>
       <p:pic>
         <p:nvPicPr>
-          <p:cNvPr id="7" name="Image 1" descr="public/newsletters/2026-06/_assets/linkedin.png">
+          <p:cNvPr id="7" name="Image 1" descr="public\newsletters\2026-06\_assets\linkedin.png">
             <a:hlinkClick r:id="rId7" tooltip="DLinRT on LinkedIn"/>
           </p:cNvPr>
           <p:cNvPicPr>
@@ -2709,7 +2750,7 @@
                 <a:ea typeface="Calibri" pitchFamily="34" charset="-122"/>
                 <a:cs typeface="Calibri" pitchFamily="34" charset="-120"/>
               </a:rPr>
-              <a:t>n = 87 products · primary category only · click a category to browse</a:t>
+              <a:t>n = 87 products (78 active + 9 pipeline) · primary category only · click a category to browse</a:t>
             </a:r>
             <a:endParaRPr lang="en-US" sz="1400" dirty="0"/>
           </a:p>
@@ -2831,7 +2872,7 @@
                   </a:extLst>
                 </a:hlinkClick>
               </a:rPr>
-              <a:t>Image Enhancement</a:t>
+              <a:t>Reconstruction</a:t>
             </a:r>
             <a:pPr indent="0" marL="0">
               <a:buNone/>
@@ -2845,7 +2886,7 @@
                 <a:ea typeface="Calibri" pitchFamily="34" charset="-122"/>
                 <a:cs typeface="Calibri" pitchFamily="34" charset="-120"/>
               </a:rPr>
-              <a:t>: 14</a:t>
+              <a:t>: 15</a:t>
             </a:r>
             <a:endParaRPr lang="en-US" sz="1500" dirty="0"/>
           </a:p>
@@ -2891,7 +2932,7 @@
                   </a:extLst>
                 </a:hlinkClick>
               </a:rPr>
-              <a:t>Reconstruction</a:t>
+              <a:t>Image Enhancement</a:t>
             </a:r>
             <a:pPr indent="0" marL="0">
               <a:buNone/>
@@ -2905,7 +2946,7 @@
                 <a:ea typeface="Calibri" pitchFamily="34" charset="-122"/>
                 <a:cs typeface="Calibri" pitchFamily="34" charset="-120"/>
               </a:rPr>
-              <a:t>: 13</a:t>
+              <a:t>: 11</a:t>
             </a:r>
             <a:endParaRPr lang="en-US" sz="1500" dirty="0"/>
           </a:p>
@@ -3271,78 +3312,39 @@
           </a:p>
         </p:txBody>
       </p:sp>
-      <p:pic>
-        <p:nvPicPr>
-          <p:cNvPr id="14" name="Image 0" descr="public/newsletters/2026-06/_assets/dlinrt-logo.png">
-            <a:hlinkClick r:id="rId13" tooltip="dlinrt.eu"/>
-          </p:cNvPr>
-          <p:cNvPicPr>
-            <a:picLocks noChangeAspect="1"/>
-          </p:cNvPicPr>
-          <p:nvPr/>
-        </p:nvPicPr>
-        <p:blipFill>
-          <a:blip r:embed="rId12"/>
-          <a:srcRect l="0" r="0" t="0" b="0"/>
-          <a:stretch/>
-        </p:blipFill>
-        <p:spPr>
-          <a:xfrm>
-            <a:off x="274320" y="6519672"/>
-            <a:ext cx="885871" cy="256032"/>
-          </a:xfrm>
-          <a:prstGeom prst="rect">
-            <a:avLst/>
-          </a:prstGeom>
-        </p:spPr>
-      </p:pic>
-      <p:sp>
-        <p:nvSpPr>
-          <p:cNvPr id="15" name="Text 11"/>
-          <p:cNvSpPr/>
-          <p:nvPr/>
-        </p:nvSpPr>
-        <p:spPr>
-          <a:xfrm>
-            <a:off x="2743200" y="6510528"/>
-            <a:ext cx="6705295" cy="274320"/>
-          </a:xfrm>
-          <a:prstGeom prst="rect">
-            <a:avLst/>
-          </a:prstGeom>
-          <a:noFill/>
-          <a:ln/>
-        </p:spPr>
-        <p:txBody>
-          <a:bodyPr wrap="square" rtlCol="0" anchor="ctr"/>
-          <a:lstStyle/>
-          <a:p>
-            <a:pPr algn="ctr" indent="0" marL="0">
-              <a:buNone/>
-            </a:pPr>
-            <a:r>
-              <a:rPr lang="en-US" sz="1100" dirty="0">
-                <a:solidFill>
-                  <a:srgbClr val="6B7280"/>
-                </a:solidFill>
-                <a:latin typeface="Calibri" pitchFamily="34" charset="0"/>
-                <a:ea typeface="Calibri" pitchFamily="34" charset="-122"/>
-                <a:cs typeface="Calibri" pitchFamily="34" charset="-120"/>
-              </a:rPr>
-              <a:t>2026-06-16  ·  </a:t>
-            </a:r>
-            <a:pPr algn="ctr" indent="0" marL="0">
-              <a:buNone/>
-            </a:pPr>
-            <a:r>
-              <a:rPr lang="en-US" sz="1100" u="sng" dirty="0">
+      <p:sp>
+        <p:nvSpPr>
+          <p:cNvPr id="14" name="Text 11"/>
+          <p:cNvSpPr/>
+          <p:nvPr/>
+        </p:nvSpPr>
+        <p:spPr>
+          <a:xfrm>
+            <a:off x="7863840" y="4919472"/>
+            <a:ext cx="3840480" cy="320040"/>
+          </a:xfrm>
+          <a:prstGeom prst="rect">
+            <a:avLst/>
+          </a:prstGeom>
+          <a:noFill/>
+          <a:ln/>
+        </p:spPr>
+        <p:txBody>
+          <a:bodyPr wrap="square" rtlCol="0" anchor="ctr"/>
+          <a:lstStyle/>
+          <a:p>
+            <a:pPr indent="0" marL="0">
+              <a:buNone/>
+            </a:pPr>
+            <a:r>
+              <a:rPr lang="en-US" sz="1500" b="1" u="sng" dirty="0">
                 <a:solidFill>
                   <a:srgbClr val="5090D0"/>
                 </a:solidFill>
                 <a:latin typeface="Calibri" pitchFamily="34" charset="0"/>
                 <a:ea typeface="Calibri" pitchFamily="34" charset="-122"/>
                 <a:cs typeface="Calibri" pitchFamily="34" charset="-120"/>
-                <a:hlinkClick r:id="rId14" invalidUrl="" action="" tgtFrame="" tooltip="" history="1" highlightClick="0" endSnd="0">
+                <a:hlinkClick r:id="rId12" invalidUrl="" action="" tgtFrame="" tooltip="" history="1" highlightClick="0" endSnd="0">
                   <a:extLst>
                     <a:ext uri="{A12FA001-AC4F-418D-AE19-62706E023703}">
                       <ahyp:hlinkClr xmlns:ahyp="http://schemas.microsoft.com/office/drawing/2018/hyperlinkcolor" val="tx"/>
@@ -3350,16 +3352,30 @@
                   </a:extLst>
                 </a:hlinkClick>
               </a:rPr>
-              <a:t>CC BY 4.0</a:t>
-            </a:r>
-            <a:endParaRPr lang="en-US" sz="1100" dirty="0"/>
+              <a:t>Positioning</a:t>
+            </a:r>
+            <a:pPr indent="0" marL="0">
+              <a:buNone/>
+            </a:pPr>
+            <a:r>
+              <a:rPr lang="en-US" sz="1500" dirty="0">
+                <a:solidFill>
+                  <a:srgbClr val="1A1A2E"/>
+                </a:solidFill>
+                <a:latin typeface="Calibri" pitchFamily="34" charset="0"/>
+                <a:ea typeface="Calibri" pitchFamily="34" charset="-122"/>
+                <a:cs typeface="Calibri" pitchFamily="34" charset="-120"/>
+              </a:rPr>
+              <a:t>: 1</a:t>
+            </a:r>
+            <a:endParaRPr lang="en-US" sz="1500" dirty="0"/>
           </a:p>
         </p:txBody>
       </p:sp>
       <p:pic>
         <p:nvPicPr>
-          <p:cNvPr id="16" name="Image 1" descr="public/newsletters/2026-06/_assets/linkedin.png">
-            <a:hlinkClick r:id="rId16" tooltip="DLinRT on LinkedIn"/>
+          <p:cNvPr id="15" name="Image 0" descr="public\newsletters\2026-06\_assets\dlinrt-logo.png">
+            <a:hlinkClick r:id="rId14" tooltip="dlinrt.eu"/>
           </p:cNvPr>
           <p:cNvPicPr>
             <a:picLocks noChangeAspect="1"/>
@@ -3367,7 +3383,92 @@
           <p:nvPr/>
         </p:nvPicPr>
         <p:blipFill>
-          <a:blip r:embed="rId15"/>
+          <a:blip r:embed="rId13"/>
+          <a:srcRect l="0" r="0" t="0" b="0"/>
+          <a:stretch/>
+        </p:blipFill>
+        <p:spPr>
+          <a:xfrm>
+            <a:off x="274320" y="6519672"/>
+            <a:ext cx="885871" cy="256032"/>
+          </a:xfrm>
+          <a:prstGeom prst="rect">
+            <a:avLst/>
+          </a:prstGeom>
+        </p:spPr>
+      </p:pic>
+      <p:sp>
+        <p:nvSpPr>
+          <p:cNvPr id="16" name="Text 12"/>
+          <p:cNvSpPr/>
+          <p:nvPr/>
+        </p:nvSpPr>
+        <p:spPr>
+          <a:xfrm>
+            <a:off x="2743200" y="6510528"/>
+            <a:ext cx="6705295" cy="274320"/>
+          </a:xfrm>
+          <a:prstGeom prst="rect">
+            <a:avLst/>
+          </a:prstGeom>
+          <a:noFill/>
+          <a:ln/>
+        </p:spPr>
+        <p:txBody>
+          <a:bodyPr wrap="square" rtlCol="0" anchor="ctr"/>
+          <a:lstStyle/>
+          <a:p>
+            <a:pPr algn="ctr" indent="0" marL="0">
+              <a:buNone/>
+            </a:pPr>
+            <a:r>
+              <a:rPr lang="en-US" sz="1100" dirty="0">
+                <a:solidFill>
+                  <a:srgbClr val="6B7280"/>
+                </a:solidFill>
+                <a:latin typeface="Calibri" pitchFamily="34" charset="0"/>
+                <a:ea typeface="Calibri" pitchFamily="34" charset="-122"/>
+                <a:cs typeface="Calibri" pitchFamily="34" charset="-120"/>
+              </a:rPr>
+              <a:t>2026-06-18  ·  </a:t>
+            </a:r>
+            <a:pPr algn="ctr" indent="0" marL="0">
+              <a:buNone/>
+            </a:pPr>
+            <a:r>
+              <a:rPr lang="en-US" sz="1100" u="sng" dirty="0">
+                <a:solidFill>
+                  <a:srgbClr val="5090D0"/>
+                </a:solidFill>
+                <a:latin typeface="Calibri" pitchFamily="34" charset="0"/>
+                <a:ea typeface="Calibri" pitchFamily="34" charset="-122"/>
+                <a:cs typeface="Calibri" pitchFamily="34" charset="-120"/>
+                <a:hlinkClick r:id="rId15" invalidUrl="" action="" tgtFrame="" tooltip="" history="1" highlightClick="0" endSnd="0">
+                  <a:extLst>
+                    <a:ext uri="{A12FA001-AC4F-418D-AE19-62706E023703}">
+                      <ahyp:hlinkClr xmlns:ahyp="http://schemas.microsoft.com/office/drawing/2018/hyperlinkcolor" val="tx"/>
+                    </a:ext>
+                  </a:extLst>
+                </a:hlinkClick>
+              </a:rPr>
+              <a:t>CC BY 4.0</a:t>
+            </a:r>
+            <a:endParaRPr lang="en-US" sz="1100" dirty="0"/>
+          </a:p>
+        </p:txBody>
+      </p:sp>
+      <p:pic>
+        <p:nvPicPr>
+          <p:cNvPr id="17" name="Image 1" descr="public\newsletters\2026-06\_assets\linkedin.png">
+            <a:hlinkClick r:id="rId17" tooltip="DLinRT on LinkedIn"/>
+          </p:cNvPr>
+          <p:cNvPicPr>
+            <a:picLocks noChangeAspect="1"/>
+          </p:cNvPicPr>
+          <p:nvPr/>
+        </p:nvPicPr>
+        <p:blipFill>
+          <a:blip r:embed="rId16"/>
           <a:srcRect l="0" r="0" t="0" b="0"/>
           <a:stretch/>
         </p:blipFill>
@@ -3453,7 +3554,7 @@
                   </a:extLst>
                 </a:hlinkClick>
               </a:rPr>
-              <a:t>Companies in the DLinRT.eu catalogue</a:t>
+              <a:t>Companies in the DLinRT.eu catalog</a:t>
             </a:r>
             <a:endParaRPr lang="en-US" sz="2600" dirty="0"/>
           </a:p>
@@ -3492,7 +3593,7 @@
                 <a:ea typeface="Calibri" pitchFamily="34" charset="-122"/>
                 <a:cs typeface="Calibri" pitchFamily="34" charset="-120"/>
               </a:rPr>
-              <a:t>41 active companies · click any logo to open its page</a:t>
+              <a:t>41 companies · click any logo to open its page</a:t>
             </a:r>
             <a:endParaRPr lang="en-US" sz="1300" dirty="0"/>
           </a:p>
@@ -3500,7 +3601,7 @@
       </p:sp>
       <p:pic>
         <p:nvPicPr>
-          <p:cNvPr id="4" name="Image 0" descr="public/logos/NeuralRadLogo.png">
+          <p:cNvPr id="4" name="Image 0" descr="public\logos\NeuralRadLogo.png">
             <a:hlinkClick r:id="rId3" tooltip="NeuralRad"/>
           </p:cNvPr>
           <p:cNvPicPr>
@@ -3572,7 +3673,7 @@
       </p:sp>
       <p:pic>
         <p:nvPicPr>
-          <p:cNvPr id="6" name="Image 1" descr="public/logos/ai-medical.png">
+          <p:cNvPr id="6" name="Image 1" descr="public\logos\ai-medical.png">
             <a:hlinkClick r:id="rId6" tooltip="AI Medical"/>
           </p:cNvPr>
           <p:cNvPicPr>
@@ -3644,7 +3745,7 @@
       </p:sp>
       <p:pic>
         <p:nvPicPr>
-          <p:cNvPr id="8" name="Image 2" descr="public/logos/carina.jpg">
+          <p:cNvPr id="8" name="Image 2" descr="public\logos\carina.jpg">
             <a:hlinkClick r:id="rId9" tooltip="Carina AI"/>
           </p:cNvPr>
           <p:cNvPicPr>
@@ -3716,7 +3817,7 @@
       </p:sp>
       <p:pic>
         <p:nvPicPr>
-          <p:cNvPr id="10" name="Image 3" descr="public/logos/coreline.jpg">
+          <p:cNvPr id="10" name="Image 3" descr="public\logos\coreline.jpg">
             <a:hlinkClick r:id="rId12" tooltip="Coreline Soft Co"/>
           </p:cNvPr>
           <p:cNvPicPr>
@@ -3788,7 +3889,7 @@
       </p:sp>
       <p:pic>
         <p:nvPicPr>
-          <p:cNvPr id="12" name="Image 4" descr="public/logos/ever-fortune.png">
+          <p:cNvPr id="12" name="Image 4" descr="public\logos\ever-fortune.png">
             <a:hlinkClick r:id="rId15" tooltip="Ever Fortune AI"/>
           </p:cNvPr>
           <p:cNvPicPr>
@@ -3860,7 +3961,7 @@
       </p:sp>
       <p:pic>
         <p:nvPicPr>
-          <p:cNvPr id="14" name="Image 5" descr="public/logos/huraimaging.png">
+          <p:cNvPr id="14" name="Image 5" descr="public\logos\huraimaging.png">
             <a:hlinkClick r:id="rId18" tooltip="Hura Imaging"/>
           </p:cNvPr>
           <p:cNvPicPr>
@@ -3932,7 +4033,7 @@
       </p:sp>
       <p:pic>
         <p:nvPicPr>
-          <p:cNvPr id="16" name="Image 6" descr="public/logos/Limbus-ai.png">
+          <p:cNvPr id="16" name="Image 6" descr="public\logos\Limbus-ai.png">
             <a:hlinkClick r:id="rId21" tooltip="Limbus AI"/>
           </p:cNvPr>
           <p:cNvPicPr>
@@ -4004,7 +4105,7 @@
       </p:sp>
       <p:pic>
         <p:nvPicPr>
-          <p:cNvPr id="18" name="Image 7" descr="public/logos/manteia.png">
+          <p:cNvPr id="18" name="Image 7" descr="public\logos\manteia.png">
             <a:hlinkClick r:id="rId24" tooltip="Manteia"/>
           </p:cNvPr>
           <p:cNvPicPr>
@@ -4076,7 +4177,7 @@
       </p:sp>
       <p:pic>
         <p:nvPicPr>
-          <p:cNvPr id="20" name="Image 8" descr="public/newsletters/2026-06/_logo-cache/mimsoftware.png">
+          <p:cNvPr id="20" name="Image 8" descr="public\newsletters\2026-06\_logo-cache\mimsoftware.png">
             <a:hlinkClick r:id="rId27" tooltip="MIM Software"/>
           </p:cNvPr>
           <p:cNvPicPr>
@@ -4148,7 +4249,7 @@
       </p:sp>
       <p:pic>
         <p:nvPicPr>
-          <p:cNvPr id="22" name="Image 9" descr="public/logos/mirada-medical.png">
+          <p:cNvPr id="22" name="Image 9" descr="public\logos\mirada-medical.png">
             <a:hlinkClick r:id="rId30" tooltip="Mirada Medical"/>
           </p:cNvPr>
           <p:cNvPicPr>
@@ -4220,7 +4321,7 @@
       </p:sp>
       <p:pic>
         <p:nvPicPr>
-          <p:cNvPr id="24" name="Image 10" descr="public/logos/mvision-ai.png">
+          <p:cNvPr id="24" name="Image 10" descr="public\logos\mvision-ai.png">
             <a:hlinkClick r:id="rId33" tooltip="MVision AI"/>
           </p:cNvPr>
           <p:cNvPicPr>
@@ -4292,7 +4393,7 @@
       </p:sp>
       <p:pic>
         <p:nvPicPr>
-          <p:cNvPr id="26" name="Image 11" descr="public/newsletters/2026-06/_logo-cache/radformation.png">
+          <p:cNvPr id="26" name="Image 11" descr="public\newsletters\2026-06\_logo-cache\radformation.png">
             <a:hlinkClick r:id="rId36" tooltip="RadFormation"/>
           </p:cNvPr>
           <p:cNvPicPr>
@@ -4364,7 +4465,7 @@
       </p:sp>
       <p:pic>
         <p:nvPicPr>
-          <p:cNvPr id="28" name="Image 12" descr="public/logos/synaptiq.png">
+          <p:cNvPr id="28" name="Image 12" descr="public\logos\synaptiq.png">
             <a:hlinkClick r:id="rId39" tooltip="Synaptiq"/>
           </p:cNvPr>
           <p:cNvPicPr>
@@ -4436,7 +4537,7 @@
       </p:sp>
       <p:pic>
         <p:nvPicPr>
-          <p:cNvPr id="30" name="Image 13" descr="public/logos/therapanacea.png">
+          <p:cNvPr id="30" name="Image 13" descr="public\logos\therapanacea.png">
             <a:hlinkClick r:id="rId42" tooltip="Therapanacea"/>
           </p:cNvPr>
           <p:cNvPicPr>
@@ -4508,7 +4609,7 @@
       </p:sp>
       <p:pic>
         <p:nvPicPr>
-          <p:cNvPr id="32" name="Image 14" descr="public/logos/vysioner.png">
+          <p:cNvPr id="32" name="Image 14" descr="public\logos\vysioner.png">
             <a:hlinkClick r:id="rId45" tooltip="Vysioner"/>
           </p:cNvPr>
           <p:cNvPicPr>
@@ -4580,7 +4681,7 @@
       </p:sp>
       <p:pic>
         <p:nvPicPr>
-          <p:cNvPr id="34" name="Image 15" descr="public/logos/wisdom-tech.png">
+          <p:cNvPr id="34" name="Image 15" descr="public\logos\wisdom-tech.png">
             <a:hlinkClick r:id="rId48" tooltip="Wisdom Tech"/>
           </p:cNvPr>
           <p:cNvPicPr>
@@ -4652,7 +4753,7 @@
       </p:sp>
       <p:pic>
         <p:nvPicPr>
-          <p:cNvPr id="36" name="Image 16" descr="public/logos/oncosoft.png">
+          <p:cNvPr id="36" name="Image 16" descr="public\logos\oncosoft.png">
             <a:hlinkClick r:id="rId51" tooltip="Oncosoft"/>
           </p:cNvPr>
           <p:cNvPicPr>
@@ -4724,7 +4825,7 @@
       </p:sp>
       <p:pic>
         <p:nvPicPr>
-          <p:cNvPr id="38" name="Image 17" descr="public/logos/medcom.png">
+          <p:cNvPr id="38" name="Image 17" descr="public\logos\medcom.png">
             <a:hlinkClick r:id="rId54" tooltip="MedCom"/>
           </p:cNvPr>
           <p:cNvPicPr>
@@ -4796,7 +4897,7 @@
       </p:sp>
       <p:pic>
         <p:nvPicPr>
-          <p:cNvPr id="40" name="Image 18" descr="public/logos/ge_healthcare.png">
+          <p:cNvPr id="40" name="Image 18" descr="public\logos\ge_healthcare.png">
             <a:hlinkClick r:id="rId57" tooltip="GE Healthcare"/>
           </p:cNvPr>
           <p:cNvPicPr>
@@ -4868,7 +4969,7 @@
       </p:sp>
       <p:pic>
         <p:nvPicPr>
-          <p:cNvPr id="42" name="Image 19" descr="public/logos/philips.png">
+          <p:cNvPr id="42" name="Image 19" descr="public\logos\philips.png">
             <a:hlinkClick r:id="rId60" tooltip="Philips"/>
           </p:cNvPr>
           <p:cNvPicPr>
@@ -4940,7 +5041,7 @@
       </p:sp>
       <p:pic>
         <p:nvPicPr>
-          <p:cNvPr id="44" name="Image 20" descr="public/logos/siemens.png">
+          <p:cNvPr id="44" name="Image 20" descr="public\logos\siemens.png">
             <a:hlinkClick r:id="rId63" tooltip="Siemens Healthineers"/>
           </p:cNvPr>
           <p:cNvPicPr>
@@ -5012,7 +5113,7 @@
       </p:sp>
       <p:pic>
         <p:nvPicPr>
-          <p:cNvPr id="46" name="Image 21" descr="public/logos/canon.jpg">
+          <p:cNvPr id="46" name="Image 21" descr="public\logos\canon.jpg">
             <a:hlinkClick r:id="rId66" tooltip="Canon Medical Systems"/>
           </p:cNvPr>
           <p:cNvPicPr>
@@ -5084,7 +5185,7 @@
       </p:sp>
       <p:pic>
         <p:nvPicPr>
-          <p:cNvPr id="48" name="Image 22" descr="public/logos/unitedimaging.png">
+          <p:cNvPr id="48" name="Image 22" descr="public\logos\unitedimaging.png">
             <a:hlinkClick r:id="rId69" tooltip="United Imaging"/>
           </p:cNvPr>
           <p:cNvPicPr>
@@ -5156,7 +5257,7 @@
       </p:sp>
       <p:pic>
         <p:nvPicPr>
-          <p:cNvPr id="50" name="Image 23" descr="public/newsletters/2026-06/_logo-cache/Taiwan_MedImag.png">
+          <p:cNvPr id="50" name="Image 23" descr="public\newsletters\2026-06\_logo-cache\Taiwan_MedImag.png">
             <a:hlinkClick r:id="rId72" tooltip="Taiwan Medical Imaging Co."/>
           </p:cNvPr>
           <p:cNvPicPr>
@@ -5228,7 +5329,7 @@
       </p:sp>
       <p:pic>
         <p:nvPicPr>
-          <p:cNvPr id="52" name="Image 24" descr="public/logos/algomedica.png">
+          <p:cNvPr id="52" name="Image 24" descr="public\logos\algomedica.png">
             <a:hlinkClick r:id="rId75" tooltip="AlgoMedica"/>
           </p:cNvPr>
           <p:cNvPicPr>
@@ -5300,7 +5401,7 @@
       </p:sp>
       <p:pic>
         <p:nvPicPr>
-          <p:cNvPr id="54" name="Image 25" descr="public/logos/spectronic-medical.jpg">
+          <p:cNvPr id="54" name="Image 25" descr="public\logos\spectronic-medical.jpg">
             <a:hlinkClick r:id="rId78" tooltip="Spectronic Medical"/>
           </p:cNvPr>
           <p:cNvPicPr>
@@ -5372,7 +5473,7 @@
       </p:sp>
       <p:pic>
         <p:nvPicPr>
-          <p:cNvPr id="56" name="Image 26" descr="public/logos/raystation.jpg">
+          <p:cNvPr id="56" name="Image 26" descr="public\logos\raystation.jpg">
             <a:hlinkClick r:id="rId81" tooltip="RaySearch Laboratories"/>
           </p:cNvPr>
           <p:cNvPicPr>
@@ -5444,7 +5545,7 @@
       </p:sp>
       <p:pic>
         <p:nvPicPr>
-          <p:cNvPr id="58" name="Image 27" descr="public/logos/airs.jpg">
+          <p:cNvPr id="58" name="Image 27" descr="public\logos\airs.jpg">
             <a:hlinkClick r:id="rId84" tooltip="AIRS Medical"/>
           </p:cNvPr>
           <p:cNvPicPr>
@@ -5516,7 +5617,7 @@
       </p:sp>
       <p:pic>
         <p:nvPicPr>
-          <p:cNvPr id="60" name="Image 28" descr="public/logos/claripi.jpg">
+          <p:cNvPr id="60" name="Image 28" descr="public\logos\claripi.jpg">
             <a:hlinkClick r:id="rId87" tooltip="ClariPi"/>
           </p:cNvPr>
           <p:cNvPicPr>
@@ -5588,7 +5689,7 @@
       </p:sp>
       <p:pic>
         <p:nvPicPr>
-          <p:cNvPr id="62" name="Image 29" descr="public/logos/SubtleMedical.jpg">
+          <p:cNvPr id="62" name="Image 29" descr="public\logos\SubtleMedical.jpg">
             <a:hlinkClick r:id="rId90" tooltip="Subtle Medical"/>
           </p:cNvPr>
           <p:cNvPicPr>
@@ -5660,7 +5761,7 @@
       </p:sp>
       <p:pic>
         <p:nvPicPr>
-          <p:cNvPr id="64" name="Image 30" descr="public/logos/ptw.jpg">
+          <p:cNvPr id="64" name="Image 30" descr="public\logos\ptw.jpg">
             <a:hlinkClick r:id="rId93" tooltip="PTW"/>
           </p:cNvPr>
           <p:cNvPicPr>
@@ -5732,7 +5833,7 @@
       </p:sp>
       <p:pic>
         <p:nvPicPr>
-          <p:cNvPr id="66" name="Image 31" descr="public/logos/pymedix.png">
+          <p:cNvPr id="66" name="Image 31" descr="public\logos\pymedix.png">
             <a:hlinkClick r:id="rId96" tooltip="PyMedix"/>
           </p:cNvPr>
           <p:cNvPicPr>
@@ -5804,7 +5905,7 @@
       </p:sp>
       <p:pic>
         <p:nvPicPr>
-          <p:cNvPr id="68" name="Image 32" descr="public/logos/medlever.jpg">
+          <p:cNvPr id="68" name="Image 32" descr="public\logos\medlever.jpg">
             <a:hlinkClick r:id="rId99" tooltip="MedLever, Inc."/>
           </p:cNvPr>
           <p:cNvPicPr>
@@ -5876,7 +5977,7 @@
       </p:sp>
       <p:pic>
         <p:nvPicPr>
-          <p:cNvPr id="70" name="Image 33" descr="public/logos/medmind.png">
+          <p:cNvPr id="70" name="Image 33" descr="public\logos\medmind.png">
             <a:hlinkClick r:id="rId102" tooltip="MedMind Technology Co., Ltd."/>
           </p:cNvPr>
           <p:cNvPicPr>
@@ -5948,7 +6049,7 @@
       </p:sp>
       <p:pic>
         <p:nvPicPr>
-          <p:cNvPr id="72" name="Image 34" descr="public/logos/quanta-computer.png">
+          <p:cNvPr id="72" name="Image 34" descr="public\logos\quanta-computer.png">
             <a:hlinkClick r:id="rId105" tooltip="Quanta Computer Inc."/>
           </p:cNvPr>
           <p:cNvPicPr>
@@ -6020,7 +6121,7 @@
       </p:sp>
       <p:pic>
         <p:nvPicPr>
-          <p:cNvPr id="74" name="Image 35" descr="public/logos/Elekta.png">
+          <p:cNvPr id="74" name="Image 35" descr="public\logos\Elekta.png">
             <a:hlinkClick r:id="rId108" tooltip="Elekta"/>
           </p:cNvPr>
           <p:cNvPicPr>
@@ -6092,7 +6193,7 @@
       </p:sp>
       <p:pic>
         <p:nvPicPr>
-          <p:cNvPr id="76" name="Image 36" descr="public/logos/accuray.png">
+          <p:cNvPr id="76" name="Image 36" descr="public\logos\accuray.png">
             <a:hlinkClick r:id="rId111" tooltip="Accuray®"/>
           </p:cNvPr>
           <p:cNvPicPr>
@@ -6164,7 +6265,7 @@
       </p:sp>
       <p:pic>
         <p:nvPicPr>
-          <p:cNvPr id="78" name="Image 37" descr="public/logos/SunNuclear.png">
+          <p:cNvPr id="78" name="Image 37" descr="public\logos\SunNuclear.png">
             <a:hlinkClick r:id="rId114" tooltip="Sun Nuclear (Mirion Medical)"/>
           </p:cNvPr>
           <p:cNvPicPr>
@@ -6236,7 +6337,7 @@
       </p:sp>
       <p:pic>
         <p:nvPicPr>
-          <p:cNvPr id="80" name="Image 38" descr="public/newsletters/2026-06/_logo-cache/md_anderson.png">
+          <p:cNvPr id="80" name="Image 38" descr="public\newsletters\2026-06\_logo-cache\md_anderson.png">
             <a:hlinkClick r:id="rId117" tooltip="MD Anderson Cancer Center"/>
           </p:cNvPr>
           <p:cNvPicPr>
@@ -6308,7 +6409,7 @@
       </p:sp>
       <p:pic>
         <p:nvPicPr>
-          <p:cNvPr id="82" name="Image 39" descr="public/logos/Brainlab.jpg">
+          <p:cNvPr id="82" name="Image 39" descr="public\logos\Brainlab.jpg">
             <a:hlinkClick r:id="rId120" tooltip="Brainlab"/>
           </p:cNvPr>
           <p:cNvPicPr>
@@ -6380,7 +6481,7 @@
       </p:sp>
       <p:pic>
         <p:nvPicPr>
-          <p:cNvPr id="84" name="Image 40" descr="public/logos/varian.jpg">
+          <p:cNvPr id="84" name="Image 40" descr="public\logos\varian.jpg">
             <a:hlinkClick r:id="rId123" tooltip="Varian (Siemens Healthineers)"/>
           </p:cNvPr>
           <p:cNvPicPr>
@@ -6452,7 +6553,7 @@
       </p:sp>
       <p:pic>
         <p:nvPicPr>
-          <p:cNvPr id="86" name="Image 41" descr="public/newsletters/2026-06/_assets/dlinrt-logo.png">
+          <p:cNvPr id="86" name="Image 41" descr="public\newsletters\2026-06\_assets\dlinrt-logo.png">
             <a:hlinkClick r:id="rId126" tooltip="dlinrt.eu"/>
           </p:cNvPr>
           <p:cNvPicPr>
@@ -6508,7 +6609,7 @@
                 <a:ea typeface="Calibri" pitchFamily="34" charset="-122"/>
                 <a:cs typeface="Calibri" pitchFamily="34" charset="-120"/>
               </a:rPr>
-              <a:t>2026-06-16  ·  </a:t>
+              <a:t>2026-06-18  ·  </a:t>
             </a:r>
             <a:pPr algn="ctr" indent="0" marL="0">
               <a:buNone/>
@@ -6537,7 +6638,7 @@
       </p:sp>
       <p:pic>
         <p:nvPicPr>
-          <p:cNvPr id="88" name="Image 42" descr="public/newsletters/2026-06/_assets/linkedin.png">
+          <p:cNvPr id="88" name="Image 42" descr="public\newsletters\2026-06\_assets\linkedin.png">
             <a:hlinkClick r:id="rId129" tooltip="DLinRT on LinkedIn"/>
           </p:cNvPr>
           <p:cNvPicPr>
@@ -6929,7 +7030,7 @@
                 <a:ea typeface="Calibri" pitchFamily="34" charset="-122"/>
                 <a:cs typeface="Calibri" pitchFamily="34" charset="-120"/>
               </a:rPr>
-              <a:t>A warm welcome to Szabolcs David, who joins the reviewer team. Huge thanks to all 12 reviewers keeping the catalogue trustworthy — full list on the </a:t>
+              <a:t>A warm welcome to Szabolcs David, who joins the reviewer team. Huge thanks to all 12 reviewers keeping the catalog trustworthy — full list on the </a:t>
             </a:r>
             <a:pPr indent="0" marL="0">
               <a:buNone/>
@@ -7085,7 +7186,7 @@
       </p:sp>
       <p:pic>
         <p:nvPicPr>
-          <p:cNvPr id="12" name="Image 0" descr="public/newsletters/2026-06/_assets/dlinrt-logo.png">
+          <p:cNvPr id="12" name="Image 0" descr="public\newsletters\2026-06\_assets\dlinrt-logo.png">
             <a:hlinkClick r:id="rId6" tooltip="dlinrt.eu"/>
           </p:cNvPr>
           <p:cNvPicPr>
@@ -7141,7 +7242,7 @@
                 <a:ea typeface="Calibri" pitchFamily="34" charset="-122"/>
                 <a:cs typeface="Calibri" pitchFamily="34" charset="-120"/>
               </a:rPr>
-              <a:t>2026-06-16  ·  </a:t>
+              <a:t>2026-06-18  ·  </a:t>
             </a:r>
             <a:pPr algn="ctr" indent="0" marL="0">
               <a:buNone/>
@@ -7170,7 +7271,7 @@
       </p:sp>
       <p:pic>
         <p:nvPicPr>
-          <p:cNvPr id="14" name="Image 1" descr="public/newsletters/2026-06/_assets/linkedin.png">
+          <p:cNvPr id="14" name="Image 1" descr="public\newsletters\2026-06\_assets\linkedin.png">
             <a:hlinkClick r:id="rId9" tooltip="DLinRT on LinkedIn"/>
           </p:cNvPr>
           <p:cNvPicPr>
@@ -7368,7 +7469,7 @@
                 <a:ea typeface="Calibri" pitchFamily="34" charset="-122"/>
                 <a:cs typeface="Calibri" pitchFamily="34" charset="-120"/>
               </a:rPr>
-              <a:t>DLinRT.eu will support the organisation of a two-day international workshop in Utrecht around March 2026. Dates and venue are being finalised — details will follow around September on </a:t>
+              <a:t>DLinRT.eu will support the organization of a two-day international workshop in Utrecht around March 2026. Dates and venue are being finalised — details will follow around September on </a:t>
             </a:r>
             <a:pPr indent="0" marL="0">
               <a:buNone/>
@@ -7604,7 +7705,7 @@
                   </a:extLst>
                 </a:hlinkClick>
               </a:rPr>
-              <a:t>MAIRT @ MICCAI · Oct 1, 2026</a:t>
+              <a:t>MIART @ MICCAI · Oct 1, 2026</a:t>
             </a:r>
             <a:endParaRPr lang="en-US" sz="1800" dirty="0"/>
           </a:p>
@@ -7869,7 +7970,7 @@
                 <a:ea typeface="Calibri" pitchFamily="34" charset="-122"/>
                 <a:cs typeface="Calibri" pitchFamily="34" charset="-120"/>
               </a:rPr>
-              <a:t>Browse the Evidence Matrix to see how the catalogue distributes across rigor (E0–E3) and impact (I0–I5): </a:t>
+              <a:t>Browse the Evidence Matrix to see how the catalog distributes across rigor (E0–E3) and impact (I0–I5): </a:t>
             </a:r>
             <a:pPr indent="0" marL="0">
               <a:buNone/>
@@ -7912,7 +8013,7 @@
       </p:sp>
       <p:pic>
         <p:nvPicPr>
-          <p:cNvPr id="14" name="Image 0" descr="public/newsletters/2026-06/_assets/dlinrt-logo.png">
+          <p:cNvPr id="14" name="Image 0" descr="public\newsletters\2026-06\_assets\dlinrt-logo.png">
             <a:hlinkClick r:id="rId13" tooltip="dlinrt.eu"/>
           </p:cNvPr>
           <p:cNvPicPr>
@@ -7968,7 +8069,7 @@
                 <a:ea typeface="Calibri" pitchFamily="34" charset="-122"/>
                 <a:cs typeface="Calibri" pitchFamily="34" charset="-120"/>
               </a:rPr>
-              <a:t>2026-06-16  ·  </a:t>
+              <a:t>2026-06-18  ·  </a:t>
             </a:r>
             <a:pPr algn="ctr" indent="0" marL="0">
               <a:buNone/>
@@ -7997,7 +8098,7 @@
       </p:sp>
       <p:pic>
         <p:nvPicPr>
-          <p:cNvPr id="16" name="Image 1" descr="public/newsletters/2026-06/_assets/linkedin.png">
+          <p:cNvPr id="16" name="Image 1" descr="public\newsletters\2026-06\_assets\linkedin.png">
             <a:hlinkClick r:id="rId16" tooltip="DLinRT on LinkedIn"/>
           </p:cNvPr>
           <p:cNvPicPr>
